--- a/LabBook_010.pptx
+++ b/LabBook_010.pptx
@@ -274,7 +274,7 @@
           <a:p>
             <a:fld id="{8438F8DC-35B0-48E6-A86E-42F1F08DD00F}" type="datetimeFigureOut">
               <a:rPr lang="es-ES" smtClean="0"/>
-              <a:t>03/02/2026</a:t>
+              <a:t>16/02/2026</a:t>
             </a:fld>
             <a:endParaRPr lang="es-ES"/>
           </a:p>
@@ -451,7 +451,7 @@
           <a:p>
             <a:fld id="{FACBDC12-F39B-4B97-8F4D-6734F9D366FF}" type="datetimeFigureOut">
               <a:rPr lang="es-ES" smtClean="0"/>
-              <a:t>03/02/2026</a:t>
+              <a:t>16/02/2026</a:t>
             </a:fld>
             <a:endParaRPr lang="es-ES"/>
           </a:p>
@@ -6065,8 +6065,8 @@
         </p:nvSpPr>
         <p:spPr>
           <a:xfrm>
-            <a:off x="609441" y="4860334"/>
-            <a:ext cx="11199971" cy="1200329"/>
+            <a:off x="625605" y="4904218"/>
+            <a:ext cx="11199971" cy="2677656"/>
           </a:xfrm>
           <a:prstGeom prst="rect">
             <a:avLst/>
@@ -6089,12 +6089,1003 @@
           <a:lstStyle/>
           <a:p>
             <a:pPr algn="just"/>
+            <a:endParaRPr lang="en-US" sz="1200" dirty="0">
+              <a:latin typeface="Arial" panose="020B0604020202020204" pitchFamily="34" charset="0"/>
+              <a:cs typeface="Arial" panose="020B0604020202020204" pitchFamily="34" charset="0"/>
+            </a:endParaRPr>
+          </a:p>
+          <a:p>
+            <a:pPr algn="just"/>
             <a:r>
               <a:rPr lang="en-US" sz="1200" dirty="0">
                 <a:latin typeface="Arial" panose="020B0604020202020204" pitchFamily="34" charset="0"/>
                 <a:cs typeface="Arial" panose="020B0604020202020204" pitchFamily="34" charset="0"/>
               </a:rPr>
-              <a:t>Comment results (neff changes this way with wavelength, comparison between different waveguide cross-sections …)</a:t>
+              <a:t>Deep Waveguide. </a:t>
+            </a:r>
+          </a:p>
+          <a:p>
+            <a:pPr algn="just"/>
+            <a:r>
+              <a:rPr lang="en-US" sz="1200" dirty="0">
+                <a:latin typeface="Arial" panose="020B0604020202020204" pitchFamily="34" charset="0"/>
+                <a:cs typeface="Arial" panose="020B0604020202020204" pitchFamily="34" charset="0"/>
+              </a:rPr>
+              <a:t>En </a:t>
+            </a:r>
+            <a:r>
+              <a:rPr lang="en-US" sz="1200" dirty="0" err="1">
+                <a:latin typeface="Arial" panose="020B0604020202020204" pitchFamily="34" charset="0"/>
+                <a:cs typeface="Arial" panose="020B0604020202020204" pitchFamily="34" charset="0"/>
+              </a:rPr>
+              <a:t>el</a:t>
+            </a:r>
+            <a:r>
+              <a:rPr lang="en-US" sz="1200" dirty="0">
+                <a:latin typeface="Arial" panose="020B0604020202020204" pitchFamily="34" charset="0"/>
+                <a:cs typeface="Arial" panose="020B0604020202020204" pitchFamily="34" charset="0"/>
+              </a:rPr>
+              <a:t> </a:t>
+            </a:r>
+            <a:r>
+              <a:rPr lang="en-US" sz="1200" dirty="0" err="1">
+                <a:latin typeface="Arial" panose="020B0604020202020204" pitchFamily="34" charset="0"/>
+                <a:cs typeface="Arial" panose="020B0604020202020204" pitchFamily="34" charset="0"/>
+              </a:rPr>
+              <a:t>que</a:t>
+            </a:r>
+            <a:r>
+              <a:rPr lang="en-US" sz="1200" dirty="0">
+                <a:latin typeface="Arial" panose="020B0604020202020204" pitchFamily="34" charset="0"/>
+                <a:cs typeface="Arial" panose="020B0604020202020204" pitchFamily="34" charset="0"/>
+              </a:rPr>
+              <a:t> no </a:t>
+            </a:r>
+            <a:r>
+              <a:rPr lang="en-US" sz="1200" dirty="0" err="1">
+                <a:latin typeface="Arial" panose="020B0604020202020204" pitchFamily="34" charset="0"/>
+                <a:cs typeface="Arial" panose="020B0604020202020204" pitchFamily="34" charset="0"/>
+              </a:rPr>
+              <a:t>tiene</a:t>
+            </a:r>
+            <a:r>
+              <a:rPr lang="en-US" sz="1200" dirty="0">
+                <a:latin typeface="Arial" panose="020B0604020202020204" pitchFamily="34" charset="0"/>
+                <a:cs typeface="Arial" panose="020B0604020202020204" pitchFamily="34" charset="0"/>
+              </a:rPr>
+              <a:t> slab se </a:t>
+            </a:r>
+            <a:r>
+              <a:rPr lang="en-US" sz="1200" dirty="0" err="1">
+                <a:latin typeface="Arial" panose="020B0604020202020204" pitchFamily="34" charset="0"/>
+                <a:cs typeface="Arial" panose="020B0604020202020204" pitchFamily="34" charset="0"/>
+              </a:rPr>
+              <a:t>propagan</a:t>
+            </a:r>
+            <a:r>
+              <a:rPr lang="en-US" sz="1200" dirty="0">
+                <a:latin typeface="Arial" panose="020B0604020202020204" pitchFamily="34" charset="0"/>
+                <a:cs typeface="Arial" panose="020B0604020202020204" pitchFamily="34" charset="0"/>
+              </a:rPr>
+              <a:t> dos </a:t>
+            </a:r>
+            <a:r>
+              <a:rPr lang="en-US" sz="1200" dirty="0" err="1">
+                <a:latin typeface="Arial" panose="020B0604020202020204" pitchFamily="34" charset="0"/>
+                <a:cs typeface="Arial" panose="020B0604020202020204" pitchFamily="34" charset="0"/>
+              </a:rPr>
+              <a:t>modos</a:t>
+            </a:r>
+            <a:r>
+              <a:rPr lang="en-US" sz="1200" dirty="0">
+                <a:latin typeface="Arial" panose="020B0604020202020204" pitchFamily="34" charset="0"/>
+                <a:cs typeface="Arial" panose="020B0604020202020204" pitchFamily="34" charset="0"/>
+              </a:rPr>
+              <a:t>, </a:t>
+            </a:r>
+            <a:r>
+              <a:rPr lang="en-US" sz="1200" dirty="0" err="1">
+                <a:latin typeface="Arial" panose="020B0604020202020204" pitchFamily="34" charset="0"/>
+                <a:cs typeface="Arial" panose="020B0604020202020204" pitchFamily="34" charset="0"/>
+              </a:rPr>
+              <a:t>ya</a:t>
+            </a:r>
+            <a:r>
+              <a:rPr lang="en-US" sz="1200" dirty="0">
+                <a:latin typeface="Arial" panose="020B0604020202020204" pitchFamily="34" charset="0"/>
+                <a:cs typeface="Arial" panose="020B0604020202020204" pitchFamily="34" charset="0"/>
+              </a:rPr>
+              <a:t> </a:t>
+            </a:r>
+            <a:r>
+              <a:rPr lang="en-US" sz="1200" dirty="0" err="1">
+                <a:latin typeface="Arial" panose="020B0604020202020204" pitchFamily="34" charset="0"/>
+                <a:cs typeface="Arial" panose="020B0604020202020204" pitchFamily="34" charset="0"/>
+              </a:rPr>
+              <a:t>que</a:t>
+            </a:r>
+            <a:r>
+              <a:rPr lang="en-US" sz="1200" dirty="0">
+                <a:latin typeface="Arial" panose="020B0604020202020204" pitchFamily="34" charset="0"/>
+                <a:cs typeface="Arial" panose="020B0604020202020204" pitchFamily="34" charset="0"/>
+              </a:rPr>
+              <a:t> </a:t>
+            </a:r>
+            <a:r>
+              <a:rPr lang="en-US" sz="1200" dirty="0" err="1">
+                <a:latin typeface="Arial" panose="020B0604020202020204" pitchFamily="34" charset="0"/>
+                <a:cs typeface="Arial" panose="020B0604020202020204" pitchFamily="34" charset="0"/>
+              </a:rPr>
+              <a:t>los</a:t>
+            </a:r>
+            <a:r>
+              <a:rPr lang="en-US" sz="1200" dirty="0">
+                <a:latin typeface="Arial" panose="020B0604020202020204" pitchFamily="34" charset="0"/>
+                <a:cs typeface="Arial" panose="020B0604020202020204" pitchFamily="34" charset="0"/>
+              </a:rPr>
+              <a:t> </a:t>
+            </a:r>
+            <a:r>
+              <a:rPr lang="en-US" sz="1200" dirty="0" err="1">
+                <a:latin typeface="Arial" panose="020B0604020202020204" pitchFamily="34" charset="0"/>
+                <a:cs typeface="Arial" panose="020B0604020202020204" pitchFamily="34" charset="0"/>
+              </a:rPr>
+              <a:t>que</a:t>
+            </a:r>
+            <a:r>
+              <a:rPr lang="en-US" sz="1200" dirty="0">
+                <a:latin typeface="Arial" panose="020B0604020202020204" pitchFamily="34" charset="0"/>
+                <a:cs typeface="Arial" panose="020B0604020202020204" pitchFamily="34" charset="0"/>
+              </a:rPr>
+              <a:t> </a:t>
+            </a:r>
+            <a:r>
+              <a:rPr lang="en-US" sz="1200" dirty="0" err="1">
+                <a:latin typeface="Arial" panose="020B0604020202020204" pitchFamily="34" charset="0"/>
+                <a:cs typeface="Arial" panose="020B0604020202020204" pitchFamily="34" charset="0"/>
+              </a:rPr>
+              <a:t>estén</a:t>
+            </a:r>
+            <a:r>
+              <a:rPr lang="en-US" sz="1200" dirty="0">
+                <a:latin typeface="Arial" panose="020B0604020202020204" pitchFamily="34" charset="0"/>
+                <a:cs typeface="Arial" panose="020B0604020202020204" pitchFamily="34" charset="0"/>
+              </a:rPr>
+              <a:t> </a:t>
+            </a:r>
+            <a:r>
+              <a:rPr lang="en-US" sz="1200" dirty="0" err="1">
+                <a:latin typeface="Arial" panose="020B0604020202020204" pitchFamily="34" charset="0"/>
+                <a:cs typeface="Arial" panose="020B0604020202020204" pitchFamily="34" charset="0"/>
+              </a:rPr>
+              <a:t>por</a:t>
+            </a:r>
+            <a:r>
+              <a:rPr lang="en-US" sz="1200" dirty="0">
+                <a:latin typeface="Arial" panose="020B0604020202020204" pitchFamily="34" charset="0"/>
+                <a:cs typeface="Arial" panose="020B0604020202020204" pitchFamily="34" charset="0"/>
+              </a:rPr>
+              <a:t> </a:t>
+            </a:r>
+            <a:r>
+              <a:rPr lang="en-US" sz="1200" dirty="0" err="1">
+                <a:latin typeface="Arial" panose="020B0604020202020204" pitchFamily="34" charset="0"/>
+                <a:cs typeface="Arial" panose="020B0604020202020204" pitchFamily="34" charset="0"/>
+              </a:rPr>
+              <a:t>debajo</a:t>
+            </a:r>
+            <a:r>
+              <a:rPr lang="en-US" sz="1200" dirty="0">
+                <a:latin typeface="Arial" panose="020B0604020202020204" pitchFamily="34" charset="0"/>
+                <a:cs typeface="Arial" panose="020B0604020202020204" pitchFamily="34" charset="0"/>
+              </a:rPr>
+              <a:t> del </a:t>
+            </a:r>
+            <a:r>
+              <a:rPr lang="en-US" sz="1200" dirty="0" err="1">
+                <a:latin typeface="Arial" panose="020B0604020202020204" pitchFamily="34" charset="0"/>
+                <a:cs typeface="Arial" panose="020B0604020202020204" pitchFamily="34" charset="0"/>
+              </a:rPr>
+              <a:t>índice</a:t>
+            </a:r>
+            <a:r>
+              <a:rPr lang="en-US" sz="1200" dirty="0">
+                <a:latin typeface="Arial" panose="020B0604020202020204" pitchFamily="34" charset="0"/>
+                <a:cs typeface="Arial" panose="020B0604020202020204" pitchFamily="34" charset="0"/>
+              </a:rPr>
+              <a:t> de la </a:t>
+            </a:r>
+            <a:r>
+              <a:rPr lang="en-US" sz="1200" dirty="0" err="1">
+                <a:latin typeface="Arial" panose="020B0604020202020204" pitchFamily="34" charset="0"/>
+                <a:cs typeface="Arial" panose="020B0604020202020204" pitchFamily="34" charset="0"/>
+              </a:rPr>
+              <a:t>cubierta</a:t>
+            </a:r>
+            <a:r>
+              <a:rPr lang="en-US" sz="1200" dirty="0">
+                <a:latin typeface="Arial" panose="020B0604020202020204" pitchFamily="34" charset="0"/>
+                <a:cs typeface="Arial" panose="020B0604020202020204" pitchFamily="34" charset="0"/>
+              </a:rPr>
+              <a:t>. </a:t>
+            </a:r>
+          </a:p>
+          <a:p>
+            <a:pPr algn="just"/>
+            <a:r>
+              <a:rPr lang="en-US" sz="1200" dirty="0">
+                <a:latin typeface="Arial" panose="020B0604020202020204" pitchFamily="34" charset="0"/>
+                <a:cs typeface="Arial" panose="020B0604020202020204" pitchFamily="34" charset="0"/>
+              </a:rPr>
+              <a:t>El primer modo es TE y </a:t>
+            </a:r>
+            <a:r>
+              <a:rPr lang="en-US" sz="1200" dirty="0" err="1">
+                <a:latin typeface="Arial" panose="020B0604020202020204" pitchFamily="34" charset="0"/>
+                <a:cs typeface="Arial" panose="020B0604020202020204" pitchFamily="34" charset="0"/>
+              </a:rPr>
+              <a:t>el</a:t>
+            </a:r>
+            <a:r>
+              <a:rPr lang="en-US" sz="1200" dirty="0">
+                <a:latin typeface="Arial" panose="020B0604020202020204" pitchFamily="34" charset="0"/>
+                <a:cs typeface="Arial" panose="020B0604020202020204" pitchFamily="34" charset="0"/>
+              </a:rPr>
+              <a:t> </a:t>
+            </a:r>
+            <a:r>
+              <a:rPr lang="en-US" sz="1200" dirty="0" err="1">
+                <a:latin typeface="Arial" panose="020B0604020202020204" pitchFamily="34" charset="0"/>
+                <a:cs typeface="Arial" panose="020B0604020202020204" pitchFamily="34" charset="0"/>
+              </a:rPr>
+              <a:t>segundo</a:t>
+            </a:r>
+            <a:r>
+              <a:rPr lang="en-US" sz="1200" dirty="0">
+                <a:latin typeface="Arial" panose="020B0604020202020204" pitchFamily="34" charset="0"/>
+                <a:cs typeface="Arial" panose="020B0604020202020204" pitchFamily="34" charset="0"/>
+              </a:rPr>
+              <a:t> TM.</a:t>
+            </a:r>
+          </a:p>
+          <a:p>
+            <a:pPr algn="just"/>
+            <a:r>
+              <a:rPr lang="en-US" sz="1200" dirty="0">
+                <a:latin typeface="Arial" panose="020B0604020202020204" pitchFamily="34" charset="0"/>
+                <a:cs typeface="Arial" panose="020B0604020202020204" pitchFamily="34" charset="0"/>
+              </a:rPr>
+              <a:t>Si </a:t>
+            </a:r>
+            <a:r>
+              <a:rPr lang="en-US" sz="1200" dirty="0" err="1">
+                <a:latin typeface="Arial" panose="020B0604020202020204" pitchFamily="34" charset="0"/>
+                <a:cs typeface="Arial" panose="020B0604020202020204" pitchFamily="34" charset="0"/>
+              </a:rPr>
+              <a:t>yo</a:t>
+            </a:r>
+            <a:r>
+              <a:rPr lang="en-US" sz="1200" dirty="0">
+                <a:latin typeface="Arial" panose="020B0604020202020204" pitchFamily="34" charset="0"/>
+                <a:cs typeface="Arial" panose="020B0604020202020204" pitchFamily="34" charset="0"/>
+              </a:rPr>
+              <a:t> </a:t>
+            </a:r>
+            <a:r>
+              <a:rPr lang="en-US" sz="1200" dirty="0" err="1">
+                <a:latin typeface="Arial" panose="020B0604020202020204" pitchFamily="34" charset="0"/>
+                <a:cs typeface="Arial" panose="020B0604020202020204" pitchFamily="34" charset="0"/>
+              </a:rPr>
+              <a:t>tuviera</a:t>
+            </a:r>
+            <a:r>
+              <a:rPr lang="en-US" sz="1200" dirty="0">
+                <a:latin typeface="Arial" panose="020B0604020202020204" pitchFamily="34" charset="0"/>
+                <a:cs typeface="Arial" panose="020B0604020202020204" pitchFamily="34" charset="0"/>
+              </a:rPr>
+              <a:t> </a:t>
+            </a:r>
+            <a:r>
+              <a:rPr lang="en-US" sz="1200" dirty="0" err="1">
+                <a:latin typeface="Arial" panose="020B0604020202020204" pitchFamily="34" charset="0"/>
+                <a:cs typeface="Arial" panose="020B0604020202020204" pitchFamily="34" charset="0"/>
+              </a:rPr>
+              <a:t>alguna</a:t>
+            </a:r>
+            <a:r>
+              <a:rPr lang="en-US" sz="1200" dirty="0">
+                <a:latin typeface="Arial" panose="020B0604020202020204" pitchFamily="34" charset="0"/>
+                <a:cs typeface="Arial" panose="020B0604020202020204" pitchFamily="34" charset="0"/>
+              </a:rPr>
+              <a:t> forma de </a:t>
+            </a:r>
+            <a:r>
+              <a:rPr lang="en-US" sz="1200" dirty="0" err="1">
+                <a:latin typeface="Arial" panose="020B0604020202020204" pitchFamily="34" charset="0"/>
+                <a:cs typeface="Arial" panose="020B0604020202020204" pitchFamily="34" charset="0"/>
+              </a:rPr>
+              <a:t>filtrar</a:t>
+            </a:r>
+            <a:r>
+              <a:rPr lang="en-US" sz="1200" dirty="0">
+                <a:latin typeface="Arial" panose="020B0604020202020204" pitchFamily="34" charset="0"/>
+                <a:cs typeface="Arial" panose="020B0604020202020204" pitchFamily="34" charset="0"/>
+              </a:rPr>
+              <a:t> la </a:t>
+            </a:r>
+            <a:r>
+              <a:rPr lang="en-US" sz="1200" dirty="0" err="1">
+                <a:latin typeface="Arial" panose="020B0604020202020204" pitchFamily="34" charset="0"/>
+                <a:cs typeface="Arial" panose="020B0604020202020204" pitchFamily="34" charset="0"/>
+              </a:rPr>
+              <a:t>polarización</a:t>
+            </a:r>
+            <a:r>
+              <a:rPr lang="en-US" sz="1200" dirty="0">
+                <a:latin typeface="Arial" panose="020B0604020202020204" pitchFamily="34" charset="0"/>
+                <a:cs typeface="Arial" panose="020B0604020202020204" pitchFamily="34" charset="0"/>
+              </a:rPr>
+              <a:t> a la entrada del </a:t>
+            </a:r>
+            <a:r>
+              <a:rPr lang="en-US" sz="1200" dirty="0" err="1">
+                <a:latin typeface="Arial" panose="020B0604020202020204" pitchFamily="34" charset="0"/>
+                <a:cs typeface="Arial" panose="020B0604020202020204" pitchFamily="34" charset="0"/>
+              </a:rPr>
+              <a:t>circuito</a:t>
+            </a:r>
+            <a:r>
+              <a:rPr lang="en-US" sz="1200" dirty="0">
+                <a:latin typeface="Arial" panose="020B0604020202020204" pitchFamily="34" charset="0"/>
+                <a:cs typeface="Arial" panose="020B0604020202020204" pitchFamily="34" charset="0"/>
+              </a:rPr>
+              <a:t> </a:t>
+            </a:r>
+            <a:r>
+              <a:rPr lang="en-US" sz="1200" dirty="0" err="1">
+                <a:latin typeface="Arial" panose="020B0604020202020204" pitchFamily="34" charset="0"/>
+                <a:cs typeface="Arial" panose="020B0604020202020204" pitchFamily="34" charset="0"/>
+              </a:rPr>
+              <a:t>entonces</a:t>
+            </a:r>
+            <a:r>
+              <a:rPr lang="en-US" sz="1200" dirty="0">
+                <a:latin typeface="Arial" panose="020B0604020202020204" pitchFamily="34" charset="0"/>
+                <a:cs typeface="Arial" panose="020B0604020202020204" pitchFamily="34" charset="0"/>
+              </a:rPr>
+              <a:t> </a:t>
+            </a:r>
+            <a:r>
+              <a:rPr lang="en-US" sz="1200" dirty="0" err="1">
+                <a:latin typeface="Arial" panose="020B0604020202020204" pitchFamily="34" charset="0"/>
+                <a:cs typeface="Arial" panose="020B0604020202020204" pitchFamily="34" charset="0"/>
+              </a:rPr>
+              <a:t>esa</a:t>
+            </a:r>
+            <a:r>
+              <a:rPr lang="en-US" sz="1200" dirty="0">
+                <a:latin typeface="Arial" panose="020B0604020202020204" pitchFamily="34" charset="0"/>
+                <a:cs typeface="Arial" panose="020B0604020202020204" pitchFamily="34" charset="0"/>
+              </a:rPr>
+              <a:t> </a:t>
+            </a:r>
+            <a:r>
+              <a:rPr lang="en-US" sz="1200" dirty="0" err="1">
+                <a:latin typeface="Arial" panose="020B0604020202020204" pitchFamily="34" charset="0"/>
+                <a:cs typeface="Arial" panose="020B0604020202020204" pitchFamily="34" charset="0"/>
+              </a:rPr>
+              <a:t>guía</a:t>
+            </a:r>
+            <a:r>
+              <a:rPr lang="en-US" sz="1200" dirty="0">
+                <a:latin typeface="Arial" panose="020B0604020202020204" pitchFamily="34" charset="0"/>
+                <a:cs typeface="Arial" panose="020B0604020202020204" pitchFamily="34" charset="0"/>
+              </a:rPr>
+              <a:t> </a:t>
+            </a:r>
+            <a:r>
+              <a:rPr lang="en-US" sz="1200" dirty="0" err="1">
+                <a:latin typeface="Arial" panose="020B0604020202020204" pitchFamily="34" charset="0"/>
+                <a:cs typeface="Arial" panose="020B0604020202020204" pitchFamily="34" charset="0"/>
+              </a:rPr>
+              <a:t>sería</a:t>
+            </a:r>
+            <a:r>
+              <a:rPr lang="en-US" sz="1200" dirty="0">
+                <a:latin typeface="Arial" panose="020B0604020202020204" pitchFamily="34" charset="0"/>
+                <a:cs typeface="Arial" panose="020B0604020202020204" pitchFamily="34" charset="0"/>
+              </a:rPr>
+              <a:t> </a:t>
+            </a:r>
+            <a:r>
+              <a:rPr lang="en-US" sz="1200" dirty="0" err="1">
+                <a:latin typeface="Arial" panose="020B0604020202020204" pitchFamily="34" charset="0"/>
+                <a:cs typeface="Arial" panose="020B0604020202020204" pitchFamily="34" charset="0"/>
+              </a:rPr>
+              <a:t>monomodo</a:t>
+            </a:r>
+            <a:r>
+              <a:rPr lang="en-US" sz="1200" dirty="0">
+                <a:latin typeface="Arial" panose="020B0604020202020204" pitchFamily="34" charset="0"/>
+                <a:cs typeface="Arial" panose="020B0604020202020204" pitchFamily="34" charset="0"/>
+              </a:rPr>
+              <a:t>. </a:t>
+            </a:r>
+          </a:p>
+          <a:p>
+            <a:pPr algn="just"/>
+            <a:r>
+              <a:rPr lang="en-US" sz="1200" dirty="0">
+                <a:latin typeface="Arial" panose="020B0604020202020204" pitchFamily="34" charset="0"/>
+                <a:cs typeface="Arial" panose="020B0604020202020204" pitchFamily="34" charset="0"/>
+              </a:rPr>
+              <a:t>Es </a:t>
+            </a:r>
+            <a:r>
+              <a:rPr lang="en-US" sz="1200" dirty="0" err="1">
+                <a:latin typeface="Arial" panose="020B0604020202020204" pitchFamily="34" charset="0"/>
+                <a:cs typeface="Arial" panose="020B0604020202020204" pitchFamily="34" charset="0"/>
+              </a:rPr>
+              <a:t>una</a:t>
+            </a:r>
+            <a:r>
+              <a:rPr lang="en-US" sz="1200" dirty="0">
+                <a:latin typeface="Arial" panose="020B0604020202020204" pitchFamily="34" charset="0"/>
+                <a:cs typeface="Arial" panose="020B0604020202020204" pitchFamily="34" charset="0"/>
+              </a:rPr>
+              <a:t> </a:t>
+            </a:r>
+            <a:r>
+              <a:rPr lang="en-US" sz="1200" dirty="0" err="1">
+                <a:latin typeface="Arial" panose="020B0604020202020204" pitchFamily="34" charset="0"/>
+                <a:cs typeface="Arial" panose="020B0604020202020204" pitchFamily="34" charset="0"/>
+              </a:rPr>
+              <a:t>guia</a:t>
+            </a:r>
+            <a:r>
+              <a:rPr lang="en-US" sz="1200" dirty="0">
+                <a:latin typeface="Arial" panose="020B0604020202020204" pitchFamily="34" charset="0"/>
+                <a:cs typeface="Arial" panose="020B0604020202020204" pitchFamily="34" charset="0"/>
+              </a:rPr>
+              <a:t> </a:t>
+            </a:r>
+            <a:r>
+              <a:rPr lang="en-US" sz="1200" dirty="0" err="1">
+                <a:latin typeface="Arial" panose="020B0604020202020204" pitchFamily="34" charset="0"/>
+                <a:cs typeface="Arial" panose="020B0604020202020204" pitchFamily="34" charset="0"/>
+              </a:rPr>
+              <a:t>monomodo</a:t>
+            </a:r>
+            <a:r>
+              <a:rPr lang="en-US" sz="1200" dirty="0">
+                <a:latin typeface="Arial" panose="020B0604020202020204" pitchFamily="34" charset="0"/>
+                <a:cs typeface="Arial" panose="020B0604020202020204" pitchFamily="34" charset="0"/>
+              </a:rPr>
+              <a:t>. </a:t>
+            </a:r>
+            <a:r>
+              <a:rPr lang="en-US" sz="1200" dirty="0" err="1">
+                <a:latin typeface="Arial" panose="020B0604020202020204" pitchFamily="34" charset="0"/>
+                <a:cs typeface="Arial" panose="020B0604020202020204" pitchFamily="34" charset="0"/>
+              </a:rPr>
+              <a:t>Podria</a:t>
+            </a:r>
+            <a:r>
+              <a:rPr lang="en-US" sz="1200" dirty="0">
+                <a:latin typeface="Arial" panose="020B0604020202020204" pitchFamily="34" charset="0"/>
+                <a:cs typeface="Arial" panose="020B0604020202020204" pitchFamily="34" charset="0"/>
+              </a:rPr>
+              <a:t> ser </a:t>
+            </a:r>
+            <a:r>
+              <a:rPr lang="en-US" sz="1200" dirty="0" err="1">
+                <a:latin typeface="Arial" panose="020B0604020202020204" pitchFamily="34" charset="0"/>
+                <a:cs typeface="Arial" panose="020B0604020202020204" pitchFamily="34" charset="0"/>
+              </a:rPr>
+              <a:t>monomodo</a:t>
+            </a:r>
+            <a:r>
+              <a:rPr lang="en-US" sz="1200" dirty="0">
+                <a:latin typeface="Arial" panose="020B0604020202020204" pitchFamily="34" charset="0"/>
+                <a:cs typeface="Arial" panose="020B0604020202020204" pitchFamily="34" charset="0"/>
+              </a:rPr>
+              <a:t> TE o </a:t>
+            </a:r>
+            <a:r>
+              <a:rPr lang="en-US" sz="1200" dirty="0" err="1">
+                <a:latin typeface="Arial" panose="020B0604020202020204" pitchFamily="34" charset="0"/>
+                <a:cs typeface="Arial" panose="020B0604020202020204" pitchFamily="34" charset="0"/>
+              </a:rPr>
+              <a:t>monomodo</a:t>
+            </a:r>
+            <a:r>
+              <a:rPr lang="en-US" sz="1200" dirty="0">
+                <a:latin typeface="Arial" panose="020B0604020202020204" pitchFamily="34" charset="0"/>
+                <a:cs typeface="Arial" panose="020B0604020202020204" pitchFamily="34" charset="0"/>
+              </a:rPr>
+              <a:t> TM y </a:t>
+            </a:r>
+            <a:r>
+              <a:rPr lang="en-US" sz="1200" dirty="0" err="1">
+                <a:latin typeface="Arial" panose="020B0604020202020204" pitchFamily="34" charset="0"/>
+                <a:cs typeface="Arial" panose="020B0604020202020204" pitchFamily="34" charset="0"/>
+              </a:rPr>
+              <a:t>propagaríamos</a:t>
+            </a:r>
+            <a:r>
+              <a:rPr lang="en-US" sz="1200" dirty="0">
+                <a:latin typeface="Arial" panose="020B0604020202020204" pitchFamily="34" charset="0"/>
+                <a:cs typeface="Arial" panose="020B0604020202020204" pitchFamily="34" charset="0"/>
+              </a:rPr>
+              <a:t> </a:t>
+            </a:r>
+            <a:r>
+              <a:rPr lang="en-US" sz="1200" dirty="0" err="1">
+                <a:latin typeface="Arial" panose="020B0604020202020204" pitchFamily="34" charset="0"/>
+                <a:cs typeface="Arial" panose="020B0604020202020204" pitchFamily="34" charset="0"/>
+              </a:rPr>
+              <a:t>el</a:t>
+            </a:r>
+            <a:r>
+              <a:rPr lang="en-US" sz="1200" dirty="0">
+                <a:latin typeface="Arial" panose="020B0604020202020204" pitchFamily="34" charset="0"/>
+                <a:cs typeface="Arial" panose="020B0604020202020204" pitchFamily="34" charset="0"/>
+              </a:rPr>
+              <a:t> modo de </a:t>
+            </a:r>
+            <a:r>
+              <a:rPr lang="en-US" sz="1200" dirty="0" err="1">
+                <a:latin typeface="Arial" panose="020B0604020202020204" pitchFamily="34" charset="0"/>
+                <a:cs typeface="Arial" panose="020B0604020202020204" pitchFamily="34" charset="0"/>
+              </a:rPr>
+              <a:t>orden</a:t>
+            </a:r>
+            <a:r>
+              <a:rPr lang="en-US" sz="1200" dirty="0">
+                <a:latin typeface="Arial" panose="020B0604020202020204" pitchFamily="34" charset="0"/>
+                <a:cs typeface="Arial" panose="020B0604020202020204" pitchFamily="34" charset="0"/>
+              </a:rPr>
+              <a:t> 0 </a:t>
+            </a:r>
+            <a:r>
+              <a:rPr lang="en-US" sz="1200" dirty="0" err="1">
+                <a:latin typeface="Arial" panose="020B0604020202020204" pitchFamily="34" charset="0"/>
+                <a:cs typeface="Arial" panose="020B0604020202020204" pitchFamily="34" charset="0"/>
+              </a:rPr>
+              <a:t>en</a:t>
+            </a:r>
+            <a:r>
+              <a:rPr lang="en-US" sz="1200" dirty="0">
+                <a:latin typeface="Arial" panose="020B0604020202020204" pitchFamily="34" charset="0"/>
+                <a:cs typeface="Arial" panose="020B0604020202020204" pitchFamily="34" charset="0"/>
+              </a:rPr>
+              <a:t> ambas, TE0 o TM0.</a:t>
+            </a:r>
+          </a:p>
+          <a:p>
+            <a:pPr algn="just"/>
+            <a:r>
+              <a:rPr lang="en-US" sz="1200" dirty="0">
+                <a:latin typeface="Arial" panose="020B0604020202020204" pitchFamily="34" charset="0"/>
+                <a:cs typeface="Arial" panose="020B0604020202020204" pitchFamily="34" charset="0"/>
+              </a:rPr>
+              <a:t>El </a:t>
+            </a:r>
+            <a:r>
+              <a:rPr lang="en-US" sz="1200" dirty="0" err="1">
+                <a:latin typeface="Arial" panose="020B0604020202020204" pitchFamily="34" charset="0"/>
+                <a:cs typeface="Arial" panose="020B0604020202020204" pitchFamily="34" charset="0"/>
+              </a:rPr>
+              <a:t>índice</a:t>
+            </a:r>
+            <a:r>
+              <a:rPr lang="en-US" sz="1200" dirty="0">
+                <a:latin typeface="Arial" panose="020B0604020202020204" pitchFamily="34" charset="0"/>
+                <a:cs typeface="Arial" panose="020B0604020202020204" pitchFamily="34" charset="0"/>
+              </a:rPr>
+              <a:t> </a:t>
+            </a:r>
+            <a:r>
+              <a:rPr lang="en-US" sz="1200" dirty="0" err="1">
+                <a:latin typeface="Arial" panose="020B0604020202020204" pitchFamily="34" charset="0"/>
+                <a:cs typeface="Arial" panose="020B0604020202020204" pitchFamily="34" charset="0"/>
+              </a:rPr>
+              <a:t>efectivo</a:t>
+            </a:r>
+            <a:r>
+              <a:rPr lang="en-US" sz="1200" dirty="0">
+                <a:latin typeface="Arial" panose="020B0604020202020204" pitchFamily="34" charset="0"/>
+                <a:cs typeface="Arial" panose="020B0604020202020204" pitchFamily="34" charset="0"/>
+              </a:rPr>
+              <a:t> </a:t>
+            </a:r>
+            <a:r>
+              <a:rPr lang="en-US" sz="1200" dirty="0" err="1">
+                <a:latin typeface="Arial" panose="020B0604020202020204" pitchFamily="34" charset="0"/>
+                <a:cs typeface="Arial" panose="020B0604020202020204" pitchFamily="34" charset="0"/>
+              </a:rPr>
+              <a:t>modela</a:t>
+            </a:r>
+            <a:r>
+              <a:rPr lang="en-US" sz="1200" dirty="0">
+                <a:latin typeface="Arial" panose="020B0604020202020204" pitchFamily="34" charset="0"/>
+                <a:cs typeface="Arial" panose="020B0604020202020204" pitchFamily="34" charset="0"/>
+              </a:rPr>
+              <a:t> la </a:t>
+            </a:r>
+            <a:r>
+              <a:rPr lang="en-US" sz="1200" dirty="0" err="1">
+                <a:latin typeface="Arial" panose="020B0604020202020204" pitchFamily="34" charset="0"/>
+                <a:cs typeface="Arial" panose="020B0604020202020204" pitchFamily="34" charset="0"/>
+              </a:rPr>
+              <a:t>propagación</a:t>
+            </a:r>
+            <a:r>
+              <a:rPr lang="en-US" sz="1200" dirty="0">
+                <a:latin typeface="Arial" panose="020B0604020202020204" pitchFamily="34" charset="0"/>
+                <a:cs typeface="Arial" panose="020B0604020202020204" pitchFamily="34" charset="0"/>
+              </a:rPr>
+              <a:t> de la </a:t>
+            </a:r>
+            <a:r>
+              <a:rPr lang="en-US" sz="1200" dirty="0" err="1">
+                <a:latin typeface="Arial" panose="020B0604020202020204" pitchFamily="34" charset="0"/>
+                <a:cs typeface="Arial" panose="020B0604020202020204" pitchFamily="34" charset="0"/>
+              </a:rPr>
+              <a:t>fase</a:t>
+            </a:r>
+            <a:r>
+              <a:rPr lang="en-US" sz="1200" dirty="0">
+                <a:latin typeface="Arial" panose="020B0604020202020204" pitchFamily="34" charset="0"/>
+                <a:cs typeface="Arial" panose="020B0604020202020204" pitchFamily="34" charset="0"/>
+              </a:rPr>
+              <a:t>, </a:t>
+            </a:r>
+            <a:r>
+              <a:rPr lang="en-US" sz="1200" dirty="0" err="1">
+                <a:latin typeface="Arial" panose="020B0604020202020204" pitchFamily="34" charset="0"/>
+                <a:cs typeface="Arial" panose="020B0604020202020204" pitchFamily="34" charset="0"/>
+              </a:rPr>
+              <a:t>como</a:t>
+            </a:r>
+            <a:r>
+              <a:rPr lang="en-US" sz="1200" dirty="0">
+                <a:latin typeface="Arial" panose="020B0604020202020204" pitchFamily="34" charset="0"/>
+                <a:cs typeface="Arial" panose="020B0604020202020204" pitchFamily="34" charset="0"/>
+              </a:rPr>
+              <a:t> </a:t>
+            </a:r>
+            <a:r>
+              <a:rPr lang="en-US" sz="1200" dirty="0" err="1">
+                <a:latin typeface="Arial" panose="020B0604020202020204" pitchFamily="34" charset="0"/>
+                <a:cs typeface="Arial" panose="020B0604020202020204" pitchFamily="34" charset="0"/>
+              </a:rPr>
+              <a:t>el</a:t>
+            </a:r>
+            <a:r>
+              <a:rPr lang="en-US" sz="1200" dirty="0">
+                <a:latin typeface="Arial" panose="020B0604020202020204" pitchFamily="34" charset="0"/>
+                <a:cs typeface="Arial" panose="020B0604020202020204" pitchFamily="34" charset="0"/>
+              </a:rPr>
+              <a:t> </a:t>
+            </a:r>
+            <a:r>
+              <a:rPr lang="en-US" sz="1200" dirty="0" err="1">
+                <a:latin typeface="Arial" panose="020B0604020202020204" pitchFamily="34" charset="0"/>
+                <a:cs typeface="Arial" panose="020B0604020202020204" pitchFamily="34" charset="0"/>
+              </a:rPr>
+              <a:t>índice</a:t>
+            </a:r>
+            <a:r>
+              <a:rPr lang="en-US" sz="1200" dirty="0">
+                <a:latin typeface="Arial" panose="020B0604020202020204" pitchFamily="34" charset="0"/>
+                <a:cs typeface="Arial" panose="020B0604020202020204" pitchFamily="34" charset="0"/>
+              </a:rPr>
+              <a:t> </a:t>
+            </a:r>
+            <a:r>
+              <a:rPr lang="en-US" sz="1200" dirty="0" err="1">
+                <a:latin typeface="Arial" panose="020B0604020202020204" pitchFamily="34" charset="0"/>
+                <a:cs typeface="Arial" panose="020B0604020202020204" pitchFamily="34" charset="0"/>
+              </a:rPr>
+              <a:t>efectivo</a:t>
+            </a:r>
+            <a:r>
+              <a:rPr lang="en-US" sz="1200" dirty="0">
+                <a:latin typeface="Arial" panose="020B0604020202020204" pitchFamily="34" charset="0"/>
+                <a:cs typeface="Arial" panose="020B0604020202020204" pitchFamily="34" charset="0"/>
+              </a:rPr>
+              <a:t> </a:t>
+            </a:r>
+            <a:r>
+              <a:rPr lang="en-US" sz="1200" dirty="0" err="1">
+                <a:latin typeface="Arial" panose="020B0604020202020204" pitchFamily="34" charset="0"/>
+                <a:cs typeface="Arial" panose="020B0604020202020204" pitchFamily="34" charset="0"/>
+              </a:rPr>
+              <a:t>váría</a:t>
+            </a:r>
+            <a:r>
+              <a:rPr lang="en-US" sz="1200" dirty="0">
+                <a:latin typeface="Arial" panose="020B0604020202020204" pitchFamily="34" charset="0"/>
+                <a:cs typeface="Arial" panose="020B0604020202020204" pitchFamily="34" charset="0"/>
+              </a:rPr>
+              <a:t>, no es </a:t>
+            </a:r>
+            <a:r>
+              <a:rPr lang="en-US" sz="1200" dirty="0" err="1">
+                <a:latin typeface="Arial" panose="020B0604020202020204" pitchFamily="34" charset="0"/>
+                <a:cs typeface="Arial" panose="020B0604020202020204" pitchFamily="34" charset="0"/>
+              </a:rPr>
+              <a:t>cte</a:t>
+            </a:r>
+            <a:r>
+              <a:rPr lang="en-US" sz="1200" dirty="0">
+                <a:latin typeface="Arial" panose="020B0604020202020204" pitchFamily="34" charset="0"/>
+                <a:cs typeface="Arial" panose="020B0604020202020204" pitchFamily="34" charset="0"/>
+              </a:rPr>
+              <a:t> y </a:t>
+            </a:r>
+            <a:r>
+              <a:rPr lang="en-US" sz="1200" dirty="0" err="1">
+                <a:latin typeface="Arial" panose="020B0604020202020204" pitchFamily="34" charset="0"/>
+                <a:cs typeface="Arial" panose="020B0604020202020204" pitchFamily="34" charset="0"/>
+              </a:rPr>
+              <a:t>tendremos</a:t>
+            </a:r>
+            <a:r>
+              <a:rPr lang="en-US" sz="1200" dirty="0">
+                <a:latin typeface="Arial" panose="020B0604020202020204" pitchFamily="34" charset="0"/>
+                <a:cs typeface="Arial" panose="020B0604020202020204" pitchFamily="34" charset="0"/>
+              </a:rPr>
+              <a:t> </a:t>
+            </a:r>
+            <a:r>
+              <a:rPr lang="en-US" sz="1200" dirty="0" err="1">
+                <a:latin typeface="Arial" panose="020B0604020202020204" pitchFamily="34" charset="0"/>
+                <a:cs typeface="Arial" panose="020B0604020202020204" pitchFamily="34" charset="0"/>
+              </a:rPr>
+              <a:t>dependencia</a:t>
+            </a:r>
+            <a:r>
+              <a:rPr lang="en-US" sz="1200" dirty="0">
+                <a:latin typeface="Arial" panose="020B0604020202020204" pitchFamily="34" charset="0"/>
+                <a:cs typeface="Arial" panose="020B0604020202020204" pitchFamily="34" charset="0"/>
+              </a:rPr>
+              <a:t> de la longitude de </a:t>
+            </a:r>
+            <a:r>
+              <a:rPr lang="en-US" sz="1200" dirty="0" err="1">
+                <a:latin typeface="Arial" panose="020B0604020202020204" pitchFamily="34" charset="0"/>
+                <a:cs typeface="Arial" panose="020B0604020202020204" pitchFamily="34" charset="0"/>
+              </a:rPr>
+              <a:t>onda</a:t>
+            </a:r>
+            <a:r>
+              <a:rPr lang="en-US" sz="1200" dirty="0">
+                <a:latin typeface="Arial" panose="020B0604020202020204" pitchFamily="34" charset="0"/>
+                <a:cs typeface="Arial" panose="020B0604020202020204" pitchFamily="34" charset="0"/>
+              </a:rPr>
+              <a:t>. </a:t>
+            </a:r>
+            <a:r>
+              <a:rPr lang="en-US" sz="1200" dirty="0" err="1">
+                <a:latin typeface="Arial" panose="020B0604020202020204" pitchFamily="34" charset="0"/>
+                <a:cs typeface="Arial" panose="020B0604020202020204" pitchFamily="34" charset="0"/>
+              </a:rPr>
+              <a:t>Operará</a:t>
+            </a:r>
+            <a:r>
+              <a:rPr lang="en-US" sz="1200" dirty="0">
+                <a:latin typeface="Arial" panose="020B0604020202020204" pitchFamily="34" charset="0"/>
+                <a:cs typeface="Arial" panose="020B0604020202020204" pitchFamily="34" charset="0"/>
+              </a:rPr>
+              <a:t> de </a:t>
+            </a:r>
+            <a:r>
+              <a:rPr lang="en-US" sz="1200" dirty="0" err="1">
+                <a:latin typeface="Arial" panose="020B0604020202020204" pitchFamily="34" charset="0"/>
+                <a:cs typeface="Arial" panose="020B0604020202020204" pitchFamily="34" charset="0"/>
+              </a:rPr>
+              <a:t>manera</a:t>
+            </a:r>
+            <a:r>
+              <a:rPr lang="en-US" sz="1200" dirty="0">
+                <a:latin typeface="Arial" panose="020B0604020202020204" pitchFamily="34" charset="0"/>
+                <a:cs typeface="Arial" panose="020B0604020202020204" pitchFamily="34" charset="0"/>
+              </a:rPr>
+              <a:t> </a:t>
+            </a:r>
+            <a:r>
+              <a:rPr lang="en-US" sz="1200" dirty="0" err="1">
+                <a:latin typeface="Arial" panose="020B0604020202020204" pitchFamily="34" charset="0"/>
+                <a:cs typeface="Arial" panose="020B0604020202020204" pitchFamily="34" charset="0"/>
+              </a:rPr>
+              <a:t>diferente</a:t>
+            </a:r>
+            <a:r>
+              <a:rPr lang="en-US" sz="1200" dirty="0">
+                <a:latin typeface="Arial" panose="020B0604020202020204" pitchFamily="34" charset="0"/>
+                <a:cs typeface="Arial" panose="020B0604020202020204" pitchFamily="34" charset="0"/>
+              </a:rPr>
+              <a:t>. </a:t>
+            </a:r>
+          </a:p>
+          <a:p>
+            <a:pPr algn="just"/>
+            <a:r>
+              <a:rPr lang="en-US" sz="1200" dirty="0">
+                <a:latin typeface="Arial" panose="020B0604020202020204" pitchFamily="34" charset="0"/>
+                <a:cs typeface="Arial" panose="020B0604020202020204" pitchFamily="34" charset="0"/>
+              </a:rPr>
+              <a:t>El </a:t>
+            </a:r>
+            <a:r>
+              <a:rPr lang="en-US" sz="1200" dirty="0" err="1">
+                <a:latin typeface="Arial" panose="020B0604020202020204" pitchFamily="34" charset="0"/>
+                <a:cs typeface="Arial" panose="020B0604020202020204" pitchFamily="34" charset="0"/>
+              </a:rPr>
+              <a:t>núcleo</a:t>
+            </a:r>
+            <a:r>
+              <a:rPr lang="en-US" sz="1200" dirty="0">
+                <a:latin typeface="Arial" panose="020B0604020202020204" pitchFamily="34" charset="0"/>
+                <a:cs typeface="Arial" panose="020B0604020202020204" pitchFamily="34" charset="0"/>
+              </a:rPr>
+              <a:t> de </a:t>
+            </a:r>
+            <a:r>
+              <a:rPr lang="en-US" sz="1200" dirty="0" err="1">
+                <a:latin typeface="Arial" panose="020B0604020202020204" pitchFamily="34" charset="0"/>
+                <a:cs typeface="Arial" panose="020B0604020202020204" pitchFamily="34" charset="0"/>
+              </a:rPr>
+              <a:t>nitruro</a:t>
+            </a:r>
+            <a:r>
+              <a:rPr lang="en-US" sz="1200" dirty="0">
+                <a:latin typeface="Arial" panose="020B0604020202020204" pitchFamily="34" charset="0"/>
+                <a:cs typeface="Arial" panose="020B0604020202020204" pitchFamily="34" charset="0"/>
+              </a:rPr>
+              <a:t> de </a:t>
+            </a:r>
+            <a:r>
+              <a:rPr lang="en-US" sz="1200" dirty="0" err="1">
+                <a:latin typeface="Arial" panose="020B0604020202020204" pitchFamily="34" charset="0"/>
+                <a:cs typeface="Arial" panose="020B0604020202020204" pitchFamily="34" charset="0"/>
+              </a:rPr>
+              <a:t>silicio</a:t>
+            </a:r>
+            <a:r>
+              <a:rPr lang="en-US" sz="1200" dirty="0">
+                <a:latin typeface="Arial" panose="020B0604020202020204" pitchFamily="34" charset="0"/>
+                <a:cs typeface="Arial" panose="020B0604020202020204" pitchFamily="34" charset="0"/>
+              </a:rPr>
+              <a:t>, </a:t>
+            </a:r>
+            <a:r>
+              <a:rPr lang="en-US" sz="1200" dirty="0" err="1">
+                <a:latin typeface="Arial" panose="020B0604020202020204" pitchFamily="34" charset="0"/>
+                <a:cs typeface="Arial" panose="020B0604020202020204" pitchFamily="34" charset="0"/>
+              </a:rPr>
+              <a:t>su</a:t>
+            </a:r>
+            <a:r>
+              <a:rPr lang="en-US" sz="1200" dirty="0">
+                <a:latin typeface="Arial" panose="020B0604020202020204" pitchFamily="34" charset="0"/>
+                <a:cs typeface="Arial" panose="020B0604020202020204" pitchFamily="34" charset="0"/>
+              </a:rPr>
+              <a:t> </a:t>
+            </a:r>
+            <a:r>
+              <a:rPr lang="en-US" sz="1200" dirty="0" err="1">
+                <a:latin typeface="Arial" panose="020B0604020202020204" pitchFamily="34" charset="0"/>
+                <a:cs typeface="Arial" panose="020B0604020202020204" pitchFamily="34" charset="0"/>
+              </a:rPr>
+              <a:t>índice</a:t>
+            </a:r>
+            <a:r>
+              <a:rPr lang="en-US" sz="1200" dirty="0">
+                <a:latin typeface="Arial" panose="020B0604020202020204" pitchFamily="34" charset="0"/>
+                <a:cs typeface="Arial" panose="020B0604020202020204" pitchFamily="34" charset="0"/>
+              </a:rPr>
+              <a:t> es </a:t>
+            </a:r>
+            <a:r>
+              <a:rPr lang="en-US" sz="1200" dirty="0" err="1">
+                <a:latin typeface="Arial" panose="020B0604020202020204" pitchFamily="34" charset="0"/>
+                <a:cs typeface="Arial" panose="020B0604020202020204" pitchFamily="34" charset="0"/>
+              </a:rPr>
+              <a:t>cercano</a:t>
+            </a:r>
+            <a:r>
+              <a:rPr lang="en-US" sz="1200" dirty="0">
+                <a:latin typeface="Arial" panose="020B0604020202020204" pitchFamily="34" charset="0"/>
+                <a:cs typeface="Arial" panose="020B0604020202020204" pitchFamily="34" charset="0"/>
+              </a:rPr>
+              <a:t> a 2. </a:t>
+            </a:r>
+            <a:r>
+              <a:rPr lang="en-US" sz="1200" dirty="0" err="1">
+                <a:latin typeface="Arial" panose="020B0604020202020204" pitchFamily="34" charset="0"/>
+                <a:cs typeface="Arial" panose="020B0604020202020204" pitchFamily="34" charset="0"/>
+              </a:rPr>
+              <a:t>Entonces</a:t>
+            </a:r>
+            <a:r>
+              <a:rPr lang="en-US" sz="1200" dirty="0">
+                <a:latin typeface="Arial" panose="020B0604020202020204" pitchFamily="34" charset="0"/>
+                <a:cs typeface="Arial" panose="020B0604020202020204" pitchFamily="34" charset="0"/>
+              </a:rPr>
+              <a:t> </a:t>
+            </a:r>
+            <a:r>
+              <a:rPr lang="en-US" sz="1200" dirty="0" err="1">
+                <a:latin typeface="Arial" panose="020B0604020202020204" pitchFamily="34" charset="0"/>
+                <a:cs typeface="Arial" panose="020B0604020202020204" pitchFamily="34" charset="0"/>
+              </a:rPr>
+              <a:t>vemos</a:t>
+            </a:r>
+            <a:r>
+              <a:rPr lang="en-US" sz="1200" dirty="0">
+                <a:latin typeface="Arial" panose="020B0604020202020204" pitchFamily="34" charset="0"/>
+                <a:cs typeface="Arial" panose="020B0604020202020204" pitchFamily="34" charset="0"/>
+              </a:rPr>
+              <a:t> </a:t>
+            </a:r>
+            <a:r>
+              <a:rPr lang="en-US" sz="1200" dirty="0" err="1">
+                <a:latin typeface="Arial" panose="020B0604020202020204" pitchFamily="34" charset="0"/>
+                <a:cs typeface="Arial" panose="020B0604020202020204" pitchFamily="34" charset="0"/>
+              </a:rPr>
+              <a:t>que</a:t>
+            </a:r>
+            <a:r>
+              <a:rPr lang="en-US" sz="1200" dirty="0">
+                <a:latin typeface="Arial" panose="020B0604020202020204" pitchFamily="34" charset="0"/>
+                <a:cs typeface="Arial" panose="020B0604020202020204" pitchFamily="34" charset="0"/>
+              </a:rPr>
+              <a:t> no </a:t>
+            </a:r>
+            <a:r>
+              <a:rPr lang="en-US" sz="1200" dirty="0" err="1">
+                <a:latin typeface="Arial" panose="020B0604020202020204" pitchFamily="34" charset="0"/>
+                <a:cs typeface="Arial" panose="020B0604020202020204" pitchFamily="34" charset="0"/>
+              </a:rPr>
+              <a:t>está</a:t>
+            </a:r>
+            <a:r>
+              <a:rPr lang="en-US" sz="1200" dirty="0">
+                <a:latin typeface="Arial" panose="020B0604020202020204" pitchFamily="34" charset="0"/>
+                <a:cs typeface="Arial" panose="020B0604020202020204" pitchFamily="34" charset="0"/>
+              </a:rPr>
+              <a:t> </a:t>
+            </a:r>
+            <a:r>
+              <a:rPr lang="en-US" sz="1200" dirty="0" err="1">
+                <a:latin typeface="Arial" panose="020B0604020202020204" pitchFamily="34" charset="0"/>
+                <a:cs typeface="Arial" panose="020B0604020202020204" pitchFamily="34" charset="0"/>
+              </a:rPr>
+              <a:t>muy</a:t>
+            </a:r>
+            <a:r>
+              <a:rPr lang="en-US" sz="1200" dirty="0">
+                <a:latin typeface="Arial" panose="020B0604020202020204" pitchFamily="34" charset="0"/>
+                <a:cs typeface="Arial" panose="020B0604020202020204" pitchFamily="34" charset="0"/>
+              </a:rPr>
+              <a:t> </a:t>
+            </a:r>
+            <a:r>
+              <a:rPr lang="en-US" sz="1200" dirty="0" err="1">
+                <a:latin typeface="Arial" panose="020B0604020202020204" pitchFamily="34" charset="0"/>
+                <a:cs typeface="Arial" panose="020B0604020202020204" pitchFamily="34" charset="0"/>
+              </a:rPr>
+              <a:t>confinado</a:t>
+            </a:r>
+            <a:r>
+              <a:rPr lang="en-US" sz="1200" dirty="0">
+                <a:latin typeface="Arial" panose="020B0604020202020204" pitchFamily="34" charset="0"/>
+                <a:cs typeface="Arial" panose="020B0604020202020204" pitchFamily="34" charset="0"/>
+              </a:rPr>
+              <a:t>.</a:t>
             </a:r>
           </a:p>
           <a:p>
@@ -6291,57 +7282,6 @@
       </p:sp>
       <p:sp>
         <p:nvSpPr>
-          <p:cNvPr id="8" name="CuadroTexto 7">
-            <a:extLst>
-              <a:ext uri="{FF2B5EF4-FFF2-40B4-BE49-F238E27FC236}">
-                <a16:creationId xmlns:a16="http://schemas.microsoft.com/office/drawing/2014/main" id="{CD9C65D4-5494-F5CE-1094-CB0A32C33876}"/>
-              </a:ext>
-            </a:extLst>
-          </p:cNvPr>
-          <p:cNvSpPr txBox="1"/>
-          <p:nvPr/>
-        </p:nvSpPr>
-        <p:spPr>
-          <a:xfrm>
-            <a:off x="8281672" y="2671278"/>
-            <a:ext cx="1722908" cy="923330"/>
-          </a:xfrm>
-          <a:prstGeom prst="rect">
-            <a:avLst/>
-          </a:prstGeom>
-          <a:noFill/>
-        </p:spPr>
-        <p:txBody>
-          <a:bodyPr wrap="none" rtlCol="0">
-            <a:spAutoFit/>
-          </a:bodyPr>
-          <a:lstStyle/>
-          <a:p>
-            <a:pPr algn="ctr"/>
-            <a:r>
-              <a:rPr lang="en-US" b="1" dirty="0"/>
-              <a:t>deep</a:t>
-            </a:r>
-            <a:r>
-              <a:rPr lang="en-US" dirty="0"/>
-              <a:t> waveguide</a:t>
-            </a:r>
-          </a:p>
-          <a:p>
-            <a:pPr algn="ctr"/>
-            <a:endParaRPr lang="en-US" dirty="0"/>
-          </a:p>
-          <a:p>
-            <a:pPr algn="ctr"/>
-            <a:r>
-              <a:rPr lang="en-US" dirty="0"/>
-              <a:t>Paste plot here</a:t>
-            </a:r>
-          </a:p>
-        </p:txBody>
-      </p:sp>
-      <p:sp>
-        <p:nvSpPr>
           <p:cNvPr id="9" name="CuadroTexto 8">
             <a:extLst>
               <a:ext uri="{FF2B5EF4-FFF2-40B4-BE49-F238E27FC236}">
@@ -6380,6 +7320,66 @@
           </a:p>
         </p:txBody>
       </p:sp>
+      <p:pic>
+        <p:nvPicPr>
+          <p:cNvPr id="10" name="Imagen 9" descr="Gráfico, Gráfico de líneas&#10;&#10;El contenido generado por IA puede ser incorrecto.">
+            <a:extLst>
+              <a:ext uri="{FF2B5EF4-FFF2-40B4-BE49-F238E27FC236}">
+                <a16:creationId xmlns:a16="http://schemas.microsoft.com/office/drawing/2014/main" id="{6F8352F8-9D55-0A91-7C62-AF0F3E3764F8}"/>
+              </a:ext>
+            </a:extLst>
+          </p:cNvPr>
+          <p:cNvPicPr>
+            <a:picLocks noChangeAspect="1"/>
+          </p:cNvPicPr>
+          <p:nvPr/>
+        </p:nvPicPr>
+        <p:blipFill>
+          <a:blip r:embed="rId5"/>
+          <a:stretch>
+            <a:fillRect/>
+          </a:stretch>
+        </p:blipFill>
+        <p:spPr>
+          <a:xfrm>
+            <a:off x="600205" y="1564998"/>
+            <a:ext cx="5333710" cy="2919724"/>
+          </a:xfrm>
+          <a:prstGeom prst="rect">
+            <a:avLst/>
+          </a:prstGeom>
+        </p:spPr>
+      </p:pic>
+      <p:pic>
+        <p:nvPicPr>
+          <p:cNvPr id="12" name="Imagen 11" descr="Gráfico&#10;&#10;El contenido generado por IA puede ser incorrecto.">
+            <a:extLst>
+              <a:ext uri="{FF2B5EF4-FFF2-40B4-BE49-F238E27FC236}">
+                <a16:creationId xmlns:a16="http://schemas.microsoft.com/office/drawing/2014/main" id="{2E412073-5B4F-E16F-7D6E-1C978D3D99C2}"/>
+              </a:ext>
+            </a:extLst>
+          </p:cNvPr>
+          <p:cNvPicPr>
+            <a:picLocks noChangeAspect="1"/>
+          </p:cNvPicPr>
+          <p:nvPr/>
+        </p:nvPicPr>
+        <p:blipFill>
+          <a:blip r:embed="rId6"/>
+          <a:stretch>
+            <a:fillRect/>
+          </a:stretch>
+        </p:blipFill>
+        <p:spPr>
+          <a:xfrm>
+            <a:off x="6390212" y="1548801"/>
+            <a:ext cx="5505828" cy="2986121"/>
+          </a:xfrm>
+          <a:prstGeom prst="rect">
+            <a:avLst/>
+          </a:prstGeom>
+        </p:spPr>
+      </p:pic>
     </p:spTree>
     <p:extLst>
       <p:ext uri="{BB962C8B-B14F-4D97-AF65-F5344CB8AC3E}">

--- a/LabBook_010.pptx
+++ b/LabBook_010.pptx
@@ -5,17 +5,23 @@
     <p:sldMasterId id="2147483648" r:id="rId1"/>
   </p:sldMasterIdLst>
   <p:notesMasterIdLst>
-    <p:notesMasterId r:id="rId7"/>
+    <p:notesMasterId r:id="rId13"/>
   </p:notesMasterIdLst>
   <p:handoutMasterIdLst>
-    <p:handoutMasterId r:id="rId8"/>
+    <p:handoutMasterId r:id="rId14"/>
   </p:handoutMasterIdLst>
   <p:sldIdLst>
     <p:sldId id="256" r:id="rId2"/>
     <p:sldId id="289" r:id="rId3"/>
     <p:sldId id="290" r:id="rId4"/>
-    <p:sldId id="291" r:id="rId5"/>
-    <p:sldId id="288" r:id="rId6"/>
+    <p:sldId id="292" r:id="rId5"/>
+    <p:sldId id="293" r:id="rId6"/>
+    <p:sldId id="294" r:id="rId7"/>
+    <p:sldId id="295" r:id="rId8"/>
+    <p:sldId id="296" r:id="rId9"/>
+    <p:sldId id="297" r:id="rId10"/>
+    <p:sldId id="291" r:id="rId11"/>
+    <p:sldId id="288" r:id="rId12"/>
   </p:sldIdLst>
   <p:sldSz cx="12192000" cy="6858000"/>
   <p:notesSz cx="12192000" cy="6858000"/>
@@ -810,6 +816,654 @@
         <p:cNvPr id="1" name="">
           <a:extLst>
             <a:ext uri="{FF2B5EF4-FFF2-40B4-BE49-F238E27FC236}">
+              <a16:creationId xmlns:a16="http://schemas.microsoft.com/office/drawing/2014/main" id="{3B1E4B56-6B01-1B56-088F-9C4CB5DF14F1}"/>
+            </a:ext>
+          </a:extLst>
+        </p:cNvPr>
+        <p:cNvGrpSpPr/>
+        <p:nvPr/>
+      </p:nvGrpSpPr>
+      <p:grpSpPr>
+        <a:xfrm>
+          <a:off x="0" y="0"/>
+          <a:ext cx="0" cy="0"/>
+          <a:chOff x="0" y="0"/>
+          <a:chExt cx="0" cy="0"/>
+        </a:xfrm>
+      </p:grpSpPr>
+      <p:sp>
+        <p:nvSpPr>
+          <p:cNvPr id="2" name="Marcador de imagen de diapositiva 1">
+            <a:extLst>
+              <a:ext uri="{FF2B5EF4-FFF2-40B4-BE49-F238E27FC236}">
+                <a16:creationId xmlns:a16="http://schemas.microsoft.com/office/drawing/2014/main" id="{4B8EAEA0-121F-B5C5-8811-BDC5C0610D5D}"/>
+              </a:ext>
+            </a:extLst>
+          </p:cNvPr>
+          <p:cNvSpPr>
+            <a:spLocks noGrp="1" noRot="1" noChangeAspect="1"/>
+          </p:cNvSpPr>
+          <p:nvPr>
+            <p:ph type="sldImg"/>
+          </p:nvPr>
+        </p:nvSpPr>
+        <p:spPr/>
+      </p:sp>
+      <p:sp>
+        <p:nvSpPr>
+          <p:cNvPr id="3" name="Marcador de notas 2">
+            <a:extLst>
+              <a:ext uri="{FF2B5EF4-FFF2-40B4-BE49-F238E27FC236}">
+                <a16:creationId xmlns:a16="http://schemas.microsoft.com/office/drawing/2014/main" id="{B2B95947-ABE7-E097-5563-793607920DC4}"/>
+              </a:ext>
+            </a:extLst>
+          </p:cNvPr>
+          <p:cNvSpPr>
+            <a:spLocks noGrp="1"/>
+          </p:cNvSpPr>
+          <p:nvPr>
+            <p:ph type="body" idx="1"/>
+          </p:nvPr>
+        </p:nvSpPr>
+        <p:spPr/>
+        <p:txBody>
+          <a:bodyPr/>
+          <a:lstStyle/>
+          <a:p>
+            <a:endParaRPr lang="es-ES" dirty="0"/>
+          </a:p>
+        </p:txBody>
+      </p:sp>
+      <p:sp>
+        <p:nvSpPr>
+          <p:cNvPr id="4" name="Marcador de número de diapositiva 3">
+            <a:extLst>
+              <a:ext uri="{FF2B5EF4-FFF2-40B4-BE49-F238E27FC236}">
+                <a16:creationId xmlns:a16="http://schemas.microsoft.com/office/drawing/2014/main" id="{F1777315-6F16-4B94-8050-2D2423BA228F}"/>
+              </a:ext>
+            </a:extLst>
+          </p:cNvPr>
+          <p:cNvSpPr>
+            <a:spLocks noGrp="1"/>
+          </p:cNvSpPr>
+          <p:nvPr>
+            <p:ph type="sldNum" sz="quarter" idx="5"/>
+          </p:nvPr>
+        </p:nvSpPr>
+        <p:spPr/>
+        <p:txBody>
+          <a:bodyPr/>
+          <a:lstStyle/>
+          <a:p>
+            <a:fld id="{676223B9-C868-4436-87D9-1A3152E1157A}" type="slidenum">
+              <a:rPr lang="es-ES" smtClean="0"/>
+              <a:t>4</a:t>
+            </a:fld>
+            <a:endParaRPr lang="es-ES"/>
+          </a:p>
+        </p:txBody>
+      </p:sp>
+    </p:spTree>
+    <p:extLst>
+      <p:ext uri="{BB962C8B-B14F-4D97-AF65-F5344CB8AC3E}">
+        <p14:creationId xmlns:p14="http://schemas.microsoft.com/office/powerpoint/2010/main" val="736903743"/>
+      </p:ext>
+    </p:extLst>
+  </p:cSld>
+  <p:clrMapOvr>
+    <a:masterClrMapping/>
+  </p:clrMapOvr>
+</p:notes>
+</file>
+
+<file path=ppt/notesSlides/notesSlide3.xml><?xml version="1.0" encoding="utf-8"?>
+<p:notes xmlns:a="http://schemas.openxmlformats.org/drawingml/2006/main" xmlns:r="http://schemas.openxmlformats.org/officeDocument/2006/relationships" xmlns:p="http://schemas.openxmlformats.org/presentationml/2006/main">
+  <p:cSld>
+    <p:spTree>
+      <p:nvGrpSpPr>
+        <p:cNvPr id="1" name="">
+          <a:extLst>
+            <a:ext uri="{FF2B5EF4-FFF2-40B4-BE49-F238E27FC236}">
+              <a16:creationId xmlns:a16="http://schemas.microsoft.com/office/drawing/2014/main" id="{27F5CDDB-FC66-6BCC-A755-53EB38AFAFF5}"/>
+            </a:ext>
+          </a:extLst>
+        </p:cNvPr>
+        <p:cNvGrpSpPr/>
+        <p:nvPr/>
+      </p:nvGrpSpPr>
+      <p:grpSpPr>
+        <a:xfrm>
+          <a:off x="0" y="0"/>
+          <a:ext cx="0" cy="0"/>
+          <a:chOff x="0" y="0"/>
+          <a:chExt cx="0" cy="0"/>
+        </a:xfrm>
+      </p:grpSpPr>
+      <p:sp>
+        <p:nvSpPr>
+          <p:cNvPr id="2" name="Marcador de imagen de diapositiva 1">
+            <a:extLst>
+              <a:ext uri="{FF2B5EF4-FFF2-40B4-BE49-F238E27FC236}">
+                <a16:creationId xmlns:a16="http://schemas.microsoft.com/office/drawing/2014/main" id="{681EC6B8-8FF6-5A70-E31A-ADA710B675F6}"/>
+              </a:ext>
+            </a:extLst>
+          </p:cNvPr>
+          <p:cNvSpPr>
+            <a:spLocks noGrp="1" noRot="1" noChangeAspect="1"/>
+          </p:cNvSpPr>
+          <p:nvPr>
+            <p:ph type="sldImg"/>
+          </p:nvPr>
+        </p:nvSpPr>
+        <p:spPr/>
+      </p:sp>
+      <p:sp>
+        <p:nvSpPr>
+          <p:cNvPr id="3" name="Marcador de notas 2">
+            <a:extLst>
+              <a:ext uri="{FF2B5EF4-FFF2-40B4-BE49-F238E27FC236}">
+                <a16:creationId xmlns:a16="http://schemas.microsoft.com/office/drawing/2014/main" id="{BD7B6567-0E82-B5F5-88FC-FAD17F535B39}"/>
+              </a:ext>
+            </a:extLst>
+          </p:cNvPr>
+          <p:cNvSpPr>
+            <a:spLocks noGrp="1"/>
+          </p:cNvSpPr>
+          <p:nvPr>
+            <p:ph type="body" idx="1"/>
+          </p:nvPr>
+        </p:nvSpPr>
+        <p:spPr/>
+        <p:txBody>
+          <a:bodyPr/>
+          <a:lstStyle/>
+          <a:p>
+            <a:endParaRPr lang="es-ES" dirty="0"/>
+          </a:p>
+        </p:txBody>
+      </p:sp>
+      <p:sp>
+        <p:nvSpPr>
+          <p:cNvPr id="4" name="Marcador de número de diapositiva 3">
+            <a:extLst>
+              <a:ext uri="{FF2B5EF4-FFF2-40B4-BE49-F238E27FC236}">
+                <a16:creationId xmlns:a16="http://schemas.microsoft.com/office/drawing/2014/main" id="{00FDCB85-119D-3607-B4C1-F371C902C828}"/>
+              </a:ext>
+            </a:extLst>
+          </p:cNvPr>
+          <p:cNvSpPr>
+            <a:spLocks noGrp="1"/>
+          </p:cNvSpPr>
+          <p:nvPr>
+            <p:ph type="sldNum" sz="quarter" idx="5"/>
+          </p:nvPr>
+        </p:nvSpPr>
+        <p:spPr/>
+        <p:txBody>
+          <a:bodyPr/>
+          <a:lstStyle/>
+          <a:p>
+            <a:fld id="{676223B9-C868-4436-87D9-1A3152E1157A}" type="slidenum">
+              <a:rPr lang="es-ES" smtClean="0"/>
+              <a:t>5</a:t>
+            </a:fld>
+            <a:endParaRPr lang="es-ES"/>
+          </a:p>
+        </p:txBody>
+      </p:sp>
+    </p:spTree>
+    <p:extLst>
+      <p:ext uri="{BB962C8B-B14F-4D97-AF65-F5344CB8AC3E}">
+        <p14:creationId xmlns:p14="http://schemas.microsoft.com/office/powerpoint/2010/main" val="1835691195"/>
+      </p:ext>
+    </p:extLst>
+  </p:cSld>
+  <p:clrMapOvr>
+    <a:masterClrMapping/>
+  </p:clrMapOvr>
+</p:notes>
+</file>
+
+<file path=ppt/notesSlides/notesSlide4.xml><?xml version="1.0" encoding="utf-8"?>
+<p:notes xmlns:a="http://schemas.openxmlformats.org/drawingml/2006/main" xmlns:r="http://schemas.openxmlformats.org/officeDocument/2006/relationships" xmlns:p="http://schemas.openxmlformats.org/presentationml/2006/main">
+  <p:cSld>
+    <p:spTree>
+      <p:nvGrpSpPr>
+        <p:cNvPr id="1" name="">
+          <a:extLst>
+            <a:ext uri="{FF2B5EF4-FFF2-40B4-BE49-F238E27FC236}">
+              <a16:creationId xmlns:a16="http://schemas.microsoft.com/office/drawing/2014/main" id="{0E179D7A-B353-C878-088B-C12B144C81D9}"/>
+            </a:ext>
+          </a:extLst>
+        </p:cNvPr>
+        <p:cNvGrpSpPr/>
+        <p:nvPr/>
+      </p:nvGrpSpPr>
+      <p:grpSpPr>
+        <a:xfrm>
+          <a:off x="0" y="0"/>
+          <a:ext cx="0" cy="0"/>
+          <a:chOff x="0" y="0"/>
+          <a:chExt cx="0" cy="0"/>
+        </a:xfrm>
+      </p:grpSpPr>
+      <p:sp>
+        <p:nvSpPr>
+          <p:cNvPr id="2" name="Marcador de imagen de diapositiva 1">
+            <a:extLst>
+              <a:ext uri="{FF2B5EF4-FFF2-40B4-BE49-F238E27FC236}">
+                <a16:creationId xmlns:a16="http://schemas.microsoft.com/office/drawing/2014/main" id="{593EEBF4-5ECF-D67D-838D-C186C3A19FA1}"/>
+              </a:ext>
+            </a:extLst>
+          </p:cNvPr>
+          <p:cNvSpPr>
+            <a:spLocks noGrp="1" noRot="1" noChangeAspect="1"/>
+          </p:cNvSpPr>
+          <p:nvPr>
+            <p:ph type="sldImg"/>
+          </p:nvPr>
+        </p:nvSpPr>
+        <p:spPr/>
+      </p:sp>
+      <p:sp>
+        <p:nvSpPr>
+          <p:cNvPr id="3" name="Marcador de notas 2">
+            <a:extLst>
+              <a:ext uri="{FF2B5EF4-FFF2-40B4-BE49-F238E27FC236}">
+                <a16:creationId xmlns:a16="http://schemas.microsoft.com/office/drawing/2014/main" id="{133BA97D-7E8F-5F7E-4BA6-A0E94F6D50AC}"/>
+              </a:ext>
+            </a:extLst>
+          </p:cNvPr>
+          <p:cNvSpPr>
+            <a:spLocks noGrp="1"/>
+          </p:cNvSpPr>
+          <p:nvPr>
+            <p:ph type="body" idx="1"/>
+          </p:nvPr>
+        </p:nvSpPr>
+        <p:spPr/>
+        <p:txBody>
+          <a:bodyPr/>
+          <a:lstStyle/>
+          <a:p>
+            <a:endParaRPr lang="es-ES" dirty="0"/>
+          </a:p>
+        </p:txBody>
+      </p:sp>
+      <p:sp>
+        <p:nvSpPr>
+          <p:cNvPr id="4" name="Marcador de número de diapositiva 3">
+            <a:extLst>
+              <a:ext uri="{FF2B5EF4-FFF2-40B4-BE49-F238E27FC236}">
+                <a16:creationId xmlns:a16="http://schemas.microsoft.com/office/drawing/2014/main" id="{9EE076E1-E76A-34FD-7113-6FBC2177CBF3}"/>
+              </a:ext>
+            </a:extLst>
+          </p:cNvPr>
+          <p:cNvSpPr>
+            <a:spLocks noGrp="1"/>
+          </p:cNvSpPr>
+          <p:nvPr>
+            <p:ph type="sldNum" sz="quarter" idx="5"/>
+          </p:nvPr>
+        </p:nvSpPr>
+        <p:spPr/>
+        <p:txBody>
+          <a:bodyPr/>
+          <a:lstStyle/>
+          <a:p>
+            <a:fld id="{676223B9-C868-4436-87D9-1A3152E1157A}" type="slidenum">
+              <a:rPr lang="es-ES" smtClean="0"/>
+              <a:t>6</a:t>
+            </a:fld>
+            <a:endParaRPr lang="es-ES"/>
+          </a:p>
+        </p:txBody>
+      </p:sp>
+    </p:spTree>
+    <p:extLst>
+      <p:ext uri="{BB962C8B-B14F-4D97-AF65-F5344CB8AC3E}">
+        <p14:creationId xmlns:p14="http://schemas.microsoft.com/office/powerpoint/2010/main" val="1537704971"/>
+      </p:ext>
+    </p:extLst>
+  </p:cSld>
+  <p:clrMapOvr>
+    <a:masterClrMapping/>
+  </p:clrMapOvr>
+</p:notes>
+</file>
+
+<file path=ppt/notesSlides/notesSlide5.xml><?xml version="1.0" encoding="utf-8"?>
+<p:notes xmlns:a="http://schemas.openxmlformats.org/drawingml/2006/main" xmlns:r="http://schemas.openxmlformats.org/officeDocument/2006/relationships" xmlns:p="http://schemas.openxmlformats.org/presentationml/2006/main">
+  <p:cSld>
+    <p:spTree>
+      <p:nvGrpSpPr>
+        <p:cNvPr id="1" name="">
+          <a:extLst>
+            <a:ext uri="{FF2B5EF4-FFF2-40B4-BE49-F238E27FC236}">
+              <a16:creationId xmlns:a16="http://schemas.microsoft.com/office/drawing/2014/main" id="{CBE29953-A3E7-EBCB-02D9-BDEB50776195}"/>
+            </a:ext>
+          </a:extLst>
+        </p:cNvPr>
+        <p:cNvGrpSpPr/>
+        <p:nvPr/>
+      </p:nvGrpSpPr>
+      <p:grpSpPr>
+        <a:xfrm>
+          <a:off x="0" y="0"/>
+          <a:ext cx="0" cy="0"/>
+          <a:chOff x="0" y="0"/>
+          <a:chExt cx="0" cy="0"/>
+        </a:xfrm>
+      </p:grpSpPr>
+      <p:sp>
+        <p:nvSpPr>
+          <p:cNvPr id="2" name="Marcador de imagen de diapositiva 1">
+            <a:extLst>
+              <a:ext uri="{FF2B5EF4-FFF2-40B4-BE49-F238E27FC236}">
+                <a16:creationId xmlns:a16="http://schemas.microsoft.com/office/drawing/2014/main" id="{D217D450-585F-DC5F-CA14-E091247688BE}"/>
+              </a:ext>
+            </a:extLst>
+          </p:cNvPr>
+          <p:cNvSpPr>
+            <a:spLocks noGrp="1" noRot="1" noChangeAspect="1"/>
+          </p:cNvSpPr>
+          <p:nvPr>
+            <p:ph type="sldImg"/>
+          </p:nvPr>
+        </p:nvSpPr>
+        <p:spPr/>
+      </p:sp>
+      <p:sp>
+        <p:nvSpPr>
+          <p:cNvPr id="3" name="Marcador de notas 2">
+            <a:extLst>
+              <a:ext uri="{FF2B5EF4-FFF2-40B4-BE49-F238E27FC236}">
+                <a16:creationId xmlns:a16="http://schemas.microsoft.com/office/drawing/2014/main" id="{582A74DF-6105-6C37-60CB-59E07A131C91}"/>
+              </a:ext>
+            </a:extLst>
+          </p:cNvPr>
+          <p:cNvSpPr>
+            <a:spLocks noGrp="1"/>
+          </p:cNvSpPr>
+          <p:nvPr>
+            <p:ph type="body" idx="1"/>
+          </p:nvPr>
+        </p:nvSpPr>
+        <p:spPr/>
+        <p:txBody>
+          <a:bodyPr/>
+          <a:lstStyle/>
+          <a:p>
+            <a:endParaRPr lang="es-ES" dirty="0"/>
+          </a:p>
+        </p:txBody>
+      </p:sp>
+      <p:sp>
+        <p:nvSpPr>
+          <p:cNvPr id="4" name="Marcador de número de diapositiva 3">
+            <a:extLst>
+              <a:ext uri="{FF2B5EF4-FFF2-40B4-BE49-F238E27FC236}">
+                <a16:creationId xmlns:a16="http://schemas.microsoft.com/office/drawing/2014/main" id="{604DBCB9-241F-215E-F27D-9876CBEA45AB}"/>
+              </a:ext>
+            </a:extLst>
+          </p:cNvPr>
+          <p:cNvSpPr>
+            <a:spLocks noGrp="1"/>
+          </p:cNvSpPr>
+          <p:nvPr>
+            <p:ph type="sldNum" sz="quarter" idx="5"/>
+          </p:nvPr>
+        </p:nvSpPr>
+        <p:spPr/>
+        <p:txBody>
+          <a:bodyPr/>
+          <a:lstStyle/>
+          <a:p>
+            <a:fld id="{676223B9-C868-4436-87D9-1A3152E1157A}" type="slidenum">
+              <a:rPr lang="es-ES" smtClean="0"/>
+              <a:t>7</a:t>
+            </a:fld>
+            <a:endParaRPr lang="es-ES"/>
+          </a:p>
+        </p:txBody>
+      </p:sp>
+    </p:spTree>
+    <p:extLst>
+      <p:ext uri="{BB962C8B-B14F-4D97-AF65-F5344CB8AC3E}">
+        <p14:creationId xmlns:p14="http://schemas.microsoft.com/office/powerpoint/2010/main" val="1184808779"/>
+      </p:ext>
+    </p:extLst>
+  </p:cSld>
+  <p:clrMapOvr>
+    <a:masterClrMapping/>
+  </p:clrMapOvr>
+</p:notes>
+</file>
+
+<file path=ppt/notesSlides/notesSlide6.xml><?xml version="1.0" encoding="utf-8"?>
+<p:notes xmlns:a="http://schemas.openxmlformats.org/drawingml/2006/main" xmlns:r="http://schemas.openxmlformats.org/officeDocument/2006/relationships" xmlns:p="http://schemas.openxmlformats.org/presentationml/2006/main">
+  <p:cSld>
+    <p:spTree>
+      <p:nvGrpSpPr>
+        <p:cNvPr id="1" name="">
+          <a:extLst>
+            <a:ext uri="{FF2B5EF4-FFF2-40B4-BE49-F238E27FC236}">
+              <a16:creationId xmlns:a16="http://schemas.microsoft.com/office/drawing/2014/main" id="{9C470C96-FC96-6D49-7AE9-32C3C6036B3F}"/>
+            </a:ext>
+          </a:extLst>
+        </p:cNvPr>
+        <p:cNvGrpSpPr/>
+        <p:nvPr/>
+      </p:nvGrpSpPr>
+      <p:grpSpPr>
+        <a:xfrm>
+          <a:off x="0" y="0"/>
+          <a:ext cx="0" cy="0"/>
+          <a:chOff x="0" y="0"/>
+          <a:chExt cx="0" cy="0"/>
+        </a:xfrm>
+      </p:grpSpPr>
+      <p:sp>
+        <p:nvSpPr>
+          <p:cNvPr id="2" name="Marcador de imagen de diapositiva 1">
+            <a:extLst>
+              <a:ext uri="{FF2B5EF4-FFF2-40B4-BE49-F238E27FC236}">
+                <a16:creationId xmlns:a16="http://schemas.microsoft.com/office/drawing/2014/main" id="{AE1D6942-5E6A-02C4-6E1E-7977142F0759}"/>
+              </a:ext>
+            </a:extLst>
+          </p:cNvPr>
+          <p:cNvSpPr>
+            <a:spLocks noGrp="1" noRot="1" noChangeAspect="1"/>
+          </p:cNvSpPr>
+          <p:nvPr>
+            <p:ph type="sldImg"/>
+          </p:nvPr>
+        </p:nvSpPr>
+        <p:spPr/>
+      </p:sp>
+      <p:sp>
+        <p:nvSpPr>
+          <p:cNvPr id="3" name="Marcador de notas 2">
+            <a:extLst>
+              <a:ext uri="{FF2B5EF4-FFF2-40B4-BE49-F238E27FC236}">
+                <a16:creationId xmlns:a16="http://schemas.microsoft.com/office/drawing/2014/main" id="{57694B3E-BE50-3BA3-084E-E1EF1E02F9DE}"/>
+              </a:ext>
+            </a:extLst>
+          </p:cNvPr>
+          <p:cNvSpPr>
+            <a:spLocks noGrp="1"/>
+          </p:cNvSpPr>
+          <p:nvPr>
+            <p:ph type="body" idx="1"/>
+          </p:nvPr>
+        </p:nvSpPr>
+        <p:spPr/>
+        <p:txBody>
+          <a:bodyPr/>
+          <a:lstStyle/>
+          <a:p>
+            <a:endParaRPr lang="es-ES" dirty="0"/>
+          </a:p>
+        </p:txBody>
+      </p:sp>
+      <p:sp>
+        <p:nvSpPr>
+          <p:cNvPr id="4" name="Marcador de número de diapositiva 3">
+            <a:extLst>
+              <a:ext uri="{FF2B5EF4-FFF2-40B4-BE49-F238E27FC236}">
+                <a16:creationId xmlns:a16="http://schemas.microsoft.com/office/drawing/2014/main" id="{0E08ECC2-5683-8F86-9279-189D393FEF05}"/>
+              </a:ext>
+            </a:extLst>
+          </p:cNvPr>
+          <p:cNvSpPr>
+            <a:spLocks noGrp="1"/>
+          </p:cNvSpPr>
+          <p:nvPr>
+            <p:ph type="sldNum" sz="quarter" idx="5"/>
+          </p:nvPr>
+        </p:nvSpPr>
+        <p:spPr/>
+        <p:txBody>
+          <a:bodyPr/>
+          <a:lstStyle/>
+          <a:p>
+            <a:fld id="{676223B9-C868-4436-87D9-1A3152E1157A}" type="slidenum">
+              <a:rPr lang="es-ES" smtClean="0"/>
+              <a:t>8</a:t>
+            </a:fld>
+            <a:endParaRPr lang="es-ES"/>
+          </a:p>
+        </p:txBody>
+      </p:sp>
+    </p:spTree>
+    <p:extLst>
+      <p:ext uri="{BB962C8B-B14F-4D97-AF65-F5344CB8AC3E}">
+        <p14:creationId xmlns:p14="http://schemas.microsoft.com/office/powerpoint/2010/main" val="587393117"/>
+      </p:ext>
+    </p:extLst>
+  </p:cSld>
+  <p:clrMapOvr>
+    <a:masterClrMapping/>
+  </p:clrMapOvr>
+</p:notes>
+</file>
+
+<file path=ppt/notesSlides/notesSlide7.xml><?xml version="1.0" encoding="utf-8"?>
+<p:notes xmlns:a="http://schemas.openxmlformats.org/drawingml/2006/main" xmlns:r="http://schemas.openxmlformats.org/officeDocument/2006/relationships" xmlns:p="http://schemas.openxmlformats.org/presentationml/2006/main">
+  <p:cSld>
+    <p:spTree>
+      <p:nvGrpSpPr>
+        <p:cNvPr id="1" name="">
+          <a:extLst>
+            <a:ext uri="{FF2B5EF4-FFF2-40B4-BE49-F238E27FC236}">
+              <a16:creationId xmlns:a16="http://schemas.microsoft.com/office/drawing/2014/main" id="{142AF91C-7F88-4795-C05E-160034E43B86}"/>
+            </a:ext>
+          </a:extLst>
+        </p:cNvPr>
+        <p:cNvGrpSpPr/>
+        <p:nvPr/>
+      </p:nvGrpSpPr>
+      <p:grpSpPr>
+        <a:xfrm>
+          <a:off x="0" y="0"/>
+          <a:ext cx="0" cy="0"/>
+          <a:chOff x="0" y="0"/>
+          <a:chExt cx="0" cy="0"/>
+        </a:xfrm>
+      </p:grpSpPr>
+      <p:sp>
+        <p:nvSpPr>
+          <p:cNvPr id="2" name="Marcador de imagen de diapositiva 1">
+            <a:extLst>
+              <a:ext uri="{FF2B5EF4-FFF2-40B4-BE49-F238E27FC236}">
+                <a16:creationId xmlns:a16="http://schemas.microsoft.com/office/drawing/2014/main" id="{6BB76315-4895-B8B0-D1B0-BA01F253DAEE}"/>
+              </a:ext>
+            </a:extLst>
+          </p:cNvPr>
+          <p:cNvSpPr>
+            <a:spLocks noGrp="1" noRot="1" noChangeAspect="1"/>
+          </p:cNvSpPr>
+          <p:nvPr>
+            <p:ph type="sldImg"/>
+          </p:nvPr>
+        </p:nvSpPr>
+        <p:spPr/>
+      </p:sp>
+      <p:sp>
+        <p:nvSpPr>
+          <p:cNvPr id="3" name="Marcador de notas 2">
+            <a:extLst>
+              <a:ext uri="{FF2B5EF4-FFF2-40B4-BE49-F238E27FC236}">
+                <a16:creationId xmlns:a16="http://schemas.microsoft.com/office/drawing/2014/main" id="{8A9CF1F5-7047-A41B-45A7-FC35D3AB48CA}"/>
+              </a:ext>
+            </a:extLst>
+          </p:cNvPr>
+          <p:cNvSpPr>
+            <a:spLocks noGrp="1"/>
+          </p:cNvSpPr>
+          <p:nvPr>
+            <p:ph type="body" idx="1"/>
+          </p:nvPr>
+        </p:nvSpPr>
+        <p:spPr/>
+        <p:txBody>
+          <a:bodyPr/>
+          <a:lstStyle/>
+          <a:p>
+            <a:endParaRPr lang="es-ES" dirty="0"/>
+          </a:p>
+        </p:txBody>
+      </p:sp>
+      <p:sp>
+        <p:nvSpPr>
+          <p:cNvPr id="4" name="Marcador de número de diapositiva 3">
+            <a:extLst>
+              <a:ext uri="{FF2B5EF4-FFF2-40B4-BE49-F238E27FC236}">
+                <a16:creationId xmlns:a16="http://schemas.microsoft.com/office/drawing/2014/main" id="{2F885087-D3DA-7F61-A2BB-AA7384F6B865}"/>
+              </a:ext>
+            </a:extLst>
+          </p:cNvPr>
+          <p:cNvSpPr>
+            <a:spLocks noGrp="1"/>
+          </p:cNvSpPr>
+          <p:nvPr>
+            <p:ph type="sldNum" sz="quarter" idx="5"/>
+          </p:nvPr>
+        </p:nvSpPr>
+        <p:spPr/>
+        <p:txBody>
+          <a:bodyPr/>
+          <a:lstStyle/>
+          <a:p>
+            <a:fld id="{676223B9-C868-4436-87D9-1A3152E1157A}" type="slidenum">
+              <a:rPr lang="es-ES" smtClean="0"/>
+              <a:t>9</a:t>
+            </a:fld>
+            <a:endParaRPr lang="es-ES"/>
+          </a:p>
+        </p:txBody>
+      </p:sp>
+    </p:spTree>
+    <p:extLst>
+      <p:ext uri="{BB962C8B-B14F-4D97-AF65-F5344CB8AC3E}">
+        <p14:creationId xmlns:p14="http://schemas.microsoft.com/office/powerpoint/2010/main" val="1113656582"/>
+      </p:ext>
+    </p:extLst>
+  </p:cSld>
+  <p:clrMapOvr>
+    <a:masterClrMapping/>
+  </p:clrMapOvr>
+</p:notes>
+</file>
+
+<file path=ppt/notesSlides/notesSlide8.xml><?xml version="1.0" encoding="utf-8"?>
+<p:notes xmlns:a="http://schemas.openxmlformats.org/drawingml/2006/main" xmlns:r="http://schemas.openxmlformats.org/officeDocument/2006/relationships" xmlns:p="http://schemas.openxmlformats.org/presentationml/2006/main">
+  <p:cSld>
+    <p:spTree>
+      <p:nvGrpSpPr>
+        <p:cNvPr id="1" name="">
+          <a:extLst>
+            <a:ext uri="{FF2B5EF4-FFF2-40B4-BE49-F238E27FC236}">
               <a16:creationId xmlns:a16="http://schemas.microsoft.com/office/drawing/2014/main" id="{4E3C5711-C157-AA5E-1EA1-9F4C3F40B90E}"/>
             </a:ext>
           </a:extLst>
@@ -891,7 +1545,7 @@
           <a:p>
             <a:fld id="{676223B9-C868-4436-87D9-1A3152E1157A}" type="slidenum">
               <a:rPr lang="es-ES" smtClean="0"/>
-              <a:t>4</a:t>
+              <a:t>10</a:t>
             </a:fld>
             <a:endParaRPr lang="es-ES"/>
           </a:p>
@@ -2502,6 +3156,1682 @@
 </p:sld>
 </file>
 
+<file path=ppt/slides/slide10.xml><?xml version="1.0" encoding="utf-8"?>
+<p:sld xmlns:a="http://schemas.openxmlformats.org/drawingml/2006/main" xmlns:r="http://schemas.openxmlformats.org/officeDocument/2006/relationships" xmlns:p="http://schemas.openxmlformats.org/presentationml/2006/main">
+  <p:cSld>
+    <p:spTree>
+      <p:nvGrpSpPr>
+        <p:cNvPr id="1" name="">
+          <a:extLst>
+            <a:ext uri="{FF2B5EF4-FFF2-40B4-BE49-F238E27FC236}">
+              <a16:creationId xmlns:a16="http://schemas.microsoft.com/office/drawing/2014/main" id="{371656EC-E197-239C-60DD-C11F7BA4B44A}"/>
+            </a:ext>
+          </a:extLst>
+        </p:cNvPr>
+        <p:cNvGrpSpPr/>
+        <p:nvPr/>
+      </p:nvGrpSpPr>
+      <p:grpSpPr>
+        <a:xfrm>
+          <a:off x="0" y="0"/>
+          <a:ext cx="0" cy="0"/>
+          <a:chOff x="0" y="0"/>
+          <a:chExt cx="0" cy="0"/>
+        </a:xfrm>
+      </p:grpSpPr>
+      <p:sp>
+        <p:nvSpPr>
+          <p:cNvPr id="16" name="object 16">
+            <a:extLst>
+              <a:ext uri="{FF2B5EF4-FFF2-40B4-BE49-F238E27FC236}">
+                <a16:creationId xmlns:a16="http://schemas.microsoft.com/office/drawing/2014/main" id="{5431EA70-9578-8BF1-5A05-77CDC26788B4}"/>
+              </a:ext>
+            </a:extLst>
+          </p:cNvPr>
+          <p:cNvSpPr txBox="1">
+            <a:spLocks noGrp="1"/>
+          </p:cNvSpPr>
+          <p:nvPr>
+            <p:ph type="title"/>
+          </p:nvPr>
+        </p:nvSpPr>
+        <p:spPr>
+          <a:xfrm>
+            <a:off x="685800" y="408883"/>
+            <a:ext cx="10994410" cy="705321"/>
+          </a:xfrm>
+          <a:prstGeom prst="rect">
+            <a:avLst/>
+          </a:prstGeom>
+        </p:spPr>
+        <p:txBody>
+          <a:bodyPr vert="horz" wrap="square" lIns="0" tIns="12700" rIns="0" bIns="0" rtlCol="0">
+            <a:spAutoFit/>
+          </a:bodyPr>
+          <a:lstStyle/>
+          <a:p>
+            <a:pPr marL="12700">
+              <a:lnSpc>
+                <a:spcPct val="100000"/>
+              </a:lnSpc>
+              <a:spcBef>
+                <a:spcPts val="100"/>
+              </a:spcBef>
+            </a:pPr>
+            <a:r>
+              <a:rPr lang="en-US" sz="2500" dirty="0"/>
+              <a:t>Learning outcome #2 – Wavelength behavior</a:t>
+            </a:r>
+            <a:br>
+              <a:rPr lang="es-ES" sz="2500" spc="-5" dirty="0">
+                <a:latin typeface="+mj-lt"/>
+                <a:cs typeface="Lucida Sans"/>
+              </a:rPr>
+            </a:br>
+            <a:r>
+              <a:rPr lang="en-US" b="0" dirty="0"/>
+              <a:t>Wavelength 1.5-1.6 µm (step 0.02 µm) – width 1.2 µm</a:t>
+            </a:r>
+            <a:endParaRPr sz="2500" b="0" dirty="0">
+              <a:latin typeface="+mj-lt"/>
+              <a:cs typeface="Lucida Sans"/>
+            </a:endParaRPr>
+          </a:p>
+        </p:txBody>
+      </p:sp>
+      <p:pic>
+        <p:nvPicPr>
+          <p:cNvPr id="83" name="Gráfico 82">
+            <a:extLst>
+              <a:ext uri="{FF2B5EF4-FFF2-40B4-BE49-F238E27FC236}">
+                <a16:creationId xmlns:a16="http://schemas.microsoft.com/office/drawing/2014/main" id="{B6A02C28-9CC3-6E88-B695-04A48E5FDEAC}"/>
+              </a:ext>
+            </a:extLst>
+          </p:cNvPr>
+          <p:cNvPicPr>
+            <a:picLocks noChangeAspect="1"/>
+          </p:cNvPicPr>
+          <p:nvPr/>
+        </p:nvPicPr>
+        <p:blipFill>
+          <a:blip r:embed="rId3">
+            <a:extLst>
+              <a:ext uri="{96DAC541-7B7A-43D3-8B79-37D633B846F1}">
+                <asvg:svgBlip xmlns:asvg="http://schemas.microsoft.com/office/drawing/2016/SVG/main" r:embed="rId4"/>
+              </a:ext>
+            </a:extLst>
+          </a:blip>
+          <a:stretch>
+            <a:fillRect/>
+          </a:stretch>
+        </p:blipFill>
+        <p:spPr>
+          <a:xfrm>
+            <a:off x="5045006" y="6356057"/>
+            <a:ext cx="6409575" cy="363174"/>
+          </a:xfrm>
+          <a:prstGeom prst="rect">
+            <a:avLst/>
+          </a:prstGeom>
+        </p:spPr>
+      </p:pic>
+      <p:sp>
+        <p:nvSpPr>
+          <p:cNvPr id="84" name="Marcador de número de diapositiva 83">
+            <a:extLst>
+              <a:ext uri="{FF2B5EF4-FFF2-40B4-BE49-F238E27FC236}">
+                <a16:creationId xmlns:a16="http://schemas.microsoft.com/office/drawing/2014/main" id="{FB7F118F-AD79-0ED0-CE53-A8EE4409B4F8}"/>
+              </a:ext>
+            </a:extLst>
+          </p:cNvPr>
+          <p:cNvSpPr>
+            <a:spLocks noGrp="1"/>
+          </p:cNvSpPr>
+          <p:nvPr>
+            <p:ph type="sldNum" sz="quarter" idx="7"/>
+          </p:nvPr>
+        </p:nvSpPr>
+        <p:spPr/>
+        <p:txBody>
+          <a:bodyPr/>
+          <a:lstStyle/>
+          <a:p>
+            <a:fld id="{B6F15528-21DE-4FAA-801E-634DDDAF4B2B}" type="slidenum">
+              <a:rPr lang="es-ES" smtClean="0"/>
+              <a:t>10</a:t>
+            </a:fld>
+            <a:endParaRPr lang="es-ES"/>
+          </a:p>
+        </p:txBody>
+      </p:sp>
+      <p:sp>
+        <p:nvSpPr>
+          <p:cNvPr id="3" name="Marcador de pie de página 2">
+            <a:extLst>
+              <a:ext uri="{FF2B5EF4-FFF2-40B4-BE49-F238E27FC236}">
+                <a16:creationId xmlns:a16="http://schemas.microsoft.com/office/drawing/2014/main" id="{10846C9D-3FE3-8524-3349-96E1AD1712B3}"/>
+              </a:ext>
+            </a:extLst>
+          </p:cNvPr>
+          <p:cNvSpPr>
+            <a:spLocks noGrp="1"/>
+          </p:cNvSpPr>
+          <p:nvPr>
+            <p:ph type="ftr" sz="quarter" idx="5"/>
+          </p:nvPr>
+        </p:nvSpPr>
+        <p:spPr/>
+        <p:txBody>
+          <a:bodyPr/>
+          <a:lstStyle/>
+          <a:p>
+            <a:pPr marL="12700">
+              <a:spcBef>
+                <a:spcPts val="15"/>
+              </a:spcBef>
+            </a:pPr>
+            <a:r>
+              <a:rPr lang="es-ES" spc="-5" dirty="0"/>
+              <a:t>LAB 0.1. MODESOLVER</a:t>
+            </a:r>
+          </a:p>
+        </p:txBody>
+      </p:sp>
+      <p:sp>
+        <p:nvSpPr>
+          <p:cNvPr id="2" name="CuadroTexto 1">
+            <a:extLst>
+              <a:ext uri="{FF2B5EF4-FFF2-40B4-BE49-F238E27FC236}">
+                <a16:creationId xmlns:a16="http://schemas.microsoft.com/office/drawing/2014/main" id="{CA5F0FDF-2A95-453B-4ECA-AEB637FF2694}"/>
+              </a:ext>
+            </a:extLst>
+          </p:cNvPr>
+          <p:cNvSpPr txBox="1"/>
+          <p:nvPr/>
+        </p:nvSpPr>
+        <p:spPr>
+          <a:xfrm>
+            <a:off x="625605" y="4904218"/>
+            <a:ext cx="11199971" cy="2677656"/>
+          </a:xfrm>
+          <a:prstGeom prst="rect">
+            <a:avLst/>
+          </a:prstGeom>
+          <a:solidFill>
+            <a:schemeClr val="bg1">
+              <a:lumMod val="95000"/>
+            </a:schemeClr>
+          </a:solidFill>
+          <a:ln w="28575">
+            <a:solidFill>
+              <a:srgbClr val="E0700D"/>
+            </a:solidFill>
+          </a:ln>
+        </p:spPr>
+        <p:txBody>
+          <a:bodyPr wrap="square" rtlCol="0">
+            <a:spAutoFit/>
+          </a:bodyPr>
+          <a:lstStyle/>
+          <a:p>
+            <a:pPr algn="just"/>
+            <a:endParaRPr lang="en-US" sz="1200" dirty="0">
+              <a:latin typeface="Arial" panose="020B0604020202020204" pitchFamily="34" charset="0"/>
+              <a:cs typeface="Arial" panose="020B0604020202020204" pitchFamily="34" charset="0"/>
+            </a:endParaRPr>
+          </a:p>
+          <a:p>
+            <a:pPr algn="just"/>
+            <a:r>
+              <a:rPr lang="en-US" sz="1200" dirty="0">
+                <a:latin typeface="Arial" panose="020B0604020202020204" pitchFamily="34" charset="0"/>
+                <a:cs typeface="Arial" panose="020B0604020202020204" pitchFamily="34" charset="0"/>
+              </a:rPr>
+              <a:t>Deep Waveguide. </a:t>
+            </a:r>
+          </a:p>
+          <a:p>
+            <a:pPr algn="just"/>
+            <a:r>
+              <a:rPr lang="en-US" sz="1200" dirty="0">
+                <a:latin typeface="Arial" panose="020B0604020202020204" pitchFamily="34" charset="0"/>
+                <a:cs typeface="Arial" panose="020B0604020202020204" pitchFamily="34" charset="0"/>
+              </a:rPr>
+              <a:t>En </a:t>
+            </a:r>
+            <a:r>
+              <a:rPr lang="en-US" sz="1200" dirty="0" err="1">
+                <a:latin typeface="Arial" panose="020B0604020202020204" pitchFamily="34" charset="0"/>
+                <a:cs typeface="Arial" panose="020B0604020202020204" pitchFamily="34" charset="0"/>
+              </a:rPr>
+              <a:t>el</a:t>
+            </a:r>
+            <a:r>
+              <a:rPr lang="en-US" sz="1200" dirty="0">
+                <a:latin typeface="Arial" panose="020B0604020202020204" pitchFamily="34" charset="0"/>
+                <a:cs typeface="Arial" panose="020B0604020202020204" pitchFamily="34" charset="0"/>
+              </a:rPr>
+              <a:t> </a:t>
+            </a:r>
+            <a:r>
+              <a:rPr lang="en-US" sz="1200" dirty="0" err="1">
+                <a:latin typeface="Arial" panose="020B0604020202020204" pitchFamily="34" charset="0"/>
+                <a:cs typeface="Arial" panose="020B0604020202020204" pitchFamily="34" charset="0"/>
+              </a:rPr>
+              <a:t>que</a:t>
+            </a:r>
+            <a:r>
+              <a:rPr lang="en-US" sz="1200" dirty="0">
+                <a:latin typeface="Arial" panose="020B0604020202020204" pitchFamily="34" charset="0"/>
+                <a:cs typeface="Arial" panose="020B0604020202020204" pitchFamily="34" charset="0"/>
+              </a:rPr>
+              <a:t> no </a:t>
+            </a:r>
+            <a:r>
+              <a:rPr lang="en-US" sz="1200" dirty="0" err="1">
+                <a:latin typeface="Arial" panose="020B0604020202020204" pitchFamily="34" charset="0"/>
+                <a:cs typeface="Arial" panose="020B0604020202020204" pitchFamily="34" charset="0"/>
+              </a:rPr>
+              <a:t>tiene</a:t>
+            </a:r>
+            <a:r>
+              <a:rPr lang="en-US" sz="1200" dirty="0">
+                <a:latin typeface="Arial" panose="020B0604020202020204" pitchFamily="34" charset="0"/>
+                <a:cs typeface="Arial" panose="020B0604020202020204" pitchFamily="34" charset="0"/>
+              </a:rPr>
+              <a:t> slab se </a:t>
+            </a:r>
+            <a:r>
+              <a:rPr lang="en-US" sz="1200" dirty="0" err="1">
+                <a:latin typeface="Arial" panose="020B0604020202020204" pitchFamily="34" charset="0"/>
+                <a:cs typeface="Arial" panose="020B0604020202020204" pitchFamily="34" charset="0"/>
+              </a:rPr>
+              <a:t>propagan</a:t>
+            </a:r>
+            <a:r>
+              <a:rPr lang="en-US" sz="1200" dirty="0">
+                <a:latin typeface="Arial" panose="020B0604020202020204" pitchFamily="34" charset="0"/>
+                <a:cs typeface="Arial" panose="020B0604020202020204" pitchFamily="34" charset="0"/>
+              </a:rPr>
+              <a:t> dos </a:t>
+            </a:r>
+            <a:r>
+              <a:rPr lang="en-US" sz="1200" dirty="0" err="1">
+                <a:latin typeface="Arial" panose="020B0604020202020204" pitchFamily="34" charset="0"/>
+                <a:cs typeface="Arial" panose="020B0604020202020204" pitchFamily="34" charset="0"/>
+              </a:rPr>
+              <a:t>modos</a:t>
+            </a:r>
+            <a:r>
+              <a:rPr lang="en-US" sz="1200" dirty="0">
+                <a:latin typeface="Arial" panose="020B0604020202020204" pitchFamily="34" charset="0"/>
+                <a:cs typeface="Arial" panose="020B0604020202020204" pitchFamily="34" charset="0"/>
+              </a:rPr>
+              <a:t>, </a:t>
+            </a:r>
+            <a:r>
+              <a:rPr lang="en-US" sz="1200" dirty="0" err="1">
+                <a:latin typeface="Arial" panose="020B0604020202020204" pitchFamily="34" charset="0"/>
+                <a:cs typeface="Arial" panose="020B0604020202020204" pitchFamily="34" charset="0"/>
+              </a:rPr>
+              <a:t>ya</a:t>
+            </a:r>
+            <a:r>
+              <a:rPr lang="en-US" sz="1200" dirty="0">
+                <a:latin typeface="Arial" panose="020B0604020202020204" pitchFamily="34" charset="0"/>
+                <a:cs typeface="Arial" panose="020B0604020202020204" pitchFamily="34" charset="0"/>
+              </a:rPr>
+              <a:t> </a:t>
+            </a:r>
+            <a:r>
+              <a:rPr lang="en-US" sz="1200" dirty="0" err="1">
+                <a:latin typeface="Arial" panose="020B0604020202020204" pitchFamily="34" charset="0"/>
+                <a:cs typeface="Arial" panose="020B0604020202020204" pitchFamily="34" charset="0"/>
+              </a:rPr>
+              <a:t>que</a:t>
+            </a:r>
+            <a:r>
+              <a:rPr lang="en-US" sz="1200" dirty="0">
+                <a:latin typeface="Arial" panose="020B0604020202020204" pitchFamily="34" charset="0"/>
+                <a:cs typeface="Arial" panose="020B0604020202020204" pitchFamily="34" charset="0"/>
+              </a:rPr>
+              <a:t> </a:t>
+            </a:r>
+            <a:r>
+              <a:rPr lang="en-US" sz="1200" dirty="0" err="1">
+                <a:latin typeface="Arial" panose="020B0604020202020204" pitchFamily="34" charset="0"/>
+                <a:cs typeface="Arial" panose="020B0604020202020204" pitchFamily="34" charset="0"/>
+              </a:rPr>
+              <a:t>los</a:t>
+            </a:r>
+            <a:r>
+              <a:rPr lang="en-US" sz="1200" dirty="0">
+                <a:latin typeface="Arial" panose="020B0604020202020204" pitchFamily="34" charset="0"/>
+                <a:cs typeface="Arial" panose="020B0604020202020204" pitchFamily="34" charset="0"/>
+              </a:rPr>
+              <a:t> </a:t>
+            </a:r>
+            <a:r>
+              <a:rPr lang="en-US" sz="1200" dirty="0" err="1">
+                <a:latin typeface="Arial" panose="020B0604020202020204" pitchFamily="34" charset="0"/>
+                <a:cs typeface="Arial" panose="020B0604020202020204" pitchFamily="34" charset="0"/>
+              </a:rPr>
+              <a:t>que</a:t>
+            </a:r>
+            <a:r>
+              <a:rPr lang="en-US" sz="1200" dirty="0">
+                <a:latin typeface="Arial" panose="020B0604020202020204" pitchFamily="34" charset="0"/>
+                <a:cs typeface="Arial" panose="020B0604020202020204" pitchFamily="34" charset="0"/>
+              </a:rPr>
+              <a:t> </a:t>
+            </a:r>
+            <a:r>
+              <a:rPr lang="en-US" sz="1200" dirty="0" err="1">
+                <a:latin typeface="Arial" panose="020B0604020202020204" pitchFamily="34" charset="0"/>
+                <a:cs typeface="Arial" panose="020B0604020202020204" pitchFamily="34" charset="0"/>
+              </a:rPr>
+              <a:t>estén</a:t>
+            </a:r>
+            <a:r>
+              <a:rPr lang="en-US" sz="1200" dirty="0">
+                <a:latin typeface="Arial" panose="020B0604020202020204" pitchFamily="34" charset="0"/>
+                <a:cs typeface="Arial" panose="020B0604020202020204" pitchFamily="34" charset="0"/>
+              </a:rPr>
+              <a:t> </a:t>
+            </a:r>
+            <a:r>
+              <a:rPr lang="en-US" sz="1200" dirty="0" err="1">
+                <a:latin typeface="Arial" panose="020B0604020202020204" pitchFamily="34" charset="0"/>
+                <a:cs typeface="Arial" panose="020B0604020202020204" pitchFamily="34" charset="0"/>
+              </a:rPr>
+              <a:t>por</a:t>
+            </a:r>
+            <a:r>
+              <a:rPr lang="en-US" sz="1200" dirty="0">
+                <a:latin typeface="Arial" panose="020B0604020202020204" pitchFamily="34" charset="0"/>
+                <a:cs typeface="Arial" panose="020B0604020202020204" pitchFamily="34" charset="0"/>
+              </a:rPr>
+              <a:t> </a:t>
+            </a:r>
+            <a:r>
+              <a:rPr lang="en-US" sz="1200" dirty="0" err="1">
+                <a:latin typeface="Arial" panose="020B0604020202020204" pitchFamily="34" charset="0"/>
+                <a:cs typeface="Arial" panose="020B0604020202020204" pitchFamily="34" charset="0"/>
+              </a:rPr>
+              <a:t>debajo</a:t>
+            </a:r>
+            <a:r>
+              <a:rPr lang="en-US" sz="1200" dirty="0">
+                <a:latin typeface="Arial" panose="020B0604020202020204" pitchFamily="34" charset="0"/>
+                <a:cs typeface="Arial" panose="020B0604020202020204" pitchFamily="34" charset="0"/>
+              </a:rPr>
+              <a:t> del </a:t>
+            </a:r>
+            <a:r>
+              <a:rPr lang="en-US" sz="1200" dirty="0" err="1">
+                <a:latin typeface="Arial" panose="020B0604020202020204" pitchFamily="34" charset="0"/>
+                <a:cs typeface="Arial" panose="020B0604020202020204" pitchFamily="34" charset="0"/>
+              </a:rPr>
+              <a:t>índice</a:t>
+            </a:r>
+            <a:r>
+              <a:rPr lang="en-US" sz="1200" dirty="0">
+                <a:latin typeface="Arial" panose="020B0604020202020204" pitchFamily="34" charset="0"/>
+                <a:cs typeface="Arial" panose="020B0604020202020204" pitchFamily="34" charset="0"/>
+              </a:rPr>
+              <a:t> de la </a:t>
+            </a:r>
+            <a:r>
+              <a:rPr lang="en-US" sz="1200" dirty="0" err="1">
+                <a:latin typeface="Arial" panose="020B0604020202020204" pitchFamily="34" charset="0"/>
+                <a:cs typeface="Arial" panose="020B0604020202020204" pitchFamily="34" charset="0"/>
+              </a:rPr>
+              <a:t>cubierta</a:t>
+            </a:r>
+            <a:r>
+              <a:rPr lang="en-US" sz="1200" dirty="0">
+                <a:latin typeface="Arial" panose="020B0604020202020204" pitchFamily="34" charset="0"/>
+                <a:cs typeface="Arial" panose="020B0604020202020204" pitchFamily="34" charset="0"/>
+              </a:rPr>
+              <a:t>. </a:t>
+            </a:r>
+          </a:p>
+          <a:p>
+            <a:pPr algn="just"/>
+            <a:r>
+              <a:rPr lang="en-US" sz="1200" dirty="0">
+                <a:latin typeface="Arial" panose="020B0604020202020204" pitchFamily="34" charset="0"/>
+                <a:cs typeface="Arial" panose="020B0604020202020204" pitchFamily="34" charset="0"/>
+              </a:rPr>
+              <a:t>El primer modo es TE y </a:t>
+            </a:r>
+            <a:r>
+              <a:rPr lang="en-US" sz="1200" dirty="0" err="1">
+                <a:latin typeface="Arial" panose="020B0604020202020204" pitchFamily="34" charset="0"/>
+                <a:cs typeface="Arial" panose="020B0604020202020204" pitchFamily="34" charset="0"/>
+              </a:rPr>
+              <a:t>el</a:t>
+            </a:r>
+            <a:r>
+              <a:rPr lang="en-US" sz="1200" dirty="0">
+                <a:latin typeface="Arial" panose="020B0604020202020204" pitchFamily="34" charset="0"/>
+                <a:cs typeface="Arial" panose="020B0604020202020204" pitchFamily="34" charset="0"/>
+              </a:rPr>
+              <a:t> </a:t>
+            </a:r>
+            <a:r>
+              <a:rPr lang="en-US" sz="1200" dirty="0" err="1">
+                <a:latin typeface="Arial" panose="020B0604020202020204" pitchFamily="34" charset="0"/>
+                <a:cs typeface="Arial" panose="020B0604020202020204" pitchFamily="34" charset="0"/>
+              </a:rPr>
+              <a:t>segundo</a:t>
+            </a:r>
+            <a:r>
+              <a:rPr lang="en-US" sz="1200" dirty="0">
+                <a:latin typeface="Arial" panose="020B0604020202020204" pitchFamily="34" charset="0"/>
+                <a:cs typeface="Arial" panose="020B0604020202020204" pitchFamily="34" charset="0"/>
+              </a:rPr>
+              <a:t> TM.</a:t>
+            </a:r>
+          </a:p>
+          <a:p>
+            <a:pPr algn="just"/>
+            <a:r>
+              <a:rPr lang="en-US" sz="1200" dirty="0">
+                <a:latin typeface="Arial" panose="020B0604020202020204" pitchFamily="34" charset="0"/>
+                <a:cs typeface="Arial" panose="020B0604020202020204" pitchFamily="34" charset="0"/>
+              </a:rPr>
+              <a:t>Si </a:t>
+            </a:r>
+            <a:r>
+              <a:rPr lang="en-US" sz="1200" dirty="0" err="1">
+                <a:latin typeface="Arial" panose="020B0604020202020204" pitchFamily="34" charset="0"/>
+                <a:cs typeface="Arial" panose="020B0604020202020204" pitchFamily="34" charset="0"/>
+              </a:rPr>
+              <a:t>yo</a:t>
+            </a:r>
+            <a:r>
+              <a:rPr lang="en-US" sz="1200" dirty="0">
+                <a:latin typeface="Arial" panose="020B0604020202020204" pitchFamily="34" charset="0"/>
+                <a:cs typeface="Arial" panose="020B0604020202020204" pitchFamily="34" charset="0"/>
+              </a:rPr>
+              <a:t> </a:t>
+            </a:r>
+            <a:r>
+              <a:rPr lang="en-US" sz="1200" dirty="0" err="1">
+                <a:latin typeface="Arial" panose="020B0604020202020204" pitchFamily="34" charset="0"/>
+                <a:cs typeface="Arial" panose="020B0604020202020204" pitchFamily="34" charset="0"/>
+              </a:rPr>
+              <a:t>tuviera</a:t>
+            </a:r>
+            <a:r>
+              <a:rPr lang="en-US" sz="1200" dirty="0">
+                <a:latin typeface="Arial" panose="020B0604020202020204" pitchFamily="34" charset="0"/>
+                <a:cs typeface="Arial" panose="020B0604020202020204" pitchFamily="34" charset="0"/>
+              </a:rPr>
+              <a:t> </a:t>
+            </a:r>
+            <a:r>
+              <a:rPr lang="en-US" sz="1200" dirty="0" err="1">
+                <a:latin typeface="Arial" panose="020B0604020202020204" pitchFamily="34" charset="0"/>
+                <a:cs typeface="Arial" panose="020B0604020202020204" pitchFamily="34" charset="0"/>
+              </a:rPr>
+              <a:t>alguna</a:t>
+            </a:r>
+            <a:r>
+              <a:rPr lang="en-US" sz="1200" dirty="0">
+                <a:latin typeface="Arial" panose="020B0604020202020204" pitchFamily="34" charset="0"/>
+                <a:cs typeface="Arial" panose="020B0604020202020204" pitchFamily="34" charset="0"/>
+              </a:rPr>
+              <a:t> forma de </a:t>
+            </a:r>
+            <a:r>
+              <a:rPr lang="en-US" sz="1200" dirty="0" err="1">
+                <a:latin typeface="Arial" panose="020B0604020202020204" pitchFamily="34" charset="0"/>
+                <a:cs typeface="Arial" panose="020B0604020202020204" pitchFamily="34" charset="0"/>
+              </a:rPr>
+              <a:t>filtrar</a:t>
+            </a:r>
+            <a:r>
+              <a:rPr lang="en-US" sz="1200" dirty="0">
+                <a:latin typeface="Arial" panose="020B0604020202020204" pitchFamily="34" charset="0"/>
+                <a:cs typeface="Arial" panose="020B0604020202020204" pitchFamily="34" charset="0"/>
+              </a:rPr>
+              <a:t> la </a:t>
+            </a:r>
+            <a:r>
+              <a:rPr lang="en-US" sz="1200" dirty="0" err="1">
+                <a:latin typeface="Arial" panose="020B0604020202020204" pitchFamily="34" charset="0"/>
+                <a:cs typeface="Arial" panose="020B0604020202020204" pitchFamily="34" charset="0"/>
+              </a:rPr>
+              <a:t>polarización</a:t>
+            </a:r>
+            <a:r>
+              <a:rPr lang="en-US" sz="1200" dirty="0">
+                <a:latin typeface="Arial" panose="020B0604020202020204" pitchFamily="34" charset="0"/>
+                <a:cs typeface="Arial" panose="020B0604020202020204" pitchFamily="34" charset="0"/>
+              </a:rPr>
+              <a:t> a la entrada del </a:t>
+            </a:r>
+            <a:r>
+              <a:rPr lang="en-US" sz="1200" dirty="0" err="1">
+                <a:latin typeface="Arial" panose="020B0604020202020204" pitchFamily="34" charset="0"/>
+                <a:cs typeface="Arial" panose="020B0604020202020204" pitchFamily="34" charset="0"/>
+              </a:rPr>
+              <a:t>circuito</a:t>
+            </a:r>
+            <a:r>
+              <a:rPr lang="en-US" sz="1200" dirty="0">
+                <a:latin typeface="Arial" panose="020B0604020202020204" pitchFamily="34" charset="0"/>
+                <a:cs typeface="Arial" panose="020B0604020202020204" pitchFamily="34" charset="0"/>
+              </a:rPr>
+              <a:t> </a:t>
+            </a:r>
+            <a:r>
+              <a:rPr lang="en-US" sz="1200" dirty="0" err="1">
+                <a:latin typeface="Arial" panose="020B0604020202020204" pitchFamily="34" charset="0"/>
+                <a:cs typeface="Arial" panose="020B0604020202020204" pitchFamily="34" charset="0"/>
+              </a:rPr>
+              <a:t>entonces</a:t>
+            </a:r>
+            <a:r>
+              <a:rPr lang="en-US" sz="1200" dirty="0">
+                <a:latin typeface="Arial" panose="020B0604020202020204" pitchFamily="34" charset="0"/>
+                <a:cs typeface="Arial" panose="020B0604020202020204" pitchFamily="34" charset="0"/>
+              </a:rPr>
+              <a:t> </a:t>
+            </a:r>
+            <a:r>
+              <a:rPr lang="en-US" sz="1200" dirty="0" err="1">
+                <a:latin typeface="Arial" panose="020B0604020202020204" pitchFamily="34" charset="0"/>
+                <a:cs typeface="Arial" panose="020B0604020202020204" pitchFamily="34" charset="0"/>
+              </a:rPr>
+              <a:t>esa</a:t>
+            </a:r>
+            <a:r>
+              <a:rPr lang="en-US" sz="1200" dirty="0">
+                <a:latin typeface="Arial" panose="020B0604020202020204" pitchFamily="34" charset="0"/>
+                <a:cs typeface="Arial" panose="020B0604020202020204" pitchFamily="34" charset="0"/>
+              </a:rPr>
+              <a:t> </a:t>
+            </a:r>
+            <a:r>
+              <a:rPr lang="en-US" sz="1200" dirty="0" err="1">
+                <a:latin typeface="Arial" panose="020B0604020202020204" pitchFamily="34" charset="0"/>
+                <a:cs typeface="Arial" panose="020B0604020202020204" pitchFamily="34" charset="0"/>
+              </a:rPr>
+              <a:t>guía</a:t>
+            </a:r>
+            <a:r>
+              <a:rPr lang="en-US" sz="1200" dirty="0">
+                <a:latin typeface="Arial" panose="020B0604020202020204" pitchFamily="34" charset="0"/>
+                <a:cs typeface="Arial" panose="020B0604020202020204" pitchFamily="34" charset="0"/>
+              </a:rPr>
+              <a:t> </a:t>
+            </a:r>
+            <a:r>
+              <a:rPr lang="en-US" sz="1200" dirty="0" err="1">
+                <a:latin typeface="Arial" panose="020B0604020202020204" pitchFamily="34" charset="0"/>
+                <a:cs typeface="Arial" panose="020B0604020202020204" pitchFamily="34" charset="0"/>
+              </a:rPr>
+              <a:t>sería</a:t>
+            </a:r>
+            <a:r>
+              <a:rPr lang="en-US" sz="1200" dirty="0">
+                <a:latin typeface="Arial" panose="020B0604020202020204" pitchFamily="34" charset="0"/>
+                <a:cs typeface="Arial" panose="020B0604020202020204" pitchFamily="34" charset="0"/>
+              </a:rPr>
+              <a:t> </a:t>
+            </a:r>
+            <a:r>
+              <a:rPr lang="en-US" sz="1200" dirty="0" err="1">
+                <a:latin typeface="Arial" panose="020B0604020202020204" pitchFamily="34" charset="0"/>
+                <a:cs typeface="Arial" panose="020B0604020202020204" pitchFamily="34" charset="0"/>
+              </a:rPr>
+              <a:t>monomodo</a:t>
+            </a:r>
+            <a:r>
+              <a:rPr lang="en-US" sz="1200" dirty="0">
+                <a:latin typeface="Arial" panose="020B0604020202020204" pitchFamily="34" charset="0"/>
+                <a:cs typeface="Arial" panose="020B0604020202020204" pitchFamily="34" charset="0"/>
+              </a:rPr>
+              <a:t>. </a:t>
+            </a:r>
+          </a:p>
+          <a:p>
+            <a:pPr algn="just"/>
+            <a:r>
+              <a:rPr lang="en-US" sz="1200" dirty="0">
+                <a:latin typeface="Arial" panose="020B0604020202020204" pitchFamily="34" charset="0"/>
+                <a:cs typeface="Arial" panose="020B0604020202020204" pitchFamily="34" charset="0"/>
+              </a:rPr>
+              <a:t>Es </a:t>
+            </a:r>
+            <a:r>
+              <a:rPr lang="en-US" sz="1200" dirty="0" err="1">
+                <a:latin typeface="Arial" panose="020B0604020202020204" pitchFamily="34" charset="0"/>
+                <a:cs typeface="Arial" panose="020B0604020202020204" pitchFamily="34" charset="0"/>
+              </a:rPr>
+              <a:t>una</a:t>
+            </a:r>
+            <a:r>
+              <a:rPr lang="en-US" sz="1200" dirty="0">
+                <a:latin typeface="Arial" panose="020B0604020202020204" pitchFamily="34" charset="0"/>
+                <a:cs typeface="Arial" panose="020B0604020202020204" pitchFamily="34" charset="0"/>
+              </a:rPr>
+              <a:t> </a:t>
+            </a:r>
+            <a:r>
+              <a:rPr lang="en-US" sz="1200" dirty="0" err="1">
+                <a:latin typeface="Arial" panose="020B0604020202020204" pitchFamily="34" charset="0"/>
+                <a:cs typeface="Arial" panose="020B0604020202020204" pitchFamily="34" charset="0"/>
+              </a:rPr>
+              <a:t>guia</a:t>
+            </a:r>
+            <a:r>
+              <a:rPr lang="en-US" sz="1200" dirty="0">
+                <a:latin typeface="Arial" panose="020B0604020202020204" pitchFamily="34" charset="0"/>
+                <a:cs typeface="Arial" panose="020B0604020202020204" pitchFamily="34" charset="0"/>
+              </a:rPr>
+              <a:t> </a:t>
+            </a:r>
+            <a:r>
+              <a:rPr lang="en-US" sz="1200" dirty="0" err="1">
+                <a:latin typeface="Arial" panose="020B0604020202020204" pitchFamily="34" charset="0"/>
+                <a:cs typeface="Arial" panose="020B0604020202020204" pitchFamily="34" charset="0"/>
+              </a:rPr>
+              <a:t>monomodo</a:t>
+            </a:r>
+            <a:r>
+              <a:rPr lang="en-US" sz="1200" dirty="0">
+                <a:latin typeface="Arial" panose="020B0604020202020204" pitchFamily="34" charset="0"/>
+                <a:cs typeface="Arial" panose="020B0604020202020204" pitchFamily="34" charset="0"/>
+              </a:rPr>
+              <a:t>. </a:t>
+            </a:r>
+            <a:r>
+              <a:rPr lang="en-US" sz="1200" dirty="0" err="1">
+                <a:latin typeface="Arial" panose="020B0604020202020204" pitchFamily="34" charset="0"/>
+                <a:cs typeface="Arial" panose="020B0604020202020204" pitchFamily="34" charset="0"/>
+              </a:rPr>
+              <a:t>Podria</a:t>
+            </a:r>
+            <a:r>
+              <a:rPr lang="en-US" sz="1200" dirty="0">
+                <a:latin typeface="Arial" panose="020B0604020202020204" pitchFamily="34" charset="0"/>
+                <a:cs typeface="Arial" panose="020B0604020202020204" pitchFamily="34" charset="0"/>
+              </a:rPr>
+              <a:t> ser </a:t>
+            </a:r>
+            <a:r>
+              <a:rPr lang="en-US" sz="1200" dirty="0" err="1">
+                <a:latin typeface="Arial" panose="020B0604020202020204" pitchFamily="34" charset="0"/>
+                <a:cs typeface="Arial" panose="020B0604020202020204" pitchFamily="34" charset="0"/>
+              </a:rPr>
+              <a:t>monomodo</a:t>
+            </a:r>
+            <a:r>
+              <a:rPr lang="en-US" sz="1200" dirty="0">
+                <a:latin typeface="Arial" panose="020B0604020202020204" pitchFamily="34" charset="0"/>
+                <a:cs typeface="Arial" panose="020B0604020202020204" pitchFamily="34" charset="0"/>
+              </a:rPr>
+              <a:t> TE o </a:t>
+            </a:r>
+            <a:r>
+              <a:rPr lang="en-US" sz="1200" dirty="0" err="1">
+                <a:latin typeface="Arial" panose="020B0604020202020204" pitchFamily="34" charset="0"/>
+                <a:cs typeface="Arial" panose="020B0604020202020204" pitchFamily="34" charset="0"/>
+              </a:rPr>
+              <a:t>monomodo</a:t>
+            </a:r>
+            <a:r>
+              <a:rPr lang="en-US" sz="1200" dirty="0">
+                <a:latin typeface="Arial" panose="020B0604020202020204" pitchFamily="34" charset="0"/>
+                <a:cs typeface="Arial" panose="020B0604020202020204" pitchFamily="34" charset="0"/>
+              </a:rPr>
+              <a:t> TM y </a:t>
+            </a:r>
+            <a:r>
+              <a:rPr lang="en-US" sz="1200" dirty="0" err="1">
+                <a:latin typeface="Arial" panose="020B0604020202020204" pitchFamily="34" charset="0"/>
+                <a:cs typeface="Arial" panose="020B0604020202020204" pitchFamily="34" charset="0"/>
+              </a:rPr>
+              <a:t>propagaríamos</a:t>
+            </a:r>
+            <a:r>
+              <a:rPr lang="en-US" sz="1200" dirty="0">
+                <a:latin typeface="Arial" panose="020B0604020202020204" pitchFamily="34" charset="0"/>
+                <a:cs typeface="Arial" panose="020B0604020202020204" pitchFamily="34" charset="0"/>
+              </a:rPr>
+              <a:t> </a:t>
+            </a:r>
+            <a:r>
+              <a:rPr lang="en-US" sz="1200" dirty="0" err="1">
+                <a:latin typeface="Arial" panose="020B0604020202020204" pitchFamily="34" charset="0"/>
+                <a:cs typeface="Arial" panose="020B0604020202020204" pitchFamily="34" charset="0"/>
+              </a:rPr>
+              <a:t>el</a:t>
+            </a:r>
+            <a:r>
+              <a:rPr lang="en-US" sz="1200" dirty="0">
+                <a:latin typeface="Arial" panose="020B0604020202020204" pitchFamily="34" charset="0"/>
+                <a:cs typeface="Arial" panose="020B0604020202020204" pitchFamily="34" charset="0"/>
+              </a:rPr>
+              <a:t> modo de </a:t>
+            </a:r>
+            <a:r>
+              <a:rPr lang="en-US" sz="1200" dirty="0" err="1">
+                <a:latin typeface="Arial" panose="020B0604020202020204" pitchFamily="34" charset="0"/>
+                <a:cs typeface="Arial" panose="020B0604020202020204" pitchFamily="34" charset="0"/>
+              </a:rPr>
+              <a:t>orden</a:t>
+            </a:r>
+            <a:r>
+              <a:rPr lang="en-US" sz="1200" dirty="0">
+                <a:latin typeface="Arial" panose="020B0604020202020204" pitchFamily="34" charset="0"/>
+                <a:cs typeface="Arial" panose="020B0604020202020204" pitchFamily="34" charset="0"/>
+              </a:rPr>
+              <a:t> 0 </a:t>
+            </a:r>
+            <a:r>
+              <a:rPr lang="en-US" sz="1200" dirty="0" err="1">
+                <a:latin typeface="Arial" panose="020B0604020202020204" pitchFamily="34" charset="0"/>
+                <a:cs typeface="Arial" panose="020B0604020202020204" pitchFamily="34" charset="0"/>
+              </a:rPr>
+              <a:t>en</a:t>
+            </a:r>
+            <a:r>
+              <a:rPr lang="en-US" sz="1200" dirty="0">
+                <a:latin typeface="Arial" panose="020B0604020202020204" pitchFamily="34" charset="0"/>
+                <a:cs typeface="Arial" panose="020B0604020202020204" pitchFamily="34" charset="0"/>
+              </a:rPr>
+              <a:t> ambas, TE0 o TM0.</a:t>
+            </a:r>
+          </a:p>
+          <a:p>
+            <a:pPr algn="just"/>
+            <a:r>
+              <a:rPr lang="en-US" sz="1200" dirty="0">
+                <a:latin typeface="Arial" panose="020B0604020202020204" pitchFamily="34" charset="0"/>
+                <a:cs typeface="Arial" panose="020B0604020202020204" pitchFamily="34" charset="0"/>
+              </a:rPr>
+              <a:t>El </a:t>
+            </a:r>
+            <a:r>
+              <a:rPr lang="en-US" sz="1200" dirty="0" err="1">
+                <a:latin typeface="Arial" panose="020B0604020202020204" pitchFamily="34" charset="0"/>
+                <a:cs typeface="Arial" panose="020B0604020202020204" pitchFamily="34" charset="0"/>
+              </a:rPr>
+              <a:t>índice</a:t>
+            </a:r>
+            <a:r>
+              <a:rPr lang="en-US" sz="1200" dirty="0">
+                <a:latin typeface="Arial" panose="020B0604020202020204" pitchFamily="34" charset="0"/>
+                <a:cs typeface="Arial" panose="020B0604020202020204" pitchFamily="34" charset="0"/>
+              </a:rPr>
+              <a:t> </a:t>
+            </a:r>
+            <a:r>
+              <a:rPr lang="en-US" sz="1200" dirty="0" err="1">
+                <a:latin typeface="Arial" panose="020B0604020202020204" pitchFamily="34" charset="0"/>
+                <a:cs typeface="Arial" panose="020B0604020202020204" pitchFamily="34" charset="0"/>
+              </a:rPr>
+              <a:t>efectivo</a:t>
+            </a:r>
+            <a:r>
+              <a:rPr lang="en-US" sz="1200" dirty="0">
+                <a:latin typeface="Arial" panose="020B0604020202020204" pitchFamily="34" charset="0"/>
+                <a:cs typeface="Arial" panose="020B0604020202020204" pitchFamily="34" charset="0"/>
+              </a:rPr>
+              <a:t> </a:t>
+            </a:r>
+            <a:r>
+              <a:rPr lang="en-US" sz="1200" dirty="0" err="1">
+                <a:latin typeface="Arial" panose="020B0604020202020204" pitchFamily="34" charset="0"/>
+                <a:cs typeface="Arial" panose="020B0604020202020204" pitchFamily="34" charset="0"/>
+              </a:rPr>
+              <a:t>modela</a:t>
+            </a:r>
+            <a:r>
+              <a:rPr lang="en-US" sz="1200" dirty="0">
+                <a:latin typeface="Arial" panose="020B0604020202020204" pitchFamily="34" charset="0"/>
+                <a:cs typeface="Arial" panose="020B0604020202020204" pitchFamily="34" charset="0"/>
+              </a:rPr>
+              <a:t> la </a:t>
+            </a:r>
+            <a:r>
+              <a:rPr lang="en-US" sz="1200" dirty="0" err="1">
+                <a:latin typeface="Arial" panose="020B0604020202020204" pitchFamily="34" charset="0"/>
+                <a:cs typeface="Arial" panose="020B0604020202020204" pitchFamily="34" charset="0"/>
+              </a:rPr>
+              <a:t>propagación</a:t>
+            </a:r>
+            <a:r>
+              <a:rPr lang="en-US" sz="1200" dirty="0">
+                <a:latin typeface="Arial" panose="020B0604020202020204" pitchFamily="34" charset="0"/>
+                <a:cs typeface="Arial" panose="020B0604020202020204" pitchFamily="34" charset="0"/>
+              </a:rPr>
+              <a:t> de la </a:t>
+            </a:r>
+            <a:r>
+              <a:rPr lang="en-US" sz="1200" dirty="0" err="1">
+                <a:latin typeface="Arial" panose="020B0604020202020204" pitchFamily="34" charset="0"/>
+                <a:cs typeface="Arial" panose="020B0604020202020204" pitchFamily="34" charset="0"/>
+              </a:rPr>
+              <a:t>fase</a:t>
+            </a:r>
+            <a:r>
+              <a:rPr lang="en-US" sz="1200" dirty="0">
+                <a:latin typeface="Arial" panose="020B0604020202020204" pitchFamily="34" charset="0"/>
+                <a:cs typeface="Arial" panose="020B0604020202020204" pitchFamily="34" charset="0"/>
+              </a:rPr>
+              <a:t>, </a:t>
+            </a:r>
+            <a:r>
+              <a:rPr lang="en-US" sz="1200" dirty="0" err="1">
+                <a:latin typeface="Arial" panose="020B0604020202020204" pitchFamily="34" charset="0"/>
+                <a:cs typeface="Arial" panose="020B0604020202020204" pitchFamily="34" charset="0"/>
+              </a:rPr>
+              <a:t>como</a:t>
+            </a:r>
+            <a:r>
+              <a:rPr lang="en-US" sz="1200" dirty="0">
+                <a:latin typeface="Arial" panose="020B0604020202020204" pitchFamily="34" charset="0"/>
+                <a:cs typeface="Arial" panose="020B0604020202020204" pitchFamily="34" charset="0"/>
+              </a:rPr>
+              <a:t> </a:t>
+            </a:r>
+            <a:r>
+              <a:rPr lang="en-US" sz="1200" dirty="0" err="1">
+                <a:latin typeface="Arial" panose="020B0604020202020204" pitchFamily="34" charset="0"/>
+                <a:cs typeface="Arial" panose="020B0604020202020204" pitchFamily="34" charset="0"/>
+              </a:rPr>
+              <a:t>el</a:t>
+            </a:r>
+            <a:r>
+              <a:rPr lang="en-US" sz="1200" dirty="0">
+                <a:latin typeface="Arial" panose="020B0604020202020204" pitchFamily="34" charset="0"/>
+                <a:cs typeface="Arial" panose="020B0604020202020204" pitchFamily="34" charset="0"/>
+              </a:rPr>
+              <a:t> </a:t>
+            </a:r>
+            <a:r>
+              <a:rPr lang="en-US" sz="1200" dirty="0" err="1">
+                <a:latin typeface="Arial" panose="020B0604020202020204" pitchFamily="34" charset="0"/>
+                <a:cs typeface="Arial" panose="020B0604020202020204" pitchFamily="34" charset="0"/>
+              </a:rPr>
+              <a:t>índice</a:t>
+            </a:r>
+            <a:r>
+              <a:rPr lang="en-US" sz="1200" dirty="0">
+                <a:latin typeface="Arial" panose="020B0604020202020204" pitchFamily="34" charset="0"/>
+                <a:cs typeface="Arial" panose="020B0604020202020204" pitchFamily="34" charset="0"/>
+              </a:rPr>
+              <a:t> </a:t>
+            </a:r>
+            <a:r>
+              <a:rPr lang="en-US" sz="1200" dirty="0" err="1">
+                <a:latin typeface="Arial" panose="020B0604020202020204" pitchFamily="34" charset="0"/>
+                <a:cs typeface="Arial" panose="020B0604020202020204" pitchFamily="34" charset="0"/>
+              </a:rPr>
+              <a:t>efectivo</a:t>
+            </a:r>
+            <a:r>
+              <a:rPr lang="en-US" sz="1200" dirty="0">
+                <a:latin typeface="Arial" panose="020B0604020202020204" pitchFamily="34" charset="0"/>
+                <a:cs typeface="Arial" panose="020B0604020202020204" pitchFamily="34" charset="0"/>
+              </a:rPr>
+              <a:t> </a:t>
+            </a:r>
+            <a:r>
+              <a:rPr lang="en-US" sz="1200" dirty="0" err="1">
+                <a:latin typeface="Arial" panose="020B0604020202020204" pitchFamily="34" charset="0"/>
+                <a:cs typeface="Arial" panose="020B0604020202020204" pitchFamily="34" charset="0"/>
+              </a:rPr>
+              <a:t>váría</a:t>
+            </a:r>
+            <a:r>
+              <a:rPr lang="en-US" sz="1200" dirty="0">
+                <a:latin typeface="Arial" panose="020B0604020202020204" pitchFamily="34" charset="0"/>
+                <a:cs typeface="Arial" panose="020B0604020202020204" pitchFamily="34" charset="0"/>
+              </a:rPr>
+              <a:t>, no es </a:t>
+            </a:r>
+            <a:r>
+              <a:rPr lang="en-US" sz="1200" dirty="0" err="1">
+                <a:latin typeface="Arial" panose="020B0604020202020204" pitchFamily="34" charset="0"/>
+                <a:cs typeface="Arial" panose="020B0604020202020204" pitchFamily="34" charset="0"/>
+              </a:rPr>
+              <a:t>cte</a:t>
+            </a:r>
+            <a:r>
+              <a:rPr lang="en-US" sz="1200" dirty="0">
+                <a:latin typeface="Arial" panose="020B0604020202020204" pitchFamily="34" charset="0"/>
+                <a:cs typeface="Arial" panose="020B0604020202020204" pitchFamily="34" charset="0"/>
+              </a:rPr>
+              <a:t> y </a:t>
+            </a:r>
+            <a:r>
+              <a:rPr lang="en-US" sz="1200" dirty="0" err="1">
+                <a:latin typeface="Arial" panose="020B0604020202020204" pitchFamily="34" charset="0"/>
+                <a:cs typeface="Arial" panose="020B0604020202020204" pitchFamily="34" charset="0"/>
+              </a:rPr>
+              <a:t>tendremos</a:t>
+            </a:r>
+            <a:r>
+              <a:rPr lang="en-US" sz="1200" dirty="0">
+                <a:latin typeface="Arial" panose="020B0604020202020204" pitchFamily="34" charset="0"/>
+                <a:cs typeface="Arial" panose="020B0604020202020204" pitchFamily="34" charset="0"/>
+              </a:rPr>
+              <a:t> </a:t>
+            </a:r>
+            <a:r>
+              <a:rPr lang="en-US" sz="1200" dirty="0" err="1">
+                <a:latin typeface="Arial" panose="020B0604020202020204" pitchFamily="34" charset="0"/>
+                <a:cs typeface="Arial" panose="020B0604020202020204" pitchFamily="34" charset="0"/>
+              </a:rPr>
+              <a:t>dependencia</a:t>
+            </a:r>
+            <a:r>
+              <a:rPr lang="en-US" sz="1200" dirty="0">
+                <a:latin typeface="Arial" panose="020B0604020202020204" pitchFamily="34" charset="0"/>
+                <a:cs typeface="Arial" panose="020B0604020202020204" pitchFamily="34" charset="0"/>
+              </a:rPr>
+              <a:t> de la longitude de </a:t>
+            </a:r>
+            <a:r>
+              <a:rPr lang="en-US" sz="1200" dirty="0" err="1">
+                <a:latin typeface="Arial" panose="020B0604020202020204" pitchFamily="34" charset="0"/>
+                <a:cs typeface="Arial" panose="020B0604020202020204" pitchFamily="34" charset="0"/>
+              </a:rPr>
+              <a:t>onda</a:t>
+            </a:r>
+            <a:r>
+              <a:rPr lang="en-US" sz="1200" dirty="0">
+                <a:latin typeface="Arial" panose="020B0604020202020204" pitchFamily="34" charset="0"/>
+                <a:cs typeface="Arial" panose="020B0604020202020204" pitchFamily="34" charset="0"/>
+              </a:rPr>
+              <a:t>. </a:t>
+            </a:r>
+            <a:r>
+              <a:rPr lang="en-US" sz="1200" dirty="0" err="1">
+                <a:latin typeface="Arial" panose="020B0604020202020204" pitchFamily="34" charset="0"/>
+                <a:cs typeface="Arial" panose="020B0604020202020204" pitchFamily="34" charset="0"/>
+              </a:rPr>
+              <a:t>Operará</a:t>
+            </a:r>
+            <a:r>
+              <a:rPr lang="en-US" sz="1200" dirty="0">
+                <a:latin typeface="Arial" panose="020B0604020202020204" pitchFamily="34" charset="0"/>
+                <a:cs typeface="Arial" panose="020B0604020202020204" pitchFamily="34" charset="0"/>
+              </a:rPr>
+              <a:t> de </a:t>
+            </a:r>
+            <a:r>
+              <a:rPr lang="en-US" sz="1200" dirty="0" err="1">
+                <a:latin typeface="Arial" panose="020B0604020202020204" pitchFamily="34" charset="0"/>
+                <a:cs typeface="Arial" panose="020B0604020202020204" pitchFamily="34" charset="0"/>
+              </a:rPr>
+              <a:t>manera</a:t>
+            </a:r>
+            <a:r>
+              <a:rPr lang="en-US" sz="1200" dirty="0">
+                <a:latin typeface="Arial" panose="020B0604020202020204" pitchFamily="34" charset="0"/>
+                <a:cs typeface="Arial" panose="020B0604020202020204" pitchFamily="34" charset="0"/>
+              </a:rPr>
+              <a:t> </a:t>
+            </a:r>
+            <a:r>
+              <a:rPr lang="en-US" sz="1200" dirty="0" err="1">
+                <a:latin typeface="Arial" panose="020B0604020202020204" pitchFamily="34" charset="0"/>
+                <a:cs typeface="Arial" panose="020B0604020202020204" pitchFamily="34" charset="0"/>
+              </a:rPr>
+              <a:t>diferente</a:t>
+            </a:r>
+            <a:r>
+              <a:rPr lang="en-US" sz="1200" dirty="0">
+                <a:latin typeface="Arial" panose="020B0604020202020204" pitchFamily="34" charset="0"/>
+                <a:cs typeface="Arial" panose="020B0604020202020204" pitchFamily="34" charset="0"/>
+              </a:rPr>
+              <a:t>. </a:t>
+            </a:r>
+          </a:p>
+          <a:p>
+            <a:pPr algn="just"/>
+            <a:r>
+              <a:rPr lang="en-US" sz="1200" dirty="0">
+                <a:latin typeface="Arial" panose="020B0604020202020204" pitchFamily="34" charset="0"/>
+                <a:cs typeface="Arial" panose="020B0604020202020204" pitchFamily="34" charset="0"/>
+              </a:rPr>
+              <a:t>El </a:t>
+            </a:r>
+            <a:r>
+              <a:rPr lang="en-US" sz="1200" dirty="0" err="1">
+                <a:latin typeface="Arial" panose="020B0604020202020204" pitchFamily="34" charset="0"/>
+                <a:cs typeface="Arial" panose="020B0604020202020204" pitchFamily="34" charset="0"/>
+              </a:rPr>
+              <a:t>núcleo</a:t>
+            </a:r>
+            <a:r>
+              <a:rPr lang="en-US" sz="1200" dirty="0">
+                <a:latin typeface="Arial" panose="020B0604020202020204" pitchFamily="34" charset="0"/>
+                <a:cs typeface="Arial" panose="020B0604020202020204" pitchFamily="34" charset="0"/>
+              </a:rPr>
+              <a:t> de </a:t>
+            </a:r>
+            <a:r>
+              <a:rPr lang="en-US" sz="1200" dirty="0" err="1">
+                <a:latin typeface="Arial" panose="020B0604020202020204" pitchFamily="34" charset="0"/>
+                <a:cs typeface="Arial" panose="020B0604020202020204" pitchFamily="34" charset="0"/>
+              </a:rPr>
+              <a:t>nitruro</a:t>
+            </a:r>
+            <a:r>
+              <a:rPr lang="en-US" sz="1200" dirty="0">
+                <a:latin typeface="Arial" panose="020B0604020202020204" pitchFamily="34" charset="0"/>
+                <a:cs typeface="Arial" panose="020B0604020202020204" pitchFamily="34" charset="0"/>
+              </a:rPr>
+              <a:t> de </a:t>
+            </a:r>
+            <a:r>
+              <a:rPr lang="en-US" sz="1200" dirty="0" err="1">
+                <a:latin typeface="Arial" panose="020B0604020202020204" pitchFamily="34" charset="0"/>
+                <a:cs typeface="Arial" panose="020B0604020202020204" pitchFamily="34" charset="0"/>
+              </a:rPr>
+              <a:t>silicio</a:t>
+            </a:r>
+            <a:r>
+              <a:rPr lang="en-US" sz="1200" dirty="0">
+                <a:latin typeface="Arial" panose="020B0604020202020204" pitchFamily="34" charset="0"/>
+                <a:cs typeface="Arial" panose="020B0604020202020204" pitchFamily="34" charset="0"/>
+              </a:rPr>
+              <a:t>, </a:t>
+            </a:r>
+            <a:r>
+              <a:rPr lang="en-US" sz="1200" dirty="0" err="1">
+                <a:latin typeface="Arial" panose="020B0604020202020204" pitchFamily="34" charset="0"/>
+                <a:cs typeface="Arial" panose="020B0604020202020204" pitchFamily="34" charset="0"/>
+              </a:rPr>
+              <a:t>su</a:t>
+            </a:r>
+            <a:r>
+              <a:rPr lang="en-US" sz="1200" dirty="0">
+                <a:latin typeface="Arial" panose="020B0604020202020204" pitchFamily="34" charset="0"/>
+                <a:cs typeface="Arial" panose="020B0604020202020204" pitchFamily="34" charset="0"/>
+              </a:rPr>
+              <a:t> </a:t>
+            </a:r>
+            <a:r>
+              <a:rPr lang="en-US" sz="1200" dirty="0" err="1">
+                <a:latin typeface="Arial" panose="020B0604020202020204" pitchFamily="34" charset="0"/>
+                <a:cs typeface="Arial" panose="020B0604020202020204" pitchFamily="34" charset="0"/>
+              </a:rPr>
+              <a:t>índice</a:t>
+            </a:r>
+            <a:r>
+              <a:rPr lang="en-US" sz="1200" dirty="0">
+                <a:latin typeface="Arial" panose="020B0604020202020204" pitchFamily="34" charset="0"/>
+                <a:cs typeface="Arial" panose="020B0604020202020204" pitchFamily="34" charset="0"/>
+              </a:rPr>
+              <a:t> es </a:t>
+            </a:r>
+            <a:r>
+              <a:rPr lang="en-US" sz="1200" dirty="0" err="1">
+                <a:latin typeface="Arial" panose="020B0604020202020204" pitchFamily="34" charset="0"/>
+                <a:cs typeface="Arial" panose="020B0604020202020204" pitchFamily="34" charset="0"/>
+              </a:rPr>
+              <a:t>cercano</a:t>
+            </a:r>
+            <a:r>
+              <a:rPr lang="en-US" sz="1200" dirty="0">
+                <a:latin typeface="Arial" panose="020B0604020202020204" pitchFamily="34" charset="0"/>
+                <a:cs typeface="Arial" panose="020B0604020202020204" pitchFamily="34" charset="0"/>
+              </a:rPr>
+              <a:t> a 2. </a:t>
+            </a:r>
+            <a:r>
+              <a:rPr lang="en-US" sz="1200" dirty="0" err="1">
+                <a:latin typeface="Arial" panose="020B0604020202020204" pitchFamily="34" charset="0"/>
+                <a:cs typeface="Arial" panose="020B0604020202020204" pitchFamily="34" charset="0"/>
+              </a:rPr>
+              <a:t>Entonces</a:t>
+            </a:r>
+            <a:r>
+              <a:rPr lang="en-US" sz="1200" dirty="0">
+                <a:latin typeface="Arial" panose="020B0604020202020204" pitchFamily="34" charset="0"/>
+                <a:cs typeface="Arial" panose="020B0604020202020204" pitchFamily="34" charset="0"/>
+              </a:rPr>
+              <a:t> </a:t>
+            </a:r>
+            <a:r>
+              <a:rPr lang="en-US" sz="1200" dirty="0" err="1">
+                <a:latin typeface="Arial" panose="020B0604020202020204" pitchFamily="34" charset="0"/>
+                <a:cs typeface="Arial" panose="020B0604020202020204" pitchFamily="34" charset="0"/>
+              </a:rPr>
+              <a:t>vemos</a:t>
+            </a:r>
+            <a:r>
+              <a:rPr lang="en-US" sz="1200" dirty="0">
+                <a:latin typeface="Arial" panose="020B0604020202020204" pitchFamily="34" charset="0"/>
+                <a:cs typeface="Arial" panose="020B0604020202020204" pitchFamily="34" charset="0"/>
+              </a:rPr>
+              <a:t> </a:t>
+            </a:r>
+            <a:r>
+              <a:rPr lang="en-US" sz="1200" dirty="0" err="1">
+                <a:latin typeface="Arial" panose="020B0604020202020204" pitchFamily="34" charset="0"/>
+                <a:cs typeface="Arial" panose="020B0604020202020204" pitchFamily="34" charset="0"/>
+              </a:rPr>
+              <a:t>que</a:t>
+            </a:r>
+            <a:r>
+              <a:rPr lang="en-US" sz="1200" dirty="0">
+                <a:latin typeface="Arial" panose="020B0604020202020204" pitchFamily="34" charset="0"/>
+                <a:cs typeface="Arial" panose="020B0604020202020204" pitchFamily="34" charset="0"/>
+              </a:rPr>
+              <a:t> no </a:t>
+            </a:r>
+            <a:r>
+              <a:rPr lang="en-US" sz="1200" dirty="0" err="1">
+                <a:latin typeface="Arial" panose="020B0604020202020204" pitchFamily="34" charset="0"/>
+                <a:cs typeface="Arial" panose="020B0604020202020204" pitchFamily="34" charset="0"/>
+              </a:rPr>
+              <a:t>está</a:t>
+            </a:r>
+            <a:r>
+              <a:rPr lang="en-US" sz="1200" dirty="0">
+                <a:latin typeface="Arial" panose="020B0604020202020204" pitchFamily="34" charset="0"/>
+                <a:cs typeface="Arial" panose="020B0604020202020204" pitchFamily="34" charset="0"/>
+              </a:rPr>
+              <a:t> </a:t>
+            </a:r>
+            <a:r>
+              <a:rPr lang="en-US" sz="1200" dirty="0" err="1">
+                <a:latin typeface="Arial" panose="020B0604020202020204" pitchFamily="34" charset="0"/>
+                <a:cs typeface="Arial" panose="020B0604020202020204" pitchFamily="34" charset="0"/>
+              </a:rPr>
+              <a:t>muy</a:t>
+            </a:r>
+            <a:r>
+              <a:rPr lang="en-US" sz="1200" dirty="0">
+                <a:latin typeface="Arial" panose="020B0604020202020204" pitchFamily="34" charset="0"/>
+                <a:cs typeface="Arial" panose="020B0604020202020204" pitchFamily="34" charset="0"/>
+              </a:rPr>
+              <a:t> </a:t>
+            </a:r>
+            <a:r>
+              <a:rPr lang="en-US" sz="1200" dirty="0" err="1">
+                <a:latin typeface="Arial" panose="020B0604020202020204" pitchFamily="34" charset="0"/>
+                <a:cs typeface="Arial" panose="020B0604020202020204" pitchFamily="34" charset="0"/>
+              </a:rPr>
+              <a:t>confinado</a:t>
+            </a:r>
+            <a:r>
+              <a:rPr lang="en-US" sz="1200" dirty="0">
+                <a:latin typeface="Arial" panose="020B0604020202020204" pitchFamily="34" charset="0"/>
+                <a:cs typeface="Arial" panose="020B0604020202020204" pitchFamily="34" charset="0"/>
+              </a:rPr>
+              <a:t>.</a:t>
+            </a:r>
+          </a:p>
+          <a:p>
+            <a:pPr algn="just"/>
+            <a:endParaRPr lang="en-US" sz="1200" dirty="0">
+              <a:latin typeface="Arial" panose="020B0604020202020204" pitchFamily="34" charset="0"/>
+              <a:cs typeface="Arial" panose="020B0604020202020204" pitchFamily="34" charset="0"/>
+            </a:endParaRPr>
+          </a:p>
+          <a:p>
+            <a:pPr algn="just"/>
+            <a:endParaRPr lang="en-US" sz="1200" dirty="0">
+              <a:latin typeface="Arial" panose="020B0604020202020204" pitchFamily="34" charset="0"/>
+              <a:cs typeface="Arial" panose="020B0604020202020204" pitchFamily="34" charset="0"/>
+            </a:endParaRPr>
+          </a:p>
+          <a:p>
+            <a:pPr algn="just"/>
+            <a:endParaRPr lang="en-US" sz="1200" dirty="0">
+              <a:latin typeface="Arial" panose="020B0604020202020204" pitchFamily="34" charset="0"/>
+              <a:cs typeface="Arial" panose="020B0604020202020204" pitchFamily="34" charset="0"/>
+            </a:endParaRPr>
+          </a:p>
+          <a:p>
+            <a:pPr algn="just"/>
+            <a:endParaRPr lang="en-US" sz="1200" dirty="0">
+              <a:latin typeface="Arial" panose="020B0604020202020204" pitchFamily="34" charset="0"/>
+              <a:cs typeface="Arial" panose="020B0604020202020204" pitchFamily="34" charset="0"/>
+            </a:endParaRPr>
+          </a:p>
+          <a:p>
+            <a:pPr algn="just"/>
+            <a:endParaRPr lang="en-US" sz="1200" dirty="0">
+              <a:latin typeface="Arial" panose="020B0604020202020204" pitchFamily="34" charset="0"/>
+              <a:cs typeface="Arial" panose="020B0604020202020204" pitchFamily="34" charset="0"/>
+            </a:endParaRPr>
+          </a:p>
+        </p:txBody>
+      </p:sp>
+      <p:sp>
+        <p:nvSpPr>
+          <p:cNvPr id="5" name="Rectángulo 4">
+            <a:extLst>
+              <a:ext uri="{FF2B5EF4-FFF2-40B4-BE49-F238E27FC236}">
+                <a16:creationId xmlns:a16="http://schemas.microsoft.com/office/drawing/2014/main" id="{88F19863-7091-B8CA-F848-DBEA5CEEA027}"/>
+              </a:ext>
+            </a:extLst>
+          </p:cNvPr>
+          <p:cNvSpPr/>
+          <p:nvPr/>
+        </p:nvSpPr>
+        <p:spPr>
+          <a:xfrm>
+            <a:off x="609441" y="1418373"/>
+            <a:ext cx="5332571" cy="3306028"/>
+          </a:xfrm>
+          <a:prstGeom prst="rect">
+            <a:avLst/>
+          </a:prstGeom>
+          <a:noFill/>
+          <a:ln w="28575">
+            <a:solidFill>
+              <a:srgbClr val="E0700D"/>
+            </a:solidFill>
+          </a:ln>
+        </p:spPr>
+        <p:style>
+          <a:lnRef idx="2">
+            <a:schemeClr val="accent1">
+              <a:shade val="15000"/>
+            </a:schemeClr>
+          </a:lnRef>
+          <a:fillRef idx="1">
+            <a:schemeClr val="accent1"/>
+          </a:fillRef>
+          <a:effectRef idx="0">
+            <a:schemeClr val="accent1"/>
+          </a:effectRef>
+          <a:fontRef idx="minor">
+            <a:schemeClr val="lt1"/>
+          </a:fontRef>
+        </p:style>
+        <p:txBody>
+          <a:bodyPr rtlCol="0" anchor="ctr"/>
+          <a:lstStyle/>
+          <a:p>
+            <a:pPr algn="ctr"/>
+            <a:endParaRPr lang="en-US"/>
+          </a:p>
+        </p:txBody>
+      </p:sp>
+      <p:sp>
+        <p:nvSpPr>
+          <p:cNvPr id="6" name="CuadroTexto 5">
+            <a:extLst>
+              <a:ext uri="{FF2B5EF4-FFF2-40B4-BE49-F238E27FC236}">
+                <a16:creationId xmlns:a16="http://schemas.microsoft.com/office/drawing/2014/main" id="{3C4E7A47-20E2-3C27-D841-5A665642F6E2}"/>
+              </a:ext>
+            </a:extLst>
+          </p:cNvPr>
+          <p:cNvSpPr txBox="1"/>
+          <p:nvPr/>
+        </p:nvSpPr>
+        <p:spPr>
+          <a:xfrm>
+            <a:off x="2285455" y="2671278"/>
+            <a:ext cx="1980542" cy="923330"/>
+          </a:xfrm>
+          <a:prstGeom prst="rect">
+            <a:avLst/>
+          </a:prstGeom>
+          <a:noFill/>
+        </p:spPr>
+        <p:txBody>
+          <a:bodyPr wrap="none" rtlCol="0">
+            <a:spAutoFit/>
+          </a:bodyPr>
+          <a:lstStyle/>
+          <a:p>
+            <a:pPr algn="ctr"/>
+            <a:r>
+              <a:rPr lang="en-US" b="1" dirty="0"/>
+              <a:t>shallow</a:t>
+            </a:r>
+            <a:r>
+              <a:rPr lang="en-US" dirty="0"/>
+              <a:t> waveguide</a:t>
+            </a:r>
+          </a:p>
+          <a:p>
+            <a:pPr algn="ctr"/>
+            <a:endParaRPr lang="en-US" dirty="0"/>
+          </a:p>
+          <a:p>
+            <a:pPr algn="ctr"/>
+            <a:r>
+              <a:rPr lang="en-US" dirty="0"/>
+              <a:t>Paste plot here</a:t>
+            </a:r>
+          </a:p>
+        </p:txBody>
+      </p:sp>
+      <p:sp>
+        <p:nvSpPr>
+          <p:cNvPr id="7" name="Rectángulo 6">
+            <a:extLst>
+              <a:ext uri="{FF2B5EF4-FFF2-40B4-BE49-F238E27FC236}">
+                <a16:creationId xmlns:a16="http://schemas.microsoft.com/office/drawing/2014/main" id="{21F754A5-65BC-14A3-5F55-75716FFA9027}"/>
+              </a:ext>
+            </a:extLst>
+          </p:cNvPr>
+          <p:cNvSpPr/>
+          <p:nvPr/>
+        </p:nvSpPr>
+        <p:spPr>
+          <a:xfrm>
+            <a:off x="6476841" y="1418373"/>
+            <a:ext cx="5332571" cy="3306028"/>
+          </a:xfrm>
+          <a:prstGeom prst="rect">
+            <a:avLst/>
+          </a:prstGeom>
+          <a:noFill/>
+          <a:ln w="28575">
+            <a:solidFill>
+              <a:srgbClr val="E0700D"/>
+            </a:solidFill>
+          </a:ln>
+        </p:spPr>
+        <p:style>
+          <a:lnRef idx="2">
+            <a:schemeClr val="accent1">
+              <a:shade val="15000"/>
+            </a:schemeClr>
+          </a:lnRef>
+          <a:fillRef idx="1">
+            <a:schemeClr val="accent1"/>
+          </a:fillRef>
+          <a:effectRef idx="0">
+            <a:schemeClr val="accent1"/>
+          </a:effectRef>
+          <a:fontRef idx="minor">
+            <a:schemeClr val="lt1"/>
+          </a:fontRef>
+        </p:style>
+        <p:txBody>
+          <a:bodyPr rtlCol="0" anchor="ctr"/>
+          <a:lstStyle/>
+          <a:p>
+            <a:pPr algn="ctr"/>
+            <a:endParaRPr lang="en-US"/>
+          </a:p>
+        </p:txBody>
+      </p:sp>
+      <p:sp>
+        <p:nvSpPr>
+          <p:cNvPr id="9" name="CuadroTexto 8">
+            <a:extLst>
+              <a:ext uri="{FF2B5EF4-FFF2-40B4-BE49-F238E27FC236}">
+                <a16:creationId xmlns:a16="http://schemas.microsoft.com/office/drawing/2014/main" id="{8BD4C233-B5D9-B6AA-93A8-CF2F130CFF9C}"/>
+              </a:ext>
+            </a:extLst>
+          </p:cNvPr>
+          <p:cNvSpPr txBox="1"/>
+          <p:nvPr/>
+        </p:nvSpPr>
+        <p:spPr>
+          <a:xfrm>
+            <a:off x="642989" y="4402885"/>
+            <a:ext cx="2269787" cy="369332"/>
+          </a:xfrm>
+          <a:prstGeom prst="rect">
+            <a:avLst/>
+          </a:prstGeom>
+          <a:noFill/>
+        </p:spPr>
+        <p:txBody>
+          <a:bodyPr wrap="square">
+            <a:spAutoFit/>
+          </a:bodyPr>
+          <a:lstStyle/>
+          <a:p>
+            <a:r>
+              <a:rPr lang="en-US"/>
+              <a:t>slab </a:t>
+            </a:r>
+            <a:r>
+              <a:rPr lang="en-US" dirty="0"/>
+              <a:t>= 150nm</a:t>
+            </a:r>
+            <a:endParaRPr lang="es-ES" dirty="0"/>
+          </a:p>
+        </p:txBody>
+      </p:sp>
+      <p:pic>
+        <p:nvPicPr>
+          <p:cNvPr id="10" name="Imagen 9" descr="Gráfico, Gráfico de líneas&#10;&#10;El contenido generado por IA puede ser incorrecto.">
+            <a:extLst>
+              <a:ext uri="{FF2B5EF4-FFF2-40B4-BE49-F238E27FC236}">
+                <a16:creationId xmlns:a16="http://schemas.microsoft.com/office/drawing/2014/main" id="{6F8352F8-9D55-0A91-7C62-AF0F3E3764F8}"/>
+              </a:ext>
+            </a:extLst>
+          </p:cNvPr>
+          <p:cNvPicPr>
+            <a:picLocks noChangeAspect="1"/>
+          </p:cNvPicPr>
+          <p:nvPr/>
+        </p:nvPicPr>
+        <p:blipFill>
+          <a:blip r:embed="rId5"/>
+          <a:stretch>
+            <a:fillRect/>
+          </a:stretch>
+        </p:blipFill>
+        <p:spPr>
+          <a:xfrm>
+            <a:off x="600205" y="1564998"/>
+            <a:ext cx="5333710" cy="2919724"/>
+          </a:xfrm>
+          <a:prstGeom prst="rect">
+            <a:avLst/>
+          </a:prstGeom>
+        </p:spPr>
+      </p:pic>
+      <p:pic>
+        <p:nvPicPr>
+          <p:cNvPr id="12" name="Imagen 11" descr="Gráfico&#10;&#10;El contenido generado por IA puede ser incorrecto.">
+            <a:extLst>
+              <a:ext uri="{FF2B5EF4-FFF2-40B4-BE49-F238E27FC236}">
+                <a16:creationId xmlns:a16="http://schemas.microsoft.com/office/drawing/2014/main" id="{2E412073-5B4F-E16F-7D6E-1C978D3D99C2}"/>
+              </a:ext>
+            </a:extLst>
+          </p:cNvPr>
+          <p:cNvPicPr>
+            <a:picLocks noChangeAspect="1"/>
+          </p:cNvPicPr>
+          <p:nvPr/>
+        </p:nvPicPr>
+        <p:blipFill>
+          <a:blip r:embed="rId6"/>
+          <a:stretch>
+            <a:fillRect/>
+          </a:stretch>
+        </p:blipFill>
+        <p:spPr>
+          <a:xfrm>
+            <a:off x="6390212" y="1548801"/>
+            <a:ext cx="5505828" cy="2986121"/>
+          </a:xfrm>
+          <a:prstGeom prst="rect">
+            <a:avLst/>
+          </a:prstGeom>
+        </p:spPr>
+      </p:pic>
+    </p:spTree>
+    <p:extLst>
+      <p:ext uri="{BB962C8B-B14F-4D97-AF65-F5344CB8AC3E}">
+        <p14:creationId xmlns:p14="http://schemas.microsoft.com/office/powerpoint/2010/main" val="3712356003"/>
+      </p:ext>
+    </p:extLst>
+  </p:cSld>
+  <p:clrMapOvr>
+    <a:masterClrMapping/>
+  </p:clrMapOvr>
+</p:sld>
+</file>
+
+<file path=ppt/slides/slide11.xml><?xml version="1.0" encoding="utf-8"?>
+<p:sld xmlns:a="http://schemas.openxmlformats.org/drawingml/2006/main" xmlns:r="http://schemas.openxmlformats.org/officeDocument/2006/relationships" xmlns:p="http://schemas.openxmlformats.org/presentationml/2006/main">
+  <p:cSld>
+    <p:spTree>
+      <p:nvGrpSpPr>
+        <p:cNvPr id="1" name=""/>
+        <p:cNvGrpSpPr/>
+        <p:nvPr/>
+      </p:nvGrpSpPr>
+      <p:grpSpPr>
+        <a:xfrm>
+          <a:off x="0" y="0"/>
+          <a:ext cx="0" cy="0"/>
+          <a:chOff x="0" y="0"/>
+          <a:chExt cx="0" cy="0"/>
+        </a:xfrm>
+      </p:grpSpPr>
+      <p:sp>
+        <p:nvSpPr>
+          <p:cNvPr id="3" name="object 3"/>
+          <p:cNvSpPr/>
+          <p:nvPr/>
+        </p:nvSpPr>
+        <p:spPr>
+          <a:xfrm>
+            <a:off x="3945635" y="2636520"/>
+            <a:ext cx="8246363" cy="1584959"/>
+          </a:xfrm>
+          <a:prstGeom prst="rect">
+            <a:avLst/>
+          </a:prstGeom>
+          <a:blipFill>
+            <a:blip r:embed="rId2" cstate="print"/>
+            <a:stretch>
+              <a:fillRect/>
+            </a:stretch>
+          </a:blipFill>
+        </p:spPr>
+        <p:txBody>
+          <a:bodyPr wrap="square" lIns="0" tIns="0" rIns="0" bIns="0" rtlCol="0"/>
+          <a:lstStyle/>
+          <a:p>
+            <a:endParaRPr/>
+          </a:p>
+        </p:txBody>
+      </p:sp>
+      <p:sp>
+        <p:nvSpPr>
+          <p:cNvPr id="4" name="object 4"/>
+          <p:cNvSpPr txBox="1">
+            <a:spLocks noGrp="1"/>
+          </p:cNvSpPr>
+          <p:nvPr>
+            <p:ph type="title"/>
+          </p:nvPr>
+        </p:nvSpPr>
+        <p:spPr>
+          <a:xfrm>
+            <a:off x="4513326" y="3165729"/>
+            <a:ext cx="2233295" cy="513715"/>
+          </a:xfrm>
+          <a:prstGeom prst="rect">
+            <a:avLst/>
+          </a:prstGeom>
+        </p:spPr>
+        <p:txBody>
+          <a:bodyPr vert="horz" wrap="square" lIns="0" tIns="13335" rIns="0" bIns="0" rtlCol="0">
+            <a:spAutoFit/>
+          </a:bodyPr>
+          <a:lstStyle/>
+          <a:p>
+            <a:pPr marL="12700">
+              <a:lnSpc>
+                <a:spcPct val="100000"/>
+              </a:lnSpc>
+              <a:spcBef>
+                <a:spcPts val="105"/>
+              </a:spcBef>
+            </a:pPr>
+            <a:r>
+              <a:rPr sz="3200" b="1" spc="-5" dirty="0">
+                <a:solidFill>
+                  <a:srgbClr val="FFFFFF"/>
+                </a:solidFill>
+                <a:latin typeface="Lucida Sans"/>
+                <a:cs typeface="Lucida Sans"/>
+              </a:rPr>
+              <a:t>Thank</a:t>
+            </a:r>
+            <a:r>
+              <a:rPr sz="3200" b="1" spc="-55" dirty="0">
+                <a:solidFill>
+                  <a:srgbClr val="FFFFFF"/>
+                </a:solidFill>
+                <a:latin typeface="Lucida Sans"/>
+                <a:cs typeface="Lucida Sans"/>
+              </a:rPr>
+              <a:t> </a:t>
+            </a:r>
+            <a:r>
+              <a:rPr sz="3200" b="1" dirty="0">
+                <a:solidFill>
+                  <a:srgbClr val="FFFFFF"/>
+                </a:solidFill>
+                <a:latin typeface="Lucida Sans"/>
+                <a:cs typeface="Lucida Sans"/>
+              </a:rPr>
+              <a:t>you</a:t>
+            </a:r>
+            <a:endParaRPr sz="3200">
+              <a:latin typeface="Lucida Sans"/>
+              <a:cs typeface="Lucida Sans"/>
+            </a:endParaRPr>
+          </a:p>
+        </p:txBody>
+      </p:sp>
+      <p:sp>
+        <p:nvSpPr>
+          <p:cNvPr id="5" name="Marcador de número de diapositiva 4">
+            <a:extLst>
+              <a:ext uri="{FF2B5EF4-FFF2-40B4-BE49-F238E27FC236}">
+                <a16:creationId xmlns:a16="http://schemas.microsoft.com/office/drawing/2014/main" id="{B052DA19-AD24-7D24-2AE9-51F8F5A7F5E0}"/>
+              </a:ext>
+            </a:extLst>
+          </p:cNvPr>
+          <p:cNvSpPr>
+            <a:spLocks noGrp="1"/>
+          </p:cNvSpPr>
+          <p:nvPr>
+            <p:ph type="sldNum" sz="quarter" idx="7"/>
+          </p:nvPr>
+        </p:nvSpPr>
+        <p:spPr/>
+        <p:txBody>
+          <a:bodyPr/>
+          <a:lstStyle/>
+          <a:p>
+            <a:fld id="{B6F15528-21DE-4FAA-801E-634DDDAF4B2B}" type="slidenum">
+              <a:rPr lang="es-ES" smtClean="0"/>
+              <a:t>11</a:t>
+            </a:fld>
+            <a:endParaRPr lang="es-ES"/>
+          </a:p>
+        </p:txBody>
+      </p:sp>
+    </p:spTree>
+  </p:cSld>
+  <p:clrMapOvr>
+    <a:masterClrMapping/>
+  </p:clrMapOvr>
+</p:sld>
+</file>
+
 <file path=ppt/slides/slide2.xml><?xml version="1.0" encoding="utf-8"?>
 <p:sld xmlns:a="http://schemas.openxmlformats.org/drawingml/2006/main" xmlns:r="http://schemas.openxmlformats.org/officeDocument/2006/relationships" xmlns:p="http://schemas.openxmlformats.org/presentationml/2006/main">
   <p:cSld>
@@ -5792,33 +8122,8 @@
                 <a:latin typeface="Arial" panose="020B0604020202020204" pitchFamily="34" charset="0"/>
                 <a:cs typeface="Arial" panose="020B0604020202020204" pitchFamily="34" charset="0"/>
               </a:rPr>
-              <a:t>Document all your results (neff, plot fields </a:t>
-            </a:r>
-            <a:r>
-              <a:rPr lang="en-US" sz="1200">
-                <a:latin typeface="Arial" panose="020B0604020202020204" pitchFamily="34" charset="0"/>
-                <a:cs typeface="Arial" panose="020B0604020202020204" pitchFamily="34" charset="0"/>
-              </a:rPr>
-              <a:t>of different modes, </a:t>
-            </a:r>
-            <a:r>
-              <a:rPr lang="en-US" sz="1200" dirty="0">
-                <a:latin typeface="Arial" panose="020B0604020202020204" pitchFamily="34" charset="0"/>
-                <a:cs typeface="Arial" panose="020B0604020202020204" pitchFamily="34" charset="0"/>
-              </a:rPr>
-              <a:t>comparison between </a:t>
-            </a:r>
-            <a:r>
-              <a:rPr lang="en-US" sz="1200">
-                <a:latin typeface="Arial" panose="020B0604020202020204" pitchFamily="34" charset="0"/>
-                <a:cs typeface="Arial" panose="020B0604020202020204" pitchFamily="34" charset="0"/>
-              </a:rPr>
-              <a:t>different polarizations…)</a:t>
-            </a:r>
-            <a:endParaRPr lang="en-US" sz="1200" dirty="0">
-              <a:latin typeface="Arial" panose="020B0604020202020204" pitchFamily="34" charset="0"/>
-              <a:cs typeface="Arial" panose="020B0604020202020204" pitchFamily="34" charset="0"/>
-            </a:endParaRPr>
+              <a:t>Document all your results (neff, plot fields of different modes, comparison between different polarizations…)</a:t>
+            </a:r>
           </a:p>
           <a:p>
             <a:pPr algn="just"/>
@@ -5878,7 +8183,7 @@
         <p:cNvPr id="1" name="">
           <a:extLst>
             <a:ext uri="{FF2B5EF4-FFF2-40B4-BE49-F238E27FC236}">
-              <a16:creationId xmlns:a16="http://schemas.microsoft.com/office/drawing/2014/main" id="{371656EC-E197-239C-60DD-C11F7BA4B44A}"/>
+              <a16:creationId xmlns:a16="http://schemas.microsoft.com/office/drawing/2014/main" id="{AFB31A42-D867-FD10-340E-4978177F88D7}"/>
             </a:ext>
           </a:extLst>
         </p:cNvPr>
@@ -5898,7 +8203,7 @@
           <p:cNvPr id="16" name="object 16">
             <a:extLst>
               <a:ext uri="{FF2B5EF4-FFF2-40B4-BE49-F238E27FC236}">
-                <a16:creationId xmlns:a16="http://schemas.microsoft.com/office/drawing/2014/main" id="{5431EA70-9578-8BF1-5A05-77CDC26788B4}"/>
+                <a16:creationId xmlns:a16="http://schemas.microsoft.com/office/drawing/2014/main" id="{CA9815B3-B866-6DC5-4C10-BA64984E0320}"/>
               </a:ext>
             </a:extLst>
           </p:cNvPr>
@@ -5912,7 +8217,7 @@
         <p:spPr>
           <a:xfrm>
             <a:off x="685800" y="408883"/>
-            <a:ext cx="10994410" cy="705321"/>
+            <a:ext cx="10994410" cy="782265"/>
           </a:xfrm>
           <a:prstGeom prst="rect">
             <a:avLst/>
@@ -5934,7 +8239,7 @@
             </a:pPr>
             <a:r>
               <a:rPr lang="en-US" sz="2500" dirty="0"/>
-              <a:t>Learning outcome #2 – Wavelength behavior</a:t>
+              <a:t>Learning outcome #1 – Effective index of a waveguide</a:t>
             </a:r>
             <a:br>
               <a:rPr lang="es-ES" sz="2500" spc="-5" dirty="0">
@@ -5942,10 +8247,6 @@
                 <a:cs typeface="Lucida Sans"/>
               </a:rPr>
             </a:br>
-            <a:r>
-              <a:rPr lang="en-US" b="0" dirty="0"/>
-              <a:t>Wavelength 1.5-1.6 µm (step 0.02 µm) – width 1.2 µm</a:t>
-            </a:r>
             <a:endParaRPr sz="2500" b="0" dirty="0">
               <a:latin typeface="+mj-lt"/>
               <a:cs typeface="Lucida Sans"/>
@@ -5958,7 +8259,7 @@
           <p:cNvPr id="83" name="Gráfico 82">
             <a:extLst>
               <a:ext uri="{FF2B5EF4-FFF2-40B4-BE49-F238E27FC236}">
-                <a16:creationId xmlns:a16="http://schemas.microsoft.com/office/drawing/2014/main" id="{B6A02C28-9CC3-6E88-B695-04A48E5FDEAC}"/>
+                <a16:creationId xmlns:a16="http://schemas.microsoft.com/office/drawing/2014/main" id="{89603784-319A-2B9F-F3D2-1D228BFED59F}"/>
               </a:ext>
             </a:extLst>
           </p:cNvPr>
@@ -5994,7 +8295,7 @@
           <p:cNvPr id="84" name="Marcador de número de diapositiva 83">
             <a:extLst>
               <a:ext uri="{FF2B5EF4-FFF2-40B4-BE49-F238E27FC236}">
-                <a16:creationId xmlns:a16="http://schemas.microsoft.com/office/drawing/2014/main" id="{FB7F118F-AD79-0ED0-CE53-A8EE4409B4F8}"/>
+                <a16:creationId xmlns:a16="http://schemas.microsoft.com/office/drawing/2014/main" id="{753F5371-F6C4-076A-EA0E-74A8A136440E}"/>
               </a:ext>
             </a:extLst>
           </p:cNvPr>
@@ -6023,7 +8324,7 @@
           <p:cNvPr id="3" name="Marcador de pie de página 2">
             <a:extLst>
               <a:ext uri="{FF2B5EF4-FFF2-40B4-BE49-F238E27FC236}">
-                <a16:creationId xmlns:a16="http://schemas.microsoft.com/office/drawing/2014/main" id="{10846C9D-3FE3-8524-3349-96E1AD1712B3}"/>
+                <a16:creationId xmlns:a16="http://schemas.microsoft.com/office/drawing/2014/main" id="{91D444CA-C9A5-8385-4816-7C8DDD97CF40}"/>
               </a:ext>
             </a:extLst>
           </p:cNvPr>
@@ -6053,10 +8354,116 @@
       </p:sp>
       <p:sp>
         <p:nvSpPr>
+          <p:cNvPr id="4" name="Marcador de texto 2">
+            <a:extLst>
+              <a:ext uri="{FF2B5EF4-FFF2-40B4-BE49-F238E27FC236}">
+                <a16:creationId xmlns:a16="http://schemas.microsoft.com/office/drawing/2014/main" id="{8EE921BC-1300-E6BB-0745-5F532646B1D5}"/>
+              </a:ext>
+            </a:extLst>
+          </p:cNvPr>
+          <p:cNvSpPr txBox="1">
+            <a:spLocks/>
+          </p:cNvSpPr>
+          <p:nvPr/>
+        </p:nvSpPr>
+        <p:spPr>
+          <a:xfrm>
+            <a:off x="608012" y="1295400"/>
+            <a:ext cx="11048999" cy="4958137"/>
+          </a:xfrm>
+          <a:prstGeom prst="rect">
+            <a:avLst/>
+          </a:prstGeom>
+        </p:spPr>
+        <p:txBody>
+          <a:bodyPr>
+            <a:normAutofit/>
+          </a:bodyPr>
+          <a:lstStyle>
+            <a:lvl1pPr marL="0">
+              <a:defRPr>
+                <a:latin typeface="+mn-lt"/>
+                <a:ea typeface="+mn-ea"/>
+                <a:cs typeface="+mn-cs"/>
+              </a:defRPr>
+            </a:lvl1pPr>
+            <a:lvl2pPr marL="457200">
+              <a:defRPr>
+                <a:latin typeface="+mn-lt"/>
+                <a:ea typeface="+mn-ea"/>
+                <a:cs typeface="+mn-cs"/>
+              </a:defRPr>
+            </a:lvl2pPr>
+            <a:lvl3pPr marL="914400">
+              <a:defRPr>
+                <a:latin typeface="+mn-lt"/>
+                <a:ea typeface="+mn-ea"/>
+                <a:cs typeface="+mn-cs"/>
+              </a:defRPr>
+            </a:lvl3pPr>
+            <a:lvl4pPr marL="1371600">
+              <a:defRPr>
+                <a:latin typeface="+mn-lt"/>
+                <a:ea typeface="+mn-ea"/>
+                <a:cs typeface="+mn-cs"/>
+              </a:defRPr>
+            </a:lvl4pPr>
+            <a:lvl5pPr marL="1828800">
+              <a:defRPr>
+                <a:latin typeface="+mn-lt"/>
+                <a:ea typeface="+mn-ea"/>
+                <a:cs typeface="+mn-cs"/>
+              </a:defRPr>
+            </a:lvl5pPr>
+            <a:lvl6pPr marL="2286000">
+              <a:defRPr>
+                <a:latin typeface="+mn-lt"/>
+                <a:ea typeface="+mn-ea"/>
+                <a:cs typeface="+mn-cs"/>
+              </a:defRPr>
+            </a:lvl6pPr>
+            <a:lvl7pPr marL="2743200">
+              <a:defRPr>
+                <a:latin typeface="+mn-lt"/>
+                <a:ea typeface="+mn-ea"/>
+                <a:cs typeface="+mn-cs"/>
+              </a:defRPr>
+            </a:lvl7pPr>
+            <a:lvl8pPr marL="3200400">
+              <a:defRPr>
+                <a:latin typeface="+mn-lt"/>
+                <a:ea typeface="+mn-ea"/>
+                <a:cs typeface="+mn-cs"/>
+              </a:defRPr>
+            </a:lvl8pPr>
+            <a:lvl9pPr marL="3657600">
+              <a:defRPr>
+                <a:latin typeface="+mn-lt"/>
+                <a:ea typeface="+mn-ea"/>
+                <a:cs typeface="+mn-cs"/>
+              </a:defRPr>
+            </a:lvl9pPr>
+          </a:lstStyle>
+          <a:p>
+            <a:pPr algn="just"/>
+            <a:endParaRPr lang="en-US" sz="2000" b="1" i="1" dirty="0"/>
+          </a:p>
+          <a:p>
+            <a:pPr algn="just"/>
+            <a:endParaRPr lang="en-US" sz="2000" kern="0" dirty="0">
+              <a:solidFill>
+                <a:sysClr val="windowText" lastClr="000000"/>
+              </a:solidFill>
+            </a:endParaRPr>
+          </a:p>
+        </p:txBody>
+      </p:sp>
+      <p:sp>
+        <p:nvSpPr>
           <p:cNvPr id="2" name="CuadroTexto 1">
             <a:extLst>
               <a:ext uri="{FF2B5EF4-FFF2-40B4-BE49-F238E27FC236}">
-                <a16:creationId xmlns:a16="http://schemas.microsoft.com/office/drawing/2014/main" id="{CA5F0FDF-2A95-453B-4ECA-AEB637FF2694}"/>
+                <a16:creationId xmlns:a16="http://schemas.microsoft.com/office/drawing/2014/main" id="{E837C079-CC18-AA7D-9B7B-A06292D10B36}"/>
               </a:ext>
             </a:extLst>
           </p:cNvPr>
@@ -6065,8 +8472,8 @@
         </p:nvSpPr>
         <p:spPr>
           <a:xfrm>
-            <a:off x="625605" y="4904218"/>
-            <a:ext cx="11199971" cy="2677656"/>
+            <a:off x="609441" y="4860334"/>
+            <a:ext cx="11199971" cy="1754326"/>
           </a:xfrm>
           <a:prstGeom prst="rect">
             <a:avLst/>
@@ -6089,29 +8496,47 @@
           <a:lstStyle/>
           <a:p>
             <a:pPr algn="just"/>
-            <a:endParaRPr lang="en-US" sz="1200" dirty="0">
-              <a:latin typeface="Arial" panose="020B0604020202020204" pitchFamily="34" charset="0"/>
-              <a:cs typeface="Arial" panose="020B0604020202020204" pitchFamily="34" charset="0"/>
-            </a:endParaRPr>
-          </a:p>
-          <a:p>
-            <a:pPr algn="just"/>
-            <a:r>
-              <a:rPr lang="en-US" sz="1200" dirty="0">
-                <a:latin typeface="Arial" panose="020B0604020202020204" pitchFamily="34" charset="0"/>
-                <a:cs typeface="Arial" panose="020B0604020202020204" pitchFamily="34" charset="0"/>
-              </a:rPr>
-              <a:t>Deep Waveguide. </a:t>
-            </a:r>
-          </a:p>
-          <a:p>
-            <a:pPr algn="just"/>
-            <a:r>
-              <a:rPr lang="en-US" sz="1200" dirty="0">
-                <a:latin typeface="Arial" panose="020B0604020202020204" pitchFamily="34" charset="0"/>
-                <a:cs typeface="Arial" panose="020B0604020202020204" pitchFamily="34" charset="0"/>
-              </a:rPr>
-              <a:t>En </a:t>
+            <a:r>
+              <a:rPr lang="en-US" sz="1200" dirty="0" err="1">
+                <a:latin typeface="Arial" panose="020B0604020202020204" pitchFamily="34" charset="0"/>
+                <a:cs typeface="Arial" panose="020B0604020202020204" pitchFamily="34" charset="0"/>
+              </a:rPr>
+              <a:t>Ploteamos</a:t>
+            </a:r>
+            <a:r>
+              <a:rPr lang="en-US" sz="1200" dirty="0">
+                <a:latin typeface="Arial" panose="020B0604020202020204" pitchFamily="34" charset="0"/>
+                <a:cs typeface="Arial" panose="020B0604020202020204" pitchFamily="34" charset="0"/>
+              </a:rPr>
+              <a:t> a </a:t>
+            </a:r>
+            <a:r>
+              <a:rPr lang="en-US" sz="1200" dirty="0" err="1">
+                <a:latin typeface="Arial" panose="020B0604020202020204" pitchFamily="34" charset="0"/>
+                <a:cs typeface="Arial" panose="020B0604020202020204" pitchFamily="34" charset="0"/>
+              </a:rPr>
+              <a:t>sección</a:t>
+            </a:r>
+            <a:r>
+              <a:rPr lang="en-US" sz="1200" dirty="0">
+                <a:latin typeface="Arial" panose="020B0604020202020204" pitchFamily="34" charset="0"/>
+                <a:cs typeface="Arial" panose="020B0604020202020204" pitchFamily="34" charset="0"/>
+              </a:rPr>
+              <a:t> </a:t>
+            </a:r>
+            <a:r>
+              <a:rPr lang="en-US" sz="1200" dirty="0" err="1">
+                <a:latin typeface="Arial" panose="020B0604020202020204" pitchFamily="34" charset="0"/>
+                <a:cs typeface="Arial" panose="020B0604020202020204" pitchFamily="34" charset="0"/>
+              </a:rPr>
+              <a:t>deguia</a:t>
+            </a:r>
+            <a:r>
+              <a:rPr lang="en-US" sz="1200" dirty="0">
+                <a:latin typeface="Arial" panose="020B0604020202020204" pitchFamily="34" charset="0"/>
+                <a:cs typeface="Arial" panose="020B0604020202020204" pitchFamily="34" charset="0"/>
+              </a:rPr>
+              <a:t> transversal con core material sin y </a:t>
             </a:r>
             <a:r>
               <a:rPr lang="en-US" sz="1200" dirty="0" err="1">
@@ -6125,6 +8550,20 @@
                 <a:latin typeface="Arial" panose="020B0604020202020204" pitchFamily="34" charset="0"/>
                 <a:cs typeface="Arial" panose="020B0604020202020204" pitchFamily="34" charset="0"/>
               </a:rPr>
+              <a:t> cladding material sio2. El </a:t>
+            </a:r>
+            <a:r>
+              <a:rPr lang="en-US" sz="1200" dirty="0" err="1">
+                <a:latin typeface="Arial" panose="020B0604020202020204" pitchFamily="34" charset="0"/>
+                <a:cs typeface="Arial" panose="020B0604020202020204" pitchFamily="34" charset="0"/>
+              </a:rPr>
+              <a:t>núcleo</a:t>
+            </a:r>
+            <a:r>
+              <a:rPr lang="en-US" sz="1200" dirty="0">
+                <a:latin typeface="Arial" panose="020B0604020202020204" pitchFamily="34" charset="0"/>
+                <a:cs typeface="Arial" panose="020B0604020202020204" pitchFamily="34" charset="0"/>
+              </a:rPr>
               <a:t> </a:t>
             </a:r>
             <a:r>
@@ -6132,20 +8571,6 @@
                 <a:latin typeface="Arial" panose="020B0604020202020204" pitchFamily="34" charset="0"/>
                 <a:cs typeface="Arial" panose="020B0604020202020204" pitchFamily="34" charset="0"/>
               </a:rPr>
-              <a:t>que</a:t>
-            </a:r>
-            <a:r>
-              <a:rPr lang="en-US" sz="1200" dirty="0">
-                <a:latin typeface="Arial" panose="020B0604020202020204" pitchFamily="34" charset="0"/>
-                <a:cs typeface="Arial" panose="020B0604020202020204" pitchFamily="34" charset="0"/>
-              </a:rPr>
-              <a:t> no </a:t>
-            </a:r>
-            <a:r>
-              <a:rPr lang="en-US" sz="1200" dirty="0" err="1">
-                <a:latin typeface="Arial" panose="020B0604020202020204" pitchFamily="34" charset="0"/>
-                <a:cs typeface="Arial" panose="020B0604020202020204" pitchFamily="34" charset="0"/>
-              </a:rPr>
               <a:t>tiene</a:t>
             </a:r>
             <a:r>
@@ -6153,42 +8578,70 @@
                 <a:latin typeface="Arial" panose="020B0604020202020204" pitchFamily="34" charset="0"/>
                 <a:cs typeface="Arial" panose="020B0604020202020204" pitchFamily="34" charset="0"/>
               </a:rPr>
-              <a:t> slab se </a:t>
-            </a:r>
-            <a:r>
-              <a:rPr lang="en-US" sz="1200" dirty="0" err="1">
-                <a:latin typeface="Arial" panose="020B0604020202020204" pitchFamily="34" charset="0"/>
-                <a:cs typeface="Arial" panose="020B0604020202020204" pitchFamily="34" charset="0"/>
-              </a:rPr>
-              <a:t>propagan</a:t>
-            </a:r>
-            <a:r>
-              <a:rPr lang="en-US" sz="1200" dirty="0">
-                <a:latin typeface="Arial" panose="020B0604020202020204" pitchFamily="34" charset="0"/>
-                <a:cs typeface="Arial" panose="020B0604020202020204" pitchFamily="34" charset="0"/>
-              </a:rPr>
-              <a:t> dos </a:t>
-            </a:r>
-            <a:r>
-              <a:rPr lang="en-US" sz="1200" dirty="0" err="1">
-                <a:latin typeface="Arial" panose="020B0604020202020204" pitchFamily="34" charset="0"/>
-                <a:cs typeface="Arial" panose="020B0604020202020204" pitchFamily="34" charset="0"/>
-              </a:rPr>
-              <a:t>modos</a:t>
-            </a:r>
-            <a:r>
-              <a:rPr lang="en-US" sz="1200" dirty="0">
-                <a:latin typeface="Arial" panose="020B0604020202020204" pitchFamily="34" charset="0"/>
-                <a:cs typeface="Arial" panose="020B0604020202020204" pitchFamily="34" charset="0"/>
-              </a:rPr>
-              <a:t>, </a:t>
-            </a:r>
-            <a:r>
-              <a:rPr lang="en-US" sz="1200" dirty="0" err="1">
-                <a:latin typeface="Arial" panose="020B0604020202020204" pitchFamily="34" charset="0"/>
-                <a:cs typeface="Arial" panose="020B0604020202020204" pitchFamily="34" charset="0"/>
-              </a:rPr>
-              <a:t>ya</a:t>
+              <a:t> un </a:t>
+            </a:r>
+            <a:r>
+              <a:rPr lang="en-US" sz="1200" dirty="0" err="1">
+                <a:latin typeface="Arial" panose="020B0604020202020204" pitchFamily="34" charset="0"/>
+                <a:cs typeface="Arial" panose="020B0604020202020204" pitchFamily="34" charset="0"/>
+              </a:rPr>
+              <a:t>índice</a:t>
+            </a:r>
+            <a:r>
+              <a:rPr lang="en-US" sz="1200" dirty="0">
+                <a:latin typeface="Arial" panose="020B0604020202020204" pitchFamily="34" charset="0"/>
+                <a:cs typeface="Arial" panose="020B0604020202020204" pitchFamily="34" charset="0"/>
+              </a:rPr>
+              <a:t> de </a:t>
+            </a:r>
+            <a:r>
+              <a:rPr lang="en-US" sz="1200" dirty="0" err="1">
+                <a:latin typeface="Arial" panose="020B0604020202020204" pitchFamily="34" charset="0"/>
+                <a:cs typeface="Arial" panose="020B0604020202020204" pitchFamily="34" charset="0"/>
+              </a:rPr>
+              <a:t>unos</a:t>
+            </a:r>
+            <a:r>
+              <a:rPr lang="en-US" sz="1200" dirty="0">
+                <a:latin typeface="Arial" panose="020B0604020202020204" pitchFamily="34" charset="0"/>
+                <a:cs typeface="Arial" panose="020B0604020202020204" pitchFamily="34" charset="0"/>
+              </a:rPr>
+              <a:t> 2 </a:t>
+            </a:r>
+            <a:r>
+              <a:rPr lang="en-US" sz="1200" dirty="0" err="1">
+                <a:latin typeface="Arial" panose="020B0604020202020204" pitchFamily="34" charset="0"/>
+                <a:cs typeface="Arial" panose="020B0604020202020204" pitchFamily="34" charset="0"/>
+              </a:rPr>
+              <a:t>aproximadamente</a:t>
+            </a:r>
+            <a:r>
+              <a:rPr lang="en-US" sz="1200" dirty="0">
+                <a:latin typeface="Arial" panose="020B0604020202020204" pitchFamily="34" charset="0"/>
+                <a:cs typeface="Arial" panose="020B0604020202020204" pitchFamily="34" charset="0"/>
+              </a:rPr>
+              <a:t> y </a:t>
+            </a:r>
+            <a:r>
+              <a:rPr lang="en-US" sz="1200" dirty="0" err="1">
+                <a:latin typeface="Arial" panose="020B0604020202020204" pitchFamily="34" charset="0"/>
+                <a:cs typeface="Arial" panose="020B0604020202020204" pitchFamily="34" charset="0"/>
+              </a:rPr>
+              <a:t>el</a:t>
+            </a:r>
+            <a:r>
+              <a:rPr lang="en-US" sz="1200" dirty="0">
+                <a:latin typeface="Arial" panose="020B0604020202020204" pitchFamily="34" charset="0"/>
+                <a:cs typeface="Arial" panose="020B0604020202020204" pitchFamily="34" charset="0"/>
+              </a:rPr>
+              <a:t> cladding </a:t>
+            </a:r>
+            <a:r>
+              <a:rPr lang="en-US" sz="1200" dirty="0" err="1">
+                <a:latin typeface="Arial" panose="020B0604020202020204" pitchFamily="34" charset="0"/>
+                <a:cs typeface="Arial" panose="020B0604020202020204" pitchFamily="34" charset="0"/>
+              </a:rPr>
+              <a:t>por</a:t>
             </a:r>
             <a:r>
               <a:rPr lang="en-US" sz="1200" dirty="0">
@@ -6202,76 +8655,6 @@
                 <a:latin typeface="Arial" panose="020B0604020202020204" pitchFamily="34" charset="0"/>
                 <a:cs typeface="Arial" panose="020B0604020202020204" pitchFamily="34" charset="0"/>
               </a:rPr>
-              <a:t>que</a:t>
-            </a:r>
-            <a:r>
-              <a:rPr lang="en-US" sz="1200" dirty="0">
-                <a:latin typeface="Arial" panose="020B0604020202020204" pitchFamily="34" charset="0"/>
-                <a:cs typeface="Arial" panose="020B0604020202020204" pitchFamily="34" charset="0"/>
-              </a:rPr>
-              <a:t> </a:t>
-            </a:r>
-            <a:r>
-              <a:rPr lang="en-US" sz="1200" dirty="0" err="1">
-                <a:latin typeface="Arial" panose="020B0604020202020204" pitchFamily="34" charset="0"/>
-                <a:cs typeface="Arial" panose="020B0604020202020204" pitchFamily="34" charset="0"/>
-              </a:rPr>
-              <a:t>los</a:t>
-            </a:r>
-            <a:r>
-              <a:rPr lang="en-US" sz="1200" dirty="0">
-                <a:latin typeface="Arial" panose="020B0604020202020204" pitchFamily="34" charset="0"/>
-                <a:cs typeface="Arial" panose="020B0604020202020204" pitchFamily="34" charset="0"/>
-              </a:rPr>
-              <a:t> </a:t>
-            </a:r>
-            <a:r>
-              <a:rPr lang="en-US" sz="1200" dirty="0" err="1">
-                <a:latin typeface="Arial" panose="020B0604020202020204" pitchFamily="34" charset="0"/>
-                <a:cs typeface="Arial" panose="020B0604020202020204" pitchFamily="34" charset="0"/>
-              </a:rPr>
-              <a:t>que</a:t>
-            </a:r>
-            <a:r>
-              <a:rPr lang="en-US" sz="1200" dirty="0">
-                <a:latin typeface="Arial" panose="020B0604020202020204" pitchFamily="34" charset="0"/>
-                <a:cs typeface="Arial" panose="020B0604020202020204" pitchFamily="34" charset="0"/>
-              </a:rPr>
-              <a:t> </a:t>
-            </a:r>
-            <a:r>
-              <a:rPr lang="en-US" sz="1200" dirty="0" err="1">
-                <a:latin typeface="Arial" panose="020B0604020202020204" pitchFamily="34" charset="0"/>
-                <a:cs typeface="Arial" panose="020B0604020202020204" pitchFamily="34" charset="0"/>
-              </a:rPr>
-              <a:t>estén</a:t>
-            </a:r>
-            <a:r>
-              <a:rPr lang="en-US" sz="1200" dirty="0">
-                <a:latin typeface="Arial" panose="020B0604020202020204" pitchFamily="34" charset="0"/>
-                <a:cs typeface="Arial" panose="020B0604020202020204" pitchFamily="34" charset="0"/>
-              </a:rPr>
-              <a:t> </a:t>
-            </a:r>
-            <a:r>
-              <a:rPr lang="en-US" sz="1200" dirty="0" err="1">
-                <a:latin typeface="Arial" panose="020B0604020202020204" pitchFamily="34" charset="0"/>
-                <a:cs typeface="Arial" panose="020B0604020202020204" pitchFamily="34" charset="0"/>
-              </a:rPr>
-              <a:t>por</a:t>
-            </a:r>
-            <a:r>
-              <a:rPr lang="en-US" sz="1200" dirty="0">
-                <a:latin typeface="Arial" panose="020B0604020202020204" pitchFamily="34" charset="0"/>
-                <a:cs typeface="Arial" panose="020B0604020202020204" pitchFamily="34" charset="0"/>
-              </a:rPr>
-              <a:t> </a:t>
-            </a:r>
-            <a:r>
-              <a:rPr lang="en-US" sz="1200" dirty="0" err="1">
-                <a:latin typeface="Arial" panose="020B0604020202020204" pitchFamily="34" charset="0"/>
-                <a:cs typeface="Arial" panose="020B0604020202020204" pitchFamily="34" charset="0"/>
-              </a:rPr>
               <a:t>debajo</a:t>
             </a:r>
             <a:r>
@@ -6279,813 +8662,7 @@
                 <a:latin typeface="Arial" panose="020B0604020202020204" pitchFamily="34" charset="0"/>
                 <a:cs typeface="Arial" panose="020B0604020202020204" pitchFamily="34" charset="0"/>
               </a:rPr>
-              <a:t> del </a:t>
-            </a:r>
-            <a:r>
-              <a:rPr lang="en-US" sz="1200" dirty="0" err="1">
-                <a:latin typeface="Arial" panose="020B0604020202020204" pitchFamily="34" charset="0"/>
-                <a:cs typeface="Arial" panose="020B0604020202020204" pitchFamily="34" charset="0"/>
-              </a:rPr>
-              <a:t>índice</a:t>
-            </a:r>
-            <a:r>
-              <a:rPr lang="en-US" sz="1200" dirty="0">
-                <a:latin typeface="Arial" panose="020B0604020202020204" pitchFamily="34" charset="0"/>
-                <a:cs typeface="Arial" panose="020B0604020202020204" pitchFamily="34" charset="0"/>
-              </a:rPr>
-              <a:t> de la </a:t>
-            </a:r>
-            <a:r>
-              <a:rPr lang="en-US" sz="1200" dirty="0" err="1">
-                <a:latin typeface="Arial" panose="020B0604020202020204" pitchFamily="34" charset="0"/>
-                <a:cs typeface="Arial" panose="020B0604020202020204" pitchFamily="34" charset="0"/>
-              </a:rPr>
-              <a:t>cubierta</a:t>
-            </a:r>
-            <a:r>
-              <a:rPr lang="en-US" sz="1200" dirty="0">
-                <a:latin typeface="Arial" panose="020B0604020202020204" pitchFamily="34" charset="0"/>
-                <a:cs typeface="Arial" panose="020B0604020202020204" pitchFamily="34" charset="0"/>
-              </a:rPr>
-              <a:t>. </a:t>
-            </a:r>
-          </a:p>
-          <a:p>
-            <a:pPr algn="just"/>
-            <a:r>
-              <a:rPr lang="en-US" sz="1200" dirty="0">
-                <a:latin typeface="Arial" panose="020B0604020202020204" pitchFamily="34" charset="0"/>
-                <a:cs typeface="Arial" panose="020B0604020202020204" pitchFamily="34" charset="0"/>
-              </a:rPr>
-              <a:t>El primer modo es TE y </a:t>
-            </a:r>
-            <a:r>
-              <a:rPr lang="en-US" sz="1200" dirty="0" err="1">
-                <a:latin typeface="Arial" panose="020B0604020202020204" pitchFamily="34" charset="0"/>
-                <a:cs typeface="Arial" panose="020B0604020202020204" pitchFamily="34" charset="0"/>
-              </a:rPr>
-              <a:t>el</a:t>
-            </a:r>
-            <a:r>
-              <a:rPr lang="en-US" sz="1200" dirty="0">
-                <a:latin typeface="Arial" panose="020B0604020202020204" pitchFamily="34" charset="0"/>
-                <a:cs typeface="Arial" panose="020B0604020202020204" pitchFamily="34" charset="0"/>
-              </a:rPr>
-              <a:t> </a:t>
-            </a:r>
-            <a:r>
-              <a:rPr lang="en-US" sz="1200" dirty="0" err="1">
-                <a:latin typeface="Arial" panose="020B0604020202020204" pitchFamily="34" charset="0"/>
-                <a:cs typeface="Arial" panose="020B0604020202020204" pitchFamily="34" charset="0"/>
-              </a:rPr>
-              <a:t>segundo</a:t>
-            </a:r>
-            <a:r>
-              <a:rPr lang="en-US" sz="1200" dirty="0">
-                <a:latin typeface="Arial" panose="020B0604020202020204" pitchFamily="34" charset="0"/>
-                <a:cs typeface="Arial" panose="020B0604020202020204" pitchFamily="34" charset="0"/>
-              </a:rPr>
-              <a:t> TM.</a:t>
-            </a:r>
-          </a:p>
-          <a:p>
-            <a:pPr algn="just"/>
-            <a:r>
-              <a:rPr lang="en-US" sz="1200" dirty="0">
-                <a:latin typeface="Arial" panose="020B0604020202020204" pitchFamily="34" charset="0"/>
-                <a:cs typeface="Arial" panose="020B0604020202020204" pitchFamily="34" charset="0"/>
-              </a:rPr>
-              <a:t>Si </a:t>
-            </a:r>
-            <a:r>
-              <a:rPr lang="en-US" sz="1200" dirty="0" err="1">
-                <a:latin typeface="Arial" panose="020B0604020202020204" pitchFamily="34" charset="0"/>
-                <a:cs typeface="Arial" panose="020B0604020202020204" pitchFamily="34" charset="0"/>
-              </a:rPr>
-              <a:t>yo</a:t>
-            </a:r>
-            <a:r>
-              <a:rPr lang="en-US" sz="1200" dirty="0">
-                <a:latin typeface="Arial" panose="020B0604020202020204" pitchFamily="34" charset="0"/>
-                <a:cs typeface="Arial" panose="020B0604020202020204" pitchFamily="34" charset="0"/>
-              </a:rPr>
-              <a:t> </a:t>
-            </a:r>
-            <a:r>
-              <a:rPr lang="en-US" sz="1200" dirty="0" err="1">
-                <a:latin typeface="Arial" panose="020B0604020202020204" pitchFamily="34" charset="0"/>
-                <a:cs typeface="Arial" panose="020B0604020202020204" pitchFamily="34" charset="0"/>
-              </a:rPr>
-              <a:t>tuviera</a:t>
-            </a:r>
-            <a:r>
-              <a:rPr lang="en-US" sz="1200" dirty="0">
-                <a:latin typeface="Arial" panose="020B0604020202020204" pitchFamily="34" charset="0"/>
-                <a:cs typeface="Arial" panose="020B0604020202020204" pitchFamily="34" charset="0"/>
-              </a:rPr>
-              <a:t> </a:t>
-            </a:r>
-            <a:r>
-              <a:rPr lang="en-US" sz="1200" dirty="0" err="1">
-                <a:latin typeface="Arial" panose="020B0604020202020204" pitchFamily="34" charset="0"/>
-                <a:cs typeface="Arial" panose="020B0604020202020204" pitchFamily="34" charset="0"/>
-              </a:rPr>
-              <a:t>alguna</a:t>
-            </a:r>
-            <a:r>
-              <a:rPr lang="en-US" sz="1200" dirty="0">
-                <a:latin typeface="Arial" panose="020B0604020202020204" pitchFamily="34" charset="0"/>
-                <a:cs typeface="Arial" panose="020B0604020202020204" pitchFamily="34" charset="0"/>
-              </a:rPr>
-              <a:t> forma de </a:t>
-            </a:r>
-            <a:r>
-              <a:rPr lang="en-US" sz="1200" dirty="0" err="1">
-                <a:latin typeface="Arial" panose="020B0604020202020204" pitchFamily="34" charset="0"/>
-                <a:cs typeface="Arial" panose="020B0604020202020204" pitchFamily="34" charset="0"/>
-              </a:rPr>
-              <a:t>filtrar</a:t>
-            </a:r>
-            <a:r>
-              <a:rPr lang="en-US" sz="1200" dirty="0">
-                <a:latin typeface="Arial" panose="020B0604020202020204" pitchFamily="34" charset="0"/>
-                <a:cs typeface="Arial" panose="020B0604020202020204" pitchFamily="34" charset="0"/>
-              </a:rPr>
-              <a:t> la </a:t>
-            </a:r>
-            <a:r>
-              <a:rPr lang="en-US" sz="1200" dirty="0" err="1">
-                <a:latin typeface="Arial" panose="020B0604020202020204" pitchFamily="34" charset="0"/>
-                <a:cs typeface="Arial" panose="020B0604020202020204" pitchFamily="34" charset="0"/>
-              </a:rPr>
-              <a:t>polarización</a:t>
-            </a:r>
-            <a:r>
-              <a:rPr lang="en-US" sz="1200" dirty="0">
-                <a:latin typeface="Arial" panose="020B0604020202020204" pitchFamily="34" charset="0"/>
-                <a:cs typeface="Arial" panose="020B0604020202020204" pitchFamily="34" charset="0"/>
-              </a:rPr>
-              <a:t> a la entrada del </a:t>
-            </a:r>
-            <a:r>
-              <a:rPr lang="en-US" sz="1200" dirty="0" err="1">
-                <a:latin typeface="Arial" panose="020B0604020202020204" pitchFamily="34" charset="0"/>
-                <a:cs typeface="Arial" panose="020B0604020202020204" pitchFamily="34" charset="0"/>
-              </a:rPr>
-              <a:t>circuito</a:t>
-            </a:r>
-            <a:r>
-              <a:rPr lang="en-US" sz="1200" dirty="0">
-                <a:latin typeface="Arial" panose="020B0604020202020204" pitchFamily="34" charset="0"/>
-                <a:cs typeface="Arial" panose="020B0604020202020204" pitchFamily="34" charset="0"/>
-              </a:rPr>
-              <a:t> </a:t>
-            </a:r>
-            <a:r>
-              <a:rPr lang="en-US" sz="1200" dirty="0" err="1">
-                <a:latin typeface="Arial" panose="020B0604020202020204" pitchFamily="34" charset="0"/>
-                <a:cs typeface="Arial" panose="020B0604020202020204" pitchFamily="34" charset="0"/>
-              </a:rPr>
-              <a:t>entonces</a:t>
-            </a:r>
-            <a:r>
-              <a:rPr lang="en-US" sz="1200" dirty="0">
-                <a:latin typeface="Arial" panose="020B0604020202020204" pitchFamily="34" charset="0"/>
-                <a:cs typeface="Arial" panose="020B0604020202020204" pitchFamily="34" charset="0"/>
-              </a:rPr>
-              <a:t> </a:t>
-            </a:r>
-            <a:r>
-              <a:rPr lang="en-US" sz="1200" dirty="0" err="1">
-                <a:latin typeface="Arial" panose="020B0604020202020204" pitchFamily="34" charset="0"/>
-                <a:cs typeface="Arial" panose="020B0604020202020204" pitchFamily="34" charset="0"/>
-              </a:rPr>
-              <a:t>esa</a:t>
-            </a:r>
-            <a:r>
-              <a:rPr lang="en-US" sz="1200" dirty="0">
-                <a:latin typeface="Arial" panose="020B0604020202020204" pitchFamily="34" charset="0"/>
-                <a:cs typeface="Arial" panose="020B0604020202020204" pitchFamily="34" charset="0"/>
-              </a:rPr>
-              <a:t> </a:t>
-            </a:r>
-            <a:r>
-              <a:rPr lang="en-US" sz="1200" dirty="0" err="1">
-                <a:latin typeface="Arial" panose="020B0604020202020204" pitchFamily="34" charset="0"/>
-                <a:cs typeface="Arial" panose="020B0604020202020204" pitchFamily="34" charset="0"/>
-              </a:rPr>
-              <a:t>guía</a:t>
-            </a:r>
-            <a:r>
-              <a:rPr lang="en-US" sz="1200" dirty="0">
-                <a:latin typeface="Arial" panose="020B0604020202020204" pitchFamily="34" charset="0"/>
-                <a:cs typeface="Arial" panose="020B0604020202020204" pitchFamily="34" charset="0"/>
-              </a:rPr>
-              <a:t> </a:t>
-            </a:r>
-            <a:r>
-              <a:rPr lang="en-US" sz="1200" dirty="0" err="1">
-                <a:latin typeface="Arial" panose="020B0604020202020204" pitchFamily="34" charset="0"/>
-                <a:cs typeface="Arial" panose="020B0604020202020204" pitchFamily="34" charset="0"/>
-              </a:rPr>
-              <a:t>sería</a:t>
-            </a:r>
-            <a:r>
-              <a:rPr lang="en-US" sz="1200" dirty="0">
-                <a:latin typeface="Arial" panose="020B0604020202020204" pitchFamily="34" charset="0"/>
-                <a:cs typeface="Arial" panose="020B0604020202020204" pitchFamily="34" charset="0"/>
-              </a:rPr>
-              <a:t> </a:t>
-            </a:r>
-            <a:r>
-              <a:rPr lang="en-US" sz="1200" dirty="0" err="1">
-                <a:latin typeface="Arial" panose="020B0604020202020204" pitchFamily="34" charset="0"/>
-                <a:cs typeface="Arial" panose="020B0604020202020204" pitchFamily="34" charset="0"/>
-              </a:rPr>
-              <a:t>monomodo</a:t>
-            </a:r>
-            <a:r>
-              <a:rPr lang="en-US" sz="1200" dirty="0">
-                <a:latin typeface="Arial" panose="020B0604020202020204" pitchFamily="34" charset="0"/>
-                <a:cs typeface="Arial" panose="020B0604020202020204" pitchFamily="34" charset="0"/>
-              </a:rPr>
-              <a:t>. </a:t>
-            </a:r>
-          </a:p>
-          <a:p>
-            <a:pPr algn="just"/>
-            <a:r>
-              <a:rPr lang="en-US" sz="1200" dirty="0">
-                <a:latin typeface="Arial" panose="020B0604020202020204" pitchFamily="34" charset="0"/>
-                <a:cs typeface="Arial" panose="020B0604020202020204" pitchFamily="34" charset="0"/>
-              </a:rPr>
-              <a:t>Es </a:t>
-            </a:r>
-            <a:r>
-              <a:rPr lang="en-US" sz="1200" dirty="0" err="1">
-                <a:latin typeface="Arial" panose="020B0604020202020204" pitchFamily="34" charset="0"/>
-                <a:cs typeface="Arial" panose="020B0604020202020204" pitchFamily="34" charset="0"/>
-              </a:rPr>
-              <a:t>una</a:t>
-            </a:r>
-            <a:r>
-              <a:rPr lang="en-US" sz="1200" dirty="0">
-                <a:latin typeface="Arial" panose="020B0604020202020204" pitchFamily="34" charset="0"/>
-                <a:cs typeface="Arial" panose="020B0604020202020204" pitchFamily="34" charset="0"/>
-              </a:rPr>
-              <a:t> </a:t>
-            </a:r>
-            <a:r>
-              <a:rPr lang="en-US" sz="1200" dirty="0" err="1">
-                <a:latin typeface="Arial" panose="020B0604020202020204" pitchFamily="34" charset="0"/>
-                <a:cs typeface="Arial" panose="020B0604020202020204" pitchFamily="34" charset="0"/>
-              </a:rPr>
-              <a:t>guia</a:t>
-            </a:r>
-            <a:r>
-              <a:rPr lang="en-US" sz="1200" dirty="0">
-                <a:latin typeface="Arial" panose="020B0604020202020204" pitchFamily="34" charset="0"/>
-                <a:cs typeface="Arial" panose="020B0604020202020204" pitchFamily="34" charset="0"/>
-              </a:rPr>
-              <a:t> </a:t>
-            </a:r>
-            <a:r>
-              <a:rPr lang="en-US" sz="1200" dirty="0" err="1">
-                <a:latin typeface="Arial" panose="020B0604020202020204" pitchFamily="34" charset="0"/>
-                <a:cs typeface="Arial" panose="020B0604020202020204" pitchFamily="34" charset="0"/>
-              </a:rPr>
-              <a:t>monomodo</a:t>
-            </a:r>
-            <a:r>
-              <a:rPr lang="en-US" sz="1200" dirty="0">
-                <a:latin typeface="Arial" panose="020B0604020202020204" pitchFamily="34" charset="0"/>
-                <a:cs typeface="Arial" panose="020B0604020202020204" pitchFamily="34" charset="0"/>
-              </a:rPr>
-              <a:t>. </a:t>
-            </a:r>
-            <a:r>
-              <a:rPr lang="en-US" sz="1200" dirty="0" err="1">
-                <a:latin typeface="Arial" panose="020B0604020202020204" pitchFamily="34" charset="0"/>
-                <a:cs typeface="Arial" panose="020B0604020202020204" pitchFamily="34" charset="0"/>
-              </a:rPr>
-              <a:t>Podria</a:t>
-            </a:r>
-            <a:r>
-              <a:rPr lang="en-US" sz="1200" dirty="0">
-                <a:latin typeface="Arial" panose="020B0604020202020204" pitchFamily="34" charset="0"/>
-                <a:cs typeface="Arial" panose="020B0604020202020204" pitchFamily="34" charset="0"/>
-              </a:rPr>
-              <a:t> ser </a:t>
-            </a:r>
-            <a:r>
-              <a:rPr lang="en-US" sz="1200" dirty="0" err="1">
-                <a:latin typeface="Arial" panose="020B0604020202020204" pitchFamily="34" charset="0"/>
-                <a:cs typeface="Arial" panose="020B0604020202020204" pitchFamily="34" charset="0"/>
-              </a:rPr>
-              <a:t>monomodo</a:t>
-            </a:r>
-            <a:r>
-              <a:rPr lang="en-US" sz="1200" dirty="0">
-                <a:latin typeface="Arial" panose="020B0604020202020204" pitchFamily="34" charset="0"/>
-                <a:cs typeface="Arial" panose="020B0604020202020204" pitchFamily="34" charset="0"/>
-              </a:rPr>
-              <a:t> TE o </a:t>
-            </a:r>
-            <a:r>
-              <a:rPr lang="en-US" sz="1200" dirty="0" err="1">
-                <a:latin typeface="Arial" panose="020B0604020202020204" pitchFamily="34" charset="0"/>
-                <a:cs typeface="Arial" panose="020B0604020202020204" pitchFamily="34" charset="0"/>
-              </a:rPr>
-              <a:t>monomodo</a:t>
-            </a:r>
-            <a:r>
-              <a:rPr lang="en-US" sz="1200" dirty="0">
-                <a:latin typeface="Arial" panose="020B0604020202020204" pitchFamily="34" charset="0"/>
-                <a:cs typeface="Arial" panose="020B0604020202020204" pitchFamily="34" charset="0"/>
-              </a:rPr>
-              <a:t> TM y </a:t>
-            </a:r>
-            <a:r>
-              <a:rPr lang="en-US" sz="1200" dirty="0" err="1">
-                <a:latin typeface="Arial" panose="020B0604020202020204" pitchFamily="34" charset="0"/>
-                <a:cs typeface="Arial" panose="020B0604020202020204" pitchFamily="34" charset="0"/>
-              </a:rPr>
-              <a:t>propagaríamos</a:t>
-            </a:r>
-            <a:r>
-              <a:rPr lang="en-US" sz="1200" dirty="0">
-                <a:latin typeface="Arial" panose="020B0604020202020204" pitchFamily="34" charset="0"/>
-                <a:cs typeface="Arial" panose="020B0604020202020204" pitchFamily="34" charset="0"/>
-              </a:rPr>
-              <a:t> </a:t>
-            </a:r>
-            <a:r>
-              <a:rPr lang="en-US" sz="1200" dirty="0" err="1">
-                <a:latin typeface="Arial" panose="020B0604020202020204" pitchFamily="34" charset="0"/>
-                <a:cs typeface="Arial" panose="020B0604020202020204" pitchFamily="34" charset="0"/>
-              </a:rPr>
-              <a:t>el</a:t>
-            </a:r>
-            <a:r>
-              <a:rPr lang="en-US" sz="1200" dirty="0">
-                <a:latin typeface="Arial" panose="020B0604020202020204" pitchFamily="34" charset="0"/>
-                <a:cs typeface="Arial" panose="020B0604020202020204" pitchFamily="34" charset="0"/>
-              </a:rPr>
-              <a:t> modo de </a:t>
-            </a:r>
-            <a:r>
-              <a:rPr lang="en-US" sz="1200" dirty="0" err="1">
-                <a:latin typeface="Arial" panose="020B0604020202020204" pitchFamily="34" charset="0"/>
-                <a:cs typeface="Arial" panose="020B0604020202020204" pitchFamily="34" charset="0"/>
-              </a:rPr>
-              <a:t>orden</a:t>
-            </a:r>
-            <a:r>
-              <a:rPr lang="en-US" sz="1200" dirty="0">
-                <a:latin typeface="Arial" panose="020B0604020202020204" pitchFamily="34" charset="0"/>
-                <a:cs typeface="Arial" panose="020B0604020202020204" pitchFamily="34" charset="0"/>
-              </a:rPr>
-              <a:t> 0 </a:t>
-            </a:r>
-            <a:r>
-              <a:rPr lang="en-US" sz="1200" dirty="0" err="1">
-                <a:latin typeface="Arial" panose="020B0604020202020204" pitchFamily="34" charset="0"/>
-                <a:cs typeface="Arial" panose="020B0604020202020204" pitchFamily="34" charset="0"/>
-              </a:rPr>
-              <a:t>en</a:t>
-            </a:r>
-            <a:r>
-              <a:rPr lang="en-US" sz="1200" dirty="0">
-                <a:latin typeface="Arial" panose="020B0604020202020204" pitchFamily="34" charset="0"/>
-                <a:cs typeface="Arial" panose="020B0604020202020204" pitchFamily="34" charset="0"/>
-              </a:rPr>
-              <a:t> ambas, TE0 o TM0.</a:t>
-            </a:r>
-          </a:p>
-          <a:p>
-            <a:pPr algn="just"/>
-            <a:r>
-              <a:rPr lang="en-US" sz="1200" dirty="0">
-                <a:latin typeface="Arial" panose="020B0604020202020204" pitchFamily="34" charset="0"/>
-                <a:cs typeface="Arial" panose="020B0604020202020204" pitchFamily="34" charset="0"/>
-              </a:rPr>
-              <a:t>El </a:t>
-            </a:r>
-            <a:r>
-              <a:rPr lang="en-US" sz="1200" dirty="0" err="1">
-                <a:latin typeface="Arial" panose="020B0604020202020204" pitchFamily="34" charset="0"/>
-                <a:cs typeface="Arial" panose="020B0604020202020204" pitchFamily="34" charset="0"/>
-              </a:rPr>
-              <a:t>índice</a:t>
-            </a:r>
-            <a:r>
-              <a:rPr lang="en-US" sz="1200" dirty="0">
-                <a:latin typeface="Arial" panose="020B0604020202020204" pitchFamily="34" charset="0"/>
-                <a:cs typeface="Arial" panose="020B0604020202020204" pitchFamily="34" charset="0"/>
-              </a:rPr>
-              <a:t> </a:t>
-            </a:r>
-            <a:r>
-              <a:rPr lang="en-US" sz="1200" dirty="0" err="1">
-                <a:latin typeface="Arial" panose="020B0604020202020204" pitchFamily="34" charset="0"/>
-                <a:cs typeface="Arial" panose="020B0604020202020204" pitchFamily="34" charset="0"/>
-              </a:rPr>
-              <a:t>efectivo</a:t>
-            </a:r>
-            <a:r>
-              <a:rPr lang="en-US" sz="1200" dirty="0">
-                <a:latin typeface="Arial" panose="020B0604020202020204" pitchFamily="34" charset="0"/>
-                <a:cs typeface="Arial" panose="020B0604020202020204" pitchFamily="34" charset="0"/>
-              </a:rPr>
-              <a:t> </a:t>
-            </a:r>
-            <a:r>
-              <a:rPr lang="en-US" sz="1200" dirty="0" err="1">
-                <a:latin typeface="Arial" panose="020B0604020202020204" pitchFamily="34" charset="0"/>
-                <a:cs typeface="Arial" panose="020B0604020202020204" pitchFamily="34" charset="0"/>
-              </a:rPr>
-              <a:t>modela</a:t>
-            </a:r>
-            <a:r>
-              <a:rPr lang="en-US" sz="1200" dirty="0">
-                <a:latin typeface="Arial" panose="020B0604020202020204" pitchFamily="34" charset="0"/>
-                <a:cs typeface="Arial" panose="020B0604020202020204" pitchFamily="34" charset="0"/>
-              </a:rPr>
-              <a:t> la </a:t>
-            </a:r>
-            <a:r>
-              <a:rPr lang="en-US" sz="1200" dirty="0" err="1">
-                <a:latin typeface="Arial" panose="020B0604020202020204" pitchFamily="34" charset="0"/>
-                <a:cs typeface="Arial" panose="020B0604020202020204" pitchFamily="34" charset="0"/>
-              </a:rPr>
-              <a:t>propagación</a:t>
-            </a:r>
-            <a:r>
-              <a:rPr lang="en-US" sz="1200" dirty="0">
-                <a:latin typeface="Arial" panose="020B0604020202020204" pitchFamily="34" charset="0"/>
-                <a:cs typeface="Arial" panose="020B0604020202020204" pitchFamily="34" charset="0"/>
-              </a:rPr>
-              <a:t> de la </a:t>
-            </a:r>
-            <a:r>
-              <a:rPr lang="en-US" sz="1200" dirty="0" err="1">
-                <a:latin typeface="Arial" panose="020B0604020202020204" pitchFamily="34" charset="0"/>
-                <a:cs typeface="Arial" panose="020B0604020202020204" pitchFamily="34" charset="0"/>
-              </a:rPr>
-              <a:t>fase</a:t>
-            </a:r>
-            <a:r>
-              <a:rPr lang="en-US" sz="1200" dirty="0">
-                <a:latin typeface="Arial" panose="020B0604020202020204" pitchFamily="34" charset="0"/>
-                <a:cs typeface="Arial" panose="020B0604020202020204" pitchFamily="34" charset="0"/>
-              </a:rPr>
-              <a:t>, </a:t>
-            </a:r>
-            <a:r>
-              <a:rPr lang="en-US" sz="1200" dirty="0" err="1">
-                <a:latin typeface="Arial" panose="020B0604020202020204" pitchFamily="34" charset="0"/>
-                <a:cs typeface="Arial" panose="020B0604020202020204" pitchFamily="34" charset="0"/>
-              </a:rPr>
-              <a:t>como</a:t>
-            </a:r>
-            <a:r>
-              <a:rPr lang="en-US" sz="1200" dirty="0">
-                <a:latin typeface="Arial" panose="020B0604020202020204" pitchFamily="34" charset="0"/>
-                <a:cs typeface="Arial" panose="020B0604020202020204" pitchFamily="34" charset="0"/>
-              </a:rPr>
-              <a:t> </a:t>
-            </a:r>
-            <a:r>
-              <a:rPr lang="en-US" sz="1200" dirty="0" err="1">
-                <a:latin typeface="Arial" panose="020B0604020202020204" pitchFamily="34" charset="0"/>
-                <a:cs typeface="Arial" panose="020B0604020202020204" pitchFamily="34" charset="0"/>
-              </a:rPr>
-              <a:t>el</a:t>
-            </a:r>
-            <a:r>
-              <a:rPr lang="en-US" sz="1200" dirty="0">
-                <a:latin typeface="Arial" panose="020B0604020202020204" pitchFamily="34" charset="0"/>
-                <a:cs typeface="Arial" panose="020B0604020202020204" pitchFamily="34" charset="0"/>
-              </a:rPr>
-              <a:t> </a:t>
-            </a:r>
-            <a:r>
-              <a:rPr lang="en-US" sz="1200" dirty="0" err="1">
-                <a:latin typeface="Arial" panose="020B0604020202020204" pitchFamily="34" charset="0"/>
-                <a:cs typeface="Arial" panose="020B0604020202020204" pitchFamily="34" charset="0"/>
-              </a:rPr>
-              <a:t>índice</a:t>
-            </a:r>
-            <a:r>
-              <a:rPr lang="en-US" sz="1200" dirty="0">
-                <a:latin typeface="Arial" panose="020B0604020202020204" pitchFamily="34" charset="0"/>
-                <a:cs typeface="Arial" panose="020B0604020202020204" pitchFamily="34" charset="0"/>
-              </a:rPr>
-              <a:t> </a:t>
-            </a:r>
-            <a:r>
-              <a:rPr lang="en-US" sz="1200" dirty="0" err="1">
-                <a:latin typeface="Arial" panose="020B0604020202020204" pitchFamily="34" charset="0"/>
-                <a:cs typeface="Arial" panose="020B0604020202020204" pitchFamily="34" charset="0"/>
-              </a:rPr>
-              <a:t>efectivo</a:t>
-            </a:r>
-            <a:r>
-              <a:rPr lang="en-US" sz="1200" dirty="0">
-                <a:latin typeface="Arial" panose="020B0604020202020204" pitchFamily="34" charset="0"/>
-                <a:cs typeface="Arial" panose="020B0604020202020204" pitchFamily="34" charset="0"/>
-              </a:rPr>
-              <a:t> </a:t>
-            </a:r>
-            <a:r>
-              <a:rPr lang="en-US" sz="1200" dirty="0" err="1">
-                <a:latin typeface="Arial" panose="020B0604020202020204" pitchFamily="34" charset="0"/>
-                <a:cs typeface="Arial" panose="020B0604020202020204" pitchFamily="34" charset="0"/>
-              </a:rPr>
-              <a:t>váría</a:t>
-            </a:r>
-            <a:r>
-              <a:rPr lang="en-US" sz="1200" dirty="0">
-                <a:latin typeface="Arial" panose="020B0604020202020204" pitchFamily="34" charset="0"/>
-                <a:cs typeface="Arial" panose="020B0604020202020204" pitchFamily="34" charset="0"/>
-              </a:rPr>
-              <a:t>, no es </a:t>
-            </a:r>
-            <a:r>
-              <a:rPr lang="en-US" sz="1200" dirty="0" err="1">
-                <a:latin typeface="Arial" panose="020B0604020202020204" pitchFamily="34" charset="0"/>
-                <a:cs typeface="Arial" panose="020B0604020202020204" pitchFamily="34" charset="0"/>
-              </a:rPr>
-              <a:t>cte</a:t>
-            </a:r>
-            <a:r>
-              <a:rPr lang="en-US" sz="1200" dirty="0">
-                <a:latin typeface="Arial" panose="020B0604020202020204" pitchFamily="34" charset="0"/>
-                <a:cs typeface="Arial" panose="020B0604020202020204" pitchFamily="34" charset="0"/>
-              </a:rPr>
-              <a:t> y </a:t>
-            </a:r>
-            <a:r>
-              <a:rPr lang="en-US" sz="1200" dirty="0" err="1">
-                <a:latin typeface="Arial" panose="020B0604020202020204" pitchFamily="34" charset="0"/>
-                <a:cs typeface="Arial" panose="020B0604020202020204" pitchFamily="34" charset="0"/>
-              </a:rPr>
-              <a:t>tendremos</a:t>
-            </a:r>
-            <a:r>
-              <a:rPr lang="en-US" sz="1200" dirty="0">
-                <a:latin typeface="Arial" panose="020B0604020202020204" pitchFamily="34" charset="0"/>
-                <a:cs typeface="Arial" panose="020B0604020202020204" pitchFamily="34" charset="0"/>
-              </a:rPr>
-              <a:t> </a:t>
-            </a:r>
-            <a:r>
-              <a:rPr lang="en-US" sz="1200" dirty="0" err="1">
-                <a:latin typeface="Arial" panose="020B0604020202020204" pitchFamily="34" charset="0"/>
-                <a:cs typeface="Arial" panose="020B0604020202020204" pitchFamily="34" charset="0"/>
-              </a:rPr>
-              <a:t>dependencia</a:t>
-            </a:r>
-            <a:r>
-              <a:rPr lang="en-US" sz="1200" dirty="0">
-                <a:latin typeface="Arial" panose="020B0604020202020204" pitchFamily="34" charset="0"/>
-                <a:cs typeface="Arial" panose="020B0604020202020204" pitchFamily="34" charset="0"/>
-              </a:rPr>
-              <a:t> de la longitude de </a:t>
-            </a:r>
-            <a:r>
-              <a:rPr lang="en-US" sz="1200" dirty="0" err="1">
-                <a:latin typeface="Arial" panose="020B0604020202020204" pitchFamily="34" charset="0"/>
-                <a:cs typeface="Arial" panose="020B0604020202020204" pitchFamily="34" charset="0"/>
-              </a:rPr>
-              <a:t>onda</a:t>
-            </a:r>
-            <a:r>
-              <a:rPr lang="en-US" sz="1200" dirty="0">
-                <a:latin typeface="Arial" panose="020B0604020202020204" pitchFamily="34" charset="0"/>
-                <a:cs typeface="Arial" panose="020B0604020202020204" pitchFamily="34" charset="0"/>
-              </a:rPr>
-              <a:t>. </a:t>
-            </a:r>
-            <a:r>
-              <a:rPr lang="en-US" sz="1200" dirty="0" err="1">
-                <a:latin typeface="Arial" panose="020B0604020202020204" pitchFamily="34" charset="0"/>
-                <a:cs typeface="Arial" panose="020B0604020202020204" pitchFamily="34" charset="0"/>
-              </a:rPr>
-              <a:t>Operará</a:t>
-            </a:r>
-            <a:r>
-              <a:rPr lang="en-US" sz="1200" dirty="0">
-                <a:latin typeface="Arial" panose="020B0604020202020204" pitchFamily="34" charset="0"/>
-                <a:cs typeface="Arial" panose="020B0604020202020204" pitchFamily="34" charset="0"/>
-              </a:rPr>
-              <a:t> de </a:t>
-            </a:r>
-            <a:r>
-              <a:rPr lang="en-US" sz="1200" dirty="0" err="1">
-                <a:latin typeface="Arial" panose="020B0604020202020204" pitchFamily="34" charset="0"/>
-                <a:cs typeface="Arial" panose="020B0604020202020204" pitchFamily="34" charset="0"/>
-              </a:rPr>
-              <a:t>manera</a:t>
-            </a:r>
-            <a:r>
-              <a:rPr lang="en-US" sz="1200" dirty="0">
-                <a:latin typeface="Arial" panose="020B0604020202020204" pitchFamily="34" charset="0"/>
-                <a:cs typeface="Arial" panose="020B0604020202020204" pitchFamily="34" charset="0"/>
-              </a:rPr>
-              <a:t> </a:t>
-            </a:r>
-            <a:r>
-              <a:rPr lang="en-US" sz="1200" dirty="0" err="1">
-                <a:latin typeface="Arial" panose="020B0604020202020204" pitchFamily="34" charset="0"/>
-                <a:cs typeface="Arial" panose="020B0604020202020204" pitchFamily="34" charset="0"/>
-              </a:rPr>
-              <a:t>diferente</a:t>
-            </a:r>
-            <a:r>
-              <a:rPr lang="en-US" sz="1200" dirty="0">
-                <a:latin typeface="Arial" panose="020B0604020202020204" pitchFamily="34" charset="0"/>
-                <a:cs typeface="Arial" panose="020B0604020202020204" pitchFamily="34" charset="0"/>
-              </a:rPr>
-              <a:t>. </a:t>
-            </a:r>
-          </a:p>
-          <a:p>
-            <a:pPr algn="just"/>
-            <a:r>
-              <a:rPr lang="en-US" sz="1200" dirty="0">
-                <a:latin typeface="Arial" panose="020B0604020202020204" pitchFamily="34" charset="0"/>
-                <a:cs typeface="Arial" panose="020B0604020202020204" pitchFamily="34" charset="0"/>
-              </a:rPr>
-              <a:t>El </a:t>
-            </a:r>
-            <a:r>
-              <a:rPr lang="en-US" sz="1200" dirty="0" err="1">
-                <a:latin typeface="Arial" panose="020B0604020202020204" pitchFamily="34" charset="0"/>
-                <a:cs typeface="Arial" panose="020B0604020202020204" pitchFamily="34" charset="0"/>
-              </a:rPr>
-              <a:t>núcleo</a:t>
-            </a:r>
-            <a:r>
-              <a:rPr lang="en-US" sz="1200" dirty="0">
-                <a:latin typeface="Arial" panose="020B0604020202020204" pitchFamily="34" charset="0"/>
-                <a:cs typeface="Arial" panose="020B0604020202020204" pitchFamily="34" charset="0"/>
-              </a:rPr>
-              <a:t> de </a:t>
-            </a:r>
-            <a:r>
-              <a:rPr lang="en-US" sz="1200" dirty="0" err="1">
-                <a:latin typeface="Arial" panose="020B0604020202020204" pitchFamily="34" charset="0"/>
-                <a:cs typeface="Arial" panose="020B0604020202020204" pitchFamily="34" charset="0"/>
-              </a:rPr>
-              <a:t>nitruro</a:t>
-            </a:r>
-            <a:r>
-              <a:rPr lang="en-US" sz="1200" dirty="0">
-                <a:latin typeface="Arial" panose="020B0604020202020204" pitchFamily="34" charset="0"/>
-                <a:cs typeface="Arial" panose="020B0604020202020204" pitchFamily="34" charset="0"/>
-              </a:rPr>
-              <a:t> de </a:t>
-            </a:r>
-            <a:r>
-              <a:rPr lang="en-US" sz="1200" dirty="0" err="1">
-                <a:latin typeface="Arial" panose="020B0604020202020204" pitchFamily="34" charset="0"/>
-                <a:cs typeface="Arial" panose="020B0604020202020204" pitchFamily="34" charset="0"/>
-              </a:rPr>
-              <a:t>silicio</a:t>
-            </a:r>
-            <a:r>
-              <a:rPr lang="en-US" sz="1200" dirty="0">
-                <a:latin typeface="Arial" panose="020B0604020202020204" pitchFamily="34" charset="0"/>
-                <a:cs typeface="Arial" panose="020B0604020202020204" pitchFamily="34" charset="0"/>
-              </a:rPr>
-              <a:t>, </a:t>
-            </a:r>
-            <a:r>
-              <a:rPr lang="en-US" sz="1200" dirty="0" err="1">
-                <a:latin typeface="Arial" panose="020B0604020202020204" pitchFamily="34" charset="0"/>
-                <a:cs typeface="Arial" panose="020B0604020202020204" pitchFamily="34" charset="0"/>
-              </a:rPr>
-              <a:t>su</a:t>
-            </a:r>
-            <a:r>
-              <a:rPr lang="en-US" sz="1200" dirty="0">
-                <a:latin typeface="Arial" panose="020B0604020202020204" pitchFamily="34" charset="0"/>
-                <a:cs typeface="Arial" panose="020B0604020202020204" pitchFamily="34" charset="0"/>
-              </a:rPr>
-              <a:t> </a:t>
-            </a:r>
-            <a:r>
-              <a:rPr lang="en-US" sz="1200" dirty="0" err="1">
-                <a:latin typeface="Arial" panose="020B0604020202020204" pitchFamily="34" charset="0"/>
-                <a:cs typeface="Arial" panose="020B0604020202020204" pitchFamily="34" charset="0"/>
-              </a:rPr>
-              <a:t>índice</a:t>
-            </a:r>
-            <a:r>
-              <a:rPr lang="en-US" sz="1200" dirty="0">
-                <a:latin typeface="Arial" panose="020B0604020202020204" pitchFamily="34" charset="0"/>
-                <a:cs typeface="Arial" panose="020B0604020202020204" pitchFamily="34" charset="0"/>
-              </a:rPr>
-              <a:t> es </a:t>
-            </a:r>
-            <a:r>
-              <a:rPr lang="en-US" sz="1200" dirty="0" err="1">
-                <a:latin typeface="Arial" panose="020B0604020202020204" pitchFamily="34" charset="0"/>
-                <a:cs typeface="Arial" panose="020B0604020202020204" pitchFamily="34" charset="0"/>
-              </a:rPr>
-              <a:t>cercano</a:t>
-            </a:r>
-            <a:r>
-              <a:rPr lang="en-US" sz="1200" dirty="0">
-                <a:latin typeface="Arial" panose="020B0604020202020204" pitchFamily="34" charset="0"/>
-                <a:cs typeface="Arial" panose="020B0604020202020204" pitchFamily="34" charset="0"/>
-              </a:rPr>
-              <a:t> a 2. </a:t>
-            </a:r>
-            <a:r>
-              <a:rPr lang="en-US" sz="1200" dirty="0" err="1">
-                <a:latin typeface="Arial" panose="020B0604020202020204" pitchFamily="34" charset="0"/>
-                <a:cs typeface="Arial" panose="020B0604020202020204" pitchFamily="34" charset="0"/>
-              </a:rPr>
-              <a:t>Entonces</a:t>
-            </a:r>
-            <a:r>
-              <a:rPr lang="en-US" sz="1200" dirty="0">
-                <a:latin typeface="Arial" panose="020B0604020202020204" pitchFamily="34" charset="0"/>
-                <a:cs typeface="Arial" panose="020B0604020202020204" pitchFamily="34" charset="0"/>
-              </a:rPr>
-              <a:t> </a:t>
-            </a:r>
-            <a:r>
-              <a:rPr lang="en-US" sz="1200" dirty="0" err="1">
-                <a:latin typeface="Arial" panose="020B0604020202020204" pitchFamily="34" charset="0"/>
-                <a:cs typeface="Arial" panose="020B0604020202020204" pitchFamily="34" charset="0"/>
-              </a:rPr>
-              <a:t>vemos</a:t>
-            </a:r>
-            <a:r>
-              <a:rPr lang="en-US" sz="1200" dirty="0">
-                <a:latin typeface="Arial" panose="020B0604020202020204" pitchFamily="34" charset="0"/>
-                <a:cs typeface="Arial" panose="020B0604020202020204" pitchFamily="34" charset="0"/>
-              </a:rPr>
-              <a:t> </a:t>
-            </a:r>
-            <a:r>
-              <a:rPr lang="en-US" sz="1200" dirty="0" err="1">
-                <a:latin typeface="Arial" panose="020B0604020202020204" pitchFamily="34" charset="0"/>
-                <a:cs typeface="Arial" panose="020B0604020202020204" pitchFamily="34" charset="0"/>
-              </a:rPr>
-              <a:t>que</a:t>
-            </a:r>
-            <a:r>
-              <a:rPr lang="en-US" sz="1200" dirty="0">
-                <a:latin typeface="Arial" panose="020B0604020202020204" pitchFamily="34" charset="0"/>
-                <a:cs typeface="Arial" panose="020B0604020202020204" pitchFamily="34" charset="0"/>
-              </a:rPr>
-              <a:t> no </a:t>
-            </a:r>
-            <a:r>
-              <a:rPr lang="en-US" sz="1200" dirty="0" err="1">
-                <a:latin typeface="Arial" panose="020B0604020202020204" pitchFamily="34" charset="0"/>
-                <a:cs typeface="Arial" panose="020B0604020202020204" pitchFamily="34" charset="0"/>
-              </a:rPr>
-              <a:t>está</a:t>
-            </a:r>
-            <a:r>
-              <a:rPr lang="en-US" sz="1200" dirty="0">
-                <a:latin typeface="Arial" panose="020B0604020202020204" pitchFamily="34" charset="0"/>
-                <a:cs typeface="Arial" panose="020B0604020202020204" pitchFamily="34" charset="0"/>
-              </a:rPr>
-              <a:t> </a:t>
-            </a:r>
-            <a:r>
-              <a:rPr lang="en-US" sz="1200" dirty="0" err="1">
-                <a:latin typeface="Arial" panose="020B0604020202020204" pitchFamily="34" charset="0"/>
-                <a:cs typeface="Arial" panose="020B0604020202020204" pitchFamily="34" charset="0"/>
-              </a:rPr>
-              <a:t>muy</a:t>
-            </a:r>
-            <a:r>
-              <a:rPr lang="en-US" sz="1200" dirty="0">
-                <a:latin typeface="Arial" panose="020B0604020202020204" pitchFamily="34" charset="0"/>
-                <a:cs typeface="Arial" panose="020B0604020202020204" pitchFamily="34" charset="0"/>
-              </a:rPr>
-              <a:t> </a:t>
-            </a:r>
-            <a:r>
-              <a:rPr lang="en-US" sz="1200" dirty="0" err="1">
-                <a:latin typeface="Arial" panose="020B0604020202020204" pitchFamily="34" charset="0"/>
-                <a:cs typeface="Arial" panose="020B0604020202020204" pitchFamily="34" charset="0"/>
-              </a:rPr>
-              <a:t>confinado</a:t>
-            </a:r>
-            <a:r>
-              <a:rPr lang="en-US" sz="1200" dirty="0">
-                <a:latin typeface="Arial" panose="020B0604020202020204" pitchFamily="34" charset="0"/>
-                <a:cs typeface="Arial" panose="020B0604020202020204" pitchFamily="34" charset="0"/>
-              </a:rPr>
-              <a:t>.</a:t>
+              <a:t> de 1.5.</a:t>
             </a:r>
           </a:p>
           <a:p>
@@ -7123,209 +8700,28 @@
               <a:cs typeface="Arial" panose="020B0604020202020204" pitchFamily="34" charset="0"/>
             </a:endParaRPr>
           </a:p>
-        </p:txBody>
-      </p:sp>
-      <p:sp>
-        <p:nvSpPr>
-          <p:cNvPr id="5" name="Rectángulo 4">
-            <a:extLst>
-              <a:ext uri="{FF2B5EF4-FFF2-40B4-BE49-F238E27FC236}">
-                <a16:creationId xmlns:a16="http://schemas.microsoft.com/office/drawing/2014/main" id="{88F19863-7091-B8CA-F848-DBEA5CEEA027}"/>
-              </a:ext>
-            </a:extLst>
-          </p:cNvPr>
-          <p:cNvSpPr/>
-          <p:nvPr/>
-        </p:nvSpPr>
-        <p:spPr>
-          <a:xfrm>
-            <a:off x="609441" y="1418373"/>
-            <a:ext cx="5332571" cy="3306028"/>
-          </a:xfrm>
-          <a:prstGeom prst="rect">
-            <a:avLst/>
-          </a:prstGeom>
-          <a:noFill/>
-          <a:ln w="28575">
-            <a:solidFill>
-              <a:srgbClr val="E0700D"/>
-            </a:solidFill>
-          </a:ln>
-        </p:spPr>
-        <p:style>
-          <a:lnRef idx="2">
-            <a:schemeClr val="accent1">
-              <a:shade val="15000"/>
-            </a:schemeClr>
-          </a:lnRef>
-          <a:fillRef idx="1">
-            <a:schemeClr val="accent1"/>
-          </a:fillRef>
-          <a:effectRef idx="0">
-            <a:schemeClr val="accent1"/>
-          </a:effectRef>
-          <a:fontRef idx="minor">
-            <a:schemeClr val="lt1"/>
-          </a:fontRef>
-        </p:style>
-        <p:txBody>
-          <a:bodyPr rtlCol="0" anchor="ctr"/>
-          <a:lstStyle/>
-          <a:p>
-            <a:pPr algn="ctr"/>
-            <a:endParaRPr lang="en-US"/>
-          </a:p>
-        </p:txBody>
-      </p:sp>
-      <p:sp>
-        <p:nvSpPr>
-          <p:cNvPr id="6" name="CuadroTexto 5">
-            <a:extLst>
-              <a:ext uri="{FF2B5EF4-FFF2-40B4-BE49-F238E27FC236}">
-                <a16:creationId xmlns:a16="http://schemas.microsoft.com/office/drawing/2014/main" id="{3C4E7A47-20E2-3C27-D841-5A665642F6E2}"/>
-              </a:ext>
-            </a:extLst>
-          </p:cNvPr>
-          <p:cNvSpPr txBox="1"/>
-          <p:nvPr/>
-        </p:nvSpPr>
-        <p:spPr>
-          <a:xfrm>
-            <a:off x="2285455" y="2671278"/>
-            <a:ext cx="1980542" cy="923330"/>
-          </a:xfrm>
-          <a:prstGeom prst="rect">
-            <a:avLst/>
-          </a:prstGeom>
-          <a:noFill/>
-        </p:spPr>
-        <p:txBody>
-          <a:bodyPr wrap="none" rtlCol="0">
-            <a:spAutoFit/>
-          </a:bodyPr>
-          <a:lstStyle/>
-          <a:p>
-            <a:pPr algn="ctr"/>
-            <a:r>
-              <a:rPr lang="en-US" b="1" dirty="0"/>
-              <a:t>shallow</a:t>
-            </a:r>
-            <a:r>
-              <a:rPr lang="en-US" dirty="0"/>
-              <a:t> waveguide</a:t>
-            </a:r>
-          </a:p>
-          <a:p>
-            <a:pPr algn="ctr"/>
-            <a:endParaRPr lang="en-US" dirty="0"/>
-          </a:p>
-          <a:p>
-            <a:pPr algn="ctr"/>
-            <a:r>
-              <a:rPr lang="en-US" dirty="0"/>
-              <a:t>Paste plot here</a:t>
-            </a:r>
-          </a:p>
-        </p:txBody>
-      </p:sp>
-      <p:sp>
-        <p:nvSpPr>
-          <p:cNvPr id="7" name="Rectángulo 6">
-            <a:extLst>
-              <a:ext uri="{FF2B5EF4-FFF2-40B4-BE49-F238E27FC236}">
-                <a16:creationId xmlns:a16="http://schemas.microsoft.com/office/drawing/2014/main" id="{21F754A5-65BC-14A3-5F55-75716FFA9027}"/>
-              </a:ext>
-            </a:extLst>
-          </p:cNvPr>
-          <p:cNvSpPr/>
-          <p:nvPr/>
-        </p:nvSpPr>
-        <p:spPr>
-          <a:xfrm>
-            <a:off x="6476841" y="1418373"/>
-            <a:ext cx="5332571" cy="3306028"/>
-          </a:xfrm>
-          <a:prstGeom prst="rect">
-            <a:avLst/>
-          </a:prstGeom>
-          <a:noFill/>
-          <a:ln w="28575">
-            <a:solidFill>
-              <a:srgbClr val="E0700D"/>
-            </a:solidFill>
-          </a:ln>
-        </p:spPr>
-        <p:style>
-          <a:lnRef idx="2">
-            <a:schemeClr val="accent1">
-              <a:shade val="15000"/>
-            </a:schemeClr>
-          </a:lnRef>
-          <a:fillRef idx="1">
-            <a:schemeClr val="accent1"/>
-          </a:fillRef>
-          <a:effectRef idx="0">
-            <a:schemeClr val="accent1"/>
-          </a:effectRef>
-          <a:fontRef idx="minor">
-            <a:schemeClr val="lt1"/>
-          </a:fontRef>
-        </p:style>
-        <p:txBody>
-          <a:bodyPr rtlCol="0" anchor="ctr"/>
-          <a:lstStyle/>
-          <a:p>
-            <a:pPr algn="ctr"/>
-            <a:endParaRPr lang="en-US"/>
-          </a:p>
-        </p:txBody>
-      </p:sp>
-      <p:sp>
-        <p:nvSpPr>
-          <p:cNvPr id="9" name="CuadroTexto 8">
-            <a:extLst>
-              <a:ext uri="{FF2B5EF4-FFF2-40B4-BE49-F238E27FC236}">
-                <a16:creationId xmlns:a16="http://schemas.microsoft.com/office/drawing/2014/main" id="{8BD4C233-B5D9-B6AA-93A8-CF2F130CFF9C}"/>
-              </a:ext>
-            </a:extLst>
-          </p:cNvPr>
-          <p:cNvSpPr txBox="1"/>
-          <p:nvPr/>
-        </p:nvSpPr>
-        <p:spPr>
-          <a:xfrm>
-            <a:off x="642989" y="4402885"/>
-            <a:ext cx="2269787" cy="369332"/>
-          </a:xfrm>
-          <a:prstGeom prst="rect">
-            <a:avLst/>
-          </a:prstGeom>
-          <a:noFill/>
-        </p:spPr>
-        <p:txBody>
-          <a:bodyPr wrap="square">
-            <a:spAutoFit/>
-          </a:bodyPr>
-          <a:lstStyle/>
-          <a:p>
-            <a:r>
-              <a:rPr lang="en-US"/>
-              <a:t>slab </a:t>
-            </a:r>
-            <a:r>
-              <a:rPr lang="en-US" dirty="0"/>
-              <a:t>= 150nm</a:t>
-            </a:r>
-            <a:endParaRPr lang="es-ES" dirty="0"/>
+          <a:p>
+            <a:pPr algn="just"/>
+            <a:endParaRPr lang="en-US" sz="1200" dirty="0">
+              <a:latin typeface="Arial" panose="020B0604020202020204" pitchFamily="34" charset="0"/>
+              <a:cs typeface="Arial" panose="020B0604020202020204" pitchFamily="34" charset="0"/>
+            </a:endParaRPr>
+          </a:p>
+          <a:p>
+            <a:pPr algn="just"/>
+            <a:endParaRPr lang="en-US" sz="1200" dirty="0">
+              <a:latin typeface="Arial" panose="020B0604020202020204" pitchFamily="34" charset="0"/>
+              <a:cs typeface="Arial" panose="020B0604020202020204" pitchFamily="34" charset="0"/>
+            </a:endParaRPr>
           </a:p>
         </p:txBody>
       </p:sp>
       <p:pic>
         <p:nvPicPr>
-          <p:cNvPr id="10" name="Imagen 9" descr="Gráfico, Gráfico de líneas&#10;&#10;El contenido generado por IA puede ser incorrecto.">
+          <p:cNvPr id="6" name="Imagen 5" descr="Gráfico&#10;&#10;El contenido generado por IA puede ser incorrecto.">
             <a:extLst>
               <a:ext uri="{FF2B5EF4-FFF2-40B4-BE49-F238E27FC236}">
-                <a16:creationId xmlns:a16="http://schemas.microsoft.com/office/drawing/2014/main" id="{6F8352F8-9D55-0A91-7C62-AF0F3E3764F8}"/>
+                <a16:creationId xmlns:a16="http://schemas.microsoft.com/office/drawing/2014/main" id="{BC0F90D0-DE2E-3894-3AB0-4CFA5A9A5581}"/>
               </a:ext>
             </a:extLst>
           </p:cNvPr>
@@ -7342,20 +8738,1424 @@
         </p:blipFill>
         <p:spPr>
           <a:xfrm>
-            <a:off x="600205" y="1564998"/>
-            <a:ext cx="5333710" cy="2919724"/>
+            <a:off x="3657600" y="1293668"/>
+            <a:ext cx="4572000" cy="3346967"/>
           </a:xfrm>
           <a:prstGeom prst="rect">
             <a:avLst/>
           </a:prstGeom>
         </p:spPr>
       </p:pic>
+    </p:spTree>
+    <p:extLst>
+      <p:ext uri="{BB962C8B-B14F-4D97-AF65-F5344CB8AC3E}">
+        <p14:creationId xmlns:p14="http://schemas.microsoft.com/office/powerpoint/2010/main" val="3152834780"/>
+      </p:ext>
+    </p:extLst>
+  </p:cSld>
+  <p:clrMapOvr>
+    <a:masterClrMapping/>
+  </p:clrMapOvr>
+</p:sld>
+</file>
+
+<file path=ppt/slides/slide5.xml><?xml version="1.0" encoding="utf-8"?>
+<p:sld xmlns:a="http://schemas.openxmlformats.org/drawingml/2006/main" xmlns:r="http://schemas.openxmlformats.org/officeDocument/2006/relationships" xmlns:p="http://schemas.openxmlformats.org/presentationml/2006/main">
+  <p:cSld>
+    <p:spTree>
+      <p:nvGrpSpPr>
+        <p:cNvPr id="1" name="">
+          <a:extLst>
+            <a:ext uri="{FF2B5EF4-FFF2-40B4-BE49-F238E27FC236}">
+              <a16:creationId xmlns:a16="http://schemas.microsoft.com/office/drawing/2014/main" id="{3D8C0977-E506-93A0-D737-2141593DE187}"/>
+            </a:ext>
+          </a:extLst>
+        </p:cNvPr>
+        <p:cNvGrpSpPr/>
+        <p:nvPr/>
+      </p:nvGrpSpPr>
+      <p:grpSpPr>
+        <a:xfrm>
+          <a:off x="0" y="0"/>
+          <a:ext cx="0" cy="0"/>
+          <a:chOff x="0" y="0"/>
+          <a:chExt cx="0" cy="0"/>
+        </a:xfrm>
+      </p:grpSpPr>
+      <p:sp>
+        <p:nvSpPr>
+          <p:cNvPr id="16" name="object 16">
+            <a:extLst>
+              <a:ext uri="{FF2B5EF4-FFF2-40B4-BE49-F238E27FC236}">
+                <a16:creationId xmlns:a16="http://schemas.microsoft.com/office/drawing/2014/main" id="{4A181D71-3830-D680-CC0D-B9F5866E4F62}"/>
+              </a:ext>
+            </a:extLst>
+          </p:cNvPr>
+          <p:cNvSpPr txBox="1">
+            <a:spLocks noGrp="1"/>
+          </p:cNvSpPr>
+          <p:nvPr>
+            <p:ph type="title"/>
+          </p:nvPr>
+        </p:nvSpPr>
+        <p:spPr>
+          <a:xfrm>
+            <a:off x="685800" y="408883"/>
+            <a:ext cx="10994410" cy="782265"/>
+          </a:xfrm>
+          <a:prstGeom prst="rect">
+            <a:avLst/>
+          </a:prstGeom>
+        </p:spPr>
+        <p:txBody>
+          <a:bodyPr vert="horz" wrap="square" lIns="0" tIns="12700" rIns="0" bIns="0" rtlCol="0">
+            <a:spAutoFit/>
+          </a:bodyPr>
+          <a:lstStyle/>
+          <a:p>
+            <a:pPr marL="12700">
+              <a:lnSpc>
+                <a:spcPct val="100000"/>
+              </a:lnSpc>
+              <a:spcBef>
+                <a:spcPts val="100"/>
+              </a:spcBef>
+            </a:pPr>
+            <a:r>
+              <a:rPr lang="en-US" sz="2500" dirty="0"/>
+              <a:t>Learning outcome #1 – Effective index of a waveguide</a:t>
+            </a:r>
+            <a:br>
+              <a:rPr lang="es-ES" sz="2500" spc="-5" dirty="0">
+                <a:latin typeface="+mj-lt"/>
+                <a:cs typeface="Lucida Sans"/>
+              </a:rPr>
+            </a:br>
+            <a:endParaRPr sz="2500" b="0" dirty="0">
+              <a:latin typeface="+mj-lt"/>
+              <a:cs typeface="Lucida Sans"/>
+            </a:endParaRPr>
+          </a:p>
+        </p:txBody>
+      </p:sp>
       <p:pic>
         <p:nvPicPr>
-          <p:cNvPr id="12" name="Imagen 11" descr="Gráfico&#10;&#10;El contenido generado por IA puede ser incorrecto.">
+          <p:cNvPr id="83" name="Gráfico 82">
             <a:extLst>
               <a:ext uri="{FF2B5EF4-FFF2-40B4-BE49-F238E27FC236}">
-                <a16:creationId xmlns:a16="http://schemas.microsoft.com/office/drawing/2014/main" id="{2E412073-5B4F-E16F-7D6E-1C978D3D99C2}"/>
+                <a16:creationId xmlns:a16="http://schemas.microsoft.com/office/drawing/2014/main" id="{333BB8BE-C10F-9925-E978-1025A2D65786}"/>
+              </a:ext>
+            </a:extLst>
+          </p:cNvPr>
+          <p:cNvPicPr>
+            <a:picLocks noChangeAspect="1"/>
+          </p:cNvPicPr>
+          <p:nvPr/>
+        </p:nvPicPr>
+        <p:blipFill>
+          <a:blip r:embed="rId3">
+            <a:extLst>
+              <a:ext uri="{96DAC541-7B7A-43D3-8B79-37D633B846F1}">
+                <asvg:svgBlip xmlns:asvg="http://schemas.microsoft.com/office/drawing/2016/SVG/main" r:embed="rId4"/>
+              </a:ext>
+            </a:extLst>
+          </a:blip>
+          <a:stretch>
+            <a:fillRect/>
+          </a:stretch>
+        </p:blipFill>
+        <p:spPr>
+          <a:xfrm>
+            <a:off x="5045006" y="6356057"/>
+            <a:ext cx="6409575" cy="363174"/>
+          </a:xfrm>
+          <a:prstGeom prst="rect">
+            <a:avLst/>
+          </a:prstGeom>
+        </p:spPr>
+      </p:pic>
+      <p:sp>
+        <p:nvSpPr>
+          <p:cNvPr id="84" name="Marcador de número de diapositiva 83">
+            <a:extLst>
+              <a:ext uri="{FF2B5EF4-FFF2-40B4-BE49-F238E27FC236}">
+                <a16:creationId xmlns:a16="http://schemas.microsoft.com/office/drawing/2014/main" id="{65A274A2-21AC-F649-A9CB-E4754B5EEBA9}"/>
+              </a:ext>
+            </a:extLst>
+          </p:cNvPr>
+          <p:cNvSpPr>
+            <a:spLocks noGrp="1"/>
+          </p:cNvSpPr>
+          <p:nvPr>
+            <p:ph type="sldNum" sz="quarter" idx="7"/>
+          </p:nvPr>
+        </p:nvSpPr>
+        <p:spPr/>
+        <p:txBody>
+          <a:bodyPr/>
+          <a:lstStyle/>
+          <a:p>
+            <a:fld id="{B6F15528-21DE-4FAA-801E-634DDDAF4B2B}" type="slidenum">
+              <a:rPr lang="es-ES" smtClean="0"/>
+              <a:t>5</a:t>
+            </a:fld>
+            <a:endParaRPr lang="es-ES"/>
+          </a:p>
+        </p:txBody>
+      </p:sp>
+      <p:sp>
+        <p:nvSpPr>
+          <p:cNvPr id="3" name="Marcador de pie de página 2">
+            <a:extLst>
+              <a:ext uri="{FF2B5EF4-FFF2-40B4-BE49-F238E27FC236}">
+                <a16:creationId xmlns:a16="http://schemas.microsoft.com/office/drawing/2014/main" id="{9AB8A177-1996-5CAB-6262-1AA0A3EEEB61}"/>
+              </a:ext>
+            </a:extLst>
+          </p:cNvPr>
+          <p:cNvSpPr>
+            <a:spLocks noGrp="1"/>
+          </p:cNvSpPr>
+          <p:nvPr>
+            <p:ph type="ftr" sz="quarter" idx="5"/>
+          </p:nvPr>
+        </p:nvSpPr>
+        <p:spPr/>
+        <p:txBody>
+          <a:bodyPr/>
+          <a:lstStyle/>
+          <a:p>
+            <a:pPr marL="12700">
+              <a:spcBef>
+                <a:spcPts val="15"/>
+              </a:spcBef>
+            </a:pPr>
+            <a:r>
+              <a:rPr lang="es-ES" spc="-5" dirty="0"/>
+              <a:t>LAB 0.1. MODESOLVER</a:t>
+            </a:r>
+          </a:p>
+        </p:txBody>
+      </p:sp>
+      <p:sp>
+        <p:nvSpPr>
+          <p:cNvPr id="4" name="Marcador de texto 2">
+            <a:extLst>
+              <a:ext uri="{FF2B5EF4-FFF2-40B4-BE49-F238E27FC236}">
+                <a16:creationId xmlns:a16="http://schemas.microsoft.com/office/drawing/2014/main" id="{C46E7930-DD91-97CE-FA2E-C74709172778}"/>
+              </a:ext>
+            </a:extLst>
+          </p:cNvPr>
+          <p:cNvSpPr txBox="1">
+            <a:spLocks/>
+          </p:cNvSpPr>
+          <p:nvPr/>
+        </p:nvSpPr>
+        <p:spPr>
+          <a:xfrm>
+            <a:off x="608012" y="1295400"/>
+            <a:ext cx="11048999" cy="4958137"/>
+          </a:xfrm>
+          <a:prstGeom prst="rect">
+            <a:avLst/>
+          </a:prstGeom>
+        </p:spPr>
+        <p:txBody>
+          <a:bodyPr>
+            <a:normAutofit/>
+          </a:bodyPr>
+          <a:lstStyle>
+            <a:lvl1pPr marL="0">
+              <a:defRPr>
+                <a:latin typeface="+mn-lt"/>
+                <a:ea typeface="+mn-ea"/>
+                <a:cs typeface="+mn-cs"/>
+              </a:defRPr>
+            </a:lvl1pPr>
+            <a:lvl2pPr marL="457200">
+              <a:defRPr>
+                <a:latin typeface="+mn-lt"/>
+                <a:ea typeface="+mn-ea"/>
+                <a:cs typeface="+mn-cs"/>
+              </a:defRPr>
+            </a:lvl2pPr>
+            <a:lvl3pPr marL="914400">
+              <a:defRPr>
+                <a:latin typeface="+mn-lt"/>
+                <a:ea typeface="+mn-ea"/>
+                <a:cs typeface="+mn-cs"/>
+              </a:defRPr>
+            </a:lvl3pPr>
+            <a:lvl4pPr marL="1371600">
+              <a:defRPr>
+                <a:latin typeface="+mn-lt"/>
+                <a:ea typeface="+mn-ea"/>
+                <a:cs typeface="+mn-cs"/>
+              </a:defRPr>
+            </a:lvl4pPr>
+            <a:lvl5pPr marL="1828800">
+              <a:defRPr>
+                <a:latin typeface="+mn-lt"/>
+                <a:ea typeface="+mn-ea"/>
+                <a:cs typeface="+mn-cs"/>
+              </a:defRPr>
+            </a:lvl5pPr>
+            <a:lvl6pPr marL="2286000">
+              <a:defRPr>
+                <a:latin typeface="+mn-lt"/>
+                <a:ea typeface="+mn-ea"/>
+                <a:cs typeface="+mn-cs"/>
+              </a:defRPr>
+            </a:lvl6pPr>
+            <a:lvl7pPr marL="2743200">
+              <a:defRPr>
+                <a:latin typeface="+mn-lt"/>
+                <a:ea typeface="+mn-ea"/>
+                <a:cs typeface="+mn-cs"/>
+              </a:defRPr>
+            </a:lvl7pPr>
+            <a:lvl8pPr marL="3200400">
+              <a:defRPr>
+                <a:latin typeface="+mn-lt"/>
+                <a:ea typeface="+mn-ea"/>
+                <a:cs typeface="+mn-cs"/>
+              </a:defRPr>
+            </a:lvl8pPr>
+            <a:lvl9pPr marL="3657600">
+              <a:defRPr>
+                <a:latin typeface="+mn-lt"/>
+                <a:ea typeface="+mn-ea"/>
+                <a:cs typeface="+mn-cs"/>
+              </a:defRPr>
+            </a:lvl9pPr>
+          </a:lstStyle>
+          <a:p>
+            <a:pPr algn="just"/>
+            <a:endParaRPr lang="en-US" sz="2000" b="1" i="1" dirty="0"/>
+          </a:p>
+          <a:p>
+            <a:pPr algn="just"/>
+            <a:endParaRPr lang="en-US" sz="2000" kern="0" dirty="0">
+              <a:solidFill>
+                <a:sysClr val="windowText" lastClr="000000"/>
+              </a:solidFill>
+            </a:endParaRPr>
+          </a:p>
+        </p:txBody>
+      </p:sp>
+      <p:sp>
+        <p:nvSpPr>
+          <p:cNvPr id="2" name="CuadroTexto 1">
+            <a:extLst>
+              <a:ext uri="{FF2B5EF4-FFF2-40B4-BE49-F238E27FC236}">
+                <a16:creationId xmlns:a16="http://schemas.microsoft.com/office/drawing/2014/main" id="{8CCF090D-1DA1-BA58-906C-0268A2405C69}"/>
+              </a:ext>
+            </a:extLst>
+          </p:cNvPr>
+          <p:cNvSpPr txBox="1"/>
+          <p:nvPr/>
+        </p:nvSpPr>
+        <p:spPr>
+          <a:xfrm>
+            <a:off x="609441" y="4860334"/>
+            <a:ext cx="11199971" cy="1569660"/>
+          </a:xfrm>
+          <a:prstGeom prst="rect">
+            <a:avLst/>
+          </a:prstGeom>
+          <a:solidFill>
+            <a:schemeClr val="bg1">
+              <a:lumMod val="95000"/>
+            </a:schemeClr>
+          </a:solidFill>
+          <a:ln w="28575">
+            <a:solidFill>
+              <a:srgbClr val="E0700D"/>
+            </a:solidFill>
+          </a:ln>
+        </p:spPr>
+        <p:txBody>
+          <a:bodyPr wrap="square" rtlCol="0">
+            <a:spAutoFit/>
+          </a:bodyPr>
+          <a:lstStyle/>
+          <a:p>
+            <a:pPr algn="just"/>
+            <a:r>
+              <a:rPr lang="en-US" sz="1200" dirty="0">
+                <a:latin typeface="Arial" panose="020B0604020202020204" pitchFamily="34" charset="0"/>
+                <a:cs typeface="Arial" panose="020B0604020202020204" pitchFamily="34" charset="0"/>
+              </a:rPr>
+              <a:t>Al </a:t>
+            </a:r>
+            <a:r>
+              <a:rPr lang="en-US" sz="1200" dirty="0" err="1">
+                <a:latin typeface="Arial" panose="020B0604020202020204" pitchFamily="34" charset="0"/>
+                <a:cs typeface="Arial" panose="020B0604020202020204" pitchFamily="34" charset="0"/>
+              </a:rPr>
+              <a:t>imprimir</a:t>
+            </a:r>
+            <a:r>
+              <a:rPr lang="en-US" sz="1200" dirty="0">
+                <a:latin typeface="Arial" panose="020B0604020202020204" pitchFamily="34" charset="0"/>
+                <a:cs typeface="Arial" panose="020B0604020202020204" pitchFamily="34" charset="0"/>
+              </a:rPr>
+              <a:t> </a:t>
+            </a:r>
+            <a:r>
+              <a:rPr lang="en-US" sz="1200" dirty="0" err="1">
+                <a:latin typeface="Arial" panose="020B0604020202020204" pitchFamily="34" charset="0"/>
+                <a:cs typeface="Arial" panose="020B0604020202020204" pitchFamily="34" charset="0"/>
+              </a:rPr>
+              <a:t>los</a:t>
+            </a:r>
+            <a:r>
+              <a:rPr lang="en-US" sz="1200" dirty="0">
+                <a:latin typeface="Arial" panose="020B0604020202020204" pitchFamily="34" charset="0"/>
+                <a:cs typeface="Arial" panose="020B0604020202020204" pitchFamily="34" charset="0"/>
+              </a:rPr>
+              <a:t> </a:t>
+            </a:r>
+            <a:r>
+              <a:rPr lang="en-US" sz="1200" dirty="0" err="1">
+                <a:latin typeface="Arial" panose="020B0604020202020204" pitchFamily="34" charset="0"/>
+                <a:cs typeface="Arial" panose="020B0604020202020204" pitchFamily="34" charset="0"/>
+              </a:rPr>
+              <a:t>valores</a:t>
+            </a:r>
+            <a:r>
+              <a:rPr lang="en-US" sz="1200" dirty="0">
+                <a:latin typeface="Arial" panose="020B0604020202020204" pitchFamily="34" charset="0"/>
+                <a:cs typeface="Arial" panose="020B0604020202020204" pitchFamily="34" charset="0"/>
+              </a:rPr>
+              <a:t> de </a:t>
+            </a:r>
+            <a:r>
+              <a:rPr lang="en-US" sz="1200" dirty="0" err="1">
+                <a:latin typeface="Arial" panose="020B0604020202020204" pitchFamily="34" charset="0"/>
+                <a:cs typeface="Arial" panose="020B0604020202020204" pitchFamily="34" charset="0"/>
+              </a:rPr>
+              <a:t>los</a:t>
+            </a:r>
+            <a:r>
+              <a:rPr lang="en-US" sz="1200" dirty="0">
+                <a:latin typeface="Arial" panose="020B0604020202020204" pitchFamily="34" charset="0"/>
+                <a:cs typeface="Arial" panose="020B0604020202020204" pitchFamily="34" charset="0"/>
+              </a:rPr>
+              <a:t> </a:t>
+            </a:r>
+            <a:r>
+              <a:rPr lang="en-US" sz="1200" dirty="0" err="1">
+                <a:latin typeface="Arial" panose="020B0604020202020204" pitchFamily="34" charset="0"/>
+                <a:cs typeface="Arial" panose="020B0604020202020204" pitchFamily="34" charset="0"/>
+              </a:rPr>
+              <a:t>índices</a:t>
+            </a:r>
+            <a:r>
+              <a:rPr lang="en-US" sz="1200" dirty="0">
+                <a:latin typeface="Arial" panose="020B0604020202020204" pitchFamily="34" charset="0"/>
+                <a:cs typeface="Arial" panose="020B0604020202020204" pitchFamily="34" charset="0"/>
+              </a:rPr>
+              <a:t> </a:t>
+            </a:r>
+            <a:r>
+              <a:rPr lang="en-US" sz="1200" dirty="0" err="1">
+                <a:latin typeface="Arial" panose="020B0604020202020204" pitchFamily="34" charset="0"/>
+                <a:cs typeface="Arial" panose="020B0604020202020204" pitchFamily="34" charset="0"/>
+              </a:rPr>
+              <a:t>efectivos</a:t>
+            </a:r>
+            <a:r>
+              <a:rPr lang="en-US" sz="1200" dirty="0">
+                <a:latin typeface="Arial" panose="020B0604020202020204" pitchFamily="34" charset="0"/>
+                <a:cs typeface="Arial" panose="020B0604020202020204" pitchFamily="34" charset="0"/>
+              </a:rPr>
+              <a:t> de </a:t>
+            </a:r>
+            <a:r>
+              <a:rPr lang="en-US" sz="1200" dirty="0" err="1">
+                <a:latin typeface="Arial" panose="020B0604020202020204" pitchFamily="34" charset="0"/>
+                <a:cs typeface="Arial" panose="020B0604020202020204" pitchFamily="34" charset="0"/>
+              </a:rPr>
+              <a:t>los</a:t>
+            </a:r>
+            <a:r>
+              <a:rPr lang="en-US" sz="1200" dirty="0">
+                <a:latin typeface="Arial" panose="020B0604020202020204" pitchFamily="34" charset="0"/>
+                <a:cs typeface="Arial" panose="020B0604020202020204" pitchFamily="34" charset="0"/>
+              </a:rPr>
+              <a:t> </a:t>
+            </a:r>
+            <a:r>
+              <a:rPr lang="en-US" sz="1200" dirty="0" err="1">
+                <a:latin typeface="Arial" panose="020B0604020202020204" pitchFamily="34" charset="0"/>
+                <a:cs typeface="Arial" panose="020B0604020202020204" pitchFamily="34" charset="0"/>
+              </a:rPr>
+              <a:t>modos</a:t>
+            </a:r>
+            <a:r>
+              <a:rPr lang="en-US" sz="1200" dirty="0">
+                <a:latin typeface="Arial" panose="020B0604020202020204" pitchFamily="34" charset="0"/>
+                <a:cs typeface="Arial" panose="020B0604020202020204" pitchFamily="34" charset="0"/>
+              </a:rPr>
+              <a:t> </a:t>
+            </a:r>
+            <a:r>
+              <a:rPr lang="en-US" sz="1200" dirty="0" err="1">
+                <a:latin typeface="Arial" panose="020B0604020202020204" pitchFamily="34" charset="0"/>
+                <a:cs typeface="Arial" panose="020B0604020202020204" pitchFamily="34" charset="0"/>
+              </a:rPr>
+              <a:t>vemos</a:t>
+            </a:r>
+            <a:r>
+              <a:rPr lang="en-US" sz="1200" dirty="0">
+                <a:latin typeface="Arial" panose="020B0604020202020204" pitchFamily="34" charset="0"/>
+                <a:cs typeface="Arial" panose="020B0604020202020204" pitchFamily="34" charset="0"/>
+              </a:rPr>
+              <a:t> </a:t>
+            </a:r>
+            <a:r>
+              <a:rPr lang="en-US" sz="1200" dirty="0" err="1">
+                <a:latin typeface="Arial" panose="020B0604020202020204" pitchFamily="34" charset="0"/>
+                <a:cs typeface="Arial" panose="020B0604020202020204" pitchFamily="34" charset="0"/>
+              </a:rPr>
+              <a:t>que</a:t>
+            </a:r>
+            <a:r>
+              <a:rPr lang="en-US" sz="1200" dirty="0">
+                <a:latin typeface="Arial" panose="020B0604020202020204" pitchFamily="34" charset="0"/>
+                <a:cs typeface="Arial" panose="020B0604020202020204" pitchFamily="34" charset="0"/>
+              </a:rPr>
+              <a:t> se </a:t>
+            </a:r>
+            <a:r>
+              <a:rPr lang="en-US" sz="1200" dirty="0" err="1">
+                <a:latin typeface="Arial" panose="020B0604020202020204" pitchFamily="34" charset="0"/>
+                <a:cs typeface="Arial" panose="020B0604020202020204" pitchFamily="34" charset="0"/>
+              </a:rPr>
+              <a:t>propagarán</a:t>
+            </a:r>
+            <a:r>
+              <a:rPr lang="en-US" sz="1200" dirty="0">
+                <a:latin typeface="Arial" panose="020B0604020202020204" pitchFamily="34" charset="0"/>
+                <a:cs typeface="Arial" panose="020B0604020202020204" pitchFamily="34" charset="0"/>
+              </a:rPr>
+              <a:t> 2 “</a:t>
+            </a:r>
+            <a:r>
+              <a:rPr lang="en-US" sz="1200" dirty="0" err="1">
+                <a:latin typeface="Arial" panose="020B0604020202020204" pitchFamily="34" charset="0"/>
+                <a:cs typeface="Arial" panose="020B0604020202020204" pitchFamily="34" charset="0"/>
+              </a:rPr>
+              <a:t>correctamente</a:t>
+            </a:r>
+            <a:r>
+              <a:rPr lang="en-US" sz="1200" dirty="0">
+                <a:latin typeface="Arial" panose="020B0604020202020204" pitchFamily="34" charset="0"/>
+                <a:cs typeface="Arial" panose="020B0604020202020204" pitchFamily="34" charset="0"/>
+              </a:rPr>
+              <a:t>”. Los dos posteriores </a:t>
+            </a:r>
+            <a:r>
+              <a:rPr lang="en-US" sz="1200" dirty="0" err="1">
+                <a:latin typeface="Arial" panose="020B0604020202020204" pitchFamily="34" charset="0"/>
+                <a:cs typeface="Arial" panose="020B0604020202020204" pitchFamily="34" charset="0"/>
+              </a:rPr>
+              <a:t>viajarán</a:t>
+            </a:r>
+            <a:r>
+              <a:rPr lang="en-US" sz="1200" dirty="0">
+                <a:latin typeface="Arial" panose="020B0604020202020204" pitchFamily="34" charset="0"/>
+                <a:cs typeface="Arial" panose="020B0604020202020204" pitchFamily="34" charset="0"/>
+              </a:rPr>
+              <a:t> </a:t>
+            </a:r>
+            <a:r>
+              <a:rPr lang="en-US" sz="1200" dirty="0" err="1">
+                <a:latin typeface="Arial" panose="020B0604020202020204" pitchFamily="34" charset="0"/>
+                <a:cs typeface="Arial" panose="020B0604020202020204" pitchFamily="34" charset="0"/>
+              </a:rPr>
+              <a:t>vagamenete</a:t>
+            </a:r>
+            <a:r>
+              <a:rPr lang="en-US" sz="1200" dirty="0">
+                <a:latin typeface="Arial" panose="020B0604020202020204" pitchFamily="34" charset="0"/>
+                <a:cs typeface="Arial" panose="020B0604020202020204" pitchFamily="34" charset="0"/>
+              </a:rPr>
+              <a:t> </a:t>
+            </a:r>
+            <a:r>
+              <a:rPr lang="en-US" sz="1200" dirty="0" err="1">
+                <a:latin typeface="Arial" panose="020B0604020202020204" pitchFamily="34" charset="0"/>
+                <a:cs typeface="Arial" panose="020B0604020202020204" pitchFamily="34" charset="0"/>
+              </a:rPr>
+              <a:t>por</a:t>
+            </a:r>
+            <a:r>
+              <a:rPr lang="en-US" sz="1200" dirty="0">
+                <a:latin typeface="Arial" panose="020B0604020202020204" pitchFamily="34" charset="0"/>
+                <a:cs typeface="Arial" panose="020B0604020202020204" pitchFamily="34" charset="0"/>
+              </a:rPr>
+              <a:t> </a:t>
+            </a:r>
+            <a:r>
+              <a:rPr lang="en-US" sz="1200" dirty="0" err="1">
+                <a:latin typeface="Arial" panose="020B0604020202020204" pitchFamily="34" charset="0"/>
+                <a:cs typeface="Arial" panose="020B0604020202020204" pitchFamily="34" charset="0"/>
+              </a:rPr>
+              <a:t>el</a:t>
+            </a:r>
+            <a:r>
+              <a:rPr lang="en-US" sz="1200" dirty="0">
+                <a:latin typeface="Arial" panose="020B0604020202020204" pitchFamily="34" charset="0"/>
+                <a:cs typeface="Arial" panose="020B0604020202020204" pitchFamily="34" charset="0"/>
+              </a:rPr>
+              <a:t> cladding </a:t>
+            </a:r>
+            <a:r>
+              <a:rPr lang="en-US" sz="1200" dirty="0" err="1">
+                <a:latin typeface="Arial" panose="020B0604020202020204" pitchFamily="34" charset="0"/>
+                <a:cs typeface="Arial" panose="020B0604020202020204" pitchFamily="34" charset="0"/>
+              </a:rPr>
+              <a:t>debido</a:t>
+            </a:r>
+            <a:r>
+              <a:rPr lang="en-US" sz="1200" dirty="0">
+                <a:latin typeface="Arial" panose="020B0604020202020204" pitchFamily="34" charset="0"/>
+                <a:cs typeface="Arial" panose="020B0604020202020204" pitchFamily="34" charset="0"/>
+              </a:rPr>
+              <a:t> a </a:t>
+            </a:r>
+            <a:r>
+              <a:rPr lang="en-US" sz="1200" dirty="0" err="1">
+                <a:latin typeface="Arial" panose="020B0604020202020204" pitchFamily="34" charset="0"/>
+                <a:cs typeface="Arial" panose="020B0604020202020204" pitchFamily="34" charset="0"/>
+              </a:rPr>
+              <a:t>que</a:t>
+            </a:r>
+            <a:r>
+              <a:rPr lang="en-US" sz="1200" dirty="0">
+                <a:latin typeface="Arial" panose="020B0604020202020204" pitchFamily="34" charset="0"/>
+                <a:cs typeface="Arial" panose="020B0604020202020204" pitchFamily="34" charset="0"/>
+              </a:rPr>
+              <a:t> </a:t>
+            </a:r>
+            <a:r>
+              <a:rPr lang="en-US" sz="1200" dirty="0" err="1">
+                <a:latin typeface="Arial" panose="020B0604020202020204" pitchFamily="34" charset="0"/>
+                <a:cs typeface="Arial" panose="020B0604020202020204" pitchFamily="34" charset="0"/>
+              </a:rPr>
+              <a:t>están</a:t>
+            </a:r>
+            <a:r>
+              <a:rPr lang="en-US" sz="1200" dirty="0">
+                <a:latin typeface="Arial" panose="020B0604020202020204" pitchFamily="34" charset="0"/>
+                <a:cs typeface="Arial" panose="020B0604020202020204" pitchFamily="34" charset="0"/>
+              </a:rPr>
+              <a:t> </a:t>
+            </a:r>
+            <a:r>
+              <a:rPr lang="en-US" sz="1200" dirty="0" err="1">
+                <a:latin typeface="Arial" panose="020B0604020202020204" pitchFamily="34" charset="0"/>
+                <a:cs typeface="Arial" panose="020B0604020202020204" pitchFamily="34" charset="0"/>
+              </a:rPr>
+              <a:t>muy</a:t>
+            </a:r>
+            <a:r>
+              <a:rPr lang="en-US" sz="1200" dirty="0">
+                <a:latin typeface="Arial" panose="020B0604020202020204" pitchFamily="34" charset="0"/>
+                <a:cs typeface="Arial" panose="020B0604020202020204" pitchFamily="34" charset="0"/>
+              </a:rPr>
+              <a:t> </a:t>
+            </a:r>
+            <a:r>
+              <a:rPr lang="en-US" sz="1200" dirty="0" err="1">
+                <a:latin typeface="Arial" panose="020B0604020202020204" pitchFamily="34" charset="0"/>
+                <a:cs typeface="Arial" panose="020B0604020202020204" pitchFamily="34" charset="0"/>
+              </a:rPr>
+              <a:t>cercanos</a:t>
+            </a:r>
+            <a:r>
+              <a:rPr lang="en-US" sz="1200" dirty="0">
+                <a:latin typeface="Arial" panose="020B0604020202020204" pitchFamily="34" charset="0"/>
+                <a:cs typeface="Arial" panose="020B0604020202020204" pitchFamily="34" charset="0"/>
+              </a:rPr>
+              <a:t> al valor del </a:t>
+            </a:r>
+            <a:r>
+              <a:rPr lang="en-US" sz="1200" dirty="0" err="1">
+                <a:latin typeface="Arial" panose="020B0604020202020204" pitchFamily="34" charset="0"/>
+                <a:cs typeface="Arial" panose="020B0604020202020204" pitchFamily="34" charset="0"/>
+              </a:rPr>
+              <a:t>índice</a:t>
+            </a:r>
+            <a:r>
+              <a:rPr lang="en-US" sz="1200" dirty="0">
+                <a:latin typeface="Arial" panose="020B0604020202020204" pitchFamily="34" charset="0"/>
+                <a:cs typeface="Arial" panose="020B0604020202020204" pitchFamily="34" charset="0"/>
+              </a:rPr>
+              <a:t> del cladding.</a:t>
+            </a:r>
+          </a:p>
+          <a:p>
+            <a:pPr algn="just"/>
+            <a:endParaRPr lang="en-US" sz="1200" dirty="0">
+              <a:latin typeface="Arial" panose="020B0604020202020204" pitchFamily="34" charset="0"/>
+              <a:cs typeface="Arial" panose="020B0604020202020204" pitchFamily="34" charset="0"/>
+            </a:endParaRPr>
+          </a:p>
+          <a:p>
+            <a:pPr algn="just"/>
+            <a:endParaRPr lang="en-US" sz="1200" dirty="0">
+              <a:latin typeface="Arial" panose="020B0604020202020204" pitchFamily="34" charset="0"/>
+              <a:cs typeface="Arial" panose="020B0604020202020204" pitchFamily="34" charset="0"/>
+            </a:endParaRPr>
+          </a:p>
+          <a:p>
+            <a:pPr algn="just"/>
+            <a:endParaRPr lang="en-US" sz="1200" dirty="0">
+              <a:latin typeface="Arial" panose="020B0604020202020204" pitchFamily="34" charset="0"/>
+              <a:cs typeface="Arial" panose="020B0604020202020204" pitchFamily="34" charset="0"/>
+            </a:endParaRPr>
+          </a:p>
+          <a:p>
+            <a:pPr algn="just"/>
+            <a:endParaRPr lang="en-US" sz="1200" dirty="0">
+              <a:latin typeface="Arial" panose="020B0604020202020204" pitchFamily="34" charset="0"/>
+              <a:cs typeface="Arial" panose="020B0604020202020204" pitchFamily="34" charset="0"/>
+            </a:endParaRPr>
+          </a:p>
+          <a:p>
+            <a:pPr algn="just"/>
+            <a:endParaRPr lang="en-US" sz="1200" dirty="0">
+              <a:latin typeface="Arial" panose="020B0604020202020204" pitchFamily="34" charset="0"/>
+              <a:cs typeface="Arial" panose="020B0604020202020204" pitchFamily="34" charset="0"/>
+            </a:endParaRPr>
+          </a:p>
+          <a:p>
+            <a:pPr algn="just"/>
+            <a:endParaRPr lang="en-US" sz="1200" dirty="0">
+              <a:latin typeface="Arial" panose="020B0604020202020204" pitchFamily="34" charset="0"/>
+              <a:cs typeface="Arial" panose="020B0604020202020204" pitchFamily="34" charset="0"/>
+            </a:endParaRPr>
+          </a:p>
+        </p:txBody>
+      </p:sp>
+      <p:pic>
+        <p:nvPicPr>
+          <p:cNvPr id="7" name="Imagen 6" descr="Texto&#10;&#10;El contenido generado por IA puede ser incorrecto.">
+            <a:extLst>
+              <a:ext uri="{FF2B5EF4-FFF2-40B4-BE49-F238E27FC236}">
+                <a16:creationId xmlns:a16="http://schemas.microsoft.com/office/drawing/2014/main" id="{5BAED3B8-C7EC-1E65-89D9-E416249B0060}"/>
+              </a:ext>
+            </a:extLst>
+          </p:cNvPr>
+          <p:cNvPicPr>
+            <a:picLocks noChangeAspect="1"/>
+          </p:cNvPicPr>
+          <p:nvPr/>
+        </p:nvPicPr>
+        <p:blipFill>
+          <a:blip r:embed="rId5"/>
+          <a:stretch>
+            <a:fillRect/>
+          </a:stretch>
+        </p:blipFill>
+        <p:spPr>
+          <a:xfrm>
+            <a:off x="2819400" y="2362200"/>
+            <a:ext cx="6306430" cy="800212"/>
+          </a:xfrm>
+          <a:prstGeom prst="rect">
+            <a:avLst/>
+          </a:prstGeom>
+        </p:spPr>
+      </p:pic>
+    </p:spTree>
+    <p:extLst>
+      <p:ext uri="{BB962C8B-B14F-4D97-AF65-F5344CB8AC3E}">
+        <p14:creationId xmlns:p14="http://schemas.microsoft.com/office/powerpoint/2010/main" val="1479417351"/>
+      </p:ext>
+    </p:extLst>
+  </p:cSld>
+  <p:clrMapOvr>
+    <a:masterClrMapping/>
+  </p:clrMapOvr>
+</p:sld>
+</file>
+
+<file path=ppt/slides/slide6.xml><?xml version="1.0" encoding="utf-8"?>
+<p:sld xmlns:a="http://schemas.openxmlformats.org/drawingml/2006/main" xmlns:r="http://schemas.openxmlformats.org/officeDocument/2006/relationships" xmlns:p="http://schemas.openxmlformats.org/presentationml/2006/main">
+  <p:cSld>
+    <p:spTree>
+      <p:nvGrpSpPr>
+        <p:cNvPr id="1" name="">
+          <a:extLst>
+            <a:ext uri="{FF2B5EF4-FFF2-40B4-BE49-F238E27FC236}">
+              <a16:creationId xmlns:a16="http://schemas.microsoft.com/office/drawing/2014/main" id="{8B85706D-F9C4-45A7-F547-73CCD0D0DFF5}"/>
+            </a:ext>
+          </a:extLst>
+        </p:cNvPr>
+        <p:cNvGrpSpPr/>
+        <p:nvPr/>
+      </p:nvGrpSpPr>
+      <p:grpSpPr>
+        <a:xfrm>
+          <a:off x="0" y="0"/>
+          <a:ext cx="0" cy="0"/>
+          <a:chOff x="0" y="0"/>
+          <a:chExt cx="0" cy="0"/>
+        </a:xfrm>
+      </p:grpSpPr>
+      <p:sp>
+        <p:nvSpPr>
+          <p:cNvPr id="16" name="object 16">
+            <a:extLst>
+              <a:ext uri="{FF2B5EF4-FFF2-40B4-BE49-F238E27FC236}">
+                <a16:creationId xmlns:a16="http://schemas.microsoft.com/office/drawing/2014/main" id="{64158DBB-574E-FB15-C7B7-03B7C740FAFE}"/>
+              </a:ext>
+            </a:extLst>
+          </p:cNvPr>
+          <p:cNvSpPr txBox="1">
+            <a:spLocks noGrp="1"/>
+          </p:cNvSpPr>
+          <p:nvPr>
+            <p:ph type="title"/>
+          </p:nvPr>
+        </p:nvSpPr>
+        <p:spPr>
+          <a:xfrm>
+            <a:off x="685800" y="408883"/>
+            <a:ext cx="10994410" cy="782265"/>
+          </a:xfrm>
+          <a:prstGeom prst="rect">
+            <a:avLst/>
+          </a:prstGeom>
+        </p:spPr>
+        <p:txBody>
+          <a:bodyPr vert="horz" wrap="square" lIns="0" tIns="12700" rIns="0" bIns="0" rtlCol="0">
+            <a:spAutoFit/>
+          </a:bodyPr>
+          <a:lstStyle/>
+          <a:p>
+            <a:pPr marL="12700">
+              <a:lnSpc>
+                <a:spcPct val="100000"/>
+              </a:lnSpc>
+              <a:spcBef>
+                <a:spcPts val="100"/>
+              </a:spcBef>
+            </a:pPr>
+            <a:r>
+              <a:rPr lang="en-US" sz="2500" dirty="0"/>
+              <a:t>Learning outcome #1 – Effective index of a waveguide</a:t>
+            </a:r>
+            <a:br>
+              <a:rPr lang="es-ES" sz="2500" spc="-5" dirty="0">
+                <a:latin typeface="+mj-lt"/>
+                <a:cs typeface="Lucida Sans"/>
+              </a:rPr>
+            </a:br>
+            <a:endParaRPr sz="2500" b="0" dirty="0">
+              <a:latin typeface="+mj-lt"/>
+              <a:cs typeface="Lucida Sans"/>
+            </a:endParaRPr>
+          </a:p>
+        </p:txBody>
+      </p:sp>
+      <p:pic>
+        <p:nvPicPr>
+          <p:cNvPr id="83" name="Gráfico 82">
+            <a:extLst>
+              <a:ext uri="{FF2B5EF4-FFF2-40B4-BE49-F238E27FC236}">
+                <a16:creationId xmlns:a16="http://schemas.microsoft.com/office/drawing/2014/main" id="{A27E5D2E-F3B7-6146-5CCB-30DDDDE6481C}"/>
+              </a:ext>
+            </a:extLst>
+          </p:cNvPr>
+          <p:cNvPicPr>
+            <a:picLocks noChangeAspect="1"/>
+          </p:cNvPicPr>
+          <p:nvPr/>
+        </p:nvPicPr>
+        <p:blipFill>
+          <a:blip r:embed="rId3">
+            <a:extLst>
+              <a:ext uri="{96DAC541-7B7A-43D3-8B79-37D633B846F1}">
+                <asvg:svgBlip xmlns:asvg="http://schemas.microsoft.com/office/drawing/2016/SVG/main" r:embed="rId4"/>
+              </a:ext>
+            </a:extLst>
+          </a:blip>
+          <a:stretch>
+            <a:fillRect/>
+          </a:stretch>
+        </p:blipFill>
+        <p:spPr>
+          <a:xfrm>
+            <a:off x="5045006" y="6356057"/>
+            <a:ext cx="6409575" cy="363174"/>
+          </a:xfrm>
+          <a:prstGeom prst="rect">
+            <a:avLst/>
+          </a:prstGeom>
+        </p:spPr>
+      </p:pic>
+      <p:sp>
+        <p:nvSpPr>
+          <p:cNvPr id="84" name="Marcador de número de diapositiva 83">
+            <a:extLst>
+              <a:ext uri="{FF2B5EF4-FFF2-40B4-BE49-F238E27FC236}">
+                <a16:creationId xmlns:a16="http://schemas.microsoft.com/office/drawing/2014/main" id="{6D481CA3-6CB7-8738-2FD9-8E713E795A25}"/>
+              </a:ext>
+            </a:extLst>
+          </p:cNvPr>
+          <p:cNvSpPr>
+            <a:spLocks noGrp="1"/>
+          </p:cNvSpPr>
+          <p:nvPr>
+            <p:ph type="sldNum" sz="quarter" idx="7"/>
+          </p:nvPr>
+        </p:nvSpPr>
+        <p:spPr/>
+        <p:txBody>
+          <a:bodyPr/>
+          <a:lstStyle/>
+          <a:p>
+            <a:fld id="{B6F15528-21DE-4FAA-801E-634DDDAF4B2B}" type="slidenum">
+              <a:rPr lang="es-ES" smtClean="0"/>
+              <a:t>6</a:t>
+            </a:fld>
+            <a:endParaRPr lang="es-ES"/>
+          </a:p>
+        </p:txBody>
+      </p:sp>
+      <p:sp>
+        <p:nvSpPr>
+          <p:cNvPr id="3" name="Marcador de pie de página 2">
+            <a:extLst>
+              <a:ext uri="{FF2B5EF4-FFF2-40B4-BE49-F238E27FC236}">
+                <a16:creationId xmlns:a16="http://schemas.microsoft.com/office/drawing/2014/main" id="{177D2AAD-7B62-D11E-BDC8-059792B553C1}"/>
+              </a:ext>
+            </a:extLst>
+          </p:cNvPr>
+          <p:cNvSpPr>
+            <a:spLocks noGrp="1"/>
+          </p:cNvSpPr>
+          <p:nvPr>
+            <p:ph type="ftr" sz="quarter" idx="5"/>
+          </p:nvPr>
+        </p:nvSpPr>
+        <p:spPr/>
+        <p:txBody>
+          <a:bodyPr/>
+          <a:lstStyle/>
+          <a:p>
+            <a:pPr marL="12700">
+              <a:spcBef>
+                <a:spcPts val="15"/>
+              </a:spcBef>
+            </a:pPr>
+            <a:r>
+              <a:rPr lang="es-ES" spc="-5" dirty="0"/>
+              <a:t>LAB 0.1. MODESOLVER</a:t>
+            </a:r>
+          </a:p>
+        </p:txBody>
+      </p:sp>
+      <p:sp>
+        <p:nvSpPr>
+          <p:cNvPr id="4" name="Marcador de texto 2">
+            <a:extLst>
+              <a:ext uri="{FF2B5EF4-FFF2-40B4-BE49-F238E27FC236}">
+                <a16:creationId xmlns:a16="http://schemas.microsoft.com/office/drawing/2014/main" id="{708A9C40-585E-360F-194D-385E0E380F41}"/>
+              </a:ext>
+            </a:extLst>
+          </p:cNvPr>
+          <p:cNvSpPr txBox="1">
+            <a:spLocks/>
+          </p:cNvSpPr>
+          <p:nvPr/>
+        </p:nvSpPr>
+        <p:spPr>
+          <a:xfrm>
+            <a:off x="608012" y="1295400"/>
+            <a:ext cx="11048999" cy="4958137"/>
+          </a:xfrm>
+          <a:prstGeom prst="rect">
+            <a:avLst/>
+          </a:prstGeom>
+        </p:spPr>
+        <p:txBody>
+          <a:bodyPr>
+            <a:normAutofit/>
+          </a:bodyPr>
+          <a:lstStyle>
+            <a:lvl1pPr marL="0">
+              <a:defRPr>
+                <a:latin typeface="+mn-lt"/>
+                <a:ea typeface="+mn-ea"/>
+                <a:cs typeface="+mn-cs"/>
+              </a:defRPr>
+            </a:lvl1pPr>
+            <a:lvl2pPr marL="457200">
+              <a:defRPr>
+                <a:latin typeface="+mn-lt"/>
+                <a:ea typeface="+mn-ea"/>
+                <a:cs typeface="+mn-cs"/>
+              </a:defRPr>
+            </a:lvl2pPr>
+            <a:lvl3pPr marL="914400">
+              <a:defRPr>
+                <a:latin typeface="+mn-lt"/>
+                <a:ea typeface="+mn-ea"/>
+                <a:cs typeface="+mn-cs"/>
+              </a:defRPr>
+            </a:lvl3pPr>
+            <a:lvl4pPr marL="1371600">
+              <a:defRPr>
+                <a:latin typeface="+mn-lt"/>
+                <a:ea typeface="+mn-ea"/>
+                <a:cs typeface="+mn-cs"/>
+              </a:defRPr>
+            </a:lvl4pPr>
+            <a:lvl5pPr marL="1828800">
+              <a:defRPr>
+                <a:latin typeface="+mn-lt"/>
+                <a:ea typeface="+mn-ea"/>
+                <a:cs typeface="+mn-cs"/>
+              </a:defRPr>
+            </a:lvl5pPr>
+            <a:lvl6pPr marL="2286000">
+              <a:defRPr>
+                <a:latin typeface="+mn-lt"/>
+                <a:ea typeface="+mn-ea"/>
+                <a:cs typeface="+mn-cs"/>
+              </a:defRPr>
+            </a:lvl6pPr>
+            <a:lvl7pPr marL="2743200">
+              <a:defRPr>
+                <a:latin typeface="+mn-lt"/>
+                <a:ea typeface="+mn-ea"/>
+                <a:cs typeface="+mn-cs"/>
+              </a:defRPr>
+            </a:lvl7pPr>
+            <a:lvl8pPr marL="3200400">
+              <a:defRPr>
+                <a:latin typeface="+mn-lt"/>
+                <a:ea typeface="+mn-ea"/>
+                <a:cs typeface="+mn-cs"/>
+              </a:defRPr>
+            </a:lvl8pPr>
+            <a:lvl9pPr marL="3657600">
+              <a:defRPr>
+                <a:latin typeface="+mn-lt"/>
+                <a:ea typeface="+mn-ea"/>
+                <a:cs typeface="+mn-cs"/>
+              </a:defRPr>
+            </a:lvl9pPr>
+          </a:lstStyle>
+          <a:p>
+            <a:pPr algn="just"/>
+            <a:endParaRPr lang="en-US" sz="2000" b="1" i="1" dirty="0"/>
+          </a:p>
+          <a:p>
+            <a:pPr algn="just"/>
+            <a:endParaRPr lang="en-US" sz="2000" kern="0" dirty="0">
+              <a:solidFill>
+                <a:sysClr val="windowText" lastClr="000000"/>
+              </a:solidFill>
+            </a:endParaRPr>
+          </a:p>
+        </p:txBody>
+      </p:sp>
+      <p:sp>
+        <p:nvSpPr>
+          <p:cNvPr id="2" name="CuadroTexto 1">
+            <a:extLst>
+              <a:ext uri="{FF2B5EF4-FFF2-40B4-BE49-F238E27FC236}">
+                <a16:creationId xmlns:a16="http://schemas.microsoft.com/office/drawing/2014/main" id="{F725B091-5BA2-8388-713B-4575D01AFD81}"/>
+              </a:ext>
+            </a:extLst>
+          </p:cNvPr>
+          <p:cNvSpPr txBox="1"/>
+          <p:nvPr/>
+        </p:nvSpPr>
+        <p:spPr>
+          <a:xfrm>
+            <a:off x="609441" y="4860334"/>
+            <a:ext cx="11199971" cy="1754326"/>
+          </a:xfrm>
+          <a:prstGeom prst="rect">
+            <a:avLst/>
+          </a:prstGeom>
+          <a:solidFill>
+            <a:schemeClr val="bg1">
+              <a:lumMod val="95000"/>
+            </a:schemeClr>
+          </a:solidFill>
+          <a:ln w="28575">
+            <a:solidFill>
+              <a:srgbClr val="E0700D"/>
+            </a:solidFill>
+          </a:ln>
+        </p:spPr>
+        <p:txBody>
+          <a:bodyPr wrap="square" rtlCol="0">
+            <a:spAutoFit/>
+          </a:bodyPr>
+          <a:lstStyle/>
+          <a:p>
+            <a:pPr algn="just"/>
+            <a:r>
+              <a:rPr lang="en-US" sz="1200" dirty="0">
+                <a:latin typeface="Arial" panose="020B0604020202020204" pitchFamily="34" charset="0"/>
+                <a:cs typeface="Arial" panose="020B0604020202020204" pitchFamily="34" charset="0"/>
+              </a:rPr>
+              <a:t>De </a:t>
+            </a:r>
+            <a:r>
+              <a:rPr lang="en-US" sz="1200" dirty="0" err="1">
+                <a:latin typeface="Arial" panose="020B0604020202020204" pitchFamily="34" charset="0"/>
+                <a:cs typeface="Arial" panose="020B0604020202020204" pitchFamily="34" charset="0"/>
+              </a:rPr>
+              <a:t>manera</a:t>
+            </a:r>
+            <a:r>
+              <a:rPr lang="en-US" sz="1200" dirty="0">
+                <a:latin typeface="Arial" panose="020B0604020202020204" pitchFamily="34" charset="0"/>
+                <a:cs typeface="Arial" panose="020B0604020202020204" pitchFamily="34" charset="0"/>
+              </a:rPr>
+              <a:t> </a:t>
+            </a:r>
+            <a:r>
+              <a:rPr lang="en-US" sz="1200" dirty="0" err="1">
+                <a:latin typeface="Arial" panose="020B0604020202020204" pitchFamily="34" charset="0"/>
+                <a:cs typeface="Arial" panose="020B0604020202020204" pitchFamily="34" charset="0"/>
+              </a:rPr>
+              <a:t>ordenada</a:t>
+            </a:r>
+            <a:r>
+              <a:rPr lang="en-US" sz="1200" dirty="0">
+                <a:latin typeface="Arial" panose="020B0604020202020204" pitchFamily="34" charset="0"/>
+                <a:cs typeface="Arial" panose="020B0604020202020204" pitchFamily="34" charset="0"/>
+              </a:rPr>
+              <a:t>, </a:t>
+            </a:r>
+            <a:r>
+              <a:rPr lang="en-US" sz="1200" dirty="0" err="1">
+                <a:latin typeface="Arial" panose="020B0604020202020204" pitchFamily="34" charset="0"/>
+                <a:cs typeface="Arial" panose="020B0604020202020204" pitchFamily="34" charset="0"/>
+              </a:rPr>
+              <a:t>vemos</a:t>
+            </a:r>
+            <a:r>
+              <a:rPr lang="en-US" sz="1200" dirty="0">
+                <a:latin typeface="Arial" panose="020B0604020202020204" pitchFamily="34" charset="0"/>
+                <a:cs typeface="Arial" panose="020B0604020202020204" pitchFamily="34" charset="0"/>
+              </a:rPr>
+              <a:t> la </a:t>
+            </a:r>
+            <a:r>
+              <a:rPr lang="en-US" sz="1200" dirty="0" err="1">
+                <a:latin typeface="Arial" panose="020B0604020202020204" pitchFamily="34" charset="0"/>
+                <a:cs typeface="Arial" panose="020B0604020202020204" pitchFamily="34" charset="0"/>
+              </a:rPr>
+              <a:t>fracción</a:t>
+            </a:r>
+            <a:r>
+              <a:rPr lang="en-US" sz="1200" dirty="0">
+                <a:latin typeface="Arial" panose="020B0604020202020204" pitchFamily="34" charset="0"/>
+                <a:cs typeface="Arial" panose="020B0604020202020204" pitchFamily="34" charset="0"/>
+              </a:rPr>
+              <a:t> de </a:t>
+            </a:r>
+            <a:r>
+              <a:rPr lang="en-US" sz="1200" dirty="0" err="1">
+                <a:latin typeface="Arial" panose="020B0604020202020204" pitchFamily="34" charset="0"/>
+                <a:cs typeface="Arial" panose="020B0604020202020204" pitchFamily="34" charset="0"/>
+              </a:rPr>
+              <a:t>cada</a:t>
+            </a:r>
+            <a:r>
+              <a:rPr lang="en-US" sz="1200" dirty="0">
+                <a:latin typeface="Arial" panose="020B0604020202020204" pitchFamily="34" charset="0"/>
+                <a:cs typeface="Arial" panose="020B0604020202020204" pitchFamily="34" charset="0"/>
+              </a:rPr>
+              <a:t> modo </a:t>
+            </a:r>
+            <a:r>
+              <a:rPr lang="en-US" sz="1200" dirty="0" err="1">
+                <a:latin typeface="Arial" panose="020B0604020202020204" pitchFamily="34" charset="0"/>
+                <a:cs typeface="Arial" panose="020B0604020202020204" pitchFamily="34" charset="0"/>
+              </a:rPr>
+              <a:t>correspondiente</a:t>
+            </a:r>
+            <a:r>
+              <a:rPr lang="en-US" sz="1200" dirty="0">
+                <a:latin typeface="Arial" panose="020B0604020202020204" pitchFamily="34" charset="0"/>
+                <a:cs typeface="Arial" panose="020B0604020202020204" pitchFamily="34" charset="0"/>
+              </a:rPr>
+              <a:t> a TE y TM. Por </a:t>
+            </a:r>
+            <a:r>
+              <a:rPr lang="en-US" sz="1200" dirty="0" err="1">
+                <a:latin typeface="Arial" panose="020B0604020202020204" pitchFamily="34" charset="0"/>
+                <a:cs typeface="Arial" panose="020B0604020202020204" pitchFamily="34" charset="0"/>
+              </a:rPr>
+              <a:t>ejemplo</a:t>
+            </a:r>
+            <a:r>
+              <a:rPr lang="en-US" sz="1200" dirty="0">
+                <a:latin typeface="Arial" panose="020B0604020202020204" pitchFamily="34" charset="0"/>
+                <a:cs typeface="Arial" panose="020B0604020202020204" pitchFamily="34" charset="0"/>
+              </a:rPr>
+              <a:t> </a:t>
+            </a:r>
+            <a:r>
+              <a:rPr lang="en-US" sz="1200" dirty="0" err="1">
+                <a:latin typeface="Arial" panose="020B0604020202020204" pitchFamily="34" charset="0"/>
+                <a:cs typeface="Arial" panose="020B0604020202020204" pitchFamily="34" charset="0"/>
+              </a:rPr>
+              <a:t>el</a:t>
+            </a:r>
+            <a:r>
+              <a:rPr lang="en-US" sz="1200" dirty="0">
+                <a:latin typeface="Arial" panose="020B0604020202020204" pitchFamily="34" charset="0"/>
+                <a:cs typeface="Arial" panose="020B0604020202020204" pitchFamily="34" charset="0"/>
+              </a:rPr>
+              <a:t> 0 es quasi TE, y </a:t>
+            </a:r>
+            <a:r>
+              <a:rPr lang="en-US" sz="1200" dirty="0" err="1">
+                <a:latin typeface="Arial" panose="020B0604020202020204" pitchFamily="34" charset="0"/>
+                <a:cs typeface="Arial" panose="020B0604020202020204" pitchFamily="34" charset="0"/>
+              </a:rPr>
+              <a:t>el</a:t>
+            </a:r>
+            <a:r>
+              <a:rPr lang="en-US" sz="1200" dirty="0">
+                <a:latin typeface="Arial" panose="020B0604020202020204" pitchFamily="34" charset="0"/>
+                <a:cs typeface="Arial" panose="020B0604020202020204" pitchFamily="34" charset="0"/>
+              </a:rPr>
+              <a:t> 1 es quasi TM. En la </a:t>
+            </a:r>
+            <a:r>
+              <a:rPr lang="en-US" sz="1200" dirty="0" err="1">
+                <a:latin typeface="Arial" panose="020B0604020202020204" pitchFamily="34" charset="0"/>
+                <a:cs typeface="Arial" panose="020B0604020202020204" pitchFamily="34" charset="0"/>
+              </a:rPr>
+              <a:t>realidad</a:t>
+            </a:r>
+            <a:r>
+              <a:rPr lang="en-US" sz="1200" dirty="0">
+                <a:latin typeface="Arial" panose="020B0604020202020204" pitchFamily="34" charset="0"/>
+                <a:cs typeface="Arial" panose="020B0604020202020204" pitchFamily="34" charset="0"/>
+              </a:rPr>
+              <a:t> </a:t>
+            </a:r>
+            <a:r>
+              <a:rPr lang="en-US" sz="1200" dirty="0" err="1">
+                <a:latin typeface="Arial" panose="020B0604020202020204" pitchFamily="34" charset="0"/>
+                <a:cs typeface="Arial" panose="020B0604020202020204" pitchFamily="34" charset="0"/>
+              </a:rPr>
+              <a:t>esto</a:t>
+            </a:r>
+            <a:r>
+              <a:rPr lang="en-US" sz="1200" dirty="0">
+                <a:latin typeface="Arial" panose="020B0604020202020204" pitchFamily="34" charset="0"/>
+                <a:cs typeface="Arial" panose="020B0604020202020204" pitchFamily="34" charset="0"/>
+              </a:rPr>
+              <a:t> se </a:t>
+            </a:r>
+            <a:r>
+              <a:rPr lang="en-US" sz="1200" dirty="0" err="1">
+                <a:latin typeface="Arial" panose="020B0604020202020204" pitchFamily="34" charset="0"/>
+                <a:cs typeface="Arial" panose="020B0604020202020204" pitchFamily="34" charset="0"/>
+              </a:rPr>
+              <a:t>ve</a:t>
+            </a:r>
+            <a:r>
+              <a:rPr lang="en-US" sz="1200" dirty="0">
+                <a:latin typeface="Arial" panose="020B0604020202020204" pitchFamily="34" charset="0"/>
+                <a:cs typeface="Arial" panose="020B0604020202020204" pitchFamily="34" charset="0"/>
+              </a:rPr>
+              <a:t> </a:t>
+            </a:r>
+            <a:r>
+              <a:rPr lang="en-US" sz="1200" dirty="0" err="1">
+                <a:latin typeface="Arial" panose="020B0604020202020204" pitchFamily="34" charset="0"/>
+                <a:cs typeface="Arial" panose="020B0604020202020204" pitchFamily="34" charset="0"/>
+              </a:rPr>
+              <a:t>como</a:t>
+            </a:r>
+            <a:r>
+              <a:rPr lang="en-US" sz="1200" dirty="0">
+                <a:latin typeface="Arial" panose="020B0604020202020204" pitchFamily="34" charset="0"/>
+                <a:cs typeface="Arial" panose="020B0604020202020204" pitchFamily="34" charset="0"/>
+              </a:rPr>
+              <a:t> </a:t>
+            </a:r>
+            <a:r>
+              <a:rPr lang="en-US" sz="1200" dirty="0" err="1">
+                <a:latin typeface="Arial" panose="020B0604020202020204" pitchFamily="34" charset="0"/>
+                <a:cs typeface="Arial" panose="020B0604020202020204" pitchFamily="34" charset="0"/>
+              </a:rPr>
+              <a:t>el</a:t>
+            </a:r>
+            <a:r>
+              <a:rPr lang="en-US" sz="1200" dirty="0">
+                <a:latin typeface="Arial" panose="020B0604020202020204" pitchFamily="34" charset="0"/>
+                <a:cs typeface="Arial" panose="020B0604020202020204" pitchFamily="34" charset="0"/>
+              </a:rPr>
+              <a:t> fundamental TE y </a:t>
+            </a:r>
+            <a:r>
+              <a:rPr lang="en-US" sz="1200" dirty="0" err="1">
+                <a:latin typeface="Arial" panose="020B0604020202020204" pitchFamily="34" charset="0"/>
+                <a:cs typeface="Arial" panose="020B0604020202020204" pitchFamily="34" charset="0"/>
+              </a:rPr>
+              <a:t>el</a:t>
+            </a:r>
+            <a:r>
+              <a:rPr lang="en-US" sz="1200" dirty="0">
+                <a:latin typeface="Arial" panose="020B0604020202020204" pitchFamily="34" charset="0"/>
+                <a:cs typeface="Arial" panose="020B0604020202020204" pitchFamily="34" charset="0"/>
+              </a:rPr>
+              <a:t> fundamental TM.  </a:t>
+            </a:r>
+          </a:p>
+          <a:p>
+            <a:pPr algn="just"/>
+            <a:endParaRPr lang="en-US" sz="1200" dirty="0">
+              <a:latin typeface="Arial" panose="020B0604020202020204" pitchFamily="34" charset="0"/>
+              <a:cs typeface="Arial" panose="020B0604020202020204" pitchFamily="34" charset="0"/>
+            </a:endParaRPr>
+          </a:p>
+          <a:p>
+            <a:pPr algn="just"/>
+            <a:endParaRPr lang="en-US" sz="1200" dirty="0">
+              <a:latin typeface="Arial" panose="020B0604020202020204" pitchFamily="34" charset="0"/>
+              <a:cs typeface="Arial" panose="020B0604020202020204" pitchFamily="34" charset="0"/>
+            </a:endParaRPr>
+          </a:p>
+          <a:p>
+            <a:pPr algn="just"/>
+            <a:endParaRPr lang="en-US" sz="1200" dirty="0">
+              <a:latin typeface="Arial" panose="020B0604020202020204" pitchFamily="34" charset="0"/>
+              <a:cs typeface="Arial" panose="020B0604020202020204" pitchFamily="34" charset="0"/>
+            </a:endParaRPr>
+          </a:p>
+          <a:p>
+            <a:pPr algn="just"/>
+            <a:endParaRPr lang="en-US" sz="1200" dirty="0">
+              <a:latin typeface="Arial" panose="020B0604020202020204" pitchFamily="34" charset="0"/>
+              <a:cs typeface="Arial" panose="020B0604020202020204" pitchFamily="34" charset="0"/>
+            </a:endParaRPr>
+          </a:p>
+          <a:p>
+            <a:pPr algn="just"/>
+            <a:endParaRPr lang="en-US" sz="1200" dirty="0">
+              <a:latin typeface="Arial" panose="020B0604020202020204" pitchFamily="34" charset="0"/>
+              <a:cs typeface="Arial" panose="020B0604020202020204" pitchFamily="34" charset="0"/>
+            </a:endParaRPr>
+          </a:p>
+          <a:p>
+            <a:pPr algn="just"/>
+            <a:endParaRPr lang="en-US" sz="1200" dirty="0">
+              <a:latin typeface="Arial" panose="020B0604020202020204" pitchFamily="34" charset="0"/>
+              <a:cs typeface="Arial" panose="020B0604020202020204" pitchFamily="34" charset="0"/>
+            </a:endParaRPr>
+          </a:p>
+          <a:p>
+            <a:pPr algn="just"/>
+            <a:endParaRPr lang="en-US" sz="1200" dirty="0">
+              <a:latin typeface="Arial" panose="020B0604020202020204" pitchFamily="34" charset="0"/>
+              <a:cs typeface="Arial" panose="020B0604020202020204" pitchFamily="34" charset="0"/>
+            </a:endParaRPr>
+          </a:p>
+        </p:txBody>
+      </p:sp>
+      <p:pic>
+        <p:nvPicPr>
+          <p:cNvPr id="6" name="Imagen 5">
+            <a:extLst>
+              <a:ext uri="{FF2B5EF4-FFF2-40B4-BE49-F238E27FC236}">
+                <a16:creationId xmlns:a16="http://schemas.microsoft.com/office/drawing/2014/main" id="{9679C457-5AD3-17BE-69AA-13780C1F6B94}"/>
+              </a:ext>
+            </a:extLst>
+          </p:cNvPr>
+          <p:cNvPicPr>
+            <a:picLocks noChangeAspect="1"/>
+          </p:cNvPicPr>
+          <p:nvPr/>
+        </p:nvPicPr>
+        <p:blipFill>
+          <a:blip r:embed="rId5"/>
+          <a:srcRect t="14754" b="29782"/>
+          <a:stretch>
+            <a:fillRect/>
+          </a:stretch>
+        </p:blipFill>
+        <p:spPr>
+          <a:xfrm>
+            <a:off x="685800" y="1406108"/>
+            <a:ext cx="7716327" cy="422691"/>
+          </a:xfrm>
+          <a:prstGeom prst="rect">
+            <a:avLst/>
+          </a:prstGeom>
+        </p:spPr>
+      </p:pic>
+      <p:sp>
+        <p:nvSpPr>
+          <p:cNvPr id="9" name="CuadroTexto 8">
+            <a:extLst>
+              <a:ext uri="{FF2B5EF4-FFF2-40B4-BE49-F238E27FC236}">
+                <a16:creationId xmlns:a16="http://schemas.microsoft.com/office/drawing/2014/main" id="{37FBD8C5-5BE5-7A6F-1ACF-87624E148137}"/>
+              </a:ext>
+            </a:extLst>
+          </p:cNvPr>
+          <p:cNvSpPr txBox="1"/>
+          <p:nvPr/>
+        </p:nvSpPr>
+        <p:spPr>
+          <a:xfrm>
+            <a:off x="8519825" y="1371600"/>
+            <a:ext cx="6128326" cy="369332"/>
+          </a:xfrm>
+          <a:prstGeom prst="rect">
+            <a:avLst/>
+          </a:prstGeom>
+          <a:noFill/>
+        </p:spPr>
+        <p:txBody>
+          <a:bodyPr wrap="square">
+            <a:spAutoFit/>
+          </a:bodyPr>
+          <a:lstStyle/>
+          <a:p>
+            <a:r>
+              <a:rPr lang="en-US" sz="1800" dirty="0" err="1">
+                <a:latin typeface="Arial" panose="020B0604020202020204" pitchFamily="34" charset="0"/>
+                <a:cs typeface="Arial" panose="020B0604020202020204" pitchFamily="34" charset="0"/>
+              </a:rPr>
+              <a:t>Fracción</a:t>
+            </a:r>
+            <a:r>
+              <a:rPr lang="en-US" sz="1800" dirty="0">
+                <a:latin typeface="Arial" panose="020B0604020202020204" pitchFamily="34" charset="0"/>
+                <a:cs typeface="Arial" panose="020B0604020202020204" pitchFamily="34" charset="0"/>
+              </a:rPr>
+              <a:t> TE</a:t>
+            </a:r>
+            <a:endParaRPr lang="es-ES" dirty="0"/>
+          </a:p>
+        </p:txBody>
+      </p:sp>
+      <p:pic>
+        <p:nvPicPr>
+          <p:cNvPr id="11" name="Imagen 10">
+            <a:extLst>
+              <a:ext uri="{FF2B5EF4-FFF2-40B4-BE49-F238E27FC236}">
+                <a16:creationId xmlns:a16="http://schemas.microsoft.com/office/drawing/2014/main" id="{BDC5E0D5-1BBE-AE70-C2F0-5550C434088E}"/>
               </a:ext>
             </a:extLst>
           </p:cNvPr>
@@ -7372,18 +10172,64 @@
         </p:blipFill>
         <p:spPr>
           <a:xfrm>
-            <a:off x="6390212" y="1548801"/>
-            <a:ext cx="5505828" cy="2986121"/>
+            <a:off x="685800" y="2403911"/>
+            <a:ext cx="7716327" cy="431207"/>
           </a:xfrm>
           <a:prstGeom prst="rect">
             <a:avLst/>
           </a:prstGeom>
         </p:spPr>
       </p:pic>
+      <p:sp>
+        <p:nvSpPr>
+          <p:cNvPr id="13" name="CuadroTexto 12">
+            <a:extLst>
+              <a:ext uri="{FF2B5EF4-FFF2-40B4-BE49-F238E27FC236}">
+                <a16:creationId xmlns:a16="http://schemas.microsoft.com/office/drawing/2014/main" id="{AB417C18-BD41-6273-91E5-A3BD5B2404F0}"/>
+              </a:ext>
+            </a:extLst>
+          </p:cNvPr>
+          <p:cNvSpPr txBox="1"/>
+          <p:nvPr/>
+        </p:nvSpPr>
+        <p:spPr>
+          <a:xfrm>
+            <a:off x="8453487" y="2412427"/>
+            <a:ext cx="7324626" cy="369332"/>
+          </a:xfrm>
+          <a:prstGeom prst="rect">
+            <a:avLst/>
+          </a:prstGeom>
+          <a:noFill/>
+        </p:spPr>
+        <p:txBody>
+          <a:bodyPr wrap="square">
+            <a:spAutoFit/>
+          </a:bodyPr>
+          <a:lstStyle/>
+          <a:p>
+            <a:r>
+              <a:rPr lang="en-US" sz="1800" dirty="0" err="1">
+                <a:latin typeface="Arial" panose="020B0604020202020204" pitchFamily="34" charset="0"/>
+                <a:cs typeface="Arial" panose="020B0604020202020204" pitchFamily="34" charset="0"/>
+              </a:rPr>
+              <a:t>Fracción</a:t>
+            </a:r>
+            <a:r>
+              <a:rPr lang="en-US" sz="1800" dirty="0">
+                <a:latin typeface="Arial" panose="020B0604020202020204" pitchFamily="34" charset="0"/>
+                <a:cs typeface="Arial" panose="020B0604020202020204" pitchFamily="34" charset="0"/>
+              </a:rPr>
+              <a:t> TM</a:t>
+            </a:r>
+            <a:endParaRPr lang="es-ES" dirty="0"/>
+          </a:p>
+        </p:txBody>
+      </p:sp>
     </p:spTree>
     <p:extLst>
       <p:ext uri="{BB962C8B-B14F-4D97-AF65-F5344CB8AC3E}">
-        <p14:creationId xmlns:p14="http://schemas.microsoft.com/office/powerpoint/2010/main" val="3712356003"/>
+        <p14:creationId xmlns:p14="http://schemas.microsoft.com/office/powerpoint/2010/main" val="1113521906"/>
       </p:ext>
     </p:extLst>
   </p:cSld>
@@ -7393,12 +10239,18 @@
 </p:sld>
 </file>
 
-<file path=ppt/slides/slide5.xml><?xml version="1.0" encoding="utf-8"?>
+<file path=ppt/slides/slide7.xml><?xml version="1.0" encoding="utf-8"?>
 <p:sld xmlns:a="http://schemas.openxmlformats.org/drawingml/2006/main" xmlns:r="http://schemas.openxmlformats.org/officeDocument/2006/relationships" xmlns:p="http://schemas.openxmlformats.org/presentationml/2006/main">
   <p:cSld>
     <p:spTree>
       <p:nvGrpSpPr>
-        <p:cNvPr id="1" name=""/>
+        <p:cNvPr id="1" name="">
+          <a:extLst>
+            <a:ext uri="{FF2B5EF4-FFF2-40B4-BE49-F238E27FC236}">
+              <a16:creationId xmlns:a16="http://schemas.microsoft.com/office/drawing/2014/main" id="{68D4A379-73AA-86CB-A6D2-E1419199AF2D}"/>
+            </a:ext>
+          </a:extLst>
+        </p:cNvPr>
         <p:cNvGrpSpPr/>
         <p:nvPr/>
       </p:nvGrpSpPr>
@@ -7412,36 +10264,13 @@
       </p:grpSpPr>
       <p:sp>
         <p:nvSpPr>
-          <p:cNvPr id="3" name="object 3"/>
-          <p:cNvSpPr/>
-          <p:nvPr/>
-        </p:nvSpPr>
-        <p:spPr>
-          <a:xfrm>
-            <a:off x="3945635" y="2636520"/>
-            <a:ext cx="8246363" cy="1584959"/>
-          </a:xfrm>
-          <a:prstGeom prst="rect">
-            <a:avLst/>
-          </a:prstGeom>
-          <a:blipFill>
-            <a:blip r:embed="rId2" cstate="print"/>
-            <a:stretch>
-              <a:fillRect/>
-            </a:stretch>
-          </a:blipFill>
-        </p:spPr>
-        <p:txBody>
-          <a:bodyPr wrap="square" lIns="0" tIns="0" rIns="0" bIns="0" rtlCol="0"/>
-          <a:lstStyle/>
-          <a:p>
-            <a:endParaRPr/>
-          </a:p>
-        </p:txBody>
-      </p:sp>
-      <p:sp>
-        <p:nvSpPr>
-          <p:cNvPr id="4" name="object 4"/>
+          <p:cNvPr id="16" name="object 16">
+            <a:extLst>
+              <a:ext uri="{FF2B5EF4-FFF2-40B4-BE49-F238E27FC236}">
+                <a16:creationId xmlns:a16="http://schemas.microsoft.com/office/drawing/2014/main" id="{CAD323ED-4732-C59A-9AD4-E8C7350B796D}"/>
+              </a:ext>
+            </a:extLst>
+          </p:cNvPr>
           <p:cNvSpPr txBox="1">
             <a:spLocks noGrp="1"/>
           </p:cNvSpPr>
@@ -7451,15 +10280,15 @@
         </p:nvSpPr>
         <p:spPr>
           <a:xfrm>
-            <a:off x="4513326" y="3165729"/>
-            <a:ext cx="2233295" cy="513715"/>
+            <a:off x="685800" y="408883"/>
+            <a:ext cx="10994410" cy="782265"/>
           </a:xfrm>
           <a:prstGeom prst="rect">
             <a:avLst/>
           </a:prstGeom>
         </p:spPr>
         <p:txBody>
-          <a:bodyPr vert="horz" wrap="square" lIns="0" tIns="13335" rIns="0" bIns="0" rtlCol="0">
+          <a:bodyPr vert="horz" wrap="square" lIns="0" tIns="12700" rIns="0" bIns="0" rtlCol="0">
             <a:spAutoFit/>
           </a:bodyPr>
           <a:lstStyle/>
@@ -7469,52 +10298,68 @@
                 <a:spcPct val="100000"/>
               </a:lnSpc>
               <a:spcBef>
-                <a:spcPts val="105"/>
+                <a:spcPts val="100"/>
               </a:spcBef>
             </a:pPr>
             <a:r>
-              <a:rPr sz="3200" b="1" spc="-5" dirty="0">
-                <a:solidFill>
-                  <a:srgbClr val="FFFFFF"/>
-                </a:solidFill>
-                <a:latin typeface="Lucida Sans"/>
+              <a:rPr lang="en-US" sz="2500" dirty="0"/>
+              <a:t>Learning outcome #1 – Effective index of a waveguide</a:t>
+            </a:r>
+            <a:br>
+              <a:rPr lang="es-ES" sz="2500" spc="-5" dirty="0">
+                <a:latin typeface="+mj-lt"/>
                 <a:cs typeface="Lucida Sans"/>
               </a:rPr>
-              <a:t>Thank</a:t>
-            </a:r>
-            <a:r>
-              <a:rPr sz="3200" b="1" spc="-55" dirty="0">
-                <a:solidFill>
-                  <a:srgbClr val="FFFFFF"/>
-                </a:solidFill>
-                <a:latin typeface="Lucida Sans"/>
-                <a:cs typeface="Lucida Sans"/>
-              </a:rPr>
-              <a:t> </a:t>
-            </a:r>
-            <a:r>
-              <a:rPr sz="3200" b="1" dirty="0">
-                <a:solidFill>
-                  <a:srgbClr val="FFFFFF"/>
-                </a:solidFill>
-                <a:latin typeface="Lucida Sans"/>
-                <a:cs typeface="Lucida Sans"/>
-              </a:rPr>
-              <a:t>you</a:t>
-            </a:r>
-            <a:endParaRPr sz="3200">
-              <a:latin typeface="Lucida Sans"/>
+            </a:br>
+            <a:endParaRPr sz="2500" b="0" dirty="0">
+              <a:latin typeface="+mj-lt"/>
               <a:cs typeface="Lucida Sans"/>
             </a:endParaRPr>
           </a:p>
         </p:txBody>
       </p:sp>
-      <p:sp>
-        <p:nvSpPr>
-          <p:cNvPr id="5" name="Marcador de número de diapositiva 4">
+      <p:pic>
+        <p:nvPicPr>
+          <p:cNvPr id="83" name="Gráfico 82">
             <a:extLst>
               <a:ext uri="{FF2B5EF4-FFF2-40B4-BE49-F238E27FC236}">
-                <a16:creationId xmlns:a16="http://schemas.microsoft.com/office/drawing/2014/main" id="{B052DA19-AD24-7D24-2AE9-51F8F5A7F5E0}"/>
+                <a16:creationId xmlns:a16="http://schemas.microsoft.com/office/drawing/2014/main" id="{EE4F5BA9-5BAE-3994-7152-E9517A8549F6}"/>
+              </a:ext>
+            </a:extLst>
+          </p:cNvPr>
+          <p:cNvPicPr>
+            <a:picLocks noChangeAspect="1"/>
+          </p:cNvPicPr>
+          <p:nvPr/>
+        </p:nvPicPr>
+        <p:blipFill>
+          <a:blip r:embed="rId3">
+            <a:extLst>
+              <a:ext uri="{96DAC541-7B7A-43D3-8B79-37D633B846F1}">
+                <asvg:svgBlip xmlns:asvg="http://schemas.microsoft.com/office/drawing/2016/SVG/main" r:embed="rId4"/>
+              </a:ext>
+            </a:extLst>
+          </a:blip>
+          <a:stretch>
+            <a:fillRect/>
+          </a:stretch>
+        </p:blipFill>
+        <p:spPr>
+          <a:xfrm>
+            <a:off x="5045006" y="6356057"/>
+            <a:ext cx="6409575" cy="363174"/>
+          </a:xfrm>
+          <a:prstGeom prst="rect">
+            <a:avLst/>
+          </a:prstGeom>
+        </p:spPr>
+      </p:pic>
+      <p:sp>
+        <p:nvSpPr>
+          <p:cNvPr id="84" name="Marcador de número de diapositiva 83">
+            <a:extLst>
+              <a:ext uri="{FF2B5EF4-FFF2-40B4-BE49-F238E27FC236}">
+                <a16:creationId xmlns:a16="http://schemas.microsoft.com/office/drawing/2014/main" id="{23D7697E-8970-7B6D-B01D-EAE0C67B66FC}"/>
               </a:ext>
             </a:extLst>
           </p:cNvPr>
@@ -7532,13 +10377,2136 @@
           <a:p>
             <a:fld id="{B6F15528-21DE-4FAA-801E-634DDDAF4B2B}" type="slidenum">
               <a:rPr lang="es-ES" smtClean="0"/>
-              <a:t>5</a:t>
+              <a:t>7</a:t>
             </a:fld>
             <a:endParaRPr lang="es-ES"/>
           </a:p>
         </p:txBody>
       </p:sp>
+      <p:sp>
+        <p:nvSpPr>
+          <p:cNvPr id="3" name="Marcador de pie de página 2">
+            <a:extLst>
+              <a:ext uri="{FF2B5EF4-FFF2-40B4-BE49-F238E27FC236}">
+                <a16:creationId xmlns:a16="http://schemas.microsoft.com/office/drawing/2014/main" id="{E9636D40-BBB8-C466-4E36-9D7960A3573B}"/>
+              </a:ext>
+            </a:extLst>
+          </p:cNvPr>
+          <p:cNvSpPr>
+            <a:spLocks noGrp="1"/>
+          </p:cNvSpPr>
+          <p:nvPr>
+            <p:ph type="ftr" sz="quarter" idx="5"/>
+          </p:nvPr>
+        </p:nvSpPr>
+        <p:spPr/>
+        <p:txBody>
+          <a:bodyPr/>
+          <a:lstStyle/>
+          <a:p>
+            <a:pPr marL="12700">
+              <a:spcBef>
+                <a:spcPts val="15"/>
+              </a:spcBef>
+            </a:pPr>
+            <a:r>
+              <a:rPr lang="es-ES" spc="-5" dirty="0"/>
+              <a:t>LAB 0.1. MODESOLVER</a:t>
+            </a:r>
+          </a:p>
+        </p:txBody>
+      </p:sp>
+      <p:sp>
+        <p:nvSpPr>
+          <p:cNvPr id="4" name="Marcador de texto 2">
+            <a:extLst>
+              <a:ext uri="{FF2B5EF4-FFF2-40B4-BE49-F238E27FC236}">
+                <a16:creationId xmlns:a16="http://schemas.microsoft.com/office/drawing/2014/main" id="{319ECC63-18D4-B2DF-B9D9-D6707BB05CAA}"/>
+              </a:ext>
+            </a:extLst>
+          </p:cNvPr>
+          <p:cNvSpPr txBox="1">
+            <a:spLocks/>
+          </p:cNvSpPr>
+          <p:nvPr/>
+        </p:nvSpPr>
+        <p:spPr>
+          <a:xfrm>
+            <a:off x="608012" y="1295400"/>
+            <a:ext cx="11048999" cy="4958137"/>
+          </a:xfrm>
+          <a:prstGeom prst="rect">
+            <a:avLst/>
+          </a:prstGeom>
+        </p:spPr>
+        <p:txBody>
+          <a:bodyPr>
+            <a:normAutofit/>
+          </a:bodyPr>
+          <a:lstStyle>
+            <a:lvl1pPr marL="0">
+              <a:defRPr>
+                <a:latin typeface="+mn-lt"/>
+                <a:ea typeface="+mn-ea"/>
+                <a:cs typeface="+mn-cs"/>
+              </a:defRPr>
+            </a:lvl1pPr>
+            <a:lvl2pPr marL="457200">
+              <a:defRPr>
+                <a:latin typeface="+mn-lt"/>
+                <a:ea typeface="+mn-ea"/>
+                <a:cs typeface="+mn-cs"/>
+              </a:defRPr>
+            </a:lvl2pPr>
+            <a:lvl3pPr marL="914400">
+              <a:defRPr>
+                <a:latin typeface="+mn-lt"/>
+                <a:ea typeface="+mn-ea"/>
+                <a:cs typeface="+mn-cs"/>
+              </a:defRPr>
+            </a:lvl3pPr>
+            <a:lvl4pPr marL="1371600">
+              <a:defRPr>
+                <a:latin typeface="+mn-lt"/>
+                <a:ea typeface="+mn-ea"/>
+                <a:cs typeface="+mn-cs"/>
+              </a:defRPr>
+            </a:lvl4pPr>
+            <a:lvl5pPr marL="1828800">
+              <a:defRPr>
+                <a:latin typeface="+mn-lt"/>
+                <a:ea typeface="+mn-ea"/>
+                <a:cs typeface="+mn-cs"/>
+              </a:defRPr>
+            </a:lvl5pPr>
+            <a:lvl6pPr marL="2286000">
+              <a:defRPr>
+                <a:latin typeface="+mn-lt"/>
+                <a:ea typeface="+mn-ea"/>
+                <a:cs typeface="+mn-cs"/>
+              </a:defRPr>
+            </a:lvl6pPr>
+            <a:lvl7pPr marL="2743200">
+              <a:defRPr>
+                <a:latin typeface="+mn-lt"/>
+                <a:ea typeface="+mn-ea"/>
+                <a:cs typeface="+mn-cs"/>
+              </a:defRPr>
+            </a:lvl7pPr>
+            <a:lvl8pPr marL="3200400">
+              <a:defRPr>
+                <a:latin typeface="+mn-lt"/>
+                <a:ea typeface="+mn-ea"/>
+                <a:cs typeface="+mn-cs"/>
+              </a:defRPr>
+            </a:lvl8pPr>
+            <a:lvl9pPr marL="3657600">
+              <a:defRPr>
+                <a:latin typeface="+mn-lt"/>
+                <a:ea typeface="+mn-ea"/>
+                <a:cs typeface="+mn-cs"/>
+              </a:defRPr>
+            </a:lvl9pPr>
+          </a:lstStyle>
+          <a:p>
+            <a:pPr algn="just"/>
+            <a:endParaRPr lang="en-US" sz="2000" b="1" i="1" dirty="0"/>
+          </a:p>
+          <a:p>
+            <a:pPr algn="just"/>
+            <a:endParaRPr lang="en-US" sz="2000" kern="0" dirty="0">
+              <a:solidFill>
+                <a:sysClr val="windowText" lastClr="000000"/>
+              </a:solidFill>
+            </a:endParaRPr>
+          </a:p>
+        </p:txBody>
+      </p:sp>
+      <p:sp>
+        <p:nvSpPr>
+          <p:cNvPr id="2" name="CuadroTexto 1">
+            <a:extLst>
+              <a:ext uri="{FF2B5EF4-FFF2-40B4-BE49-F238E27FC236}">
+                <a16:creationId xmlns:a16="http://schemas.microsoft.com/office/drawing/2014/main" id="{1A23318D-E27D-A427-467D-8514BD249B13}"/>
+              </a:ext>
+            </a:extLst>
+          </p:cNvPr>
+          <p:cNvSpPr txBox="1"/>
+          <p:nvPr/>
+        </p:nvSpPr>
+        <p:spPr>
+          <a:xfrm>
+            <a:off x="609441" y="4860334"/>
+            <a:ext cx="11199971" cy="1938992"/>
+          </a:xfrm>
+          <a:prstGeom prst="rect">
+            <a:avLst/>
+          </a:prstGeom>
+          <a:solidFill>
+            <a:schemeClr val="bg1">
+              <a:lumMod val="95000"/>
+            </a:schemeClr>
+          </a:solidFill>
+          <a:ln w="28575">
+            <a:solidFill>
+              <a:srgbClr val="E0700D"/>
+            </a:solidFill>
+          </a:ln>
+        </p:spPr>
+        <p:txBody>
+          <a:bodyPr wrap="square" rtlCol="0">
+            <a:spAutoFit/>
+          </a:bodyPr>
+          <a:lstStyle/>
+          <a:p>
+            <a:pPr algn="just"/>
+            <a:r>
+              <a:rPr lang="en-US" sz="1200" dirty="0" err="1">
+                <a:latin typeface="Arial" panose="020B0604020202020204" pitchFamily="34" charset="0"/>
+                <a:cs typeface="Arial" panose="020B0604020202020204" pitchFamily="34" charset="0"/>
+              </a:rPr>
+              <a:t>Analizando</a:t>
+            </a:r>
+            <a:r>
+              <a:rPr lang="en-US" sz="1200" dirty="0">
+                <a:latin typeface="Arial" panose="020B0604020202020204" pitchFamily="34" charset="0"/>
+                <a:cs typeface="Arial" panose="020B0604020202020204" pitchFamily="34" charset="0"/>
+              </a:rPr>
+              <a:t> la </a:t>
+            </a:r>
+            <a:r>
+              <a:rPr lang="en-US" sz="1200" dirty="0" err="1">
+                <a:latin typeface="Arial" panose="020B0604020202020204" pitchFamily="34" charset="0"/>
+                <a:cs typeface="Arial" panose="020B0604020202020204" pitchFamily="34" charset="0"/>
+              </a:rPr>
+              <a:t>distribución</a:t>
+            </a:r>
+            <a:r>
+              <a:rPr lang="en-US" sz="1200" dirty="0">
+                <a:latin typeface="Arial" panose="020B0604020202020204" pitchFamily="34" charset="0"/>
+                <a:cs typeface="Arial" panose="020B0604020202020204" pitchFamily="34" charset="0"/>
+              </a:rPr>
+              <a:t> del modo fundamental TE, </a:t>
+            </a:r>
+            <a:r>
+              <a:rPr lang="en-US" sz="1200" dirty="0" err="1">
+                <a:latin typeface="Arial" panose="020B0604020202020204" pitchFamily="34" charset="0"/>
+                <a:cs typeface="Arial" panose="020B0604020202020204" pitchFamily="34" charset="0"/>
+              </a:rPr>
+              <a:t>vemos</a:t>
+            </a:r>
+            <a:r>
+              <a:rPr lang="en-US" sz="1200" dirty="0">
+                <a:latin typeface="Arial" panose="020B0604020202020204" pitchFamily="34" charset="0"/>
+                <a:cs typeface="Arial" panose="020B0604020202020204" pitchFamily="34" charset="0"/>
+              </a:rPr>
+              <a:t> </a:t>
+            </a:r>
+            <a:r>
+              <a:rPr lang="en-US" sz="1200" dirty="0" err="1">
+                <a:latin typeface="Arial" panose="020B0604020202020204" pitchFamily="34" charset="0"/>
+                <a:cs typeface="Arial" panose="020B0604020202020204" pitchFamily="34" charset="0"/>
+              </a:rPr>
+              <a:t>como</a:t>
+            </a:r>
+            <a:r>
+              <a:rPr lang="en-US" sz="1200" dirty="0">
+                <a:latin typeface="Arial" panose="020B0604020202020204" pitchFamily="34" charset="0"/>
+                <a:cs typeface="Arial" panose="020B0604020202020204" pitchFamily="34" charset="0"/>
+              </a:rPr>
+              <a:t> </a:t>
+            </a:r>
+            <a:r>
+              <a:rPr lang="en-US" sz="1200" dirty="0" err="1">
+                <a:latin typeface="Arial" panose="020B0604020202020204" pitchFamily="34" charset="0"/>
+                <a:cs typeface="Arial" panose="020B0604020202020204" pitchFamily="34" charset="0"/>
+              </a:rPr>
+              <a:t>en</a:t>
+            </a:r>
+            <a:r>
+              <a:rPr lang="en-US" sz="1200" dirty="0">
+                <a:latin typeface="Arial" panose="020B0604020202020204" pitchFamily="34" charset="0"/>
+                <a:cs typeface="Arial" panose="020B0604020202020204" pitchFamily="34" charset="0"/>
+              </a:rPr>
+              <a:t> </a:t>
+            </a:r>
+            <a:r>
+              <a:rPr lang="en-US" sz="1200" dirty="0" err="1">
+                <a:latin typeface="Arial" panose="020B0604020202020204" pitchFamily="34" charset="0"/>
+                <a:cs typeface="Arial" panose="020B0604020202020204" pitchFamily="34" charset="0"/>
+              </a:rPr>
+              <a:t>su</a:t>
+            </a:r>
+            <a:r>
+              <a:rPr lang="en-US" sz="1200" dirty="0">
+                <a:latin typeface="Arial" panose="020B0604020202020204" pitchFamily="34" charset="0"/>
+                <a:cs typeface="Arial" panose="020B0604020202020204" pitchFamily="34" charset="0"/>
+              </a:rPr>
+              <a:t> </a:t>
+            </a:r>
+            <a:r>
+              <a:rPr lang="en-US" sz="1200" dirty="0" err="1">
+                <a:latin typeface="Arial" panose="020B0604020202020204" pitchFamily="34" charset="0"/>
+                <a:cs typeface="Arial" panose="020B0604020202020204" pitchFamily="34" charset="0"/>
+              </a:rPr>
+              <a:t>mayoría</a:t>
+            </a:r>
+            <a:r>
+              <a:rPr lang="en-US" sz="1200" dirty="0">
+                <a:latin typeface="Arial" panose="020B0604020202020204" pitchFamily="34" charset="0"/>
+                <a:cs typeface="Arial" panose="020B0604020202020204" pitchFamily="34" charset="0"/>
+              </a:rPr>
+              <a:t> </a:t>
+            </a:r>
+            <a:r>
+              <a:rPr lang="en-US" sz="1200" dirty="0" err="1">
+                <a:latin typeface="Arial" panose="020B0604020202020204" pitchFamily="34" charset="0"/>
+                <a:cs typeface="Arial" panose="020B0604020202020204" pitchFamily="34" charset="0"/>
+              </a:rPr>
+              <a:t>va</a:t>
+            </a:r>
+            <a:r>
+              <a:rPr lang="en-US" sz="1200" dirty="0">
+                <a:latin typeface="Arial" panose="020B0604020202020204" pitchFamily="34" charset="0"/>
+                <a:cs typeface="Arial" panose="020B0604020202020204" pitchFamily="34" charset="0"/>
+              </a:rPr>
+              <a:t> </a:t>
+            </a:r>
+            <a:r>
+              <a:rPr lang="en-US" sz="1200" dirty="0" err="1">
+                <a:latin typeface="Arial" panose="020B0604020202020204" pitchFamily="34" charset="0"/>
+                <a:cs typeface="Arial" panose="020B0604020202020204" pitchFamily="34" charset="0"/>
+              </a:rPr>
+              <a:t>por</a:t>
+            </a:r>
+            <a:r>
+              <a:rPr lang="en-US" sz="1200" dirty="0">
+                <a:latin typeface="Arial" panose="020B0604020202020204" pitchFamily="34" charset="0"/>
+                <a:cs typeface="Arial" panose="020B0604020202020204" pitchFamily="34" charset="0"/>
+              </a:rPr>
+              <a:t> </a:t>
+            </a:r>
+            <a:r>
+              <a:rPr lang="en-US" sz="1200" dirty="0" err="1">
+                <a:latin typeface="Arial" panose="020B0604020202020204" pitchFamily="34" charset="0"/>
+                <a:cs typeface="Arial" panose="020B0604020202020204" pitchFamily="34" charset="0"/>
+              </a:rPr>
+              <a:t>dentro</a:t>
+            </a:r>
+            <a:r>
+              <a:rPr lang="en-US" sz="1200" dirty="0">
+                <a:latin typeface="Arial" panose="020B0604020202020204" pitchFamily="34" charset="0"/>
+                <a:cs typeface="Arial" panose="020B0604020202020204" pitchFamily="34" charset="0"/>
+              </a:rPr>
+              <a:t> del core. De </a:t>
+            </a:r>
+            <a:r>
+              <a:rPr lang="en-US" sz="1200" dirty="0" err="1">
+                <a:latin typeface="Arial" panose="020B0604020202020204" pitchFamily="34" charset="0"/>
+                <a:cs typeface="Arial" panose="020B0604020202020204" pitchFamily="34" charset="0"/>
+              </a:rPr>
+              <a:t>todos</a:t>
+            </a:r>
+            <a:r>
+              <a:rPr lang="en-US" sz="1200" dirty="0">
+                <a:latin typeface="Arial" panose="020B0604020202020204" pitchFamily="34" charset="0"/>
+                <a:cs typeface="Arial" panose="020B0604020202020204" pitchFamily="34" charset="0"/>
+              </a:rPr>
+              <a:t> </a:t>
+            </a:r>
+            <a:r>
+              <a:rPr lang="en-US" sz="1200" dirty="0" err="1">
+                <a:latin typeface="Arial" panose="020B0604020202020204" pitchFamily="34" charset="0"/>
+                <a:cs typeface="Arial" panose="020B0604020202020204" pitchFamily="34" charset="0"/>
+              </a:rPr>
+              <a:t>modos</a:t>
+            </a:r>
+            <a:r>
+              <a:rPr lang="en-US" sz="1200" dirty="0">
+                <a:latin typeface="Arial" panose="020B0604020202020204" pitchFamily="34" charset="0"/>
+                <a:cs typeface="Arial" panose="020B0604020202020204" pitchFamily="34" charset="0"/>
+              </a:rPr>
+              <a:t> se </a:t>
+            </a:r>
+            <a:r>
+              <a:rPr lang="en-US" sz="1200" dirty="0" err="1">
+                <a:latin typeface="Arial" panose="020B0604020202020204" pitchFamily="34" charset="0"/>
+                <a:cs typeface="Arial" panose="020B0604020202020204" pitchFamily="34" charset="0"/>
+              </a:rPr>
+              <a:t>observa</a:t>
+            </a:r>
+            <a:r>
+              <a:rPr lang="en-US" sz="1200" dirty="0">
+                <a:latin typeface="Arial" panose="020B0604020202020204" pitchFamily="34" charset="0"/>
+                <a:cs typeface="Arial" panose="020B0604020202020204" pitchFamily="34" charset="0"/>
+              </a:rPr>
+              <a:t> algo de campo </a:t>
+            </a:r>
+            <a:r>
+              <a:rPr lang="en-US" sz="1200" dirty="0" err="1">
+                <a:latin typeface="Arial" panose="020B0604020202020204" pitchFamily="34" charset="0"/>
+                <a:cs typeface="Arial" panose="020B0604020202020204" pitchFamily="34" charset="0"/>
+              </a:rPr>
+              <a:t>evanescente</a:t>
+            </a:r>
+            <a:r>
+              <a:rPr lang="en-US" sz="1200" dirty="0">
+                <a:latin typeface="Arial" panose="020B0604020202020204" pitchFamily="34" charset="0"/>
+                <a:cs typeface="Arial" panose="020B0604020202020204" pitchFamily="34" charset="0"/>
+              </a:rPr>
+              <a:t>.</a:t>
+            </a:r>
+          </a:p>
+          <a:p>
+            <a:pPr algn="just"/>
+            <a:r>
+              <a:rPr lang="en-US" sz="1200" dirty="0" err="1">
+                <a:latin typeface="Arial" panose="020B0604020202020204" pitchFamily="34" charset="0"/>
+                <a:cs typeface="Arial" panose="020B0604020202020204" pitchFamily="34" charset="0"/>
+              </a:rPr>
+              <a:t>Aunque</a:t>
+            </a:r>
+            <a:r>
+              <a:rPr lang="en-US" sz="1200" dirty="0">
+                <a:latin typeface="Arial" panose="020B0604020202020204" pitchFamily="34" charset="0"/>
+                <a:cs typeface="Arial" panose="020B0604020202020204" pitchFamily="34" charset="0"/>
+              </a:rPr>
+              <a:t> </a:t>
+            </a:r>
+            <a:r>
+              <a:rPr lang="en-US" sz="1200" dirty="0" err="1">
+                <a:latin typeface="Arial" panose="020B0604020202020204" pitchFamily="34" charset="0"/>
+                <a:cs typeface="Arial" panose="020B0604020202020204" pitchFamily="34" charset="0"/>
+              </a:rPr>
+              <a:t>previamente</a:t>
+            </a:r>
+            <a:r>
+              <a:rPr lang="en-US" sz="1200" dirty="0">
+                <a:latin typeface="Arial" panose="020B0604020202020204" pitchFamily="34" charset="0"/>
+                <a:cs typeface="Arial" panose="020B0604020202020204" pitchFamily="34" charset="0"/>
+              </a:rPr>
+              <a:t> </a:t>
+            </a:r>
+            <a:r>
+              <a:rPr lang="en-US" sz="1200" dirty="0" err="1">
+                <a:latin typeface="Arial" panose="020B0604020202020204" pitchFamily="34" charset="0"/>
+                <a:cs typeface="Arial" panose="020B0604020202020204" pitchFamily="34" charset="0"/>
+              </a:rPr>
+              <a:t>sabíamos</a:t>
+            </a:r>
+            <a:r>
+              <a:rPr lang="en-US" sz="1200" dirty="0">
+                <a:latin typeface="Arial" panose="020B0604020202020204" pitchFamily="34" charset="0"/>
+                <a:cs typeface="Arial" panose="020B0604020202020204" pitchFamily="34" charset="0"/>
+              </a:rPr>
+              <a:t> </a:t>
+            </a:r>
+            <a:r>
+              <a:rPr lang="en-US" sz="1200" dirty="0" err="1">
+                <a:latin typeface="Arial" panose="020B0604020202020204" pitchFamily="34" charset="0"/>
+                <a:cs typeface="Arial" panose="020B0604020202020204" pitchFamily="34" charset="0"/>
+              </a:rPr>
+              <a:t>que</a:t>
+            </a:r>
+            <a:r>
+              <a:rPr lang="en-US" sz="1200" dirty="0">
+                <a:latin typeface="Arial" panose="020B0604020202020204" pitchFamily="34" charset="0"/>
+                <a:cs typeface="Arial" panose="020B0604020202020204" pitchFamily="34" charset="0"/>
+              </a:rPr>
+              <a:t> la </a:t>
+            </a:r>
+            <a:r>
+              <a:rPr lang="en-US" sz="1200" dirty="0" err="1">
+                <a:latin typeface="Arial" panose="020B0604020202020204" pitchFamily="34" charset="0"/>
+                <a:cs typeface="Arial" panose="020B0604020202020204" pitchFamily="34" charset="0"/>
+              </a:rPr>
+              <a:t>componente</a:t>
+            </a:r>
+            <a:r>
+              <a:rPr lang="en-US" sz="1200" dirty="0">
+                <a:latin typeface="Arial" panose="020B0604020202020204" pitchFamily="34" charset="0"/>
+                <a:cs typeface="Arial" panose="020B0604020202020204" pitchFamily="34" charset="0"/>
+              </a:rPr>
+              <a:t> TM era </a:t>
+            </a:r>
+            <a:r>
+              <a:rPr lang="en-US" sz="1200" dirty="0" err="1">
+                <a:latin typeface="Arial" panose="020B0604020202020204" pitchFamily="34" charset="0"/>
+                <a:cs typeface="Arial" panose="020B0604020202020204" pitchFamily="34" charset="0"/>
+              </a:rPr>
+              <a:t>casi</a:t>
+            </a:r>
+            <a:r>
+              <a:rPr lang="en-US" sz="1200" dirty="0">
+                <a:latin typeface="Arial" panose="020B0604020202020204" pitchFamily="34" charset="0"/>
+                <a:cs typeface="Arial" panose="020B0604020202020204" pitchFamily="34" charset="0"/>
+              </a:rPr>
+              <a:t> </a:t>
+            </a:r>
+            <a:r>
+              <a:rPr lang="en-US" sz="1200" dirty="0" err="1">
+                <a:latin typeface="Arial" panose="020B0604020202020204" pitchFamily="34" charset="0"/>
+                <a:cs typeface="Arial" panose="020B0604020202020204" pitchFamily="34" charset="0"/>
+              </a:rPr>
+              <a:t>inexistente</a:t>
+            </a:r>
+            <a:r>
+              <a:rPr lang="en-US" sz="1200" dirty="0">
+                <a:latin typeface="Arial" panose="020B0604020202020204" pitchFamily="34" charset="0"/>
+                <a:cs typeface="Arial" panose="020B0604020202020204" pitchFamily="34" charset="0"/>
+              </a:rPr>
+              <a:t>, </a:t>
+            </a:r>
+            <a:r>
+              <a:rPr lang="en-US" sz="1200" dirty="0" err="1">
+                <a:latin typeface="Arial" panose="020B0604020202020204" pitchFamily="34" charset="0"/>
+                <a:cs typeface="Arial" panose="020B0604020202020204" pitchFamily="34" charset="0"/>
+              </a:rPr>
+              <a:t>podemos</a:t>
+            </a:r>
+            <a:r>
+              <a:rPr lang="en-US" sz="1200" dirty="0">
+                <a:latin typeface="Arial" panose="020B0604020202020204" pitchFamily="34" charset="0"/>
+                <a:cs typeface="Arial" panose="020B0604020202020204" pitchFamily="34" charset="0"/>
+              </a:rPr>
+              <a:t> </a:t>
+            </a:r>
+            <a:r>
+              <a:rPr lang="en-US" sz="1200" dirty="0" err="1">
+                <a:latin typeface="Arial" panose="020B0604020202020204" pitchFamily="34" charset="0"/>
+                <a:cs typeface="Arial" panose="020B0604020202020204" pitchFamily="34" charset="0"/>
+              </a:rPr>
+              <a:t>corroborarlo</a:t>
+            </a:r>
+            <a:r>
+              <a:rPr lang="en-US" sz="1200" dirty="0">
+                <a:latin typeface="Arial" panose="020B0604020202020204" pitchFamily="34" charset="0"/>
+                <a:cs typeface="Arial" panose="020B0604020202020204" pitchFamily="34" charset="0"/>
+              </a:rPr>
+              <a:t> con la imagen bajo </a:t>
+            </a:r>
+            <a:r>
+              <a:rPr lang="en-US" sz="1200" dirty="0" err="1">
+                <a:latin typeface="Arial" panose="020B0604020202020204" pitchFamily="34" charset="0"/>
+                <a:cs typeface="Arial" panose="020B0604020202020204" pitchFamily="34" charset="0"/>
+              </a:rPr>
+              <a:t>el</a:t>
+            </a:r>
+            <a:r>
+              <a:rPr lang="en-US" sz="1200" dirty="0">
+                <a:latin typeface="Arial" panose="020B0604020202020204" pitchFamily="34" charset="0"/>
+                <a:cs typeface="Arial" panose="020B0604020202020204" pitchFamily="34" charset="0"/>
+              </a:rPr>
+              <a:t> </a:t>
+            </a:r>
+            <a:r>
+              <a:rPr lang="en-US" sz="1200" dirty="0" err="1">
+                <a:latin typeface="Arial" panose="020B0604020202020204" pitchFamily="34" charset="0"/>
+                <a:cs typeface="Arial" panose="020B0604020202020204" pitchFamily="34" charset="0"/>
+              </a:rPr>
+              <a:t>título</a:t>
+            </a:r>
+            <a:r>
+              <a:rPr lang="en-US" sz="1200" dirty="0">
+                <a:latin typeface="Arial" panose="020B0604020202020204" pitchFamily="34" charset="0"/>
+                <a:cs typeface="Arial" panose="020B0604020202020204" pitchFamily="34" charset="0"/>
+              </a:rPr>
+              <a:t> </a:t>
+            </a:r>
+            <a:r>
+              <a:rPr lang="en-US" sz="1200" dirty="0" err="1">
+                <a:latin typeface="Arial" panose="020B0604020202020204" pitchFamily="34" charset="0"/>
+                <a:cs typeface="Arial" panose="020B0604020202020204" pitchFamily="34" charset="0"/>
+              </a:rPr>
+              <a:t>Contribución</a:t>
+            </a:r>
+            <a:r>
+              <a:rPr lang="en-US" sz="1200" dirty="0">
+                <a:latin typeface="Arial" panose="020B0604020202020204" pitchFamily="34" charset="0"/>
+                <a:cs typeface="Arial" panose="020B0604020202020204" pitchFamily="34" charset="0"/>
+              </a:rPr>
+              <a:t> de TM.  </a:t>
+            </a:r>
+          </a:p>
+          <a:p>
+            <a:pPr algn="just"/>
+            <a:endParaRPr lang="en-US" sz="1200" dirty="0">
+              <a:latin typeface="Arial" panose="020B0604020202020204" pitchFamily="34" charset="0"/>
+              <a:cs typeface="Arial" panose="020B0604020202020204" pitchFamily="34" charset="0"/>
+            </a:endParaRPr>
+          </a:p>
+          <a:p>
+            <a:pPr algn="just"/>
+            <a:endParaRPr lang="en-US" sz="1200" dirty="0">
+              <a:latin typeface="Arial" panose="020B0604020202020204" pitchFamily="34" charset="0"/>
+              <a:cs typeface="Arial" panose="020B0604020202020204" pitchFamily="34" charset="0"/>
+            </a:endParaRPr>
+          </a:p>
+          <a:p>
+            <a:pPr algn="just"/>
+            <a:endParaRPr lang="en-US" sz="1200" dirty="0">
+              <a:latin typeface="Arial" panose="020B0604020202020204" pitchFamily="34" charset="0"/>
+              <a:cs typeface="Arial" panose="020B0604020202020204" pitchFamily="34" charset="0"/>
+            </a:endParaRPr>
+          </a:p>
+          <a:p>
+            <a:pPr algn="just"/>
+            <a:endParaRPr lang="en-US" sz="1200" dirty="0">
+              <a:latin typeface="Arial" panose="020B0604020202020204" pitchFamily="34" charset="0"/>
+              <a:cs typeface="Arial" panose="020B0604020202020204" pitchFamily="34" charset="0"/>
+            </a:endParaRPr>
+          </a:p>
+          <a:p>
+            <a:pPr algn="just"/>
+            <a:endParaRPr lang="en-US" sz="1200" dirty="0">
+              <a:latin typeface="Arial" panose="020B0604020202020204" pitchFamily="34" charset="0"/>
+              <a:cs typeface="Arial" panose="020B0604020202020204" pitchFamily="34" charset="0"/>
+            </a:endParaRPr>
+          </a:p>
+          <a:p>
+            <a:pPr algn="just"/>
+            <a:endParaRPr lang="en-US" sz="1200" dirty="0">
+              <a:latin typeface="Arial" panose="020B0604020202020204" pitchFamily="34" charset="0"/>
+              <a:cs typeface="Arial" panose="020B0604020202020204" pitchFamily="34" charset="0"/>
+            </a:endParaRPr>
+          </a:p>
+          <a:p>
+            <a:pPr algn="just"/>
+            <a:endParaRPr lang="en-US" sz="1200" dirty="0">
+              <a:latin typeface="Arial" panose="020B0604020202020204" pitchFamily="34" charset="0"/>
+              <a:cs typeface="Arial" panose="020B0604020202020204" pitchFamily="34" charset="0"/>
+            </a:endParaRPr>
+          </a:p>
+          <a:p>
+            <a:pPr algn="just"/>
+            <a:endParaRPr lang="en-US" sz="1200" dirty="0">
+              <a:latin typeface="Arial" panose="020B0604020202020204" pitchFamily="34" charset="0"/>
+              <a:cs typeface="Arial" panose="020B0604020202020204" pitchFamily="34" charset="0"/>
+            </a:endParaRPr>
+          </a:p>
+        </p:txBody>
+      </p:sp>
+      <p:pic>
+        <p:nvPicPr>
+          <p:cNvPr id="10" name="Imagen 9" descr="Gráfico, Histograma&#10;&#10;El contenido generado por IA puede ser incorrecto.">
+            <a:extLst>
+              <a:ext uri="{FF2B5EF4-FFF2-40B4-BE49-F238E27FC236}">
+                <a16:creationId xmlns:a16="http://schemas.microsoft.com/office/drawing/2014/main" id="{1997CF3B-75BA-163E-CBB1-C2D0D6CCD8E8}"/>
+              </a:ext>
+            </a:extLst>
+          </p:cNvPr>
+          <p:cNvPicPr>
+            <a:picLocks noChangeAspect="1"/>
+          </p:cNvPicPr>
+          <p:nvPr/>
+        </p:nvPicPr>
+        <p:blipFill>
+          <a:blip r:embed="rId5"/>
+          <a:stretch>
+            <a:fillRect/>
+          </a:stretch>
+        </p:blipFill>
+        <p:spPr>
+          <a:xfrm>
+            <a:off x="608012" y="1308321"/>
+            <a:ext cx="4753553" cy="3190890"/>
+          </a:xfrm>
+          <a:prstGeom prst="rect">
+            <a:avLst/>
+          </a:prstGeom>
+        </p:spPr>
+      </p:pic>
+      <p:pic>
+        <p:nvPicPr>
+          <p:cNvPr id="14" name="Imagen 13" descr="Gráfico, Gráfico de dispersión&#10;&#10;El contenido generado por IA puede ser incorrecto.">
+            <a:extLst>
+              <a:ext uri="{FF2B5EF4-FFF2-40B4-BE49-F238E27FC236}">
+                <a16:creationId xmlns:a16="http://schemas.microsoft.com/office/drawing/2014/main" id="{E38ABD3E-3785-BDB4-F2A2-F796DBB92E8C}"/>
+              </a:ext>
+            </a:extLst>
+          </p:cNvPr>
+          <p:cNvPicPr>
+            <a:picLocks noChangeAspect="1"/>
+          </p:cNvPicPr>
+          <p:nvPr/>
+        </p:nvPicPr>
+        <p:blipFill>
+          <a:blip r:embed="rId6"/>
+          <a:stretch>
+            <a:fillRect/>
+          </a:stretch>
+        </p:blipFill>
+        <p:spPr>
+          <a:xfrm>
+            <a:off x="5638800" y="1293667"/>
+            <a:ext cx="4800600" cy="3263737"/>
+          </a:xfrm>
+          <a:prstGeom prst="rect">
+            <a:avLst/>
+          </a:prstGeom>
+        </p:spPr>
+      </p:pic>
     </p:spTree>
+    <p:extLst>
+      <p:ext uri="{BB962C8B-B14F-4D97-AF65-F5344CB8AC3E}">
+        <p14:creationId xmlns:p14="http://schemas.microsoft.com/office/powerpoint/2010/main" val="821815328"/>
+      </p:ext>
+    </p:extLst>
+  </p:cSld>
+  <p:clrMapOvr>
+    <a:masterClrMapping/>
+  </p:clrMapOvr>
+</p:sld>
+</file>
+
+<file path=ppt/slides/slide8.xml><?xml version="1.0" encoding="utf-8"?>
+<p:sld xmlns:a="http://schemas.openxmlformats.org/drawingml/2006/main" xmlns:r="http://schemas.openxmlformats.org/officeDocument/2006/relationships" xmlns:p="http://schemas.openxmlformats.org/presentationml/2006/main">
+  <p:cSld>
+    <p:spTree>
+      <p:nvGrpSpPr>
+        <p:cNvPr id="1" name="">
+          <a:extLst>
+            <a:ext uri="{FF2B5EF4-FFF2-40B4-BE49-F238E27FC236}">
+              <a16:creationId xmlns:a16="http://schemas.microsoft.com/office/drawing/2014/main" id="{F2844D63-9B9A-388D-25C3-E1208A142A1D}"/>
+            </a:ext>
+          </a:extLst>
+        </p:cNvPr>
+        <p:cNvGrpSpPr/>
+        <p:nvPr/>
+      </p:nvGrpSpPr>
+      <p:grpSpPr>
+        <a:xfrm>
+          <a:off x="0" y="0"/>
+          <a:ext cx="0" cy="0"/>
+          <a:chOff x="0" y="0"/>
+          <a:chExt cx="0" cy="0"/>
+        </a:xfrm>
+      </p:grpSpPr>
+      <p:sp>
+        <p:nvSpPr>
+          <p:cNvPr id="16" name="object 16">
+            <a:extLst>
+              <a:ext uri="{FF2B5EF4-FFF2-40B4-BE49-F238E27FC236}">
+                <a16:creationId xmlns:a16="http://schemas.microsoft.com/office/drawing/2014/main" id="{5DC8A679-AFCF-3C00-67FE-5F9E1588B64C}"/>
+              </a:ext>
+            </a:extLst>
+          </p:cNvPr>
+          <p:cNvSpPr txBox="1">
+            <a:spLocks noGrp="1"/>
+          </p:cNvSpPr>
+          <p:nvPr>
+            <p:ph type="title"/>
+          </p:nvPr>
+        </p:nvSpPr>
+        <p:spPr>
+          <a:xfrm>
+            <a:off x="685800" y="408883"/>
+            <a:ext cx="10994410" cy="782265"/>
+          </a:xfrm>
+          <a:prstGeom prst="rect">
+            <a:avLst/>
+          </a:prstGeom>
+        </p:spPr>
+        <p:txBody>
+          <a:bodyPr vert="horz" wrap="square" lIns="0" tIns="12700" rIns="0" bIns="0" rtlCol="0">
+            <a:spAutoFit/>
+          </a:bodyPr>
+          <a:lstStyle/>
+          <a:p>
+            <a:pPr marL="12700">
+              <a:lnSpc>
+                <a:spcPct val="100000"/>
+              </a:lnSpc>
+              <a:spcBef>
+                <a:spcPts val="100"/>
+              </a:spcBef>
+            </a:pPr>
+            <a:r>
+              <a:rPr lang="en-US" sz="2500" dirty="0"/>
+              <a:t>Learning outcome #1 – Effective index of a waveguide</a:t>
+            </a:r>
+            <a:br>
+              <a:rPr lang="es-ES" sz="2500" spc="-5" dirty="0">
+                <a:latin typeface="+mj-lt"/>
+                <a:cs typeface="Lucida Sans"/>
+              </a:rPr>
+            </a:br>
+            <a:endParaRPr sz="2500" b="0" dirty="0">
+              <a:latin typeface="+mj-lt"/>
+              <a:cs typeface="Lucida Sans"/>
+            </a:endParaRPr>
+          </a:p>
+        </p:txBody>
+      </p:sp>
+      <p:pic>
+        <p:nvPicPr>
+          <p:cNvPr id="83" name="Gráfico 82">
+            <a:extLst>
+              <a:ext uri="{FF2B5EF4-FFF2-40B4-BE49-F238E27FC236}">
+                <a16:creationId xmlns:a16="http://schemas.microsoft.com/office/drawing/2014/main" id="{3D143E16-8917-7995-05D0-1A440AD90DD6}"/>
+              </a:ext>
+            </a:extLst>
+          </p:cNvPr>
+          <p:cNvPicPr>
+            <a:picLocks noChangeAspect="1"/>
+          </p:cNvPicPr>
+          <p:nvPr/>
+        </p:nvPicPr>
+        <p:blipFill>
+          <a:blip r:embed="rId3">
+            <a:extLst>
+              <a:ext uri="{96DAC541-7B7A-43D3-8B79-37D633B846F1}">
+                <asvg:svgBlip xmlns:asvg="http://schemas.microsoft.com/office/drawing/2016/SVG/main" r:embed="rId4"/>
+              </a:ext>
+            </a:extLst>
+          </a:blip>
+          <a:stretch>
+            <a:fillRect/>
+          </a:stretch>
+        </p:blipFill>
+        <p:spPr>
+          <a:xfrm>
+            <a:off x="5045006" y="6356057"/>
+            <a:ext cx="6409575" cy="363174"/>
+          </a:xfrm>
+          <a:prstGeom prst="rect">
+            <a:avLst/>
+          </a:prstGeom>
+        </p:spPr>
+      </p:pic>
+      <p:sp>
+        <p:nvSpPr>
+          <p:cNvPr id="84" name="Marcador de número de diapositiva 83">
+            <a:extLst>
+              <a:ext uri="{FF2B5EF4-FFF2-40B4-BE49-F238E27FC236}">
+                <a16:creationId xmlns:a16="http://schemas.microsoft.com/office/drawing/2014/main" id="{B86CCD6A-2DF5-23E0-23C9-C93D73F60917}"/>
+              </a:ext>
+            </a:extLst>
+          </p:cNvPr>
+          <p:cNvSpPr>
+            <a:spLocks noGrp="1"/>
+          </p:cNvSpPr>
+          <p:nvPr>
+            <p:ph type="sldNum" sz="quarter" idx="7"/>
+          </p:nvPr>
+        </p:nvSpPr>
+        <p:spPr/>
+        <p:txBody>
+          <a:bodyPr/>
+          <a:lstStyle/>
+          <a:p>
+            <a:fld id="{B6F15528-21DE-4FAA-801E-634DDDAF4B2B}" type="slidenum">
+              <a:rPr lang="es-ES" smtClean="0"/>
+              <a:t>8</a:t>
+            </a:fld>
+            <a:endParaRPr lang="es-ES"/>
+          </a:p>
+        </p:txBody>
+      </p:sp>
+      <p:sp>
+        <p:nvSpPr>
+          <p:cNvPr id="3" name="Marcador de pie de página 2">
+            <a:extLst>
+              <a:ext uri="{FF2B5EF4-FFF2-40B4-BE49-F238E27FC236}">
+                <a16:creationId xmlns:a16="http://schemas.microsoft.com/office/drawing/2014/main" id="{0896B467-DB75-8A75-097B-E0DB8FCC5F7A}"/>
+              </a:ext>
+            </a:extLst>
+          </p:cNvPr>
+          <p:cNvSpPr>
+            <a:spLocks noGrp="1"/>
+          </p:cNvSpPr>
+          <p:nvPr>
+            <p:ph type="ftr" sz="quarter" idx="5"/>
+          </p:nvPr>
+        </p:nvSpPr>
+        <p:spPr/>
+        <p:txBody>
+          <a:bodyPr/>
+          <a:lstStyle/>
+          <a:p>
+            <a:pPr marL="12700">
+              <a:spcBef>
+                <a:spcPts val="15"/>
+              </a:spcBef>
+            </a:pPr>
+            <a:r>
+              <a:rPr lang="es-ES" spc="-5" dirty="0"/>
+              <a:t>LAB 0.1. MODESOLVER</a:t>
+            </a:r>
+          </a:p>
+        </p:txBody>
+      </p:sp>
+      <p:sp>
+        <p:nvSpPr>
+          <p:cNvPr id="4" name="Marcador de texto 2">
+            <a:extLst>
+              <a:ext uri="{FF2B5EF4-FFF2-40B4-BE49-F238E27FC236}">
+                <a16:creationId xmlns:a16="http://schemas.microsoft.com/office/drawing/2014/main" id="{E267D3C0-7722-30C1-3C2A-73DF53157308}"/>
+              </a:ext>
+            </a:extLst>
+          </p:cNvPr>
+          <p:cNvSpPr txBox="1">
+            <a:spLocks/>
+          </p:cNvSpPr>
+          <p:nvPr/>
+        </p:nvSpPr>
+        <p:spPr>
+          <a:xfrm>
+            <a:off x="608012" y="1295400"/>
+            <a:ext cx="11048999" cy="4958137"/>
+          </a:xfrm>
+          <a:prstGeom prst="rect">
+            <a:avLst/>
+          </a:prstGeom>
+        </p:spPr>
+        <p:txBody>
+          <a:bodyPr>
+            <a:normAutofit/>
+          </a:bodyPr>
+          <a:lstStyle>
+            <a:lvl1pPr marL="0">
+              <a:defRPr>
+                <a:latin typeface="+mn-lt"/>
+                <a:ea typeface="+mn-ea"/>
+                <a:cs typeface="+mn-cs"/>
+              </a:defRPr>
+            </a:lvl1pPr>
+            <a:lvl2pPr marL="457200">
+              <a:defRPr>
+                <a:latin typeface="+mn-lt"/>
+                <a:ea typeface="+mn-ea"/>
+                <a:cs typeface="+mn-cs"/>
+              </a:defRPr>
+            </a:lvl2pPr>
+            <a:lvl3pPr marL="914400">
+              <a:defRPr>
+                <a:latin typeface="+mn-lt"/>
+                <a:ea typeface="+mn-ea"/>
+                <a:cs typeface="+mn-cs"/>
+              </a:defRPr>
+            </a:lvl3pPr>
+            <a:lvl4pPr marL="1371600">
+              <a:defRPr>
+                <a:latin typeface="+mn-lt"/>
+                <a:ea typeface="+mn-ea"/>
+                <a:cs typeface="+mn-cs"/>
+              </a:defRPr>
+            </a:lvl4pPr>
+            <a:lvl5pPr marL="1828800">
+              <a:defRPr>
+                <a:latin typeface="+mn-lt"/>
+                <a:ea typeface="+mn-ea"/>
+                <a:cs typeface="+mn-cs"/>
+              </a:defRPr>
+            </a:lvl5pPr>
+            <a:lvl6pPr marL="2286000">
+              <a:defRPr>
+                <a:latin typeface="+mn-lt"/>
+                <a:ea typeface="+mn-ea"/>
+                <a:cs typeface="+mn-cs"/>
+              </a:defRPr>
+            </a:lvl6pPr>
+            <a:lvl7pPr marL="2743200">
+              <a:defRPr>
+                <a:latin typeface="+mn-lt"/>
+                <a:ea typeface="+mn-ea"/>
+                <a:cs typeface="+mn-cs"/>
+              </a:defRPr>
+            </a:lvl7pPr>
+            <a:lvl8pPr marL="3200400">
+              <a:defRPr>
+                <a:latin typeface="+mn-lt"/>
+                <a:ea typeface="+mn-ea"/>
+                <a:cs typeface="+mn-cs"/>
+              </a:defRPr>
+            </a:lvl8pPr>
+            <a:lvl9pPr marL="3657600">
+              <a:defRPr>
+                <a:latin typeface="+mn-lt"/>
+                <a:ea typeface="+mn-ea"/>
+                <a:cs typeface="+mn-cs"/>
+              </a:defRPr>
+            </a:lvl9pPr>
+          </a:lstStyle>
+          <a:p>
+            <a:pPr algn="just"/>
+            <a:endParaRPr lang="en-US" sz="2000" b="1" i="1" dirty="0"/>
+          </a:p>
+          <a:p>
+            <a:pPr algn="just"/>
+            <a:endParaRPr lang="en-US" sz="2000" kern="0" dirty="0">
+              <a:solidFill>
+                <a:sysClr val="windowText" lastClr="000000"/>
+              </a:solidFill>
+            </a:endParaRPr>
+          </a:p>
+        </p:txBody>
+      </p:sp>
+      <p:sp>
+        <p:nvSpPr>
+          <p:cNvPr id="2" name="CuadroTexto 1">
+            <a:extLst>
+              <a:ext uri="{FF2B5EF4-FFF2-40B4-BE49-F238E27FC236}">
+                <a16:creationId xmlns:a16="http://schemas.microsoft.com/office/drawing/2014/main" id="{52DA2A28-46E7-C7E4-C5BC-21B17A52A130}"/>
+              </a:ext>
+            </a:extLst>
+          </p:cNvPr>
+          <p:cNvSpPr txBox="1"/>
+          <p:nvPr/>
+        </p:nvSpPr>
+        <p:spPr>
+          <a:xfrm>
+            <a:off x="609441" y="4860334"/>
+            <a:ext cx="11199971" cy="1938992"/>
+          </a:xfrm>
+          <a:prstGeom prst="rect">
+            <a:avLst/>
+          </a:prstGeom>
+          <a:solidFill>
+            <a:schemeClr val="bg1">
+              <a:lumMod val="95000"/>
+            </a:schemeClr>
+          </a:solidFill>
+          <a:ln w="28575">
+            <a:solidFill>
+              <a:srgbClr val="E0700D"/>
+            </a:solidFill>
+          </a:ln>
+        </p:spPr>
+        <p:txBody>
+          <a:bodyPr wrap="square" rtlCol="0">
+            <a:spAutoFit/>
+          </a:bodyPr>
+          <a:lstStyle/>
+          <a:p>
+            <a:pPr algn="just"/>
+            <a:r>
+              <a:rPr lang="en-US" sz="1200" dirty="0" err="1">
+                <a:latin typeface="Arial" panose="020B0604020202020204" pitchFamily="34" charset="0"/>
+                <a:cs typeface="Arial" panose="020B0604020202020204" pitchFamily="34" charset="0"/>
+              </a:rPr>
+              <a:t>Analizando</a:t>
+            </a:r>
+            <a:r>
+              <a:rPr lang="en-US" sz="1200" dirty="0">
+                <a:latin typeface="Arial" panose="020B0604020202020204" pitchFamily="34" charset="0"/>
+                <a:cs typeface="Arial" panose="020B0604020202020204" pitchFamily="34" charset="0"/>
+              </a:rPr>
+              <a:t> la </a:t>
+            </a:r>
+            <a:r>
+              <a:rPr lang="en-US" sz="1200" dirty="0" err="1">
+                <a:latin typeface="Arial" panose="020B0604020202020204" pitchFamily="34" charset="0"/>
+                <a:cs typeface="Arial" panose="020B0604020202020204" pitchFamily="34" charset="0"/>
+              </a:rPr>
+              <a:t>distribución</a:t>
+            </a:r>
+            <a:r>
+              <a:rPr lang="en-US" sz="1200" dirty="0">
+                <a:latin typeface="Arial" panose="020B0604020202020204" pitchFamily="34" charset="0"/>
+                <a:cs typeface="Arial" panose="020B0604020202020204" pitchFamily="34" charset="0"/>
+              </a:rPr>
+              <a:t> del modo fundamental TM, con un </a:t>
+            </a:r>
+            <a:r>
+              <a:rPr lang="en-US" sz="1200" dirty="0" err="1">
+                <a:latin typeface="Arial" panose="020B0604020202020204" pitchFamily="34" charset="0"/>
+                <a:cs typeface="Arial" panose="020B0604020202020204" pitchFamily="34" charset="0"/>
+              </a:rPr>
+              <a:t>indice</a:t>
+            </a:r>
+            <a:r>
+              <a:rPr lang="en-US" sz="1200" dirty="0">
+                <a:latin typeface="Arial" panose="020B0604020202020204" pitchFamily="34" charset="0"/>
+                <a:cs typeface="Arial" panose="020B0604020202020204" pitchFamily="34" charset="0"/>
+              </a:rPr>
+              <a:t> </a:t>
+            </a:r>
+            <a:r>
+              <a:rPr lang="en-US" sz="1200" dirty="0" err="1">
+                <a:latin typeface="Arial" panose="020B0604020202020204" pitchFamily="34" charset="0"/>
+                <a:cs typeface="Arial" panose="020B0604020202020204" pitchFamily="34" charset="0"/>
+              </a:rPr>
+              <a:t>efectivo</a:t>
+            </a:r>
+            <a:r>
+              <a:rPr lang="en-US" sz="1200" dirty="0">
+                <a:latin typeface="Arial" panose="020B0604020202020204" pitchFamily="34" charset="0"/>
+                <a:cs typeface="Arial" panose="020B0604020202020204" pitchFamily="34" charset="0"/>
+              </a:rPr>
+              <a:t> </a:t>
+            </a:r>
+            <a:r>
+              <a:rPr lang="en-US" sz="1200" dirty="0" err="1">
+                <a:latin typeface="Arial" panose="020B0604020202020204" pitchFamily="34" charset="0"/>
+                <a:cs typeface="Arial" panose="020B0604020202020204" pitchFamily="34" charset="0"/>
+              </a:rPr>
+              <a:t>menor</a:t>
+            </a:r>
+            <a:r>
+              <a:rPr lang="en-US" sz="1200" dirty="0">
+                <a:latin typeface="Arial" panose="020B0604020202020204" pitchFamily="34" charset="0"/>
+                <a:cs typeface="Arial" panose="020B0604020202020204" pitchFamily="34" charset="0"/>
+              </a:rPr>
+              <a:t>, </a:t>
+            </a:r>
+            <a:r>
+              <a:rPr lang="en-US" sz="1200" dirty="0" err="1">
+                <a:latin typeface="Arial" panose="020B0604020202020204" pitchFamily="34" charset="0"/>
+                <a:cs typeface="Arial" panose="020B0604020202020204" pitchFamily="34" charset="0"/>
+              </a:rPr>
+              <a:t>viaja</a:t>
+            </a:r>
+            <a:r>
+              <a:rPr lang="en-US" sz="1200" dirty="0">
+                <a:latin typeface="Arial" panose="020B0604020202020204" pitchFamily="34" charset="0"/>
+                <a:cs typeface="Arial" panose="020B0604020202020204" pitchFamily="34" charset="0"/>
+              </a:rPr>
+              <a:t> </a:t>
+            </a:r>
+            <a:r>
+              <a:rPr lang="en-US" sz="1200" dirty="0" err="1">
+                <a:latin typeface="Arial" panose="020B0604020202020204" pitchFamily="34" charset="0"/>
+                <a:cs typeface="Arial" panose="020B0604020202020204" pitchFamily="34" charset="0"/>
+              </a:rPr>
+              <a:t>más</a:t>
+            </a:r>
+            <a:r>
+              <a:rPr lang="en-US" sz="1200" dirty="0">
+                <a:latin typeface="Arial" panose="020B0604020202020204" pitchFamily="34" charset="0"/>
+                <a:cs typeface="Arial" panose="020B0604020202020204" pitchFamily="34" charset="0"/>
+              </a:rPr>
+              <a:t> </a:t>
+            </a:r>
+            <a:r>
+              <a:rPr lang="en-US" sz="1200" dirty="0" err="1">
+                <a:latin typeface="Arial" panose="020B0604020202020204" pitchFamily="34" charset="0"/>
+                <a:cs typeface="Arial" panose="020B0604020202020204" pitchFamily="34" charset="0"/>
+              </a:rPr>
+              <a:t>por</a:t>
+            </a:r>
+            <a:r>
+              <a:rPr lang="en-US" sz="1200" dirty="0">
+                <a:latin typeface="Arial" panose="020B0604020202020204" pitchFamily="34" charset="0"/>
+                <a:cs typeface="Arial" panose="020B0604020202020204" pitchFamily="34" charset="0"/>
+              </a:rPr>
+              <a:t> </a:t>
+            </a:r>
+            <a:r>
+              <a:rPr lang="en-US" sz="1200" dirty="0" err="1">
+                <a:latin typeface="Arial" panose="020B0604020202020204" pitchFamily="34" charset="0"/>
+                <a:cs typeface="Arial" panose="020B0604020202020204" pitchFamily="34" charset="0"/>
+              </a:rPr>
+              <a:t>el</a:t>
+            </a:r>
+            <a:r>
+              <a:rPr lang="en-US" sz="1200" dirty="0">
+                <a:latin typeface="Arial" panose="020B0604020202020204" pitchFamily="34" charset="0"/>
+                <a:cs typeface="Arial" panose="020B0604020202020204" pitchFamily="34" charset="0"/>
+              </a:rPr>
+              <a:t> cladding. </a:t>
+            </a:r>
+          </a:p>
+          <a:p>
+            <a:pPr algn="just"/>
+            <a:r>
+              <a:rPr lang="en-US" sz="1200" dirty="0" err="1">
+                <a:latin typeface="Arial" panose="020B0604020202020204" pitchFamily="34" charset="0"/>
+                <a:cs typeface="Arial" panose="020B0604020202020204" pitchFamily="34" charset="0"/>
+              </a:rPr>
+              <a:t>Aunque</a:t>
+            </a:r>
+            <a:r>
+              <a:rPr lang="en-US" sz="1200" dirty="0">
+                <a:latin typeface="Arial" panose="020B0604020202020204" pitchFamily="34" charset="0"/>
+                <a:cs typeface="Arial" panose="020B0604020202020204" pitchFamily="34" charset="0"/>
+              </a:rPr>
+              <a:t> </a:t>
+            </a:r>
+            <a:r>
+              <a:rPr lang="en-US" sz="1200" dirty="0" err="1">
+                <a:latin typeface="Arial" panose="020B0604020202020204" pitchFamily="34" charset="0"/>
+                <a:cs typeface="Arial" panose="020B0604020202020204" pitchFamily="34" charset="0"/>
+              </a:rPr>
+              <a:t>previamente</a:t>
+            </a:r>
+            <a:r>
+              <a:rPr lang="en-US" sz="1200" dirty="0">
+                <a:latin typeface="Arial" panose="020B0604020202020204" pitchFamily="34" charset="0"/>
+                <a:cs typeface="Arial" panose="020B0604020202020204" pitchFamily="34" charset="0"/>
+              </a:rPr>
+              <a:t> </a:t>
+            </a:r>
+            <a:r>
+              <a:rPr lang="en-US" sz="1200" dirty="0" err="1">
+                <a:latin typeface="Arial" panose="020B0604020202020204" pitchFamily="34" charset="0"/>
+                <a:cs typeface="Arial" panose="020B0604020202020204" pitchFamily="34" charset="0"/>
+              </a:rPr>
+              <a:t>sabíamos</a:t>
+            </a:r>
+            <a:r>
+              <a:rPr lang="en-US" sz="1200" dirty="0">
+                <a:latin typeface="Arial" panose="020B0604020202020204" pitchFamily="34" charset="0"/>
+                <a:cs typeface="Arial" panose="020B0604020202020204" pitchFamily="34" charset="0"/>
+              </a:rPr>
+              <a:t> </a:t>
+            </a:r>
+            <a:r>
+              <a:rPr lang="en-US" sz="1200" dirty="0" err="1">
+                <a:latin typeface="Arial" panose="020B0604020202020204" pitchFamily="34" charset="0"/>
+                <a:cs typeface="Arial" panose="020B0604020202020204" pitchFamily="34" charset="0"/>
+              </a:rPr>
+              <a:t>que</a:t>
+            </a:r>
+            <a:r>
+              <a:rPr lang="en-US" sz="1200" dirty="0">
+                <a:latin typeface="Arial" panose="020B0604020202020204" pitchFamily="34" charset="0"/>
+                <a:cs typeface="Arial" panose="020B0604020202020204" pitchFamily="34" charset="0"/>
+              </a:rPr>
+              <a:t> la </a:t>
+            </a:r>
+            <a:r>
+              <a:rPr lang="en-US" sz="1200" dirty="0" err="1">
+                <a:latin typeface="Arial" panose="020B0604020202020204" pitchFamily="34" charset="0"/>
+                <a:cs typeface="Arial" panose="020B0604020202020204" pitchFamily="34" charset="0"/>
+              </a:rPr>
+              <a:t>componente</a:t>
+            </a:r>
+            <a:r>
+              <a:rPr lang="en-US" sz="1200" dirty="0">
+                <a:latin typeface="Arial" panose="020B0604020202020204" pitchFamily="34" charset="0"/>
+                <a:cs typeface="Arial" panose="020B0604020202020204" pitchFamily="34" charset="0"/>
+              </a:rPr>
+              <a:t> TE era </a:t>
+            </a:r>
+            <a:r>
+              <a:rPr lang="en-US" sz="1200" dirty="0" err="1">
+                <a:latin typeface="Arial" panose="020B0604020202020204" pitchFamily="34" charset="0"/>
+                <a:cs typeface="Arial" panose="020B0604020202020204" pitchFamily="34" charset="0"/>
+              </a:rPr>
+              <a:t>casi</a:t>
+            </a:r>
+            <a:r>
+              <a:rPr lang="en-US" sz="1200" dirty="0">
+                <a:latin typeface="Arial" panose="020B0604020202020204" pitchFamily="34" charset="0"/>
+                <a:cs typeface="Arial" panose="020B0604020202020204" pitchFamily="34" charset="0"/>
+              </a:rPr>
+              <a:t> </a:t>
+            </a:r>
+            <a:r>
+              <a:rPr lang="en-US" sz="1200" dirty="0" err="1">
+                <a:latin typeface="Arial" panose="020B0604020202020204" pitchFamily="34" charset="0"/>
+                <a:cs typeface="Arial" panose="020B0604020202020204" pitchFamily="34" charset="0"/>
+              </a:rPr>
+              <a:t>inexistente</a:t>
+            </a:r>
+            <a:r>
+              <a:rPr lang="en-US" sz="1200" dirty="0">
+                <a:latin typeface="Arial" panose="020B0604020202020204" pitchFamily="34" charset="0"/>
+                <a:cs typeface="Arial" panose="020B0604020202020204" pitchFamily="34" charset="0"/>
+              </a:rPr>
+              <a:t> </a:t>
+            </a:r>
+            <a:r>
+              <a:rPr lang="en-US" sz="1200" dirty="0" err="1">
+                <a:latin typeface="Arial" panose="020B0604020202020204" pitchFamily="34" charset="0"/>
+                <a:cs typeface="Arial" panose="020B0604020202020204" pitchFamily="34" charset="0"/>
+              </a:rPr>
+              <a:t>en</a:t>
+            </a:r>
+            <a:r>
+              <a:rPr lang="en-US" sz="1200" dirty="0">
+                <a:latin typeface="Arial" panose="020B0604020202020204" pitchFamily="34" charset="0"/>
+                <a:cs typeface="Arial" panose="020B0604020202020204" pitchFamily="34" charset="0"/>
+              </a:rPr>
+              <a:t> </a:t>
+            </a:r>
+            <a:r>
+              <a:rPr lang="en-US" sz="1200" dirty="0" err="1">
+                <a:latin typeface="Arial" panose="020B0604020202020204" pitchFamily="34" charset="0"/>
+                <a:cs typeface="Arial" panose="020B0604020202020204" pitchFamily="34" charset="0"/>
+              </a:rPr>
+              <a:t>este</a:t>
+            </a:r>
+            <a:r>
+              <a:rPr lang="en-US" sz="1200" dirty="0">
+                <a:latin typeface="Arial" panose="020B0604020202020204" pitchFamily="34" charset="0"/>
+                <a:cs typeface="Arial" panose="020B0604020202020204" pitchFamily="34" charset="0"/>
+              </a:rPr>
+              <a:t> </a:t>
+            </a:r>
+            <a:r>
+              <a:rPr lang="en-US" sz="1200" dirty="0" err="1">
+                <a:latin typeface="Arial" panose="020B0604020202020204" pitchFamily="34" charset="0"/>
+                <a:cs typeface="Arial" panose="020B0604020202020204" pitchFamily="34" charset="0"/>
+              </a:rPr>
+              <a:t>caso</a:t>
+            </a:r>
+            <a:r>
+              <a:rPr lang="en-US" sz="1200" dirty="0">
+                <a:latin typeface="Arial" panose="020B0604020202020204" pitchFamily="34" charset="0"/>
+                <a:cs typeface="Arial" panose="020B0604020202020204" pitchFamily="34" charset="0"/>
+              </a:rPr>
+              <a:t> , </a:t>
+            </a:r>
+            <a:r>
+              <a:rPr lang="en-US" sz="1200" dirty="0" err="1">
+                <a:latin typeface="Arial" panose="020B0604020202020204" pitchFamily="34" charset="0"/>
+                <a:cs typeface="Arial" panose="020B0604020202020204" pitchFamily="34" charset="0"/>
+              </a:rPr>
+              <a:t>podemos</a:t>
+            </a:r>
+            <a:r>
+              <a:rPr lang="en-US" sz="1200" dirty="0">
+                <a:latin typeface="Arial" panose="020B0604020202020204" pitchFamily="34" charset="0"/>
+                <a:cs typeface="Arial" panose="020B0604020202020204" pitchFamily="34" charset="0"/>
+              </a:rPr>
+              <a:t> </a:t>
+            </a:r>
+            <a:r>
+              <a:rPr lang="en-US" sz="1200" dirty="0" err="1">
+                <a:latin typeface="Arial" panose="020B0604020202020204" pitchFamily="34" charset="0"/>
+                <a:cs typeface="Arial" panose="020B0604020202020204" pitchFamily="34" charset="0"/>
+              </a:rPr>
+              <a:t>corroborarlo</a:t>
+            </a:r>
+            <a:r>
+              <a:rPr lang="en-US" sz="1200" dirty="0">
+                <a:latin typeface="Arial" panose="020B0604020202020204" pitchFamily="34" charset="0"/>
+                <a:cs typeface="Arial" panose="020B0604020202020204" pitchFamily="34" charset="0"/>
+              </a:rPr>
+              <a:t> con la imagen bajo </a:t>
+            </a:r>
+            <a:r>
+              <a:rPr lang="en-US" sz="1200" dirty="0" err="1">
+                <a:latin typeface="Arial" panose="020B0604020202020204" pitchFamily="34" charset="0"/>
+                <a:cs typeface="Arial" panose="020B0604020202020204" pitchFamily="34" charset="0"/>
+              </a:rPr>
+              <a:t>el</a:t>
+            </a:r>
+            <a:r>
+              <a:rPr lang="en-US" sz="1200" dirty="0">
+                <a:latin typeface="Arial" panose="020B0604020202020204" pitchFamily="34" charset="0"/>
+                <a:cs typeface="Arial" panose="020B0604020202020204" pitchFamily="34" charset="0"/>
+              </a:rPr>
+              <a:t> </a:t>
+            </a:r>
+            <a:r>
+              <a:rPr lang="en-US" sz="1200" dirty="0" err="1">
+                <a:latin typeface="Arial" panose="020B0604020202020204" pitchFamily="34" charset="0"/>
+                <a:cs typeface="Arial" panose="020B0604020202020204" pitchFamily="34" charset="0"/>
+              </a:rPr>
+              <a:t>título</a:t>
+            </a:r>
+            <a:r>
+              <a:rPr lang="en-US" sz="1200" dirty="0">
+                <a:latin typeface="Arial" panose="020B0604020202020204" pitchFamily="34" charset="0"/>
+                <a:cs typeface="Arial" panose="020B0604020202020204" pitchFamily="34" charset="0"/>
+              </a:rPr>
+              <a:t> </a:t>
+            </a:r>
+            <a:r>
+              <a:rPr lang="en-US" sz="1200" dirty="0" err="1">
+                <a:latin typeface="Arial" panose="020B0604020202020204" pitchFamily="34" charset="0"/>
+                <a:cs typeface="Arial" panose="020B0604020202020204" pitchFamily="34" charset="0"/>
+              </a:rPr>
+              <a:t>Contribución</a:t>
+            </a:r>
+            <a:r>
+              <a:rPr lang="en-US" sz="1200" dirty="0">
+                <a:latin typeface="Arial" panose="020B0604020202020204" pitchFamily="34" charset="0"/>
+                <a:cs typeface="Arial" panose="020B0604020202020204" pitchFamily="34" charset="0"/>
+              </a:rPr>
+              <a:t> de TE.  </a:t>
+            </a:r>
+          </a:p>
+          <a:p>
+            <a:pPr algn="just"/>
+            <a:endParaRPr lang="en-US" sz="1200" dirty="0">
+              <a:latin typeface="Arial" panose="020B0604020202020204" pitchFamily="34" charset="0"/>
+              <a:cs typeface="Arial" panose="020B0604020202020204" pitchFamily="34" charset="0"/>
+            </a:endParaRPr>
+          </a:p>
+          <a:p>
+            <a:pPr algn="just"/>
+            <a:endParaRPr lang="en-US" sz="1200" dirty="0">
+              <a:latin typeface="Arial" panose="020B0604020202020204" pitchFamily="34" charset="0"/>
+              <a:cs typeface="Arial" panose="020B0604020202020204" pitchFamily="34" charset="0"/>
+            </a:endParaRPr>
+          </a:p>
+          <a:p>
+            <a:pPr algn="just"/>
+            <a:endParaRPr lang="en-US" sz="1200" dirty="0">
+              <a:latin typeface="Arial" panose="020B0604020202020204" pitchFamily="34" charset="0"/>
+              <a:cs typeface="Arial" panose="020B0604020202020204" pitchFamily="34" charset="0"/>
+            </a:endParaRPr>
+          </a:p>
+          <a:p>
+            <a:pPr algn="just"/>
+            <a:endParaRPr lang="en-US" sz="1200" dirty="0">
+              <a:latin typeface="Arial" panose="020B0604020202020204" pitchFamily="34" charset="0"/>
+              <a:cs typeface="Arial" panose="020B0604020202020204" pitchFamily="34" charset="0"/>
+            </a:endParaRPr>
+          </a:p>
+          <a:p>
+            <a:pPr algn="just"/>
+            <a:endParaRPr lang="en-US" sz="1200" dirty="0">
+              <a:latin typeface="Arial" panose="020B0604020202020204" pitchFamily="34" charset="0"/>
+              <a:cs typeface="Arial" panose="020B0604020202020204" pitchFamily="34" charset="0"/>
+            </a:endParaRPr>
+          </a:p>
+          <a:p>
+            <a:pPr algn="just"/>
+            <a:endParaRPr lang="en-US" sz="1200" dirty="0">
+              <a:latin typeface="Arial" panose="020B0604020202020204" pitchFamily="34" charset="0"/>
+              <a:cs typeface="Arial" panose="020B0604020202020204" pitchFamily="34" charset="0"/>
+            </a:endParaRPr>
+          </a:p>
+          <a:p>
+            <a:pPr algn="just"/>
+            <a:endParaRPr lang="en-US" sz="1200" dirty="0">
+              <a:latin typeface="Arial" panose="020B0604020202020204" pitchFamily="34" charset="0"/>
+              <a:cs typeface="Arial" panose="020B0604020202020204" pitchFamily="34" charset="0"/>
+            </a:endParaRPr>
+          </a:p>
+          <a:p>
+            <a:pPr algn="just"/>
+            <a:endParaRPr lang="en-US" sz="1200" dirty="0">
+              <a:latin typeface="Arial" panose="020B0604020202020204" pitchFamily="34" charset="0"/>
+              <a:cs typeface="Arial" panose="020B0604020202020204" pitchFamily="34" charset="0"/>
+            </a:endParaRPr>
+          </a:p>
+        </p:txBody>
+      </p:sp>
+      <p:pic>
+        <p:nvPicPr>
+          <p:cNvPr id="8" name="Imagen 7" descr="Gráfico&#10;&#10;El contenido generado por IA puede ser incorrecto.">
+            <a:extLst>
+              <a:ext uri="{FF2B5EF4-FFF2-40B4-BE49-F238E27FC236}">
+                <a16:creationId xmlns:a16="http://schemas.microsoft.com/office/drawing/2014/main" id="{BA951CE3-80FA-EB69-6DDA-9221B043358A}"/>
+              </a:ext>
+            </a:extLst>
+          </p:cNvPr>
+          <p:cNvPicPr>
+            <a:picLocks noChangeAspect="1"/>
+          </p:cNvPicPr>
+          <p:nvPr/>
+        </p:nvPicPr>
+        <p:blipFill>
+          <a:blip r:embed="rId5"/>
+          <a:stretch>
+            <a:fillRect/>
+          </a:stretch>
+        </p:blipFill>
+        <p:spPr>
+          <a:xfrm>
+            <a:off x="859342" y="1092456"/>
+            <a:ext cx="4986916" cy="3332245"/>
+          </a:xfrm>
+          <a:prstGeom prst="rect">
+            <a:avLst/>
+          </a:prstGeom>
+        </p:spPr>
+      </p:pic>
+      <p:pic>
+        <p:nvPicPr>
+          <p:cNvPr id="11" name="Imagen 10" descr="Gráfico, Gráfico de dispersión&#10;&#10;El contenido generado por IA puede ser incorrecto.">
+            <a:extLst>
+              <a:ext uri="{FF2B5EF4-FFF2-40B4-BE49-F238E27FC236}">
+                <a16:creationId xmlns:a16="http://schemas.microsoft.com/office/drawing/2014/main" id="{5B765D51-96BA-AD6C-6D46-48D3E9D226D5}"/>
+              </a:ext>
+            </a:extLst>
+          </p:cNvPr>
+          <p:cNvPicPr>
+            <a:picLocks noChangeAspect="1"/>
+          </p:cNvPicPr>
+          <p:nvPr/>
+        </p:nvPicPr>
+        <p:blipFill>
+          <a:blip r:embed="rId6"/>
+          <a:stretch>
+            <a:fillRect/>
+          </a:stretch>
+        </p:blipFill>
+        <p:spPr>
+          <a:xfrm>
+            <a:off x="6019800" y="890125"/>
+            <a:ext cx="5567403" cy="3681875"/>
+          </a:xfrm>
+          <a:prstGeom prst="rect">
+            <a:avLst/>
+          </a:prstGeom>
+        </p:spPr>
+      </p:pic>
+    </p:spTree>
+    <p:extLst>
+      <p:ext uri="{BB962C8B-B14F-4D97-AF65-F5344CB8AC3E}">
+        <p14:creationId xmlns:p14="http://schemas.microsoft.com/office/powerpoint/2010/main" val="1287086720"/>
+      </p:ext>
+    </p:extLst>
+  </p:cSld>
+  <p:clrMapOvr>
+    <a:masterClrMapping/>
+  </p:clrMapOvr>
+</p:sld>
+</file>
+
+<file path=ppt/slides/slide9.xml><?xml version="1.0" encoding="utf-8"?>
+<p:sld xmlns:a="http://schemas.openxmlformats.org/drawingml/2006/main" xmlns:r="http://schemas.openxmlformats.org/officeDocument/2006/relationships" xmlns:p="http://schemas.openxmlformats.org/presentationml/2006/main">
+  <p:cSld>
+    <p:spTree>
+      <p:nvGrpSpPr>
+        <p:cNvPr id="1" name="">
+          <a:extLst>
+            <a:ext uri="{FF2B5EF4-FFF2-40B4-BE49-F238E27FC236}">
+              <a16:creationId xmlns:a16="http://schemas.microsoft.com/office/drawing/2014/main" id="{3533A218-4A34-7ECA-9FB0-61756E5B1289}"/>
+            </a:ext>
+          </a:extLst>
+        </p:cNvPr>
+        <p:cNvGrpSpPr/>
+        <p:nvPr/>
+      </p:nvGrpSpPr>
+      <p:grpSpPr>
+        <a:xfrm>
+          <a:off x="0" y="0"/>
+          <a:ext cx="0" cy="0"/>
+          <a:chOff x="0" y="0"/>
+          <a:chExt cx="0" cy="0"/>
+        </a:xfrm>
+      </p:grpSpPr>
+      <p:sp>
+        <p:nvSpPr>
+          <p:cNvPr id="16" name="object 16">
+            <a:extLst>
+              <a:ext uri="{FF2B5EF4-FFF2-40B4-BE49-F238E27FC236}">
+                <a16:creationId xmlns:a16="http://schemas.microsoft.com/office/drawing/2014/main" id="{E53E6445-9E16-D835-4578-79773197616E}"/>
+              </a:ext>
+            </a:extLst>
+          </p:cNvPr>
+          <p:cNvSpPr txBox="1">
+            <a:spLocks noGrp="1"/>
+          </p:cNvSpPr>
+          <p:nvPr>
+            <p:ph type="title"/>
+          </p:nvPr>
+        </p:nvSpPr>
+        <p:spPr>
+          <a:xfrm>
+            <a:off x="685800" y="408883"/>
+            <a:ext cx="10994410" cy="782265"/>
+          </a:xfrm>
+          <a:prstGeom prst="rect">
+            <a:avLst/>
+          </a:prstGeom>
+        </p:spPr>
+        <p:txBody>
+          <a:bodyPr vert="horz" wrap="square" lIns="0" tIns="12700" rIns="0" bIns="0" rtlCol="0">
+            <a:spAutoFit/>
+          </a:bodyPr>
+          <a:lstStyle/>
+          <a:p>
+            <a:pPr marL="12700">
+              <a:lnSpc>
+                <a:spcPct val="100000"/>
+              </a:lnSpc>
+              <a:spcBef>
+                <a:spcPts val="100"/>
+              </a:spcBef>
+            </a:pPr>
+            <a:r>
+              <a:rPr lang="en-US" sz="2500" dirty="0"/>
+              <a:t>Learning outcome #1 – Effective index of a waveguide</a:t>
+            </a:r>
+            <a:br>
+              <a:rPr lang="es-ES" sz="2500" spc="-5" dirty="0">
+                <a:latin typeface="+mj-lt"/>
+                <a:cs typeface="Lucida Sans"/>
+              </a:rPr>
+            </a:br>
+            <a:endParaRPr sz="2500" b="0" dirty="0">
+              <a:latin typeface="+mj-lt"/>
+              <a:cs typeface="Lucida Sans"/>
+            </a:endParaRPr>
+          </a:p>
+        </p:txBody>
+      </p:sp>
+      <p:pic>
+        <p:nvPicPr>
+          <p:cNvPr id="83" name="Gráfico 82">
+            <a:extLst>
+              <a:ext uri="{FF2B5EF4-FFF2-40B4-BE49-F238E27FC236}">
+                <a16:creationId xmlns:a16="http://schemas.microsoft.com/office/drawing/2014/main" id="{06A449E7-22B6-F107-9D7E-1AFD6C135365}"/>
+              </a:ext>
+            </a:extLst>
+          </p:cNvPr>
+          <p:cNvPicPr>
+            <a:picLocks noChangeAspect="1"/>
+          </p:cNvPicPr>
+          <p:nvPr/>
+        </p:nvPicPr>
+        <p:blipFill>
+          <a:blip r:embed="rId3">
+            <a:extLst>
+              <a:ext uri="{96DAC541-7B7A-43D3-8B79-37D633B846F1}">
+                <asvg:svgBlip xmlns:asvg="http://schemas.microsoft.com/office/drawing/2016/SVG/main" r:embed="rId4"/>
+              </a:ext>
+            </a:extLst>
+          </a:blip>
+          <a:stretch>
+            <a:fillRect/>
+          </a:stretch>
+        </p:blipFill>
+        <p:spPr>
+          <a:xfrm>
+            <a:off x="5045006" y="6356057"/>
+            <a:ext cx="6409575" cy="363174"/>
+          </a:xfrm>
+          <a:prstGeom prst="rect">
+            <a:avLst/>
+          </a:prstGeom>
+        </p:spPr>
+      </p:pic>
+      <p:sp>
+        <p:nvSpPr>
+          <p:cNvPr id="84" name="Marcador de número de diapositiva 83">
+            <a:extLst>
+              <a:ext uri="{FF2B5EF4-FFF2-40B4-BE49-F238E27FC236}">
+                <a16:creationId xmlns:a16="http://schemas.microsoft.com/office/drawing/2014/main" id="{FD54FE9E-9A74-3469-0E08-360BC21D8B78}"/>
+              </a:ext>
+            </a:extLst>
+          </p:cNvPr>
+          <p:cNvSpPr>
+            <a:spLocks noGrp="1"/>
+          </p:cNvSpPr>
+          <p:nvPr>
+            <p:ph type="sldNum" sz="quarter" idx="7"/>
+          </p:nvPr>
+        </p:nvSpPr>
+        <p:spPr/>
+        <p:txBody>
+          <a:bodyPr/>
+          <a:lstStyle/>
+          <a:p>
+            <a:fld id="{B6F15528-21DE-4FAA-801E-634DDDAF4B2B}" type="slidenum">
+              <a:rPr lang="es-ES" smtClean="0"/>
+              <a:t>9</a:t>
+            </a:fld>
+            <a:endParaRPr lang="es-ES"/>
+          </a:p>
+        </p:txBody>
+      </p:sp>
+      <p:sp>
+        <p:nvSpPr>
+          <p:cNvPr id="3" name="Marcador de pie de página 2">
+            <a:extLst>
+              <a:ext uri="{FF2B5EF4-FFF2-40B4-BE49-F238E27FC236}">
+                <a16:creationId xmlns:a16="http://schemas.microsoft.com/office/drawing/2014/main" id="{BC4FF5F5-6E31-EC23-FDF4-9D736399534E}"/>
+              </a:ext>
+            </a:extLst>
+          </p:cNvPr>
+          <p:cNvSpPr>
+            <a:spLocks noGrp="1"/>
+          </p:cNvSpPr>
+          <p:nvPr>
+            <p:ph type="ftr" sz="quarter" idx="5"/>
+          </p:nvPr>
+        </p:nvSpPr>
+        <p:spPr/>
+        <p:txBody>
+          <a:bodyPr/>
+          <a:lstStyle/>
+          <a:p>
+            <a:pPr marL="12700">
+              <a:spcBef>
+                <a:spcPts val="15"/>
+              </a:spcBef>
+            </a:pPr>
+            <a:r>
+              <a:rPr lang="es-ES" spc="-5" dirty="0"/>
+              <a:t>LAB 0.1. MODESOLVER</a:t>
+            </a:r>
+          </a:p>
+        </p:txBody>
+      </p:sp>
+      <p:sp>
+        <p:nvSpPr>
+          <p:cNvPr id="4" name="Marcador de texto 2">
+            <a:extLst>
+              <a:ext uri="{FF2B5EF4-FFF2-40B4-BE49-F238E27FC236}">
+                <a16:creationId xmlns:a16="http://schemas.microsoft.com/office/drawing/2014/main" id="{38684CFB-3CE9-B364-77AA-F82B2E3EC732}"/>
+              </a:ext>
+            </a:extLst>
+          </p:cNvPr>
+          <p:cNvSpPr txBox="1">
+            <a:spLocks/>
+          </p:cNvSpPr>
+          <p:nvPr/>
+        </p:nvSpPr>
+        <p:spPr>
+          <a:xfrm>
+            <a:off x="608012" y="1295400"/>
+            <a:ext cx="11048999" cy="4958137"/>
+          </a:xfrm>
+          <a:prstGeom prst="rect">
+            <a:avLst/>
+          </a:prstGeom>
+        </p:spPr>
+        <p:txBody>
+          <a:bodyPr>
+            <a:normAutofit/>
+          </a:bodyPr>
+          <a:lstStyle>
+            <a:lvl1pPr marL="0">
+              <a:defRPr>
+                <a:latin typeface="+mn-lt"/>
+                <a:ea typeface="+mn-ea"/>
+                <a:cs typeface="+mn-cs"/>
+              </a:defRPr>
+            </a:lvl1pPr>
+            <a:lvl2pPr marL="457200">
+              <a:defRPr>
+                <a:latin typeface="+mn-lt"/>
+                <a:ea typeface="+mn-ea"/>
+                <a:cs typeface="+mn-cs"/>
+              </a:defRPr>
+            </a:lvl2pPr>
+            <a:lvl3pPr marL="914400">
+              <a:defRPr>
+                <a:latin typeface="+mn-lt"/>
+                <a:ea typeface="+mn-ea"/>
+                <a:cs typeface="+mn-cs"/>
+              </a:defRPr>
+            </a:lvl3pPr>
+            <a:lvl4pPr marL="1371600">
+              <a:defRPr>
+                <a:latin typeface="+mn-lt"/>
+                <a:ea typeface="+mn-ea"/>
+                <a:cs typeface="+mn-cs"/>
+              </a:defRPr>
+            </a:lvl4pPr>
+            <a:lvl5pPr marL="1828800">
+              <a:defRPr>
+                <a:latin typeface="+mn-lt"/>
+                <a:ea typeface="+mn-ea"/>
+                <a:cs typeface="+mn-cs"/>
+              </a:defRPr>
+            </a:lvl5pPr>
+            <a:lvl6pPr marL="2286000">
+              <a:defRPr>
+                <a:latin typeface="+mn-lt"/>
+                <a:ea typeface="+mn-ea"/>
+                <a:cs typeface="+mn-cs"/>
+              </a:defRPr>
+            </a:lvl6pPr>
+            <a:lvl7pPr marL="2743200">
+              <a:defRPr>
+                <a:latin typeface="+mn-lt"/>
+                <a:ea typeface="+mn-ea"/>
+                <a:cs typeface="+mn-cs"/>
+              </a:defRPr>
+            </a:lvl7pPr>
+            <a:lvl8pPr marL="3200400">
+              <a:defRPr>
+                <a:latin typeface="+mn-lt"/>
+                <a:ea typeface="+mn-ea"/>
+                <a:cs typeface="+mn-cs"/>
+              </a:defRPr>
+            </a:lvl8pPr>
+            <a:lvl9pPr marL="3657600">
+              <a:defRPr>
+                <a:latin typeface="+mn-lt"/>
+                <a:ea typeface="+mn-ea"/>
+                <a:cs typeface="+mn-cs"/>
+              </a:defRPr>
+            </a:lvl9pPr>
+          </a:lstStyle>
+          <a:p>
+            <a:pPr algn="just"/>
+            <a:endParaRPr lang="en-US" sz="2000" b="1" i="1" dirty="0"/>
+          </a:p>
+          <a:p>
+            <a:pPr algn="just"/>
+            <a:endParaRPr lang="en-US" sz="2000" kern="0" dirty="0">
+              <a:solidFill>
+                <a:sysClr val="windowText" lastClr="000000"/>
+              </a:solidFill>
+            </a:endParaRPr>
+          </a:p>
+        </p:txBody>
+      </p:sp>
+      <p:sp>
+        <p:nvSpPr>
+          <p:cNvPr id="2" name="CuadroTexto 1">
+            <a:extLst>
+              <a:ext uri="{FF2B5EF4-FFF2-40B4-BE49-F238E27FC236}">
+                <a16:creationId xmlns:a16="http://schemas.microsoft.com/office/drawing/2014/main" id="{53312669-8277-1F63-4ABB-EE9A666D1F08}"/>
+              </a:ext>
+            </a:extLst>
+          </p:cNvPr>
+          <p:cNvSpPr txBox="1"/>
+          <p:nvPr/>
+        </p:nvSpPr>
+        <p:spPr>
+          <a:xfrm>
+            <a:off x="609441" y="4860334"/>
+            <a:ext cx="11199971" cy="1754326"/>
+          </a:xfrm>
+          <a:prstGeom prst="rect">
+            <a:avLst/>
+          </a:prstGeom>
+          <a:solidFill>
+            <a:schemeClr val="bg1">
+              <a:lumMod val="95000"/>
+            </a:schemeClr>
+          </a:solidFill>
+          <a:ln w="28575">
+            <a:solidFill>
+              <a:srgbClr val="E0700D"/>
+            </a:solidFill>
+          </a:ln>
+        </p:spPr>
+        <p:txBody>
+          <a:bodyPr wrap="square" rtlCol="0">
+            <a:spAutoFit/>
+          </a:bodyPr>
+          <a:lstStyle/>
+          <a:p>
+            <a:pPr algn="just"/>
+            <a:r>
+              <a:rPr lang="en-US" sz="1200" dirty="0">
+                <a:latin typeface="Arial" panose="020B0604020202020204" pitchFamily="34" charset="0"/>
+                <a:cs typeface="Arial" panose="020B0604020202020204" pitchFamily="34" charset="0"/>
+              </a:rPr>
+              <a:t>Los </a:t>
+            </a:r>
+            <a:r>
+              <a:rPr lang="en-US" sz="1200" dirty="0" err="1">
+                <a:latin typeface="Arial" panose="020B0604020202020204" pitchFamily="34" charset="0"/>
+                <a:cs typeface="Arial" panose="020B0604020202020204" pitchFamily="34" charset="0"/>
+              </a:rPr>
+              <a:t>siguientes</a:t>
+            </a:r>
+            <a:r>
+              <a:rPr lang="en-US" sz="1200" dirty="0">
+                <a:latin typeface="Arial" panose="020B0604020202020204" pitchFamily="34" charset="0"/>
+                <a:cs typeface="Arial" panose="020B0604020202020204" pitchFamily="34" charset="0"/>
+              </a:rPr>
+              <a:t> dos </a:t>
+            </a:r>
+            <a:r>
+              <a:rPr lang="en-US" sz="1200" dirty="0" err="1">
+                <a:latin typeface="Arial" panose="020B0604020202020204" pitchFamily="34" charset="0"/>
+                <a:cs typeface="Arial" panose="020B0604020202020204" pitchFamily="34" charset="0"/>
+              </a:rPr>
+              <a:t>modos</a:t>
+            </a:r>
+            <a:r>
+              <a:rPr lang="en-US" sz="1200" dirty="0">
+                <a:latin typeface="Arial" panose="020B0604020202020204" pitchFamily="34" charset="0"/>
+                <a:cs typeface="Arial" panose="020B0604020202020204" pitchFamily="34" charset="0"/>
+              </a:rPr>
+              <a:t> </a:t>
+            </a:r>
+            <a:r>
+              <a:rPr lang="en-US" sz="1200" dirty="0" err="1">
+                <a:latin typeface="Arial" panose="020B0604020202020204" pitchFamily="34" charset="0"/>
+                <a:cs typeface="Arial" panose="020B0604020202020204" pitchFamily="34" charset="0"/>
+              </a:rPr>
+              <a:t>corresponden</a:t>
+            </a:r>
+            <a:r>
+              <a:rPr lang="en-US" sz="1200" dirty="0">
+                <a:latin typeface="Arial" panose="020B0604020202020204" pitchFamily="34" charset="0"/>
+                <a:cs typeface="Arial" panose="020B0604020202020204" pitchFamily="34" charset="0"/>
+              </a:rPr>
+              <a:t> a uno </a:t>
+            </a:r>
+            <a:r>
+              <a:rPr lang="en-US" sz="1200" dirty="0" err="1">
+                <a:latin typeface="Arial" panose="020B0604020202020204" pitchFamily="34" charset="0"/>
+                <a:cs typeface="Arial" panose="020B0604020202020204" pitchFamily="34" charset="0"/>
+              </a:rPr>
+              <a:t>que</a:t>
+            </a:r>
+            <a:r>
+              <a:rPr lang="en-US" sz="1200" dirty="0">
+                <a:latin typeface="Arial" panose="020B0604020202020204" pitchFamily="34" charset="0"/>
+                <a:cs typeface="Arial" panose="020B0604020202020204" pitchFamily="34" charset="0"/>
+              </a:rPr>
+              <a:t> es quasi TE, y de nuevo </a:t>
+            </a:r>
+            <a:r>
+              <a:rPr lang="en-US" sz="1200" dirty="0" err="1">
+                <a:latin typeface="Arial" panose="020B0604020202020204" pitchFamily="34" charset="0"/>
+                <a:cs typeface="Arial" panose="020B0604020202020204" pitchFamily="34" charset="0"/>
+              </a:rPr>
+              <a:t>el</a:t>
+            </a:r>
+            <a:r>
+              <a:rPr lang="en-US" sz="1200" dirty="0">
+                <a:latin typeface="Arial" panose="020B0604020202020204" pitchFamily="34" charset="0"/>
+                <a:cs typeface="Arial" panose="020B0604020202020204" pitchFamily="34" charset="0"/>
+              </a:rPr>
+              <a:t> posterior </a:t>
+            </a:r>
+            <a:r>
+              <a:rPr lang="en-US" sz="1200" dirty="0" err="1">
+                <a:latin typeface="Arial" panose="020B0604020202020204" pitchFamily="34" charset="0"/>
+                <a:cs typeface="Arial" panose="020B0604020202020204" pitchFamily="34" charset="0"/>
+              </a:rPr>
+              <a:t>que</a:t>
+            </a:r>
+            <a:r>
+              <a:rPr lang="en-US" sz="1200" dirty="0">
+                <a:latin typeface="Arial" panose="020B0604020202020204" pitchFamily="34" charset="0"/>
+                <a:cs typeface="Arial" panose="020B0604020202020204" pitchFamily="34" charset="0"/>
+              </a:rPr>
+              <a:t> es quasi TM. </a:t>
+            </a:r>
+            <a:r>
+              <a:rPr lang="en-US" sz="1200" dirty="0" err="1">
+                <a:latin typeface="Arial" panose="020B0604020202020204" pitchFamily="34" charset="0"/>
+                <a:cs typeface="Arial" panose="020B0604020202020204" pitchFamily="34" charset="0"/>
+              </a:rPr>
+              <a:t>Vemos</a:t>
+            </a:r>
+            <a:r>
+              <a:rPr lang="en-US" sz="1200" dirty="0">
+                <a:latin typeface="Arial" panose="020B0604020202020204" pitchFamily="34" charset="0"/>
+                <a:cs typeface="Arial" panose="020B0604020202020204" pitchFamily="34" charset="0"/>
+              </a:rPr>
+              <a:t> </a:t>
+            </a:r>
+            <a:r>
+              <a:rPr lang="en-US" sz="1200" dirty="0" err="1">
+                <a:latin typeface="Arial" panose="020B0604020202020204" pitchFamily="34" charset="0"/>
+                <a:cs typeface="Arial" panose="020B0604020202020204" pitchFamily="34" charset="0"/>
+              </a:rPr>
+              <a:t>que</a:t>
+            </a:r>
+            <a:r>
+              <a:rPr lang="en-US" sz="1200" dirty="0">
+                <a:latin typeface="Arial" panose="020B0604020202020204" pitchFamily="34" charset="0"/>
+                <a:cs typeface="Arial" panose="020B0604020202020204" pitchFamily="34" charset="0"/>
+              </a:rPr>
+              <a:t> </a:t>
+            </a:r>
+            <a:r>
+              <a:rPr lang="en-US" sz="1200" dirty="0" err="1">
+                <a:latin typeface="Arial" panose="020B0604020202020204" pitchFamily="34" charset="0"/>
+                <a:cs typeface="Arial" panose="020B0604020202020204" pitchFamily="34" charset="0"/>
+              </a:rPr>
+              <a:t>etán</a:t>
+            </a:r>
+            <a:r>
+              <a:rPr lang="en-US" sz="1200" dirty="0">
+                <a:latin typeface="Arial" panose="020B0604020202020204" pitchFamily="34" charset="0"/>
+                <a:cs typeface="Arial" panose="020B0604020202020204" pitchFamily="34" charset="0"/>
+              </a:rPr>
+              <a:t> </a:t>
+            </a:r>
+            <a:r>
+              <a:rPr lang="en-US" sz="1200" dirty="0" err="1">
+                <a:latin typeface="Arial" panose="020B0604020202020204" pitchFamily="34" charset="0"/>
+                <a:cs typeface="Arial" panose="020B0604020202020204" pitchFamily="34" charset="0"/>
+              </a:rPr>
+              <a:t>muy</a:t>
+            </a:r>
+            <a:r>
+              <a:rPr lang="en-US" sz="1200" dirty="0">
+                <a:latin typeface="Arial" panose="020B0604020202020204" pitchFamily="34" charset="0"/>
+                <a:cs typeface="Arial" panose="020B0604020202020204" pitchFamily="34" charset="0"/>
+              </a:rPr>
+              <a:t> poco </a:t>
+            </a:r>
+            <a:r>
+              <a:rPr lang="en-US" sz="1200" dirty="0" err="1">
+                <a:latin typeface="Arial" panose="020B0604020202020204" pitchFamily="34" charset="0"/>
+                <a:cs typeface="Arial" panose="020B0604020202020204" pitchFamily="34" charset="0"/>
+              </a:rPr>
+              <a:t>confinados</a:t>
+            </a:r>
+            <a:r>
+              <a:rPr lang="en-US" sz="1200" dirty="0">
+                <a:latin typeface="Arial" panose="020B0604020202020204" pitchFamily="34" charset="0"/>
+                <a:cs typeface="Arial" panose="020B0604020202020204" pitchFamily="34" charset="0"/>
+              </a:rPr>
+              <a:t>, y </a:t>
+            </a:r>
+            <a:r>
+              <a:rPr lang="en-US" sz="1200" dirty="0" err="1">
+                <a:latin typeface="Arial" panose="020B0604020202020204" pitchFamily="34" charset="0"/>
+                <a:cs typeface="Arial" panose="020B0604020202020204" pitchFamily="34" charset="0"/>
+              </a:rPr>
+              <a:t>que</a:t>
+            </a:r>
+            <a:r>
+              <a:rPr lang="en-US" sz="1200" dirty="0">
+                <a:latin typeface="Arial" panose="020B0604020202020204" pitchFamily="34" charset="0"/>
+                <a:cs typeface="Arial" panose="020B0604020202020204" pitchFamily="34" charset="0"/>
+              </a:rPr>
+              <a:t> la </a:t>
+            </a:r>
+            <a:r>
+              <a:rPr lang="en-US" sz="1200" dirty="0" err="1">
+                <a:latin typeface="Arial" panose="020B0604020202020204" pitchFamily="34" charset="0"/>
+                <a:cs typeface="Arial" panose="020B0604020202020204" pitchFamily="34" charset="0"/>
+              </a:rPr>
+              <a:t>intensiad</a:t>
+            </a:r>
+            <a:r>
+              <a:rPr lang="en-US" sz="1200" dirty="0">
+                <a:latin typeface="Arial" panose="020B0604020202020204" pitchFamily="34" charset="0"/>
+                <a:cs typeface="Arial" panose="020B0604020202020204" pitchFamily="34" charset="0"/>
+              </a:rPr>
+              <a:t> </a:t>
+            </a:r>
+            <a:r>
+              <a:rPr lang="en-US" sz="1200" dirty="0" err="1">
+                <a:latin typeface="Arial" panose="020B0604020202020204" pitchFamily="34" charset="0"/>
+                <a:cs typeface="Arial" panose="020B0604020202020204" pitchFamily="34" charset="0"/>
+              </a:rPr>
+              <a:t>va</a:t>
+            </a:r>
+            <a:r>
+              <a:rPr lang="en-US" sz="1200" dirty="0">
+                <a:latin typeface="Arial" panose="020B0604020202020204" pitchFamily="34" charset="0"/>
+                <a:cs typeface="Arial" panose="020B0604020202020204" pitchFamily="34" charset="0"/>
+              </a:rPr>
+              <a:t> </a:t>
+            </a:r>
+            <a:r>
+              <a:rPr lang="en-US" sz="1200" dirty="0" err="1">
+                <a:latin typeface="Arial" panose="020B0604020202020204" pitchFamily="34" charset="0"/>
+                <a:cs typeface="Arial" panose="020B0604020202020204" pitchFamily="34" charset="0"/>
+              </a:rPr>
+              <a:t>bajando</a:t>
+            </a:r>
+            <a:r>
+              <a:rPr lang="en-US" sz="1200" dirty="0">
+                <a:latin typeface="Arial" panose="020B0604020202020204" pitchFamily="34" charset="0"/>
+                <a:cs typeface="Arial" panose="020B0604020202020204" pitchFamily="34" charset="0"/>
+              </a:rPr>
+              <a:t>.  </a:t>
+            </a:r>
+          </a:p>
+          <a:p>
+            <a:pPr algn="just"/>
+            <a:endParaRPr lang="en-US" sz="1200" dirty="0">
+              <a:latin typeface="Arial" panose="020B0604020202020204" pitchFamily="34" charset="0"/>
+              <a:cs typeface="Arial" panose="020B0604020202020204" pitchFamily="34" charset="0"/>
+            </a:endParaRPr>
+          </a:p>
+          <a:p>
+            <a:pPr algn="just"/>
+            <a:endParaRPr lang="en-US" sz="1200" dirty="0">
+              <a:latin typeface="Arial" panose="020B0604020202020204" pitchFamily="34" charset="0"/>
+              <a:cs typeface="Arial" panose="020B0604020202020204" pitchFamily="34" charset="0"/>
+            </a:endParaRPr>
+          </a:p>
+          <a:p>
+            <a:pPr algn="just"/>
+            <a:endParaRPr lang="en-US" sz="1200" dirty="0">
+              <a:latin typeface="Arial" panose="020B0604020202020204" pitchFamily="34" charset="0"/>
+              <a:cs typeface="Arial" panose="020B0604020202020204" pitchFamily="34" charset="0"/>
+            </a:endParaRPr>
+          </a:p>
+          <a:p>
+            <a:pPr algn="just"/>
+            <a:endParaRPr lang="en-US" sz="1200" dirty="0">
+              <a:latin typeface="Arial" panose="020B0604020202020204" pitchFamily="34" charset="0"/>
+              <a:cs typeface="Arial" panose="020B0604020202020204" pitchFamily="34" charset="0"/>
+            </a:endParaRPr>
+          </a:p>
+          <a:p>
+            <a:pPr algn="just"/>
+            <a:endParaRPr lang="en-US" sz="1200" dirty="0">
+              <a:latin typeface="Arial" panose="020B0604020202020204" pitchFamily="34" charset="0"/>
+              <a:cs typeface="Arial" panose="020B0604020202020204" pitchFamily="34" charset="0"/>
+            </a:endParaRPr>
+          </a:p>
+          <a:p>
+            <a:pPr algn="just"/>
+            <a:endParaRPr lang="en-US" sz="1200" dirty="0">
+              <a:latin typeface="Arial" panose="020B0604020202020204" pitchFamily="34" charset="0"/>
+              <a:cs typeface="Arial" panose="020B0604020202020204" pitchFamily="34" charset="0"/>
+            </a:endParaRPr>
+          </a:p>
+          <a:p>
+            <a:pPr algn="just"/>
+            <a:endParaRPr lang="en-US" sz="1200" dirty="0">
+              <a:latin typeface="Arial" panose="020B0604020202020204" pitchFamily="34" charset="0"/>
+              <a:cs typeface="Arial" panose="020B0604020202020204" pitchFamily="34" charset="0"/>
+            </a:endParaRPr>
+          </a:p>
+        </p:txBody>
+      </p:sp>
+      <p:pic>
+        <p:nvPicPr>
+          <p:cNvPr id="6" name="Imagen 5" descr="Gráfico&#10;&#10;El contenido generado por IA puede ser incorrecto.">
+            <a:extLst>
+              <a:ext uri="{FF2B5EF4-FFF2-40B4-BE49-F238E27FC236}">
+                <a16:creationId xmlns:a16="http://schemas.microsoft.com/office/drawing/2014/main" id="{14BE0EB1-03EA-9CCF-5CAC-D5C7C2850F21}"/>
+              </a:ext>
+            </a:extLst>
+          </p:cNvPr>
+          <p:cNvPicPr>
+            <a:picLocks noChangeAspect="1"/>
+          </p:cNvPicPr>
+          <p:nvPr/>
+        </p:nvPicPr>
+        <p:blipFill>
+          <a:blip r:embed="rId5"/>
+          <a:stretch>
+            <a:fillRect/>
+          </a:stretch>
+        </p:blipFill>
+        <p:spPr>
+          <a:xfrm>
+            <a:off x="914400" y="1600200"/>
+            <a:ext cx="3505200" cy="2390090"/>
+          </a:xfrm>
+          <a:prstGeom prst="rect">
+            <a:avLst/>
+          </a:prstGeom>
+        </p:spPr>
+      </p:pic>
+      <p:pic>
+        <p:nvPicPr>
+          <p:cNvPr id="9" name="Imagen 8" descr="Gráfico, Histograma&#10;&#10;El contenido generado por IA puede ser incorrecto.">
+            <a:extLst>
+              <a:ext uri="{FF2B5EF4-FFF2-40B4-BE49-F238E27FC236}">
+                <a16:creationId xmlns:a16="http://schemas.microsoft.com/office/drawing/2014/main" id="{C3486E99-4DDC-A239-CA74-707B5581DF9F}"/>
+              </a:ext>
+            </a:extLst>
+          </p:cNvPr>
+          <p:cNvPicPr>
+            <a:picLocks noChangeAspect="1"/>
+          </p:cNvPicPr>
+          <p:nvPr/>
+        </p:nvPicPr>
+        <p:blipFill>
+          <a:blip r:embed="rId6"/>
+          <a:stretch>
+            <a:fillRect/>
+          </a:stretch>
+        </p:blipFill>
+        <p:spPr>
+          <a:xfrm>
+            <a:off x="5791200" y="1524000"/>
+            <a:ext cx="4539359" cy="2985066"/>
+          </a:xfrm>
+          <a:prstGeom prst="rect">
+            <a:avLst/>
+          </a:prstGeom>
+        </p:spPr>
+      </p:pic>
+    </p:spTree>
+    <p:extLst>
+      <p:ext uri="{BB962C8B-B14F-4D97-AF65-F5344CB8AC3E}">
+        <p14:creationId xmlns:p14="http://schemas.microsoft.com/office/powerpoint/2010/main" val="1529289753"/>
+      </p:ext>
+    </p:extLst>
   </p:cSld>
   <p:clrMapOvr>
     <a:masterClrMapping/>
